--- a/Fiches_Protocoles_Techno/Fiches_Technologie.pptx
+++ b/Fiches_Protocoles_Techno/Fiches_Technologie.pptx
@@ -17,6 +17,10 @@
     <p:sldId id="277" r:id="rId11"/>
     <p:sldId id="282" r:id="rId12"/>
     <p:sldId id="283" r:id="rId13"/>
+    <p:sldId id="285" r:id="rId14"/>
+    <p:sldId id="284" r:id="rId15"/>
+    <p:sldId id="286" r:id="rId16"/>
+    <p:sldId id="287" r:id="rId17"/>
   </p:sldIdLst>
   <p:sldSz cx="12192000" cy="6858000"/>
   <p:notesSz cx="6858000" cy="9144000"/>
@@ -255,7 +259,7 @@
           <a:p>
             <a:fld id="{1A3D9B3B-1EC8-4BC4-B783-7630517B3190}" type="datetimeFigureOut">
               <a:rPr lang="fr-FR" smtClean="0"/>
-              <a:t>09/07/2025</a:t>
+              <a:t>13/07/2025</a:t>
             </a:fld>
             <a:endParaRPr lang="fr-FR"/>
           </a:p>
@@ -664,7 +668,7 @@
           <a:p>
             <a:fld id="{1A3D9B3B-1EC8-4BC4-B783-7630517B3190}" type="datetimeFigureOut">
               <a:rPr lang="fr-FR" smtClean="0"/>
-              <a:t>09/07/2025</a:t>
+              <a:t>13/07/2025</a:t>
             </a:fld>
             <a:endParaRPr lang="fr-FR"/>
           </a:p>
@@ -850,7 +854,7 @@
           <a:p>
             <a:fld id="{1A3D9B3B-1EC8-4BC4-B783-7630517B3190}" type="datetimeFigureOut">
               <a:rPr lang="fr-FR" smtClean="0"/>
-              <a:t>09/07/2025</a:t>
+              <a:t>13/07/2025</a:t>
             </a:fld>
             <a:endParaRPr lang="fr-FR"/>
           </a:p>
@@ -1026,7 +1030,7 @@
           <a:p>
             <a:fld id="{1A3D9B3B-1EC8-4BC4-B783-7630517B3190}" type="datetimeFigureOut">
               <a:rPr lang="fr-FR" smtClean="0"/>
-              <a:t>09/07/2025</a:t>
+              <a:t>13/07/2025</a:t>
             </a:fld>
             <a:endParaRPr lang="fr-FR"/>
           </a:p>
@@ -1325,7 +1329,7 @@
           <a:p>
             <a:fld id="{1A3D9B3B-1EC8-4BC4-B783-7630517B3190}" type="datetimeFigureOut">
               <a:rPr lang="fr-FR" smtClean="0"/>
-              <a:t>09/07/2025</a:t>
+              <a:t>13/07/2025</a:t>
             </a:fld>
             <a:endParaRPr lang="fr-FR"/>
           </a:p>
@@ -1562,7 +1566,7 @@
           <a:p>
             <a:fld id="{1A3D9B3B-1EC8-4BC4-B783-7630517B3190}" type="datetimeFigureOut">
               <a:rPr lang="fr-FR" smtClean="0"/>
-              <a:t>09/07/2025</a:t>
+              <a:t>13/07/2025</a:t>
             </a:fld>
             <a:endParaRPr lang="fr-FR"/>
           </a:p>
@@ -1980,7 +1984,7 @@
           <a:p>
             <a:fld id="{1A3D9B3B-1EC8-4BC4-B783-7630517B3190}" type="datetimeFigureOut">
               <a:rPr lang="fr-FR" smtClean="0"/>
-              <a:t>09/07/2025</a:t>
+              <a:t>13/07/2025</a:t>
             </a:fld>
             <a:endParaRPr lang="fr-FR"/>
           </a:p>
@@ -2105,7 +2109,7 @@
           <a:p>
             <a:fld id="{1A3D9B3B-1EC8-4BC4-B783-7630517B3190}" type="datetimeFigureOut">
               <a:rPr lang="fr-FR" smtClean="0"/>
-              <a:t>09/07/2025</a:t>
+              <a:t>13/07/2025</a:t>
             </a:fld>
             <a:endParaRPr lang="fr-FR"/>
           </a:p>
@@ -2254,7 +2258,7 @@
           <a:p>
             <a:fld id="{1A3D9B3B-1EC8-4BC4-B783-7630517B3190}" type="datetimeFigureOut">
               <a:rPr lang="fr-FR" smtClean="0"/>
-              <a:t>09/07/2025</a:t>
+              <a:t>13/07/2025</a:t>
             </a:fld>
             <a:endParaRPr lang="fr-FR"/>
           </a:p>
@@ -2537,7 +2541,7 @@
           <a:p>
             <a:fld id="{1A3D9B3B-1EC8-4BC4-B783-7630517B3190}" type="datetimeFigureOut">
               <a:rPr lang="fr-FR" smtClean="0"/>
-              <a:t>09/07/2025</a:t>
+              <a:t>13/07/2025</a:t>
             </a:fld>
             <a:endParaRPr lang="fr-FR"/>
           </a:p>
@@ -2797,7 +2801,7 @@
           <a:p>
             <a:fld id="{1A3D9B3B-1EC8-4BC4-B783-7630517B3190}" type="datetimeFigureOut">
               <a:rPr lang="fr-FR" smtClean="0"/>
-              <a:t>09/07/2025</a:t>
+              <a:t>13/07/2025</a:t>
             </a:fld>
             <a:endParaRPr lang="fr-FR"/>
           </a:p>
@@ -3017,7 +3021,7 @@
             <a:fld id="{1A3D9B3B-1EC8-4BC4-B783-7630517B3190}" type="datetimeFigureOut">
               <a:rPr lang="fr-FR" smtClean="0"/>
               <a:pPr/>
-              <a:t>09/07/2025</a:t>
+              <a:t>13/07/2025</a:t>
             </a:fld>
             <a:endParaRPr lang="fr-FR"/>
           </a:p>
@@ -6994,8 +6998,8 @@
           </a:fontRef>
         </p:style>
       </p:cxnSp>
-      <mc:AlternateContent xmlns:mc="http://schemas.openxmlformats.org/markup-compatibility/2006">
-        <mc:Choice xmlns:a14="http://schemas.microsoft.com/office/drawing/2010/main" Requires="a14">
+      <mc:AlternateContent xmlns:mc="http://schemas.openxmlformats.org/markup-compatibility/2006" xmlns:a14="http://schemas.microsoft.com/office/drawing/2010/main">
+        <mc:Choice Requires="a14">
           <p:sp>
             <p:nvSpPr>
               <p:cNvPr id="8" name="ZoneTexte 7">
@@ -7024,6 +7028,7 @@
               </a:bodyPr>
               <a:lstStyle/>
               <a:p>
+                <a:pPr/>
                 <a14:m>
                   <m:oMathPara xmlns:m="http://schemas.openxmlformats.org/officeDocument/2006/math">
                     <m:oMathParaPr>
@@ -7044,7 +7049,7 @@
             </p:txBody>
           </p:sp>
         </mc:Choice>
-        <mc:Fallback>
+        <mc:Fallback xmlns="">
           <p:sp>
             <p:nvSpPr>
               <p:cNvPr id="8" name="ZoneTexte 7">
@@ -7089,8 +7094,8 @@
           </p:sp>
         </mc:Fallback>
       </mc:AlternateContent>
-      <mc:AlternateContent xmlns:mc="http://schemas.openxmlformats.org/markup-compatibility/2006">
-        <mc:Choice xmlns:a14="http://schemas.microsoft.com/office/drawing/2010/main" Requires="a14">
+      <mc:AlternateContent xmlns:mc="http://schemas.openxmlformats.org/markup-compatibility/2006" xmlns:a14="http://schemas.microsoft.com/office/drawing/2010/main">
+        <mc:Choice Requires="a14">
           <p:sp>
             <p:nvSpPr>
               <p:cNvPr id="9" name="ZoneTexte 8">
@@ -7119,6 +7124,7 @@
               </a:bodyPr>
               <a:lstStyle/>
               <a:p>
+                <a:pPr/>
                 <a14:m>
                   <m:oMathPara xmlns:m="http://schemas.openxmlformats.org/officeDocument/2006/math">
                     <m:oMathParaPr>
@@ -7139,7 +7145,7 @@
             </p:txBody>
           </p:sp>
         </mc:Choice>
-        <mc:Fallback>
+        <mc:Fallback xmlns="">
           <p:sp>
             <p:nvSpPr>
               <p:cNvPr id="9" name="ZoneTexte 8">
@@ -8456,8 +8462,8 @@
           </p:style>
         </p:cxnSp>
       </p:grpSp>
-      <mc:AlternateContent xmlns:mc="http://schemas.openxmlformats.org/markup-compatibility/2006">
-        <mc:Choice xmlns:a14="http://schemas.microsoft.com/office/drawing/2010/main" Requires="a14">
+      <mc:AlternateContent xmlns:mc="http://schemas.openxmlformats.org/markup-compatibility/2006" xmlns:a14="http://schemas.microsoft.com/office/drawing/2010/main">
+        <mc:Choice Requires="a14">
           <p:sp>
             <p:nvSpPr>
               <p:cNvPr id="48" name="ZoneTexte 47">
@@ -8525,7 +8531,7 @@
             </p:txBody>
           </p:sp>
         </mc:Choice>
-        <mc:Fallback>
+        <mc:Fallback xmlns="">
           <p:sp>
             <p:nvSpPr>
               <p:cNvPr id="48" name="ZoneTexte 47">
@@ -8667,8 +8673,8 @@
           </a:fontRef>
         </p:style>
       </p:cxnSp>
-      <mc:AlternateContent xmlns:mc="http://schemas.openxmlformats.org/markup-compatibility/2006">
-        <mc:Choice xmlns:a14="http://schemas.microsoft.com/office/drawing/2010/main" Requires="a14">
+      <mc:AlternateContent xmlns:mc="http://schemas.openxmlformats.org/markup-compatibility/2006" xmlns:a14="http://schemas.microsoft.com/office/drawing/2010/main">
+        <mc:Choice Requires="a14">
           <p:sp>
             <p:nvSpPr>
               <p:cNvPr id="90" name="ZoneTexte 89">
@@ -8736,7 +8742,7 @@
             </p:txBody>
           </p:sp>
         </mc:Choice>
-        <mc:Fallback>
+        <mc:Fallback xmlns="">
           <p:sp>
             <p:nvSpPr>
               <p:cNvPr id="90" name="ZoneTexte 89">
@@ -8833,8 +8839,8 @@
           </a:fontRef>
         </p:style>
       </p:cxnSp>
-      <mc:AlternateContent xmlns:mc="http://schemas.openxmlformats.org/markup-compatibility/2006">
-        <mc:Choice xmlns:a14="http://schemas.microsoft.com/office/drawing/2010/main" Requires="a14">
+      <mc:AlternateContent xmlns:mc="http://schemas.openxmlformats.org/markup-compatibility/2006" xmlns:a14="http://schemas.microsoft.com/office/drawing/2010/main">
+        <mc:Choice Requires="a14">
           <p:sp>
             <p:nvSpPr>
               <p:cNvPr id="92" name="ZoneTexte 91">
@@ -8921,7 +8927,7 @@
             </p:txBody>
           </p:sp>
         </mc:Choice>
-        <mc:Fallback>
+        <mc:Fallback xmlns="">
           <p:sp>
             <p:nvSpPr>
               <p:cNvPr id="92" name="ZoneTexte 91">
@@ -9075,8 +9081,8 @@
           </p:style>
         </p:cxnSp>
       </p:grpSp>
-      <mc:AlternateContent xmlns:mc="http://schemas.openxmlformats.org/markup-compatibility/2006">
-        <mc:Choice xmlns:a14="http://schemas.microsoft.com/office/drawing/2010/main" Requires="a14">
+      <mc:AlternateContent xmlns:mc="http://schemas.openxmlformats.org/markup-compatibility/2006" xmlns:a14="http://schemas.microsoft.com/office/drawing/2010/main">
+        <mc:Choice Requires="a14">
           <p:sp>
             <p:nvSpPr>
               <p:cNvPr id="97" name="ZoneTexte 96">
@@ -9163,7 +9169,7 @@
             </p:txBody>
           </p:sp>
         </mc:Choice>
-        <mc:Fallback>
+        <mc:Fallback xmlns="">
           <p:sp>
             <p:nvSpPr>
               <p:cNvPr id="97" name="ZoneTexte 96">
@@ -10258,8 +10264,8 @@
           </a:fontRef>
         </p:style>
       </p:cxnSp>
-      <mc:AlternateContent xmlns:mc="http://schemas.openxmlformats.org/markup-compatibility/2006">
-        <mc:Choice xmlns:a14="http://schemas.microsoft.com/office/drawing/2010/main" Requires="a14">
+      <mc:AlternateContent xmlns:mc="http://schemas.openxmlformats.org/markup-compatibility/2006" xmlns:a14="http://schemas.microsoft.com/office/drawing/2010/main">
+        <mc:Choice Requires="a14">
           <p:sp>
             <p:nvSpPr>
               <p:cNvPr id="128" name="ZoneTexte 127">
@@ -10359,7 +10365,7 @@
             </p:txBody>
           </p:sp>
         </mc:Choice>
-        <mc:Fallback>
+        <mc:Fallback xmlns="">
           <p:sp>
             <p:nvSpPr>
               <p:cNvPr id="128" name="ZoneTexte 127">
@@ -10456,8 +10462,8 @@
           </a:fontRef>
         </p:style>
       </p:cxnSp>
-      <mc:AlternateContent xmlns:mc="http://schemas.openxmlformats.org/markup-compatibility/2006">
-        <mc:Choice xmlns:a14="http://schemas.microsoft.com/office/drawing/2010/main" Requires="a14">
+      <mc:AlternateContent xmlns:mc="http://schemas.openxmlformats.org/markup-compatibility/2006" xmlns:a14="http://schemas.microsoft.com/office/drawing/2010/main">
+        <mc:Choice Requires="a14">
           <p:sp>
             <p:nvSpPr>
               <p:cNvPr id="131" name="ZoneTexte 130">
@@ -10544,7 +10550,7 @@
             </p:txBody>
           </p:sp>
         </mc:Choice>
-        <mc:Fallback>
+        <mc:Fallback xmlns="">
           <p:sp>
             <p:nvSpPr>
               <p:cNvPr id="131" name="ZoneTexte 130">
@@ -10698,8 +10704,8 @@
           </p:style>
         </p:cxnSp>
       </p:grpSp>
-      <mc:AlternateContent xmlns:mc="http://schemas.openxmlformats.org/markup-compatibility/2006">
-        <mc:Choice xmlns:a14="http://schemas.microsoft.com/office/drawing/2010/main" Requires="a14">
+      <mc:AlternateContent xmlns:mc="http://schemas.openxmlformats.org/markup-compatibility/2006" xmlns:a14="http://schemas.microsoft.com/office/drawing/2010/main">
+        <mc:Choice Requires="a14">
           <p:sp>
             <p:nvSpPr>
               <p:cNvPr id="135" name="ZoneTexte 134">
@@ -10786,7 +10792,7 @@
             </p:txBody>
           </p:sp>
         </mc:Choice>
-        <mc:Fallback>
+        <mc:Fallback xmlns="">
           <p:sp>
             <p:nvSpPr>
               <p:cNvPr id="135" name="ZoneTexte 134">
@@ -11902,8 +11908,8 @@
           </a:fontRef>
         </p:style>
       </p:cxnSp>
-      <mc:AlternateContent xmlns:mc="http://schemas.openxmlformats.org/markup-compatibility/2006">
-        <mc:Choice xmlns:a14="http://schemas.microsoft.com/office/drawing/2010/main" Requires="a14">
+      <mc:AlternateContent xmlns:mc="http://schemas.openxmlformats.org/markup-compatibility/2006" xmlns:a14="http://schemas.microsoft.com/office/drawing/2010/main">
+        <mc:Choice Requires="a14">
           <p:sp>
             <p:nvSpPr>
               <p:cNvPr id="168" name="ZoneTexte 167">
@@ -11953,7 +11959,7 @@
             </p:txBody>
           </p:sp>
         </mc:Choice>
-        <mc:Fallback>
+        <mc:Fallback xmlns="">
           <p:sp>
             <p:nvSpPr>
               <p:cNvPr id="168" name="ZoneTexte 167">
@@ -12043,8 +12049,8 @@
           </a:fontRef>
         </p:style>
       </p:cxnSp>
-      <mc:AlternateContent xmlns:mc="http://schemas.openxmlformats.org/markup-compatibility/2006">
-        <mc:Choice xmlns:a14="http://schemas.microsoft.com/office/drawing/2010/main" Requires="a14">
+      <mc:AlternateContent xmlns:mc="http://schemas.openxmlformats.org/markup-compatibility/2006" xmlns:a14="http://schemas.microsoft.com/office/drawing/2010/main">
+        <mc:Choice Requires="a14">
           <p:sp>
             <p:nvSpPr>
               <p:cNvPr id="170" name="ZoneTexte 169">
@@ -12100,7 +12106,7 @@
             </p:txBody>
           </p:sp>
         </mc:Choice>
-        <mc:Fallback>
+        <mc:Fallback xmlns="">
           <p:sp>
             <p:nvSpPr>
               <p:cNvPr id="170" name="ZoneTexte 169">
@@ -12145,8 +12151,8 @@
           </p:sp>
         </mc:Fallback>
       </mc:AlternateContent>
-      <mc:AlternateContent xmlns:mc="http://schemas.openxmlformats.org/markup-compatibility/2006">
-        <mc:Choice xmlns:a14="http://schemas.microsoft.com/office/drawing/2010/main" Requires="a14">
+      <mc:AlternateContent xmlns:mc="http://schemas.openxmlformats.org/markup-compatibility/2006" xmlns:a14="http://schemas.microsoft.com/office/drawing/2010/main">
+        <mc:Choice Requires="a14">
           <p:sp>
             <p:nvSpPr>
               <p:cNvPr id="172" name="ZoneTexte 171">
@@ -12196,7 +12202,7 @@
             </p:txBody>
           </p:sp>
         </mc:Choice>
-        <mc:Fallback>
+        <mc:Fallback xmlns="">
           <p:sp>
             <p:nvSpPr>
               <p:cNvPr id="172" name="ZoneTexte 171">
@@ -12241,8 +12247,8 @@
           </p:sp>
         </mc:Fallback>
       </mc:AlternateContent>
-      <mc:AlternateContent xmlns:mc="http://schemas.openxmlformats.org/markup-compatibility/2006">
-        <mc:Choice xmlns:a14="http://schemas.microsoft.com/office/drawing/2010/main" Requires="a14">
+      <mc:AlternateContent xmlns:mc="http://schemas.openxmlformats.org/markup-compatibility/2006" xmlns:a14="http://schemas.microsoft.com/office/drawing/2010/main">
+        <mc:Choice Requires="a14">
           <p:sp>
             <p:nvSpPr>
               <p:cNvPr id="173" name="ZoneTexte 172">
@@ -12292,7 +12298,7 @@
             </p:txBody>
           </p:sp>
         </mc:Choice>
-        <mc:Fallback>
+        <mc:Fallback xmlns="">
           <p:sp>
             <p:nvSpPr>
               <p:cNvPr id="173" name="ZoneTexte 172">
@@ -12337,8 +12343,8 @@
           </p:sp>
         </mc:Fallback>
       </mc:AlternateContent>
-      <mc:AlternateContent xmlns:mc="http://schemas.openxmlformats.org/markup-compatibility/2006">
-        <mc:Choice xmlns:a14="http://schemas.microsoft.com/office/drawing/2010/main" Requires="a14">
+      <mc:AlternateContent xmlns:mc="http://schemas.openxmlformats.org/markup-compatibility/2006" xmlns:a14="http://schemas.microsoft.com/office/drawing/2010/main">
+        <mc:Choice Requires="a14">
           <p:sp>
             <p:nvSpPr>
               <p:cNvPr id="174" name="ZoneTexte 173">
@@ -12388,7 +12394,7 @@
             </p:txBody>
           </p:sp>
         </mc:Choice>
-        <mc:Fallback>
+        <mc:Fallback xmlns="">
           <p:sp>
             <p:nvSpPr>
               <p:cNvPr id="174" name="ZoneTexte 173">
@@ -12437,6 +12443,8073 @@
     <p:extLst>
       <p:ext uri="{BB962C8B-B14F-4D97-AF65-F5344CB8AC3E}">
         <p14:creationId xmlns:p14="http://schemas.microsoft.com/office/powerpoint/2010/main" val="3680960534"/>
+      </p:ext>
+    </p:extLst>
+  </p:cSld>
+  <p:clrMapOvr>
+    <a:masterClrMapping/>
+  </p:clrMapOvr>
+</p:sld>
+</file>
+
+<file path=ppt/slides/slide13.xml><?xml version="1.0" encoding="utf-8"?>
+<p:sld xmlns:a="http://schemas.openxmlformats.org/drawingml/2006/main" xmlns:r="http://schemas.openxmlformats.org/officeDocument/2006/relationships" xmlns:p="http://schemas.openxmlformats.org/presentationml/2006/main">
+  <p:cSld>
+    <p:spTree>
+      <p:nvGrpSpPr>
+        <p:cNvPr id="1" name="">
+          <a:extLst>
+            <a:ext uri="{FF2B5EF4-FFF2-40B4-BE49-F238E27FC236}">
+              <a16:creationId xmlns:a16="http://schemas.microsoft.com/office/drawing/2014/main" id="{BBD2F18D-FF5A-D314-3B8A-0885BAE133C0}"/>
+            </a:ext>
+          </a:extLst>
+        </p:cNvPr>
+        <p:cNvGrpSpPr/>
+        <p:nvPr/>
+      </p:nvGrpSpPr>
+      <p:grpSpPr>
+        <a:xfrm>
+          <a:off x="0" y="0"/>
+          <a:ext cx="0" cy="0"/>
+          <a:chOff x="0" y="0"/>
+          <a:chExt cx="0" cy="0"/>
+        </a:xfrm>
+      </p:grpSpPr>
+      <p:sp>
+        <p:nvSpPr>
+          <p:cNvPr id="2" name="Titre 1">
+            <a:extLst>
+              <a:ext uri="{FF2B5EF4-FFF2-40B4-BE49-F238E27FC236}">
+                <a16:creationId xmlns:a16="http://schemas.microsoft.com/office/drawing/2014/main" id="{1DA33C75-3E80-A454-7994-578F276C483F}"/>
+              </a:ext>
+            </a:extLst>
+          </p:cNvPr>
+          <p:cNvSpPr>
+            <a:spLocks noGrp="1"/>
+          </p:cNvSpPr>
+          <p:nvPr>
+            <p:ph type="title"/>
+          </p:nvPr>
+        </p:nvSpPr>
+        <p:spPr/>
+        <p:txBody>
+          <a:bodyPr/>
+          <a:lstStyle/>
+          <a:p>
+            <a:endParaRPr lang="fr-FR"/>
+          </a:p>
+        </p:txBody>
+      </p:sp>
+      <p:cxnSp>
+        <p:nvCxnSpPr>
+          <p:cNvPr id="6" name="Connecteur droit 5">
+            <a:extLst>
+              <a:ext uri="{FF2B5EF4-FFF2-40B4-BE49-F238E27FC236}">
+                <a16:creationId xmlns:a16="http://schemas.microsoft.com/office/drawing/2014/main" id="{41201712-BEEE-9696-D05A-32990CEA41E4}"/>
+              </a:ext>
+            </a:extLst>
+          </p:cNvPr>
+          <p:cNvCxnSpPr>
+            <a:cxnSpLocks/>
+          </p:cNvCxnSpPr>
+          <p:nvPr/>
+        </p:nvCxnSpPr>
+        <p:spPr>
+          <a:xfrm flipV="1">
+            <a:off x="1774825" y="3024718"/>
+            <a:ext cx="0" cy="288000"/>
+          </a:xfrm>
+          <a:prstGeom prst="line">
+            <a:avLst/>
+          </a:prstGeom>
+          <a:solidFill>
+            <a:schemeClr val="accent5">
+              <a:lumMod val="20000"/>
+              <a:lumOff val="80000"/>
+            </a:schemeClr>
+          </a:solidFill>
+          <a:ln w="19050">
+            <a:solidFill>
+              <a:srgbClr val="002060"/>
+            </a:solidFill>
+          </a:ln>
+        </p:spPr>
+        <p:style>
+          <a:lnRef idx="2">
+            <a:schemeClr val="accent1">
+              <a:shade val="15000"/>
+            </a:schemeClr>
+          </a:lnRef>
+          <a:fillRef idx="1">
+            <a:schemeClr val="accent1"/>
+          </a:fillRef>
+          <a:effectRef idx="0">
+            <a:schemeClr val="accent1"/>
+          </a:effectRef>
+          <a:fontRef idx="minor">
+            <a:schemeClr val="lt1"/>
+          </a:fontRef>
+        </p:style>
+      </p:cxnSp>
+      <p:cxnSp>
+        <p:nvCxnSpPr>
+          <p:cNvPr id="7" name="Connecteur droit 6">
+            <a:extLst>
+              <a:ext uri="{FF2B5EF4-FFF2-40B4-BE49-F238E27FC236}">
+                <a16:creationId xmlns:a16="http://schemas.microsoft.com/office/drawing/2014/main" id="{E0BBE638-7EBE-7406-E8CE-A776B93CDFE5}"/>
+              </a:ext>
+            </a:extLst>
+          </p:cNvPr>
+          <p:cNvCxnSpPr>
+            <a:cxnSpLocks/>
+          </p:cNvCxnSpPr>
+          <p:nvPr/>
+        </p:nvCxnSpPr>
+        <p:spPr>
+          <a:xfrm flipH="1">
+            <a:off x="1774825" y="3024718"/>
+            <a:ext cx="288000" cy="0"/>
+          </a:xfrm>
+          <a:prstGeom prst="line">
+            <a:avLst/>
+          </a:prstGeom>
+          <a:solidFill>
+            <a:schemeClr val="accent5">
+              <a:lumMod val="20000"/>
+              <a:lumOff val="80000"/>
+            </a:schemeClr>
+          </a:solidFill>
+          <a:ln w="19050">
+            <a:solidFill>
+              <a:srgbClr val="002060"/>
+            </a:solidFill>
+          </a:ln>
+        </p:spPr>
+        <p:style>
+          <a:lnRef idx="2">
+            <a:schemeClr val="accent1">
+              <a:shade val="15000"/>
+            </a:schemeClr>
+          </a:lnRef>
+          <a:fillRef idx="1">
+            <a:schemeClr val="accent1"/>
+          </a:fillRef>
+          <a:effectRef idx="0">
+            <a:schemeClr val="accent1"/>
+          </a:effectRef>
+          <a:fontRef idx="minor">
+            <a:schemeClr val="lt1"/>
+          </a:fontRef>
+        </p:style>
+      </p:cxnSp>
+      <p:cxnSp>
+        <p:nvCxnSpPr>
+          <p:cNvPr id="10" name="Connecteur droit 9">
+            <a:extLst>
+              <a:ext uri="{FF2B5EF4-FFF2-40B4-BE49-F238E27FC236}">
+                <a16:creationId xmlns:a16="http://schemas.microsoft.com/office/drawing/2014/main" id="{C2BDACBA-B9D3-4C52-9150-0319F5D9B0F4}"/>
+              </a:ext>
+            </a:extLst>
+          </p:cNvPr>
+          <p:cNvCxnSpPr>
+            <a:cxnSpLocks/>
+          </p:cNvCxnSpPr>
+          <p:nvPr/>
+        </p:nvCxnSpPr>
+        <p:spPr>
+          <a:xfrm rot="-1800000" flipH="1">
+            <a:off x="2043532" y="2952718"/>
+            <a:ext cx="288000" cy="0"/>
+          </a:xfrm>
+          <a:prstGeom prst="line">
+            <a:avLst/>
+          </a:prstGeom>
+          <a:solidFill>
+            <a:schemeClr val="accent5">
+              <a:lumMod val="20000"/>
+              <a:lumOff val="80000"/>
+            </a:schemeClr>
+          </a:solidFill>
+          <a:ln w="19050">
+            <a:solidFill>
+              <a:srgbClr val="002060"/>
+            </a:solidFill>
+            <a:headEnd type="oval" w="sm" len="sm"/>
+            <a:tailEnd type="oval" w="sm" len="sm"/>
+          </a:ln>
+        </p:spPr>
+        <p:style>
+          <a:lnRef idx="2">
+            <a:schemeClr val="accent1">
+              <a:shade val="15000"/>
+            </a:schemeClr>
+          </a:lnRef>
+          <a:fillRef idx="1">
+            <a:schemeClr val="accent1"/>
+          </a:fillRef>
+          <a:effectRef idx="0">
+            <a:schemeClr val="accent1"/>
+          </a:effectRef>
+          <a:fontRef idx="minor">
+            <a:schemeClr val="lt1"/>
+          </a:fontRef>
+        </p:style>
+      </p:cxnSp>
+      <p:grpSp>
+        <p:nvGrpSpPr>
+          <p:cNvPr id="15" name="Groupe 14">
+            <a:extLst>
+              <a:ext uri="{FF2B5EF4-FFF2-40B4-BE49-F238E27FC236}">
+                <a16:creationId xmlns:a16="http://schemas.microsoft.com/office/drawing/2014/main" id="{FECBB501-3A2F-4843-C1F0-BAE6FBD0C00F}"/>
+              </a:ext>
+            </a:extLst>
+          </p:cNvPr>
+          <p:cNvGrpSpPr/>
+          <p:nvPr/>
+        </p:nvGrpSpPr>
+        <p:grpSpPr>
+          <a:xfrm>
+            <a:off x="1631711" y="3285000"/>
+            <a:ext cx="288000" cy="288000"/>
+            <a:chOff x="1627477" y="3285000"/>
+            <a:chExt cx="288000" cy="288000"/>
+          </a:xfrm>
+        </p:grpSpPr>
+        <p:sp>
+          <p:nvSpPr>
+            <p:cNvPr id="4" name="Ellipse 3">
+              <a:extLst>
+                <a:ext uri="{FF2B5EF4-FFF2-40B4-BE49-F238E27FC236}">
+                  <a16:creationId xmlns:a16="http://schemas.microsoft.com/office/drawing/2014/main" id="{AB578551-3C51-A1EF-A491-C1CFA0699C06}"/>
+                </a:ext>
+              </a:extLst>
+            </p:cNvPr>
+            <p:cNvSpPr/>
+            <p:nvPr/>
+          </p:nvSpPr>
+          <p:spPr>
+            <a:xfrm flipH="1">
+              <a:off x="1627477" y="3285000"/>
+              <a:ext cx="288000" cy="288000"/>
+            </a:xfrm>
+            <a:prstGeom prst="ellipse">
+              <a:avLst/>
+            </a:prstGeom>
+            <a:solidFill>
+              <a:schemeClr val="accent5">
+                <a:lumMod val="20000"/>
+                <a:lumOff val="80000"/>
+              </a:schemeClr>
+            </a:solidFill>
+            <a:ln w="19050">
+              <a:solidFill>
+                <a:srgbClr val="002060"/>
+              </a:solidFill>
+            </a:ln>
+          </p:spPr>
+          <p:style>
+            <a:lnRef idx="2">
+              <a:schemeClr val="accent1">
+                <a:shade val="15000"/>
+              </a:schemeClr>
+            </a:lnRef>
+            <a:fillRef idx="1">
+              <a:schemeClr val="accent1"/>
+            </a:fillRef>
+            <a:effectRef idx="0">
+              <a:schemeClr val="accent1"/>
+            </a:effectRef>
+            <a:fontRef idx="minor">
+              <a:schemeClr val="lt1"/>
+            </a:fontRef>
+          </p:style>
+          <p:txBody>
+            <a:bodyPr rtlCol="0" anchor="ctr"/>
+            <a:lstStyle/>
+            <a:p>
+              <a:pPr algn="ctr"/>
+              <a:endParaRPr lang="fr-FR"/>
+            </a:p>
+          </p:txBody>
+        </p:sp>
+        <p:cxnSp>
+          <p:nvCxnSpPr>
+            <p:cNvPr id="11" name="Connecteur droit 10">
+              <a:extLst>
+                <a:ext uri="{FF2B5EF4-FFF2-40B4-BE49-F238E27FC236}">
+                  <a16:creationId xmlns:a16="http://schemas.microsoft.com/office/drawing/2014/main" id="{8354039C-3DA6-9B28-6FDD-D8F3D2F91F25}"/>
+                </a:ext>
+              </a:extLst>
+            </p:cNvPr>
+            <p:cNvCxnSpPr>
+              <a:cxnSpLocks/>
+            </p:cNvCxnSpPr>
+            <p:nvPr/>
+          </p:nvCxnSpPr>
+          <p:spPr>
+            <a:xfrm flipV="1">
+              <a:off x="1771477" y="3321000"/>
+              <a:ext cx="0" cy="216000"/>
+            </a:xfrm>
+            <a:prstGeom prst="line">
+              <a:avLst/>
+            </a:prstGeom>
+            <a:solidFill>
+              <a:schemeClr val="accent5">
+                <a:lumMod val="20000"/>
+                <a:lumOff val="80000"/>
+              </a:schemeClr>
+            </a:solidFill>
+            <a:ln w="19050">
+              <a:solidFill>
+                <a:srgbClr val="002060"/>
+              </a:solidFill>
+              <a:tailEnd type="stealth" w="med" len="lg"/>
+            </a:ln>
+          </p:spPr>
+          <p:style>
+            <a:lnRef idx="2">
+              <a:schemeClr val="accent1">
+                <a:shade val="15000"/>
+              </a:schemeClr>
+            </a:lnRef>
+            <a:fillRef idx="1">
+              <a:schemeClr val="accent1"/>
+            </a:fillRef>
+            <a:effectRef idx="0">
+              <a:schemeClr val="accent1"/>
+            </a:effectRef>
+            <a:fontRef idx="minor">
+              <a:schemeClr val="lt1"/>
+            </a:fontRef>
+          </p:style>
+        </p:cxnSp>
+      </p:grpSp>
+      <p:cxnSp>
+        <p:nvCxnSpPr>
+          <p:cNvPr id="18" name="Connecteur droit 17">
+            <a:extLst>
+              <a:ext uri="{FF2B5EF4-FFF2-40B4-BE49-F238E27FC236}">
+                <a16:creationId xmlns:a16="http://schemas.microsoft.com/office/drawing/2014/main" id="{185C6B7B-6144-110F-1667-86BDA46C5504}"/>
+              </a:ext>
+            </a:extLst>
+          </p:cNvPr>
+          <p:cNvCxnSpPr>
+            <a:cxnSpLocks/>
+          </p:cNvCxnSpPr>
+          <p:nvPr/>
+        </p:nvCxnSpPr>
+        <p:spPr>
+          <a:xfrm flipV="1">
+            <a:off x="1774825" y="3573000"/>
+            <a:ext cx="0" cy="353837"/>
+          </a:xfrm>
+          <a:prstGeom prst="line">
+            <a:avLst/>
+          </a:prstGeom>
+          <a:solidFill>
+            <a:schemeClr val="accent5">
+              <a:lumMod val="20000"/>
+              <a:lumOff val="80000"/>
+            </a:schemeClr>
+          </a:solidFill>
+          <a:ln w="19050">
+            <a:solidFill>
+              <a:srgbClr val="002060"/>
+            </a:solidFill>
+          </a:ln>
+        </p:spPr>
+        <p:style>
+          <a:lnRef idx="2">
+            <a:schemeClr val="accent1">
+              <a:shade val="15000"/>
+            </a:schemeClr>
+          </a:lnRef>
+          <a:fillRef idx="1">
+            <a:schemeClr val="accent1"/>
+          </a:fillRef>
+          <a:effectRef idx="0">
+            <a:schemeClr val="accent1"/>
+          </a:effectRef>
+          <a:fontRef idx="minor">
+            <a:schemeClr val="lt1"/>
+          </a:fontRef>
+        </p:style>
+      </p:cxnSp>
+      <p:cxnSp>
+        <p:nvCxnSpPr>
+          <p:cNvPr id="21" name="Connecteur droit 20">
+            <a:extLst>
+              <a:ext uri="{FF2B5EF4-FFF2-40B4-BE49-F238E27FC236}">
+                <a16:creationId xmlns:a16="http://schemas.microsoft.com/office/drawing/2014/main" id="{235E282F-788A-5AC6-BB96-E2E8B816F9C2}"/>
+              </a:ext>
+            </a:extLst>
+          </p:cNvPr>
+          <p:cNvCxnSpPr>
+            <a:cxnSpLocks/>
+          </p:cNvCxnSpPr>
+          <p:nvPr/>
+        </p:nvCxnSpPr>
+        <p:spPr>
+          <a:xfrm flipH="1">
+            <a:off x="2350824" y="3024718"/>
+            <a:ext cx="862276" cy="0"/>
+          </a:xfrm>
+          <a:prstGeom prst="line">
+            <a:avLst/>
+          </a:prstGeom>
+          <a:solidFill>
+            <a:schemeClr val="accent5">
+              <a:lumMod val="20000"/>
+              <a:lumOff val="80000"/>
+            </a:schemeClr>
+          </a:solidFill>
+          <a:ln w="19050">
+            <a:solidFill>
+              <a:srgbClr val="002060"/>
+            </a:solidFill>
+          </a:ln>
+        </p:spPr>
+        <p:style>
+          <a:lnRef idx="2">
+            <a:schemeClr val="accent1">
+              <a:shade val="15000"/>
+            </a:schemeClr>
+          </a:lnRef>
+          <a:fillRef idx="1">
+            <a:schemeClr val="accent1"/>
+          </a:fillRef>
+          <a:effectRef idx="0">
+            <a:schemeClr val="accent1"/>
+          </a:effectRef>
+          <a:fontRef idx="minor">
+            <a:schemeClr val="lt1"/>
+          </a:fontRef>
+        </p:style>
+      </p:cxnSp>
+      <p:cxnSp>
+        <p:nvCxnSpPr>
+          <p:cNvPr id="22" name="Connecteur droit 21">
+            <a:extLst>
+              <a:ext uri="{FF2B5EF4-FFF2-40B4-BE49-F238E27FC236}">
+                <a16:creationId xmlns:a16="http://schemas.microsoft.com/office/drawing/2014/main" id="{A9DFD63D-E462-EC2A-47B1-BDAC3AC7F615}"/>
+              </a:ext>
+            </a:extLst>
+          </p:cNvPr>
+          <p:cNvCxnSpPr>
+            <a:cxnSpLocks/>
+          </p:cNvCxnSpPr>
+          <p:nvPr/>
+        </p:nvCxnSpPr>
+        <p:spPr>
+          <a:xfrm flipH="1">
+            <a:off x="1770351" y="3854122"/>
+            <a:ext cx="1442749" cy="0"/>
+          </a:xfrm>
+          <a:prstGeom prst="line">
+            <a:avLst/>
+          </a:prstGeom>
+          <a:solidFill>
+            <a:schemeClr val="accent5">
+              <a:lumMod val="20000"/>
+              <a:lumOff val="80000"/>
+            </a:schemeClr>
+          </a:solidFill>
+          <a:ln w="19050">
+            <a:solidFill>
+              <a:srgbClr val="002060"/>
+            </a:solidFill>
+          </a:ln>
+        </p:spPr>
+        <p:style>
+          <a:lnRef idx="2">
+            <a:schemeClr val="accent1">
+              <a:shade val="15000"/>
+            </a:schemeClr>
+          </a:lnRef>
+          <a:fillRef idx="1">
+            <a:schemeClr val="accent1"/>
+          </a:fillRef>
+          <a:effectRef idx="0">
+            <a:schemeClr val="accent1"/>
+          </a:effectRef>
+          <a:fontRef idx="minor">
+            <a:schemeClr val="lt1"/>
+          </a:fontRef>
+        </p:style>
+      </p:cxnSp>
+      <p:cxnSp>
+        <p:nvCxnSpPr>
+          <p:cNvPr id="23" name="Connecteur droit 22">
+            <a:extLst>
+              <a:ext uri="{FF2B5EF4-FFF2-40B4-BE49-F238E27FC236}">
+                <a16:creationId xmlns:a16="http://schemas.microsoft.com/office/drawing/2014/main" id="{3805C41D-7F3F-1F00-7738-47AEFD3CE3E3}"/>
+              </a:ext>
+            </a:extLst>
+          </p:cNvPr>
+          <p:cNvCxnSpPr>
+            <a:cxnSpLocks/>
+          </p:cNvCxnSpPr>
+          <p:nvPr/>
+        </p:nvCxnSpPr>
+        <p:spPr>
+          <a:xfrm flipV="1">
+            <a:off x="2638824" y="3024718"/>
+            <a:ext cx="0" cy="829404"/>
+          </a:xfrm>
+          <a:prstGeom prst="line">
+            <a:avLst/>
+          </a:prstGeom>
+          <a:solidFill>
+            <a:schemeClr val="accent5">
+              <a:lumMod val="20000"/>
+              <a:lumOff val="80000"/>
+            </a:schemeClr>
+          </a:solidFill>
+          <a:ln w="19050">
+            <a:solidFill>
+              <a:srgbClr val="002060"/>
+            </a:solidFill>
+          </a:ln>
+        </p:spPr>
+        <p:style>
+          <a:lnRef idx="2">
+            <a:schemeClr val="accent1">
+              <a:shade val="15000"/>
+            </a:schemeClr>
+          </a:lnRef>
+          <a:fillRef idx="1">
+            <a:schemeClr val="accent1"/>
+          </a:fillRef>
+          <a:effectRef idx="0">
+            <a:schemeClr val="accent1"/>
+          </a:effectRef>
+          <a:fontRef idx="minor">
+            <a:schemeClr val="lt1"/>
+          </a:fontRef>
+        </p:style>
+      </p:cxnSp>
+      <p:sp>
+        <p:nvSpPr>
+          <p:cNvPr id="25" name="Triangle isocèle 24">
+            <a:extLst>
+              <a:ext uri="{FF2B5EF4-FFF2-40B4-BE49-F238E27FC236}">
+                <a16:creationId xmlns:a16="http://schemas.microsoft.com/office/drawing/2014/main" id="{B3CB43AF-5BCC-4A0C-059B-0882F40B049C}"/>
+              </a:ext>
+            </a:extLst>
+          </p:cNvPr>
+          <p:cNvSpPr/>
+          <p:nvPr/>
+        </p:nvSpPr>
+        <p:spPr>
+          <a:xfrm>
+            <a:off x="2548824" y="3331984"/>
+            <a:ext cx="180000" cy="180000"/>
+          </a:xfrm>
+          <a:prstGeom prst="triangle">
+            <a:avLst/>
+          </a:prstGeom>
+          <a:solidFill>
+            <a:schemeClr val="accent5">
+              <a:lumMod val="20000"/>
+              <a:lumOff val="80000"/>
+            </a:schemeClr>
+          </a:solidFill>
+          <a:ln w="19050">
+            <a:solidFill>
+              <a:srgbClr val="002060"/>
+            </a:solidFill>
+          </a:ln>
+        </p:spPr>
+        <p:style>
+          <a:lnRef idx="2">
+            <a:schemeClr val="accent1">
+              <a:shade val="15000"/>
+            </a:schemeClr>
+          </a:lnRef>
+          <a:fillRef idx="1">
+            <a:schemeClr val="accent1"/>
+          </a:fillRef>
+          <a:effectRef idx="0">
+            <a:schemeClr val="accent1"/>
+          </a:effectRef>
+          <a:fontRef idx="minor">
+            <a:schemeClr val="lt1"/>
+          </a:fontRef>
+        </p:style>
+        <p:txBody>
+          <a:bodyPr rtlCol="0" anchor="ctr"/>
+          <a:lstStyle/>
+          <a:p>
+            <a:pPr algn="ctr"/>
+            <a:endParaRPr lang="fr-FR"/>
+          </a:p>
+        </p:txBody>
+      </p:sp>
+      <p:cxnSp>
+        <p:nvCxnSpPr>
+          <p:cNvPr id="30" name="Connecteur droit 29">
+            <a:extLst>
+              <a:ext uri="{FF2B5EF4-FFF2-40B4-BE49-F238E27FC236}">
+                <a16:creationId xmlns:a16="http://schemas.microsoft.com/office/drawing/2014/main" id="{348FBAB4-38D4-C2AB-5011-ACA1504DEE48}"/>
+              </a:ext>
+            </a:extLst>
+          </p:cNvPr>
+          <p:cNvCxnSpPr>
+            <a:cxnSpLocks/>
+          </p:cNvCxnSpPr>
+          <p:nvPr/>
+        </p:nvCxnSpPr>
+        <p:spPr>
+          <a:xfrm flipV="1">
+            <a:off x="3213100" y="3024718"/>
+            <a:ext cx="0" cy="829404"/>
+          </a:xfrm>
+          <a:prstGeom prst="line">
+            <a:avLst/>
+          </a:prstGeom>
+          <a:solidFill>
+            <a:schemeClr val="accent5">
+              <a:lumMod val="20000"/>
+              <a:lumOff val="80000"/>
+            </a:schemeClr>
+          </a:solidFill>
+          <a:ln w="19050">
+            <a:solidFill>
+              <a:srgbClr val="002060"/>
+            </a:solidFill>
+          </a:ln>
+        </p:spPr>
+        <p:style>
+          <a:lnRef idx="2">
+            <a:schemeClr val="accent1">
+              <a:shade val="15000"/>
+            </a:schemeClr>
+          </a:lnRef>
+          <a:fillRef idx="1">
+            <a:schemeClr val="accent1"/>
+          </a:fillRef>
+          <a:effectRef idx="0">
+            <a:schemeClr val="accent1"/>
+          </a:effectRef>
+          <a:fontRef idx="minor">
+            <a:schemeClr val="lt1"/>
+          </a:fontRef>
+        </p:style>
+      </p:cxnSp>
+      <p:grpSp>
+        <p:nvGrpSpPr>
+          <p:cNvPr id="34" name="Groupe 33">
+            <a:extLst>
+              <a:ext uri="{FF2B5EF4-FFF2-40B4-BE49-F238E27FC236}">
+                <a16:creationId xmlns:a16="http://schemas.microsoft.com/office/drawing/2014/main" id="{FECDAD49-5284-6151-872B-80CCB91A5E54}"/>
+              </a:ext>
+            </a:extLst>
+          </p:cNvPr>
+          <p:cNvGrpSpPr/>
+          <p:nvPr/>
+        </p:nvGrpSpPr>
+        <p:grpSpPr>
+          <a:xfrm>
+            <a:off x="3127246" y="3286679"/>
+            <a:ext cx="180000" cy="288000"/>
+            <a:chOff x="3125658" y="3289855"/>
+            <a:chExt cx="180000" cy="288000"/>
+          </a:xfrm>
+        </p:grpSpPr>
+        <p:sp>
+          <p:nvSpPr>
+            <p:cNvPr id="33" name="Rectangle 32">
+              <a:extLst>
+                <a:ext uri="{FF2B5EF4-FFF2-40B4-BE49-F238E27FC236}">
+                  <a16:creationId xmlns:a16="http://schemas.microsoft.com/office/drawing/2014/main" id="{5739AF48-18D4-9415-E283-997C740310B1}"/>
+                </a:ext>
+              </a:extLst>
+            </p:cNvPr>
+            <p:cNvSpPr/>
+            <p:nvPr/>
+          </p:nvSpPr>
+          <p:spPr>
+            <a:xfrm>
+              <a:off x="3179658" y="3289855"/>
+              <a:ext cx="72000" cy="288000"/>
+            </a:xfrm>
+            <a:prstGeom prst="rect">
+              <a:avLst/>
+            </a:prstGeom>
+            <a:solidFill>
+              <a:schemeClr val="accent5">
+                <a:lumMod val="20000"/>
+                <a:lumOff val="80000"/>
+              </a:schemeClr>
+            </a:solidFill>
+            <a:ln w="19050">
+              <a:solidFill>
+                <a:srgbClr val="002060"/>
+              </a:solidFill>
+            </a:ln>
+          </p:spPr>
+          <p:style>
+            <a:lnRef idx="2">
+              <a:schemeClr val="accent1">
+                <a:shade val="15000"/>
+              </a:schemeClr>
+            </a:lnRef>
+            <a:fillRef idx="1">
+              <a:schemeClr val="accent1"/>
+            </a:fillRef>
+            <a:effectRef idx="0">
+              <a:schemeClr val="accent1"/>
+            </a:effectRef>
+            <a:fontRef idx="minor">
+              <a:schemeClr val="lt1"/>
+            </a:fontRef>
+          </p:style>
+          <p:txBody>
+            <a:bodyPr rtlCol="0" anchor="ctr"/>
+            <a:lstStyle/>
+            <a:p>
+              <a:pPr algn="ctr"/>
+              <a:endParaRPr lang="fr-FR"/>
+            </a:p>
+          </p:txBody>
+        </p:sp>
+        <p:sp>
+          <p:nvSpPr>
+            <p:cNvPr id="32" name="Ellipse 31">
+              <a:extLst>
+                <a:ext uri="{FF2B5EF4-FFF2-40B4-BE49-F238E27FC236}">
+                  <a16:creationId xmlns:a16="http://schemas.microsoft.com/office/drawing/2014/main" id="{5C4C48F9-53CB-F3B0-F940-0BAA790B03DA}"/>
+                </a:ext>
+              </a:extLst>
+            </p:cNvPr>
+            <p:cNvSpPr/>
+            <p:nvPr/>
+          </p:nvSpPr>
+          <p:spPr>
+            <a:xfrm flipH="1">
+              <a:off x="3125658" y="3343855"/>
+              <a:ext cx="180000" cy="180000"/>
+            </a:xfrm>
+            <a:prstGeom prst="ellipse">
+              <a:avLst/>
+            </a:prstGeom>
+            <a:solidFill>
+              <a:schemeClr val="accent5">
+                <a:lumMod val="20000"/>
+                <a:lumOff val="80000"/>
+              </a:schemeClr>
+            </a:solidFill>
+            <a:ln w="19050">
+              <a:solidFill>
+                <a:srgbClr val="002060"/>
+              </a:solidFill>
+            </a:ln>
+          </p:spPr>
+          <p:style>
+            <a:lnRef idx="2">
+              <a:schemeClr val="accent1">
+                <a:shade val="15000"/>
+              </a:schemeClr>
+            </a:lnRef>
+            <a:fillRef idx="1">
+              <a:schemeClr val="accent1"/>
+            </a:fillRef>
+            <a:effectRef idx="0">
+              <a:schemeClr val="accent1"/>
+            </a:effectRef>
+            <a:fontRef idx="minor">
+              <a:schemeClr val="lt1"/>
+            </a:fontRef>
+          </p:style>
+          <p:txBody>
+            <a:bodyPr rtlCol="0" anchor="ctr"/>
+            <a:lstStyle/>
+            <a:p>
+              <a:pPr algn="ctr"/>
+              <a:endParaRPr lang="fr-FR"/>
+            </a:p>
+          </p:txBody>
+        </p:sp>
+      </p:grpSp>
+      <p:sp>
+        <p:nvSpPr>
+          <p:cNvPr id="39" name="Rectangle 38">
+            <a:extLst>
+              <a:ext uri="{FF2B5EF4-FFF2-40B4-BE49-F238E27FC236}">
+                <a16:creationId xmlns:a16="http://schemas.microsoft.com/office/drawing/2014/main" id="{BFDB10B3-C41E-231A-FAF7-634CF5ED2945}"/>
+              </a:ext>
+            </a:extLst>
+          </p:cNvPr>
+          <p:cNvSpPr/>
+          <p:nvPr/>
+        </p:nvSpPr>
+        <p:spPr>
+          <a:xfrm>
+            <a:off x="2006403" y="2799080"/>
+            <a:ext cx="776420" cy="1127757"/>
+          </a:xfrm>
+          <a:prstGeom prst="rect">
+            <a:avLst/>
+          </a:prstGeom>
+          <a:solidFill>
+            <a:srgbClr val="FFB9B9">
+              <a:alpha val="20000"/>
+            </a:srgbClr>
+          </a:solidFill>
+          <a:ln>
+            <a:solidFill>
+              <a:srgbClr val="C00000"/>
+            </a:solidFill>
+          </a:ln>
+        </p:spPr>
+        <p:style>
+          <a:lnRef idx="2">
+            <a:schemeClr val="accent1">
+              <a:shade val="15000"/>
+            </a:schemeClr>
+          </a:lnRef>
+          <a:fillRef idx="1">
+            <a:schemeClr val="accent1"/>
+          </a:fillRef>
+          <a:effectRef idx="0">
+            <a:schemeClr val="accent1"/>
+          </a:effectRef>
+          <a:fontRef idx="minor">
+            <a:schemeClr val="lt1"/>
+          </a:fontRef>
+        </p:style>
+        <p:txBody>
+          <a:bodyPr rtlCol="0" anchor="ctr"/>
+          <a:lstStyle/>
+          <a:p>
+            <a:pPr algn="ctr"/>
+            <a:endParaRPr lang="fr-FR"/>
+          </a:p>
+        </p:txBody>
+      </p:sp>
+      <p:sp>
+        <p:nvSpPr>
+          <p:cNvPr id="41" name="Rectangle 40">
+            <a:extLst>
+              <a:ext uri="{FF2B5EF4-FFF2-40B4-BE49-F238E27FC236}">
+                <a16:creationId xmlns:a16="http://schemas.microsoft.com/office/drawing/2014/main" id="{6D883DE5-AF50-16CC-1CB5-9F49A79ACF36}"/>
+              </a:ext>
+            </a:extLst>
+          </p:cNvPr>
+          <p:cNvSpPr/>
+          <p:nvPr/>
+        </p:nvSpPr>
+        <p:spPr>
+          <a:xfrm>
+            <a:off x="1631711" y="3922343"/>
+            <a:ext cx="288000" cy="81702"/>
+          </a:xfrm>
+          <a:prstGeom prst="rect">
+            <a:avLst/>
+          </a:prstGeom>
+          <a:solidFill>
+            <a:schemeClr val="accent5">
+              <a:lumMod val="20000"/>
+              <a:lumOff val="80000"/>
+            </a:schemeClr>
+          </a:solidFill>
+          <a:ln w="19050">
+            <a:noFill/>
+          </a:ln>
+        </p:spPr>
+        <p:style>
+          <a:lnRef idx="2">
+            <a:schemeClr val="accent1">
+              <a:shade val="15000"/>
+            </a:schemeClr>
+          </a:lnRef>
+          <a:fillRef idx="1">
+            <a:schemeClr val="accent1"/>
+          </a:fillRef>
+          <a:effectRef idx="0">
+            <a:schemeClr val="accent1"/>
+          </a:effectRef>
+          <a:fontRef idx="minor">
+            <a:schemeClr val="lt1"/>
+          </a:fontRef>
+        </p:style>
+        <p:txBody>
+          <a:bodyPr rtlCol="0" anchor="ctr"/>
+          <a:lstStyle/>
+          <a:p>
+            <a:pPr algn="ctr"/>
+            <a:endParaRPr lang="fr-FR"/>
+          </a:p>
+        </p:txBody>
+      </p:sp>
+      <p:cxnSp>
+        <p:nvCxnSpPr>
+          <p:cNvPr id="42" name="Connecteur droit 41">
+            <a:extLst>
+              <a:ext uri="{FF2B5EF4-FFF2-40B4-BE49-F238E27FC236}">
+                <a16:creationId xmlns:a16="http://schemas.microsoft.com/office/drawing/2014/main" id="{BFBF772C-3D15-EFB4-5A5A-19ED91B5D0FD}"/>
+              </a:ext>
+            </a:extLst>
+          </p:cNvPr>
+          <p:cNvCxnSpPr>
+            <a:cxnSpLocks/>
+          </p:cNvCxnSpPr>
+          <p:nvPr/>
+        </p:nvCxnSpPr>
+        <p:spPr>
+          <a:xfrm flipH="1">
+            <a:off x="1630011" y="3918404"/>
+            <a:ext cx="292875" cy="0"/>
+          </a:xfrm>
+          <a:prstGeom prst="line">
+            <a:avLst/>
+          </a:prstGeom>
+          <a:solidFill>
+            <a:schemeClr val="bg1"/>
+          </a:solidFill>
+          <a:ln w="19050">
+            <a:solidFill>
+              <a:srgbClr val="002060"/>
+            </a:solidFill>
+          </a:ln>
+        </p:spPr>
+        <p:style>
+          <a:lnRef idx="2">
+            <a:schemeClr val="accent1">
+              <a:shade val="15000"/>
+            </a:schemeClr>
+          </a:lnRef>
+          <a:fillRef idx="1">
+            <a:schemeClr val="accent1"/>
+          </a:fillRef>
+          <a:effectRef idx="0">
+            <a:schemeClr val="accent1"/>
+          </a:effectRef>
+          <a:fontRef idx="minor">
+            <a:schemeClr val="lt1"/>
+          </a:fontRef>
+        </p:style>
+      </p:cxnSp>
+      <p:sp>
+        <p:nvSpPr>
+          <p:cNvPr id="43" name="ZoneTexte 42">
+            <a:extLst>
+              <a:ext uri="{FF2B5EF4-FFF2-40B4-BE49-F238E27FC236}">
+                <a16:creationId xmlns:a16="http://schemas.microsoft.com/office/drawing/2014/main" id="{D55D4D5F-495C-F489-4700-ADA06C710427}"/>
+              </a:ext>
+            </a:extLst>
+          </p:cNvPr>
+          <p:cNvSpPr txBox="1"/>
+          <p:nvPr/>
+        </p:nvSpPr>
+        <p:spPr>
+          <a:xfrm rot="16200000">
+            <a:off x="477125" y="3193680"/>
+            <a:ext cx="1348446" cy="338554"/>
+          </a:xfrm>
+          <a:prstGeom prst="rect">
+            <a:avLst/>
+          </a:prstGeom>
+          <a:noFill/>
+        </p:spPr>
+        <p:txBody>
+          <a:bodyPr wrap="none" rtlCol="0">
+            <a:spAutoFit/>
+          </a:bodyPr>
+          <a:lstStyle/>
+          <a:p>
+            <a:pPr algn="ctr"/>
+            <a:r>
+              <a:rPr lang="fr-FR" sz="800" dirty="0"/>
+              <a:t>Source de tension continue </a:t>
+            </a:r>
+          </a:p>
+          <a:p>
+            <a:pPr algn="ctr"/>
+            <a:r>
+              <a:rPr lang="fr-FR" sz="800" dirty="0"/>
+              <a:t>Tension constante</a:t>
+            </a:r>
+          </a:p>
+        </p:txBody>
+      </p:sp>
+      <p:sp>
+        <p:nvSpPr>
+          <p:cNvPr id="44" name="ZoneTexte 43">
+            <a:extLst>
+              <a:ext uri="{FF2B5EF4-FFF2-40B4-BE49-F238E27FC236}">
+                <a16:creationId xmlns:a16="http://schemas.microsoft.com/office/drawing/2014/main" id="{516C5F8E-C0FE-05F8-ACB2-07B94C092C40}"/>
+              </a:ext>
+            </a:extLst>
+          </p:cNvPr>
+          <p:cNvSpPr txBox="1"/>
+          <p:nvPr/>
+        </p:nvSpPr>
+        <p:spPr>
+          <a:xfrm>
+            <a:off x="2081118" y="3872999"/>
+            <a:ext cx="623889" cy="246221"/>
+          </a:xfrm>
+          <a:prstGeom prst="rect">
+            <a:avLst/>
+          </a:prstGeom>
+          <a:noFill/>
+        </p:spPr>
+        <p:txBody>
+          <a:bodyPr wrap="none" rtlCol="0">
+            <a:spAutoFit/>
+          </a:bodyPr>
+          <a:lstStyle/>
+          <a:p>
+            <a:pPr algn="ctr"/>
+            <a:r>
+              <a:rPr lang="fr-FR" sz="1000" dirty="0"/>
+              <a:t>Hacheur</a:t>
+            </a:r>
+          </a:p>
+        </p:txBody>
+      </p:sp>
+      <p:sp>
+        <p:nvSpPr>
+          <p:cNvPr id="45" name="ZoneTexte 44">
+            <a:extLst>
+              <a:ext uri="{FF2B5EF4-FFF2-40B4-BE49-F238E27FC236}">
+                <a16:creationId xmlns:a16="http://schemas.microsoft.com/office/drawing/2014/main" id="{BD02FF38-CEC7-E928-D5EA-F4F0DE12BF14}"/>
+              </a:ext>
+            </a:extLst>
+          </p:cNvPr>
+          <p:cNvSpPr txBox="1"/>
+          <p:nvPr/>
+        </p:nvSpPr>
+        <p:spPr>
+          <a:xfrm>
+            <a:off x="2759262" y="3290779"/>
+            <a:ext cx="431528" cy="246221"/>
+          </a:xfrm>
+          <a:prstGeom prst="rect">
+            <a:avLst/>
+          </a:prstGeom>
+          <a:noFill/>
+        </p:spPr>
+        <p:txBody>
+          <a:bodyPr wrap="none" rtlCol="0">
+            <a:spAutoFit/>
+          </a:bodyPr>
+          <a:lstStyle/>
+          <a:p>
+            <a:pPr algn="ctr"/>
+            <a:r>
+              <a:rPr lang="fr-FR" sz="1000" dirty="0"/>
+              <a:t>MCC</a:t>
+            </a:r>
+          </a:p>
+        </p:txBody>
+      </p:sp>
+      <p:grpSp>
+        <p:nvGrpSpPr>
+          <p:cNvPr id="54" name="Groupe 53">
+            <a:extLst>
+              <a:ext uri="{FF2B5EF4-FFF2-40B4-BE49-F238E27FC236}">
+                <a16:creationId xmlns:a16="http://schemas.microsoft.com/office/drawing/2014/main" id="{9809D06F-E8ED-3B34-04D9-FFB525263009}"/>
+              </a:ext>
+            </a:extLst>
+          </p:cNvPr>
+          <p:cNvGrpSpPr/>
+          <p:nvPr/>
+        </p:nvGrpSpPr>
+        <p:grpSpPr>
+          <a:xfrm>
+            <a:off x="4653341" y="2446811"/>
+            <a:ext cx="3606451" cy="979714"/>
+            <a:chOff x="326571" y="1730829"/>
+            <a:chExt cx="3606451" cy="979714"/>
+          </a:xfrm>
+        </p:grpSpPr>
+        <p:cxnSp>
+          <p:nvCxnSpPr>
+            <p:cNvPr id="69" name="Connecteur droit avec flèche 68">
+              <a:extLst>
+                <a:ext uri="{FF2B5EF4-FFF2-40B4-BE49-F238E27FC236}">
+                  <a16:creationId xmlns:a16="http://schemas.microsoft.com/office/drawing/2014/main" id="{76398701-14B9-9F15-FA07-3F2BE680B922}"/>
+                </a:ext>
+              </a:extLst>
+            </p:cNvPr>
+            <p:cNvCxnSpPr/>
+            <p:nvPr/>
+          </p:nvCxnSpPr>
+          <p:spPr>
+            <a:xfrm flipV="1">
+              <a:off x="326571" y="1730829"/>
+              <a:ext cx="0" cy="979714"/>
+            </a:xfrm>
+            <a:prstGeom prst="straightConnector1">
+              <a:avLst/>
+            </a:prstGeom>
+            <a:ln w="28575">
+              <a:solidFill>
+                <a:srgbClr val="00547F"/>
+              </a:solidFill>
+              <a:headEnd type="none"/>
+              <a:tailEnd type="stealth" w="med" len="lg"/>
+            </a:ln>
+          </p:spPr>
+          <p:style>
+            <a:lnRef idx="1">
+              <a:schemeClr val="accent1"/>
+            </a:lnRef>
+            <a:fillRef idx="0">
+              <a:schemeClr val="accent1"/>
+            </a:fillRef>
+            <a:effectRef idx="0">
+              <a:schemeClr val="accent1"/>
+            </a:effectRef>
+            <a:fontRef idx="minor">
+              <a:schemeClr val="tx1"/>
+            </a:fontRef>
+          </p:style>
+        </p:cxnSp>
+        <p:cxnSp>
+          <p:nvCxnSpPr>
+            <p:cNvPr id="70" name="Connecteur droit avec flèche 69">
+              <a:extLst>
+                <a:ext uri="{FF2B5EF4-FFF2-40B4-BE49-F238E27FC236}">
+                  <a16:creationId xmlns:a16="http://schemas.microsoft.com/office/drawing/2014/main" id="{CE6C8D48-B20C-77F2-6BE2-FAD005A85B9B}"/>
+                </a:ext>
+              </a:extLst>
+            </p:cNvPr>
+            <p:cNvCxnSpPr>
+              <a:cxnSpLocks/>
+            </p:cNvCxnSpPr>
+            <p:nvPr/>
+          </p:nvCxnSpPr>
+          <p:spPr>
+            <a:xfrm>
+              <a:off x="326571" y="2710543"/>
+              <a:ext cx="3606451" cy="0"/>
+            </a:xfrm>
+            <a:prstGeom prst="straightConnector1">
+              <a:avLst/>
+            </a:prstGeom>
+            <a:ln w="28575">
+              <a:solidFill>
+                <a:srgbClr val="00547F"/>
+              </a:solidFill>
+              <a:headEnd type="none"/>
+              <a:tailEnd type="stealth" w="med" len="lg"/>
+            </a:ln>
+          </p:spPr>
+          <p:style>
+            <a:lnRef idx="1">
+              <a:schemeClr val="accent1"/>
+            </a:lnRef>
+            <a:fillRef idx="0">
+              <a:schemeClr val="accent1"/>
+            </a:fillRef>
+            <a:effectRef idx="0">
+              <a:schemeClr val="accent1"/>
+            </a:effectRef>
+            <a:fontRef idx="minor">
+              <a:schemeClr val="tx1"/>
+            </a:fontRef>
+          </p:style>
+        </p:cxnSp>
+      </p:grpSp>
+      <mc:AlternateContent xmlns:mc="http://schemas.openxmlformats.org/markup-compatibility/2006" xmlns:a14="http://schemas.microsoft.com/office/drawing/2010/main">
+        <mc:Choice Requires="a14">
+          <p:sp>
+            <p:nvSpPr>
+              <p:cNvPr id="48" name="ZoneTexte 47">
+                <a:extLst>
+                  <a:ext uri="{FF2B5EF4-FFF2-40B4-BE49-F238E27FC236}">
+                    <a16:creationId xmlns:a16="http://schemas.microsoft.com/office/drawing/2014/main" id="{0B74FFF4-AD78-8CA7-9FED-08ADFED16BC7}"/>
+                  </a:ext>
+                </a:extLst>
+              </p:cNvPr>
+              <p:cNvSpPr txBox="1"/>
+              <p:nvPr/>
+            </p:nvSpPr>
+            <p:spPr>
+              <a:xfrm rot="16200000">
+                <a:off x="1275071" y="3329650"/>
+                <a:ext cx="337015" cy="184666"/>
+              </a:xfrm>
+              <a:prstGeom prst="rect">
+                <a:avLst/>
+              </a:prstGeom>
+              <a:noFill/>
+            </p:spPr>
+            <p:txBody>
+              <a:bodyPr wrap="none" lIns="0" tIns="0" rIns="0" bIns="0" rtlCol="0">
+                <a:spAutoFit/>
+              </a:bodyPr>
+              <a:lstStyle/>
+              <a:p>
+                <a:pPr/>
+                <a14:m>
+                  <m:oMathPara xmlns:m="http://schemas.openxmlformats.org/officeDocument/2006/math">
+                    <m:oMathParaPr>
+                      <m:jc m:val="centerGroup"/>
+                    </m:oMathParaPr>
+                    <m:oMath xmlns:m="http://schemas.openxmlformats.org/officeDocument/2006/math">
+                      <m:r>
+                        <a:rPr lang="fr-FR" sz="1200" b="0" i="1" smtClean="0">
+                          <a:latin typeface="Cambria Math" panose="02040503050406030204" pitchFamily="18" charset="0"/>
+                        </a:rPr>
+                        <m:t>𝑈</m:t>
+                      </m:r>
+                      <m:r>
+                        <a:rPr lang="fr-FR" sz="1200" b="0" i="1" smtClean="0">
+                          <a:latin typeface="Cambria Math" panose="02040503050406030204" pitchFamily="18" charset="0"/>
+                        </a:rPr>
+                        <m:t>(</m:t>
+                      </m:r>
+                      <m:r>
+                        <a:rPr lang="fr-FR" sz="1200" b="0" i="1" smtClean="0">
+                          <a:latin typeface="Cambria Math" panose="02040503050406030204" pitchFamily="18" charset="0"/>
+                        </a:rPr>
+                        <m:t>𝑡</m:t>
+                      </m:r>
+                      <m:r>
+                        <a:rPr lang="fr-FR" sz="1200" b="0" i="1" smtClean="0">
+                          <a:latin typeface="Cambria Math" panose="02040503050406030204" pitchFamily="18" charset="0"/>
+                        </a:rPr>
+                        <m:t>)</m:t>
+                      </m:r>
+                    </m:oMath>
+                  </m:oMathPara>
+                </a14:m>
+                <a:endParaRPr lang="fr-FR" sz="1200" dirty="0"/>
+              </a:p>
+            </p:txBody>
+          </p:sp>
+        </mc:Choice>
+        <mc:Fallback xmlns="">
+          <p:sp>
+            <p:nvSpPr>
+              <p:cNvPr id="48" name="ZoneTexte 47">
+                <a:extLst>
+                  <a:ext uri="{FF2B5EF4-FFF2-40B4-BE49-F238E27FC236}">
+                    <a16:creationId xmlns:a16="http://schemas.microsoft.com/office/drawing/2014/main" id="{A8481421-4E3D-D979-D199-64F39CCA49DC}"/>
+                  </a:ext>
+                </a:extLst>
+              </p:cNvPr>
+              <p:cNvSpPr txBox="1">
+                <a:spLocks noRot="1" noChangeAspect="1" noMove="1" noResize="1" noEditPoints="1" noAdjustHandles="1" noChangeArrowheads="1" noChangeShapeType="1" noTextEdit="1"/>
+              </p:cNvSpPr>
+              <p:nvPr/>
+            </p:nvSpPr>
+            <p:spPr>
+              <a:xfrm rot="16200000">
+                <a:off x="1275071" y="3329650"/>
+                <a:ext cx="337015" cy="184666"/>
+              </a:xfrm>
+              <a:prstGeom prst="rect">
+                <a:avLst/>
+              </a:prstGeom>
+              <a:blipFill>
+                <a:blip r:embed="rId2"/>
+                <a:stretch>
+                  <a:fillRect l="-6667" t="-18182" r="-36667" b="-10909"/>
+                </a:stretch>
+              </a:blipFill>
+            </p:spPr>
+            <p:txBody>
+              <a:bodyPr/>
+              <a:lstStyle/>
+              <a:p>
+                <a:r>
+                  <a:rPr lang="fr-FR">
+                    <a:noFill/>
+                  </a:rPr>
+                  <a:t> </a:t>
+                </a:r>
+              </a:p>
+            </p:txBody>
+          </p:sp>
+        </mc:Fallback>
+      </mc:AlternateContent>
+      <p:cxnSp>
+        <p:nvCxnSpPr>
+          <p:cNvPr id="84" name="Connecteur droit avec flèche 83">
+            <a:extLst>
+              <a:ext uri="{FF2B5EF4-FFF2-40B4-BE49-F238E27FC236}">
+                <a16:creationId xmlns:a16="http://schemas.microsoft.com/office/drawing/2014/main" id="{E0298FDF-9D6E-DBE5-D817-5C51B5032E76}"/>
+              </a:ext>
+            </a:extLst>
+          </p:cNvPr>
+          <p:cNvCxnSpPr>
+            <a:cxnSpLocks/>
+          </p:cNvCxnSpPr>
+          <p:nvPr/>
+        </p:nvCxnSpPr>
+        <p:spPr>
+          <a:xfrm>
+            <a:off x="4653341" y="2711051"/>
+            <a:ext cx="2846009" cy="0"/>
+          </a:xfrm>
+          <a:prstGeom prst="straightConnector1">
+            <a:avLst/>
+          </a:prstGeom>
+          <a:ln w="28575">
+            <a:solidFill>
+              <a:srgbClr val="C00000"/>
+            </a:solidFill>
+            <a:headEnd type="none"/>
+            <a:tailEnd type="none" w="med" len="lg"/>
+          </a:ln>
+        </p:spPr>
+        <p:style>
+          <a:lnRef idx="1">
+            <a:schemeClr val="accent1"/>
+          </a:lnRef>
+          <a:fillRef idx="0">
+            <a:schemeClr val="accent1"/>
+          </a:fillRef>
+          <a:effectRef idx="0">
+            <a:schemeClr val="accent1"/>
+          </a:effectRef>
+          <a:fontRef idx="minor">
+            <a:schemeClr val="tx1"/>
+          </a:fontRef>
+        </p:style>
+      </p:cxnSp>
+      <p:cxnSp>
+        <p:nvCxnSpPr>
+          <p:cNvPr id="87" name="Connecteur droit 86">
+            <a:extLst>
+              <a:ext uri="{FF2B5EF4-FFF2-40B4-BE49-F238E27FC236}">
+                <a16:creationId xmlns:a16="http://schemas.microsoft.com/office/drawing/2014/main" id="{11D187FC-891D-E277-9D84-5E1CA08B0EF5}"/>
+              </a:ext>
+            </a:extLst>
+          </p:cNvPr>
+          <p:cNvCxnSpPr>
+            <a:cxnSpLocks/>
+          </p:cNvCxnSpPr>
+          <p:nvPr/>
+        </p:nvCxnSpPr>
+        <p:spPr>
+          <a:xfrm flipV="1">
+            <a:off x="1578861" y="3253475"/>
+            <a:ext cx="0" cy="337016"/>
+          </a:xfrm>
+          <a:prstGeom prst="line">
+            <a:avLst/>
+          </a:prstGeom>
+          <a:solidFill>
+            <a:schemeClr val="accent5">
+              <a:lumMod val="20000"/>
+              <a:lumOff val="80000"/>
+            </a:schemeClr>
+          </a:solidFill>
+          <a:ln w="19050">
+            <a:solidFill>
+              <a:srgbClr val="002060"/>
+            </a:solidFill>
+            <a:tailEnd type="stealth" w="med" len="lg"/>
+          </a:ln>
+        </p:spPr>
+        <p:style>
+          <a:lnRef idx="2">
+            <a:schemeClr val="accent1">
+              <a:shade val="15000"/>
+            </a:schemeClr>
+          </a:lnRef>
+          <a:fillRef idx="1">
+            <a:schemeClr val="accent1"/>
+          </a:fillRef>
+          <a:effectRef idx="0">
+            <a:schemeClr val="accent1"/>
+          </a:effectRef>
+          <a:fontRef idx="minor">
+            <a:schemeClr val="lt1"/>
+          </a:fontRef>
+        </p:style>
+      </p:cxnSp>
+      <mc:AlternateContent xmlns:mc="http://schemas.openxmlformats.org/markup-compatibility/2006" xmlns:a14="http://schemas.microsoft.com/office/drawing/2010/main">
+        <mc:Choice Requires="a14">
+          <p:sp>
+            <p:nvSpPr>
+              <p:cNvPr id="90" name="ZoneTexte 89">
+                <a:extLst>
+                  <a:ext uri="{FF2B5EF4-FFF2-40B4-BE49-F238E27FC236}">
+                    <a16:creationId xmlns:a16="http://schemas.microsoft.com/office/drawing/2014/main" id="{070A35F7-88F5-06D8-9835-005BD408611E}"/>
+                  </a:ext>
+                </a:extLst>
+              </p:cNvPr>
+              <p:cNvSpPr txBox="1"/>
+              <p:nvPr/>
+            </p:nvSpPr>
+            <p:spPr>
+              <a:xfrm>
+                <a:off x="4240060" y="2446811"/>
+                <a:ext cx="337015" cy="184666"/>
+              </a:xfrm>
+              <a:prstGeom prst="rect">
+                <a:avLst/>
+              </a:prstGeom>
+              <a:noFill/>
+            </p:spPr>
+            <p:txBody>
+              <a:bodyPr wrap="none" lIns="0" tIns="0" rIns="0" bIns="0" rtlCol="0">
+                <a:spAutoFit/>
+              </a:bodyPr>
+              <a:lstStyle/>
+              <a:p>
+                <a:pPr/>
+                <a14:m>
+                  <m:oMathPara xmlns:m="http://schemas.openxmlformats.org/officeDocument/2006/math">
+                    <m:oMathParaPr>
+                      <m:jc m:val="centerGroup"/>
+                    </m:oMathParaPr>
+                    <m:oMath xmlns:m="http://schemas.openxmlformats.org/officeDocument/2006/math">
+                      <m:r>
+                        <a:rPr lang="fr-FR" sz="1200" b="0" i="1" smtClean="0">
+                          <a:latin typeface="Cambria Math" panose="02040503050406030204" pitchFamily="18" charset="0"/>
+                        </a:rPr>
+                        <m:t>𝑈</m:t>
+                      </m:r>
+                      <m:r>
+                        <a:rPr lang="fr-FR" sz="1200" b="0" i="1" smtClean="0">
+                          <a:latin typeface="Cambria Math" panose="02040503050406030204" pitchFamily="18" charset="0"/>
+                        </a:rPr>
+                        <m:t>(</m:t>
+                      </m:r>
+                      <m:r>
+                        <a:rPr lang="fr-FR" sz="1200" b="0" i="1" smtClean="0">
+                          <a:latin typeface="Cambria Math" panose="02040503050406030204" pitchFamily="18" charset="0"/>
+                        </a:rPr>
+                        <m:t>𝑡</m:t>
+                      </m:r>
+                      <m:r>
+                        <a:rPr lang="fr-FR" sz="1200" b="0" i="1" smtClean="0">
+                          <a:latin typeface="Cambria Math" panose="02040503050406030204" pitchFamily="18" charset="0"/>
+                        </a:rPr>
+                        <m:t>)</m:t>
+                      </m:r>
+                    </m:oMath>
+                  </m:oMathPara>
+                </a14:m>
+                <a:endParaRPr lang="fr-FR" sz="1200" dirty="0"/>
+              </a:p>
+            </p:txBody>
+          </p:sp>
+        </mc:Choice>
+        <mc:Fallback xmlns="">
+          <p:sp>
+            <p:nvSpPr>
+              <p:cNvPr id="90" name="ZoneTexte 89">
+                <a:extLst>
+                  <a:ext uri="{FF2B5EF4-FFF2-40B4-BE49-F238E27FC236}">
+                    <a16:creationId xmlns:a16="http://schemas.microsoft.com/office/drawing/2014/main" id="{0C90C338-CE52-358F-304F-EEB606A31432}"/>
+                  </a:ext>
+                </a:extLst>
+              </p:cNvPr>
+              <p:cNvSpPr txBox="1">
+                <a:spLocks noRot="1" noChangeAspect="1" noMove="1" noResize="1" noEditPoints="1" noAdjustHandles="1" noChangeArrowheads="1" noChangeShapeType="1" noTextEdit="1"/>
+              </p:cNvSpPr>
+              <p:nvPr/>
+            </p:nvSpPr>
+            <p:spPr>
+              <a:xfrm>
+                <a:off x="4240060" y="2446811"/>
+                <a:ext cx="337015" cy="184666"/>
+              </a:xfrm>
+              <a:prstGeom prst="rect">
+                <a:avLst/>
+              </a:prstGeom>
+              <a:blipFill>
+                <a:blip r:embed="rId3"/>
+                <a:stretch>
+                  <a:fillRect l="-10909" t="-3226" r="-16364" b="-35484"/>
+                </a:stretch>
+              </a:blipFill>
+            </p:spPr>
+            <p:txBody>
+              <a:bodyPr/>
+              <a:lstStyle/>
+              <a:p>
+                <a:r>
+                  <a:rPr lang="fr-FR">
+                    <a:noFill/>
+                  </a:rPr>
+                  <a:t> </a:t>
+                </a:r>
+              </a:p>
+            </p:txBody>
+          </p:sp>
+        </mc:Fallback>
+      </mc:AlternateContent>
+      <p:cxnSp>
+        <p:nvCxnSpPr>
+          <p:cNvPr id="91" name="Connecteur droit 90">
+            <a:extLst>
+              <a:ext uri="{FF2B5EF4-FFF2-40B4-BE49-F238E27FC236}">
+                <a16:creationId xmlns:a16="http://schemas.microsoft.com/office/drawing/2014/main" id="{2558518D-47BF-38F8-10AC-5BA59384D405}"/>
+              </a:ext>
+            </a:extLst>
+          </p:cNvPr>
+          <p:cNvCxnSpPr>
+            <a:cxnSpLocks/>
+          </p:cNvCxnSpPr>
+          <p:nvPr/>
+        </p:nvCxnSpPr>
+        <p:spPr>
+          <a:xfrm flipV="1">
+            <a:off x="3382261" y="3235984"/>
+            <a:ext cx="0" cy="337016"/>
+          </a:xfrm>
+          <a:prstGeom prst="line">
+            <a:avLst/>
+          </a:prstGeom>
+          <a:solidFill>
+            <a:schemeClr val="accent5">
+              <a:lumMod val="20000"/>
+              <a:lumOff val="80000"/>
+            </a:schemeClr>
+          </a:solidFill>
+          <a:ln w="19050">
+            <a:solidFill>
+              <a:srgbClr val="002060"/>
+            </a:solidFill>
+            <a:tailEnd type="stealth" w="med" len="lg"/>
+          </a:ln>
+        </p:spPr>
+        <p:style>
+          <a:lnRef idx="2">
+            <a:schemeClr val="accent1">
+              <a:shade val="15000"/>
+            </a:schemeClr>
+          </a:lnRef>
+          <a:fillRef idx="1">
+            <a:schemeClr val="accent1"/>
+          </a:fillRef>
+          <a:effectRef idx="0">
+            <a:schemeClr val="accent1"/>
+          </a:effectRef>
+          <a:fontRef idx="minor">
+            <a:schemeClr val="lt1"/>
+          </a:fontRef>
+        </p:style>
+      </p:cxnSp>
+      <mc:AlternateContent xmlns:mc="http://schemas.openxmlformats.org/markup-compatibility/2006" xmlns:a14="http://schemas.microsoft.com/office/drawing/2010/main">
+        <mc:Choice Requires="a14">
+          <p:sp>
+            <p:nvSpPr>
+              <p:cNvPr id="92" name="ZoneTexte 91">
+                <a:extLst>
+                  <a:ext uri="{FF2B5EF4-FFF2-40B4-BE49-F238E27FC236}">
+                    <a16:creationId xmlns:a16="http://schemas.microsoft.com/office/drawing/2014/main" id="{5299F32C-AD04-E393-213F-AC31DF6B0106}"/>
+                  </a:ext>
+                </a:extLst>
+              </p:cNvPr>
+              <p:cNvSpPr txBox="1"/>
+              <p:nvPr/>
+            </p:nvSpPr>
+            <p:spPr>
+              <a:xfrm rot="5400000">
+                <a:off x="3319047" y="3380529"/>
+                <a:ext cx="438773" cy="184666"/>
+              </a:xfrm>
+              <a:prstGeom prst="rect">
+                <a:avLst/>
+              </a:prstGeom>
+              <a:noFill/>
+            </p:spPr>
+            <p:txBody>
+              <a:bodyPr wrap="none" lIns="0" tIns="0" rIns="0" bIns="0" rtlCol="0">
+                <a:spAutoFit/>
+              </a:bodyPr>
+              <a:lstStyle/>
+              <a:p>
+                <a:pPr/>
+                <a14:m>
+                  <m:oMathPara xmlns:m="http://schemas.openxmlformats.org/officeDocument/2006/math">
+                    <m:oMathParaPr>
+                      <m:jc m:val="centerGroup"/>
+                    </m:oMathParaPr>
+                    <m:oMath xmlns:m="http://schemas.openxmlformats.org/officeDocument/2006/math">
+                      <m:sSub>
+                        <m:sSubPr>
+                          <m:ctrlPr>
+                            <a:rPr lang="fr-FR" sz="1200" b="0" i="1" smtClean="0">
+                              <a:latin typeface="Cambria Math" panose="02040503050406030204" pitchFamily="18" charset="0"/>
+                            </a:rPr>
+                          </m:ctrlPr>
+                        </m:sSubPr>
+                        <m:e>
+                          <m:r>
+                            <a:rPr lang="fr-FR" sz="1200" b="0" i="1" smtClean="0">
+                              <a:latin typeface="Cambria Math" panose="02040503050406030204" pitchFamily="18" charset="0"/>
+                            </a:rPr>
+                            <m:t>𝑈</m:t>
+                          </m:r>
+                        </m:e>
+                        <m:sub>
+                          <m:r>
+                            <a:rPr lang="fr-FR" sz="1200" b="0" i="1" smtClean="0">
+                              <a:latin typeface="Cambria Math" panose="02040503050406030204" pitchFamily="18" charset="0"/>
+                            </a:rPr>
+                            <m:t>𝑚</m:t>
+                          </m:r>
+                        </m:sub>
+                      </m:sSub>
+                      <m:r>
+                        <a:rPr lang="fr-FR" sz="1200" b="0" i="1" smtClean="0">
+                          <a:latin typeface="Cambria Math" panose="02040503050406030204" pitchFamily="18" charset="0"/>
+                        </a:rPr>
+                        <m:t>(</m:t>
+                      </m:r>
+                      <m:r>
+                        <a:rPr lang="fr-FR" sz="1200" b="0" i="1" smtClean="0">
+                          <a:latin typeface="Cambria Math" panose="02040503050406030204" pitchFamily="18" charset="0"/>
+                        </a:rPr>
+                        <m:t>𝑡</m:t>
+                      </m:r>
+                      <m:r>
+                        <a:rPr lang="fr-FR" sz="1200" b="0" i="1" smtClean="0">
+                          <a:latin typeface="Cambria Math" panose="02040503050406030204" pitchFamily="18" charset="0"/>
+                        </a:rPr>
+                        <m:t>)</m:t>
+                      </m:r>
+                    </m:oMath>
+                  </m:oMathPara>
+                </a14:m>
+                <a:endParaRPr lang="fr-FR" sz="1200" dirty="0"/>
+              </a:p>
+            </p:txBody>
+          </p:sp>
+        </mc:Choice>
+        <mc:Fallback xmlns="">
+          <p:sp>
+            <p:nvSpPr>
+              <p:cNvPr id="92" name="ZoneTexte 91">
+                <a:extLst>
+                  <a:ext uri="{FF2B5EF4-FFF2-40B4-BE49-F238E27FC236}">
+                    <a16:creationId xmlns:a16="http://schemas.microsoft.com/office/drawing/2014/main" id="{B5952BBA-1C13-9DCE-1CC0-3FD4CE152F1D}"/>
+                  </a:ext>
+                </a:extLst>
+              </p:cNvPr>
+              <p:cNvSpPr txBox="1">
+                <a:spLocks noRot="1" noChangeAspect="1" noMove="1" noResize="1" noEditPoints="1" noAdjustHandles="1" noChangeArrowheads="1" noChangeShapeType="1" noTextEdit="1"/>
+              </p:cNvSpPr>
+              <p:nvPr/>
+            </p:nvSpPr>
+            <p:spPr>
+              <a:xfrm rot="5400000">
+                <a:off x="3319047" y="3380529"/>
+                <a:ext cx="438773" cy="184666"/>
+              </a:xfrm>
+              <a:prstGeom prst="rect">
+                <a:avLst/>
+              </a:prstGeom>
+              <a:blipFill>
+                <a:blip r:embed="rId4"/>
+                <a:stretch>
+                  <a:fillRect l="-35484" t="-8333" r="-3226" b="-11111"/>
+                </a:stretch>
+              </a:blipFill>
+            </p:spPr>
+            <p:txBody>
+              <a:bodyPr/>
+              <a:lstStyle/>
+              <a:p>
+                <a:r>
+                  <a:rPr lang="fr-FR">
+                    <a:noFill/>
+                  </a:rPr>
+                  <a:t> </a:t>
+                </a:r>
+              </a:p>
+            </p:txBody>
+          </p:sp>
+        </mc:Fallback>
+      </mc:AlternateContent>
+      <p:grpSp>
+        <p:nvGrpSpPr>
+          <p:cNvPr id="93" name="Groupe 92">
+            <a:extLst>
+              <a:ext uri="{FF2B5EF4-FFF2-40B4-BE49-F238E27FC236}">
+                <a16:creationId xmlns:a16="http://schemas.microsoft.com/office/drawing/2014/main" id="{3ACFF004-DBCC-3B5E-3CC5-EE03B952095A}"/>
+              </a:ext>
+            </a:extLst>
+          </p:cNvPr>
+          <p:cNvGrpSpPr/>
+          <p:nvPr/>
+        </p:nvGrpSpPr>
+        <p:grpSpPr>
+          <a:xfrm>
+            <a:off x="4658421" y="3605731"/>
+            <a:ext cx="3606451" cy="979714"/>
+            <a:chOff x="326571" y="1730829"/>
+            <a:chExt cx="3606451" cy="979714"/>
+          </a:xfrm>
+        </p:grpSpPr>
+        <p:cxnSp>
+          <p:nvCxnSpPr>
+            <p:cNvPr id="94" name="Connecteur droit avec flèche 93">
+              <a:extLst>
+                <a:ext uri="{FF2B5EF4-FFF2-40B4-BE49-F238E27FC236}">
+                  <a16:creationId xmlns:a16="http://schemas.microsoft.com/office/drawing/2014/main" id="{AB5C83B5-DA6B-DE4E-693E-C15E8C6CC83E}"/>
+                </a:ext>
+              </a:extLst>
+            </p:cNvPr>
+            <p:cNvCxnSpPr/>
+            <p:nvPr/>
+          </p:nvCxnSpPr>
+          <p:spPr>
+            <a:xfrm flipV="1">
+              <a:off x="326571" y="1730829"/>
+              <a:ext cx="0" cy="979714"/>
+            </a:xfrm>
+            <a:prstGeom prst="straightConnector1">
+              <a:avLst/>
+            </a:prstGeom>
+            <a:ln w="28575">
+              <a:solidFill>
+                <a:srgbClr val="00547F"/>
+              </a:solidFill>
+              <a:headEnd type="none"/>
+              <a:tailEnd type="stealth" w="med" len="lg"/>
+            </a:ln>
+          </p:spPr>
+          <p:style>
+            <a:lnRef idx="1">
+              <a:schemeClr val="accent1"/>
+            </a:lnRef>
+            <a:fillRef idx="0">
+              <a:schemeClr val="accent1"/>
+            </a:fillRef>
+            <a:effectRef idx="0">
+              <a:schemeClr val="accent1"/>
+            </a:effectRef>
+            <a:fontRef idx="minor">
+              <a:schemeClr val="tx1"/>
+            </a:fontRef>
+          </p:style>
+        </p:cxnSp>
+        <p:cxnSp>
+          <p:nvCxnSpPr>
+            <p:cNvPr id="95" name="Connecteur droit avec flèche 94">
+              <a:extLst>
+                <a:ext uri="{FF2B5EF4-FFF2-40B4-BE49-F238E27FC236}">
+                  <a16:creationId xmlns:a16="http://schemas.microsoft.com/office/drawing/2014/main" id="{76F3D9C0-94A5-32CE-3792-B64EE10D7C47}"/>
+                </a:ext>
+              </a:extLst>
+            </p:cNvPr>
+            <p:cNvCxnSpPr>
+              <a:cxnSpLocks/>
+            </p:cNvCxnSpPr>
+            <p:nvPr/>
+          </p:nvCxnSpPr>
+          <p:spPr>
+            <a:xfrm>
+              <a:off x="326571" y="2710543"/>
+              <a:ext cx="3606451" cy="0"/>
+            </a:xfrm>
+            <a:prstGeom prst="straightConnector1">
+              <a:avLst/>
+            </a:prstGeom>
+            <a:ln w="28575">
+              <a:solidFill>
+                <a:srgbClr val="00547F"/>
+              </a:solidFill>
+              <a:headEnd type="none"/>
+              <a:tailEnd type="stealth" w="med" len="lg"/>
+            </a:ln>
+          </p:spPr>
+          <p:style>
+            <a:lnRef idx="1">
+              <a:schemeClr val="accent1"/>
+            </a:lnRef>
+            <a:fillRef idx="0">
+              <a:schemeClr val="accent1"/>
+            </a:fillRef>
+            <a:effectRef idx="0">
+              <a:schemeClr val="accent1"/>
+            </a:effectRef>
+            <a:fontRef idx="minor">
+              <a:schemeClr val="tx1"/>
+            </a:fontRef>
+          </p:style>
+        </p:cxnSp>
+      </p:grpSp>
+      <mc:AlternateContent xmlns:mc="http://schemas.openxmlformats.org/markup-compatibility/2006" xmlns:a14="http://schemas.microsoft.com/office/drawing/2010/main">
+        <mc:Choice Requires="a14">
+          <p:sp>
+            <p:nvSpPr>
+              <p:cNvPr id="97" name="ZoneTexte 96">
+                <a:extLst>
+                  <a:ext uri="{FF2B5EF4-FFF2-40B4-BE49-F238E27FC236}">
+                    <a16:creationId xmlns:a16="http://schemas.microsoft.com/office/drawing/2014/main" id="{58A28D13-0A85-6916-F035-6B4FF23E1C26}"/>
+                  </a:ext>
+                </a:extLst>
+              </p:cNvPr>
+              <p:cNvSpPr txBox="1"/>
+              <p:nvPr/>
+            </p:nvSpPr>
+            <p:spPr>
+              <a:xfrm>
+                <a:off x="4199420" y="3605731"/>
+                <a:ext cx="438773" cy="184666"/>
+              </a:xfrm>
+              <a:prstGeom prst="rect">
+                <a:avLst/>
+              </a:prstGeom>
+              <a:noFill/>
+            </p:spPr>
+            <p:txBody>
+              <a:bodyPr wrap="none" lIns="0" tIns="0" rIns="0" bIns="0" rtlCol="0">
+                <a:spAutoFit/>
+              </a:bodyPr>
+              <a:lstStyle/>
+              <a:p>
+                <a:pPr/>
+                <a14:m>
+                  <m:oMathPara xmlns:m="http://schemas.openxmlformats.org/officeDocument/2006/math">
+                    <m:oMathParaPr>
+                      <m:jc m:val="centerGroup"/>
+                    </m:oMathParaPr>
+                    <m:oMath xmlns:m="http://schemas.openxmlformats.org/officeDocument/2006/math">
+                      <m:sSub>
+                        <m:sSubPr>
+                          <m:ctrlPr>
+                            <a:rPr lang="fr-FR" sz="1200" b="0" i="1" smtClean="0">
+                              <a:latin typeface="Cambria Math" panose="02040503050406030204" pitchFamily="18" charset="0"/>
+                            </a:rPr>
+                          </m:ctrlPr>
+                        </m:sSubPr>
+                        <m:e>
+                          <m:r>
+                            <a:rPr lang="fr-FR" sz="1200" b="0" i="1" smtClean="0">
+                              <a:latin typeface="Cambria Math" panose="02040503050406030204" pitchFamily="18" charset="0"/>
+                            </a:rPr>
+                            <m:t>𝑈</m:t>
+                          </m:r>
+                        </m:e>
+                        <m:sub>
+                          <m:r>
+                            <a:rPr lang="fr-FR" sz="1200" b="0" i="1" smtClean="0">
+                              <a:latin typeface="Cambria Math" panose="02040503050406030204" pitchFamily="18" charset="0"/>
+                            </a:rPr>
+                            <m:t>𝑚</m:t>
+                          </m:r>
+                        </m:sub>
+                      </m:sSub>
+                      <m:r>
+                        <a:rPr lang="fr-FR" sz="1200" b="0" i="1" smtClean="0">
+                          <a:latin typeface="Cambria Math" panose="02040503050406030204" pitchFamily="18" charset="0"/>
+                        </a:rPr>
+                        <m:t>(</m:t>
+                      </m:r>
+                      <m:r>
+                        <a:rPr lang="fr-FR" sz="1200" b="0" i="1" smtClean="0">
+                          <a:latin typeface="Cambria Math" panose="02040503050406030204" pitchFamily="18" charset="0"/>
+                        </a:rPr>
+                        <m:t>𝑡</m:t>
+                      </m:r>
+                      <m:r>
+                        <a:rPr lang="fr-FR" sz="1200" b="0" i="1" smtClean="0">
+                          <a:latin typeface="Cambria Math" panose="02040503050406030204" pitchFamily="18" charset="0"/>
+                        </a:rPr>
+                        <m:t>)</m:t>
+                      </m:r>
+                    </m:oMath>
+                  </m:oMathPara>
+                </a14:m>
+                <a:endParaRPr lang="fr-FR" sz="1200" dirty="0"/>
+              </a:p>
+            </p:txBody>
+          </p:sp>
+        </mc:Choice>
+        <mc:Fallback xmlns="">
+          <p:sp>
+            <p:nvSpPr>
+              <p:cNvPr id="97" name="ZoneTexte 96">
+                <a:extLst>
+                  <a:ext uri="{FF2B5EF4-FFF2-40B4-BE49-F238E27FC236}">
+                    <a16:creationId xmlns:a16="http://schemas.microsoft.com/office/drawing/2014/main" id="{0AA7459E-B685-E185-3F58-A36EFF6780F3}"/>
+                  </a:ext>
+                </a:extLst>
+              </p:cNvPr>
+              <p:cNvSpPr txBox="1">
+                <a:spLocks noRot="1" noChangeAspect="1" noMove="1" noResize="1" noEditPoints="1" noAdjustHandles="1" noChangeArrowheads="1" noChangeShapeType="1" noTextEdit="1"/>
+              </p:cNvSpPr>
+              <p:nvPr/>
+            </p:nvSpPr>
+            <p:spPr>
+              <a:xfrm>
+                <a:off x="4199420" y="3605731"/>
+                <a:ext cx="438773" cy="184666"/>
+              </a:xfrm>
+              <a:prstGeom prst="rect">
+                <a:avLst/>
+              </a:prstGeom>
+              <a:blipFill>
+                <a:blip r:embed="rId5"/>
+                <a:stretch>
+                  <a:fillRect l="-8333" t="-3226" r="-11111" b="-35484"/>
+                </a:stretch>
+              </a:blipFill>
+            </p:spPr>
+            <p:txBody>
+              <a:bodyPr/>
+              <a:lstStyle/>
+              <a:p>
+                <a:r>
+                  <a:rPr lang="fr-FR">
+                    <a:noFill/>
+                  </a:rPr>
+                  <a:t> </a:t>
+                </a:r>
+              </a:p>
+            </p:txBody>
+          </p:sp>
+        </mc:Fallback>
+      </mc:AlternateContent>
+      <p:grpSp>
+        <p:nvGrpSpPr>
+          <p:cNvPr id="103" name="Groupe 102">
+            <a:extLst>
+              <a:ext uri="{FF2B5EF4-FFF2-40B4-BE49-F238E27FC236}">
+                <a16:creationId xmlns:a16="http://schemas.microsoft.com/office/drawing/2014/main" id="{06ECA6F0-0AB7-7016-4C7B-6B8FEF7F9A6B}"/>
+              </a:ext>
+            </a:extLst>
+          </p:cNvPr>
+          <p:cNvGrpSpPr/>
+          <p:nvPr/>
+        </p:nvGrpSpPr>
+        <p:grpSpPr>
+          <a:xfrm>
+            <a:off x="4658421" y="3869971"/>
+            <a:ext cx="648000" cy="715474"/>
+            <a:chOff x="4658421" y="3869971"/>
+            <a:chExt cx="648000" cy="715474"/>
+          </a:xfrm>
+        </p:grpSpPr>
+        <p:cxnSp>
+          <p:nvCxnSpPr>
+            <p:cNvPr id="96" name="Connecteur droit avec flèche 95">
+              <a:extLst>
+                <a:ext uri="{FF2B5EF4-FFF2-40B4-BE49-F238E27FC236}">
+                  <a16:creationId xmlns:a16="http://schemas.microsoft.com/office/drawing/2014/main" id="{D26FC100-D37A-8EE5-A1A0-1C43AA9E96DE}"/>
+                </a:ext>
+              </a:extLst>
+            </p:cNvPr>
+            <p:cNvCxnSpPr>
+              <a:cxnSpLocks/>
+            </p:cNvCxnSpPr>
+            <p:nvPr/>
+          </p:nvCxnSpPr>
+          <p:spPr>
+            <a:xfrm>
+              <a:off x="4658421" y="3869971"/>
+              <a:ext cx="432000" cy="0"/>
+            </a:xfrm>
+            <a:prstGeom prst="straightConnector1">
+              <a:avLst/>
+            </a:prstGeom>
+            <a:ln w="28575">
+              <a:solidFill>
+                <a:srgbClr val="C00000"/>
+              </a:solidFill>
+              <a:headEnd type="none"/>
+              <a:tailEnd type="none" w="med" len="lg"/>
+            </a:ln>
+          </p:spPr>
+          <p:style>
+            <a:lnRef idx="1">
+              <a:schemeClr val="accent1"/>
+            </a:lnRef>
+            <a:fillRef idx="0">
+              <a:schemeClr val="accent1"/>
+            </a:fillRef>
+            <a:effectRef idx="0">
+              <a:schemeClr val="accent1"/>
+            </a:effectRef>
+            <a:fontRef idx="minor">
+              <a:schemeClr val="tx1"/>
+            </a:fontRef>
+          </p:style>
+        </p:cxnSp>
+        <p:cxnSp>
+          <p:nvCxnSpPr>
+            <p:cNvPr id="99" name="Connecteur droit avec flèche 98">
+              <a:extLst>
+                <a:ext uri="{FF2B5EF4-FFF2-40B4-BE49-F238E27FC236}">
+                  <a16:creationId xmlns:a16="http://schemas.microsoft.com/office/drawing/2014/main" id="{58976E1F-BECA-491E-8417-9383EB67E7A5}"/>
+                </a:ext>
+              </a:extLst>
+            </p:cNvPr>
+            <p:cNvCxnSpPr>
+              <a:cxnSpLocks/>
+            </p:cNvCxnSpPr>
+            <p:nvPr/>
+          </p:nvCxnSpPr>
+          <p:spPr>
+            <a:xfrm>
+              <a:off x="5090421" y="3869971"/>
+              <a:ext cx="0" cy="715474"/>
+            </a:xfrm>
+            <a:prstGeom prst="straightConnector1">
+              <a:avLst/>
+            </a:prstGeom>
+            <a:ln w="28575">
+              <a:solidFill>
+                <a:srgbClr val="C00000"/>
+              </a:solidFill>
+              <a:headEnd type="none"/>
+              <a:tailEnd type="none" w="med" len="lg"/>
+            </a:ln>
+          </p:spPr>
+          <p:style>
+            <a:lnRef idx="1">
+              <a:schemeClr val="accent1"/>
+            </a:lnRef>
+            <a:fillRef idx="0">
+              <a:schemeClr val="accent1"/>
+            </a:fillRef>
+            <a:effectRef idx="0">
+              <a:schemeClr val="accent1"/>
+            </a:effectRef>
+            <a:fontRef idx="minor">
+              <a:schemeClr val="tx1"/>
+            </a:fontRef>
+          </p:style>
+        </p:cxnSp>
+        <p:cxnSp>
+          <p:nvCxnSpPr>
+            <p:cNvPr id="101" name="Connecteur droit avec flèche 100">
+              <a:extLst>
+                <a:ext uri="{FF2B5EF4-FFF2-40B4-BE49-F238E27FC236}">
+                  <a16:creationId xmlns:a16="http://schemas.microsoft.com/office/drawing/2014/main" id="{099BEFA7-7A2B-56A8-4A1E-9DD9EFA48E9A}"/>
+                </a:ext>
+              </a:extLst>
+            </p:cNvPr>
+            <p:cNvCxnSpPr>
+              <a:cxnSpLocks/>
+            </p:cNvCxnSpPr>
+            <p:nvPr/>
+          </p:nvCxnSpPr>
+          <p:spPr>
+            <a:xfrm>
+              <a:off x="5090421" y="4585445"/>
+              <a:ext cx="216000" cy="0"/>
+            </a:xfrm>
+            <a:prstGeom prst="straightConnector1">
+              <a:avLst/>
+            </a:prstGeom>
+            <a:ln w="28575">
+              <a:solidFill>
+                <a:srgbClr val="C00000"/>
+              </a:solidFill>
+              <a:headEnd type="none"/>
+              <a:tailEnd type="none" w="med" len="lg"/>
+            </a:ln>
+          </p:spPr>
+          <p:style>
+            <a:lnRef idx="1">
+              <a:schemeClr val="accent1"/>
+            </a:lnRef>
+            <a:fillRef idx="0">
+              <a:schemeClr val="accent1"/>
+            </a:fillRef>
+            <a:effectRef idx="0">
+              <a:schemeClr val="accent1"/>
+            </a:effectRef>
+            <a:fontRef idx="minor">
+              <a:schemeClr val="tx1"/>
+            </a:fontRef>
+          </p:style>
+        </p:cxnSp>
+        <p:cxnSp>
+          <p:nvCxnSpPr>
+            <p:cNvPr id="102" name="Connecteur droit avec flèche 101">
+              <a:extLst>
+                <a:ext uri="{FF2B5EF4-FFF2-40B4-BE49-F238E27FC236}">
+                  <a16:creationId xmlns:a16="http://schemas.microsoft.com/office/drawing/2014/main" id="{B368370E-2306-99AC-8F40-B312ACB4B2E4}"/>
+                </a:ext>
+              </a:extLst>
+            </p:cNvPr>
+            <p:cNvCxnSpPr>
+              <a:cxnSpLocks/>
+            </p:cNvCxnSpPr>
+            <p:nvPr/>
+          </p:nvCxnSpPr>
+          <p:spPr>
+            <a:xfrm>
+              <a:off x="5306421" y="3869971"/>
+              <a:ext cx="0" cy="715474"/>
+            </a:xfrm>
+            <a:prstGeom prst="straightConnector1">
+              <a:avLst/>
+            </a:prstGeom>
+            <a:ln w="28575">
+              <a:solidFill>
+                <a:srgbClr val="C00000"/>
+              </a:solidFill>
+              <a:headEnd type="none"/>
+              <a:tailEnd type="none" w="med" len="lg"/>
+            </a:ln>
+          </p:spPr>
+          <p:style>
+            <a:lnRef idx="1">
+              <a:schemeClr val="accent1"/>
+            </a:lnRef>
+            <a:fillRef idx="0">
+              <a:schemeClr val="accent1"/>
+            </a:fillRef>
+            <a:effectRef idx="0">
+              <a:schemeClr val="accent1"/>
+            </a:effectRef>
+            <a:fontRef idx="minor">
+              <a:schemeClr val="tx1"/>
+            </a:fontRef>
+          </p:style>
+        </p:cxnSp>
+      </p:grpSp>
+      <p:grpSp>
+        <p:nvGrpSpPr>
+          <p:cNvPr id="104" name="Groupe 103">
+            <a:extLst>
+              <a:ext uri="{FF2B5EF4-FFF2-40B4-BE49-F238E27FC236}">
+                <a16:creationId xmlns:a16="http://schemas.microsoft.com/office/drawing/2014/main" id="{0BF585E9-6F08-F060-EB6A-AFA9FE35E3B3}"/>
+              </a:ext>
+            </a:extLst>
+          </p:cNvPr>
+          <p:cNvGrpSpPr/>
+          <p:nvPr/>
+        </p:nvGrpSpPr>
+        <p:grpSpPr>
+          <a:xfrm>
+            <a:off x="5303810" y="3869971"/>
+            <a:ext cx="648000" cy="715474"/>
+            <a:chOff x="4658421" y="3869971"/>
+            <a:chExt cx="648000" cy="715474"/>
+          </a:xfrm>
+        </p:grpSpPr>
+        <p:cxnSp>
+          <p:nvCxnSpPr>
+            <p:cNvPr id="105" name="Connecteur droit avec flèche 104">
+              <a:extLst>
+                <a:ext uri="{FF2B5EF4-FFF2-40B4-BE49-F238E27FC236}">
+                  <a16:creationId xmlns:a16="http://schemas.microsoft.com/office/drawing/2014/main" id="{20C86065-18EE-CD98-D9F9-CD3811EB9413}"/>
+                </a:ext>
+              </a:extLst>
+            </p:cNvPr>
+            <p:cNvCxnSpPr>
+              <a:cxnSpLocks/>
+            </p:cNvCxnSpPr>
+            <p:nvPr/>
+          </p:nvCxnSpPr>
+          <p:spPr>
+            <a:xfrm>
+              <a:off x="4658421" y="3869971"/>
+              <a:ext cx="432000" cy="0"/>
+            </a:xfrm>
+            <a:prstGeom prst="straightConnector1">
+              <a:avLst/>
+            </a:prstGeom>
+            <a:ln w="28575">
+              <a:solidFill>
+                <a:srgbClr val="C00000"/>
+              </a:solidFill>
+              <a:headEnd type="none"/>
+              <a:tailEnd type="none" w="med" len="lg"/>
+            </a:ln>
+          </p:spPr>
+          <p:style>
+            <a:lnRef idx="1">
+              <a:schemeClr val="accent1"/>
+            </a:lnRef>
+            <a:fillRef idx="0">
+              <a:schemeClr val="accent1"/>
+            </a:fillRef>
+            <a:effectRef idx="0">
+              <a:schemeClr val="accent1"/>
+            </a:effectRef>
+            <a:fontRef idx="minor">
+              <a:schemeClr val="tx1"/>
+            </a:fontRef>
+          </p:style>
+        </p:cxnSp>
+        <p:cxnSp>
+          <p:nvCxnSpPr>
+            <p:cNvPr id="106" name="Connecteur droit avec flèche 105">
+              <a:extLst>
+                <a:ext uri="{FF2B5EF4-FFF2-40B4-BE49-F238E27FC236}">
+                  <a16:creationId xmlns:a16="http://schemas.microsoft.com/office/drawing/2014/main" id="{5EA4AA53-CBB9-9E06-1D4B-4BB44B682C12}"/>
+                </a:ext>
+              </a:extLst>
+            </p:cNvPr>
+            <p:cNvCxnSpPr>
+              <a:cxnSpLocks/>
+            </p:cNvCxnSpPr>
+            <p:nvPr/>
+          </p:nvCxnSpPr>
+          <p:spPr>
+            <a:xfrm>
+              <a:off x="5090421" y="3869971"/>
+              <a:ext cx="0" cy="715474"/>
+            </a:xfrm>
+            <a:prstGeom prst="straightConnector1">
+              <a:avLst/>
+            </a:prstGeom>
+            <a:ln w="28575">
+              <a:solidFill>
+                <a:srgbClr val="C00000"/>
+              </a:solidFill>
+              <a:headEnd type="none"/>
+              <a:tailEnd type="none" w="med" len="lg"/>
+            </a:ln>
+          </p:spPr>
+          <p:style>
+            <a:lnRef idx="1">
+              <a:schemeClr val="accent1"/>
+            </a:lnRef>
+            <a:fillRef idx="0">
+              <a:schemeClr val="accent1"/>
+            </a:fillRef>
+            <a:effectRef idx="0">
+              <a:schemeClr val="accent1"/>
+            </a:effectRef>
+            <a:fontRef idx="minor">
+              <a:schemeClr val="tx1"/>
+            </a:fontRef>
+          </p:style>
+        </p:cxnSp>
+        <p:cxnSp>
+          <p:nvCxnSpPr>
+            <p:cNvPr id="107" name="Connecteur droit avec flèche 106">
+              <a:extLst>
+                <a:ext uri="{FF2B5EF4-FFF2-40B4-BE49-F238E27FC236}">
+                  <a16:creationId xmlns:a16="http://schemas.microsoft.com/office/drawing/2014/main" id="{BB6EF291-F81B-93A7-3E13-CBEDF8378F22}"/>
+                </a:ext>
+              </a:extLst>
+            </p:cNvPr>
+            <p:cNvCxnSpPr>
+              <a:cxnSpLocks/>
+            </p:cNvCxnSpPr>
+            <p:nvPr/>
+          </p:nvCxnSpPr>
+          <p:spPr>
+            <a:xfrm>
+              <a:off x="5090421" y="4585445"/>
+              <a:ext cx="216000" cy="0"/>
+            </a:xfrm>
+            <a:prstGeom prst="straightConnector1">
+              <a:avLst/>
+            </a:prstGeom>
+            <a:ln w="28575">
+              <a:solidFill>
+                <a:srgbClr val="C00000"/>
+              </a:solidFill>
+              <a:headEnd type="none"/>
+              <a:tailEnd type="none" w="med" len="lg"/>
+            </a:ln>
+          </p:spPr>
+          <p:style>
+            <a:lnRef idx="1">
+              <a:schemeClr val="accent1"/>
+            </a:lnRef>
+            <a:fillRef idx="0">
+              <a:schemeClr val="accent1"/>
+            </a:fillRef>
+            <a:effectRef idx="0">
+              <a:schemeClr val="accent1"/>
+            </a:effectRef>
+            <a:fontRef idx="minor">
+              <a:schemeClr val="tx1"/>
+            </a:fontRef>
+          </p:style>
+        </p:cxnSp>
+        <p:cxnSp>
+          <p:nvCxnSpPr>
+            <p:cNvPr id="108" name="Connecteur droit avec flèche 107">
+              <a:extLst>
+                <a:ext uri="{FF2B5EF4-FFF2-40B4-BE49-F238E27FC236}">
+                  <a16:creationId xmlns:a16="http://schemas.microsoft.com/office/drawing/2014/main" id="{D08EE39A-A92E-712F-1D87-B98D7C9BDE82}"/>
+                </a:ext>
+              </a:extLst>
+            </p:cNvPr>
+            <p:cNvCxnSpPr>
+              <a:cxnSpLocks/>
+            </p:cNvCxnSpPr>
+            <p:nvPr/>
+          </p:nvCxnSpPr>
+          <p:spPr>
+            <a:xfrm>
+              <a:off x="5306421" y="3869971"/>
+              <a:ext cx="0" cy="715474"/>
+            </a:xfrm>
+            <a:prstGeom prst="straightConnector1">
+              <a:avLst/>
+            </a:prstGeom>
+            <a:ln w="28575">
+              <a:solidFill>
+                <a:srgbClr val="C00000"/>
+              </a:solidFill>
+              <a:headEnd type="none"/>
+              <a:tailEnd type="none" w="med" len="lg"/>
+            </a:ln>
+          </p:spPr>
+          <p:style>
+            <a:lnRef idx="1">
+              <a:schemeClr val="accent1"/>
+            </a:lnRef>
+            <a:fillRef idx="0">
+              <a:schemeClr val="accent1"/>
+            </a:fillRef>
+            <a:effectRef idx="0">
+              <a:schemeClr val="accent1"/>
+            </a:effectRef>
+            <a:fontRef idx="minor">
+              <a:schemeClr val="tx1"/>
+            </a:fontRef>
+          </p:style>
+        </p:cxnSp>
+      </p:grpSp>
+      <p:grpSp>
+        <p:nvGrpSpPr>
+          <p:cNvPr id="109" name="Groupe 108">
+            <a:extLst>
+              <a:ext uri="{FF2B5EF4-FFF2-40B4-BE49-F238E27FC236}">
+                <a16:creationId xmlns:a16="http://schemas.microsoft.com/office/drawing/2014/main" id="{61C75FBB-0579-84D4-D12C-1AD647E854A8}"/>
+              </a:ext>
+            </a:extLst>
+          </p:cNvPr>
+          <p:cNvGrpSpPr/>
+          <p:nvPr/>
+        </p:nvGrpSpPr>
+        <p:grpSpPr>
+          <a:xfrm>
+            <a:off x="5949199" y="3869971"/>
+            <a:ext cx="648000" cy="715474"/>
+            <a:chOff x="4658421" y="3869971"/>
+            <a:chExt cx="648000" cy="715474"/>
+          </a:xfrm>
+        </p:grpSpPr>
+        <p:cxnSp>
+          <p:nvCxnSpPr>
+            <p:cNvPr id="110" name="Connecteur droit avec flèche 109">
+              <a:extLst>
+                <a:ext uri="{FF2B5EF4-FFF2-40B4-BE49-F238E27FC236}">
+                  <a16:creationId xmlns:a16="http://schemas.microsoft.com/office/drawing/2014/main" id="{72ECE109-B459-EB6A-A839-8896D1F2F882}"/>
+                </a:ext>
+              </a:extLst>
+            </p:cNvPr>
+            <p:cNvCxnSpPr>
+              <a:cxnSpLocks/>
+            </p:cNvCxnSpPr>
+            <p:nvPr/>
+          </p:nvCxnSpPr>
+          <p:spPr>
+            <a:xfrm>
+              <a:off x="4658421" y="3869971"/>
+              <a:ext cx="432000" cy="0"/>
+            </a:xfrm>
+            <a:prstGeom prst="straightConnector1">
+              <a:avLst/>
+            </a:prstGeom>
+            <a:ln w="28575">
+              <a:solidFill>
+                <a:srgbClr val="C00000"/>
+              </a:solidFill>
+              <a:headEnd type="none"/>
+              <a:tailEnd type="none" w="med" len="lg"/>
+            </a:ln>
+          </p:spPr>
+          <p:style>
+            <a:lnRef idx="1">
+              <a:schemeClr val="accent1"/>
+            </a:lnRef>
+            <a:fillRef idx="0">
+              <a:schemeClr val="accent1"/>
+            </a:fillRef>
+            <a:effectRef idx="0">
+              <a:schemeClr val="accent1"/>
+            </a:effectRef>
+            <a:fontRef idx="minor">
+              <a:schemeClr val="tx1"/>
+            </a:fontRef>
+          </p:style>
+        </p:cxnSp>
+        <p:cxnSp>
+          <p:nvCxnSpPr>
+            <p:cNvPr id="111" name="Connecteur droit avec flèche 110">
+              <a:extLst>
+                <a:ext uri="{FF2B5EF4-FFF2-40B4-BE49-F238E27FC236}">
+                  <a16:creationId xmlns:a16="http://schemas.microsoft.com/office/drawing/2014/main" id="{F8859AAB-3603-703F-DE41-2516DB9C64C0}"/>
+                </a:ext>
+              </a:extLst>
+            </p:cNvPr>
+            <p:cNvCxnSpPr>
+              <a:cxnSpLocks/>
+            </p:cNvCxnSpPr>
+            <p:nvPr/>
+          </p:nvCxnSpPr>
+          <p:spPr>
+            <a:xfrm>
+              <a:off x="5090421" y="3869971"/>
+              <a:ext cx="0" cy="715474"/>
+            </a:xfrm>
+            <a:prstGeom prst="straightConnector1">
+              <a:avLst/>
+            </a:prstGeom>
+            <a:ln w="28575">
+              <a:solidFill>
+                <a:srgbClr val="C00000"/>
+              </a:solidFill>
+              <a:headEnd type="none"/>
+              <a:tailEnd type="none" w="med" len="lg"/>
+            </a:ln>
+          </p:spPr>
+          <p:style>
+            <a:lnRef idx="1">
+              <a:schemeClr val="accent1"/>
+            </a:lnRef>
+            <a:fillRef idx="0">
+              <a:schemeClr val="accent1"/>
+            </a:fillRef>
+            <a:effectRef idx="0">
+              <a:schemeClr val="accent1"/>
+            </a:effectRef>
+            <a:fontRef idx="minor">
+              <a:schemeClr val="tx1"/>
+            </a:fontRef>
+          </p:style>
+        </p:cxnSp>
+        <p:cxnSp>
+          <p:nvCxnSpPr>
+            <p:cNvPr id="112" name="Connecteur droit avec flèche 111">
+              <a:extLst>
+                <a:ext uri="{FF2B5EF4-FFF2-40B4-BE49-F238E27FC236}">
+                  <a16:creationId xmlns:a16="http://schemas.microsoft.com/office/drawing/2014/main" id="{2EBFACD2-B6E6-8A5A-AB55-C6A6728ED136}"/>
+                </a:ext>
+              </a:extLst>
+            </p:cNvPr>
+            <p:cNvCxnSpPr>
+              <a:cxnSpLocks/>
+            </p:cNvCxnSpPr>
+            <p:nvPr/>
+          </p:nvCxnSpPr>
+          <p:spPr>
+            <a:xfrm>
+              <a:off x="5090421" y="4585445"/>
+              <a:ext cx="216000" cy="0"/>
+            </a:xfrm>
+            <a:prstGeom prst="straightConnector1">
+              <a:avLst/>
+            </a:prstGeom>
+            <a:ln w="28575">
+              <a:solidFill>
+                <a:srgbClr val="C00000"/>
+              </a:solidFill>
+              <a:headEnd type="none"/>
+              <a:tailEnd type="none" w="med" len="lg"/>
+            </a:ln>
+          </p:spPr>
+          <p:style>
+            <a:lnRef idx="1">
+              <a:schemeClr val="accent1"/>
+            </a:lnRef>
+            <a:fillRef idx="0">
+              <a:schemeClr val="accent1"/>
+            </a:fillRef>
+            <a:effectRef idx="0">
+              <a:schemeClr val="accent1"/>
+            </a:effectRef>
+            <a:fontRef idx="minor">
+              <a:schemeClr val="tx1"/>
+            </a:fontRef>
+          </p:style>
+        </p:cxnSp>
+        <p:cxnSp>
+          <p:nvCxnSpPr>
+            <p:cNvPr id="113" name="Connecteur droit avec flèche 112">
+              <a:extLst>
+                <a:ext uri="{FF2B5EF4-FFF2-40B4-BE49-F238E27FC236}">
+                  <a16:creationId xmlns:a16="http://schemas.microsoft.com/office/drawing/2014/main" id="{28B0FA0D-5DA4-4882-7D4F-DF9A42962FDA}"/>
+                </a:ext>
+              </a:extLst>
+            </p:cNvPr>
+            <p:cNvCxnSpPr>
+              <a:cxnSpLocks/>
+            </p:cNvCxnSpPr>
+            <p:nvPr/>
+          </p:nvCxnSpPr>
+          <p:spPr>
+            <a:xfrm>
+              <a:off x="5306421" y="3869971"/>
+              <a:ext cx="0" cy="715474"/>
+            </a:xfrm>
+            <a:prstGeom prst="straightConnector1">
+              <a:avLst/>
+            </a:prstGeom>
+            <a:ln w="28575">
+              <a:solidFill>
+                <a:srgbClr val="C00000"/>
+              </a:solidFill>
+              <a:headEnd type="none"/>
+              <a:tailEnd type="none" w="med" len="lg"/>
+            </a:ln>
+          </p:spPr>
+          <p:style>
+            <a:lnRef idx="1">
+              <a:schemeClr val="accent1"/>
+            </a:lnRef>
+            <a:fillRef idx="0">
+              <a:schemeClr val="accent1"/>
+            </a:fillRef>
+            <a:effectRef idx="0">
+              <a:schemeClr val="accent1"/>
+            </a:effectRef>
+            <a:fontRef idx="minor">
+              <a:schemeClr val="tx1"/>
+            </a:fontRef>
+          </p:style>
+        </p:cxnSp>
+      </p:grpSp>
+      <p:grpSp>
+        <p:nvGrpSpPr>
+          <p:cNvPr id="114" name="Groupe 113">
+            <a:extLst>
+              <a:ext uri="{FF2B5EF4-FFF2-40B4-BE49-F238E27FC236}">
+                <a16:creationId xmlns:a16="http://schemas.microsoft.com/office/drawing/2014/main" id="{9CAB4389-23B4-2A35-5C4A-ED2BEA3F2170}"/>
+              </a:ext>
+            </a:extLst>
+          </p:cNvPr>
+          <p:cNvGrpSpPr/>
+          <p:nvPr/>
+        </p:nvGrpSpPr>
+        <p:grpSpPr>
+          <a:xfrm>
+            <a:off x="6594588" y="3869971"/>
+            <a:ext cx="648000" cy="715474"/>
+            <a:chOff x="4658421" y="3869971"/>
+            <a:chExt cx="648000" cy="715474"/>
+          </a:xfrm>
+        </p:grpSpPr>
+        <p:cxnSp>
+          <p:nvCxnSpPr>
+            <p:cNvPr id="115" name="Connecteur droit avec flèche 114">
+              <a:extLst>
+                <a:ext uri="{FF2B5EF4-FFF2-40B4-BE49-F238E27FC236}">
+                  <a16:creationId xmlns:a16="http://schemas.microsoft.com/office/drawing/2014/main" id="{6FB1786D-9D12-4FC2-07FF-1290CA3D252E}"/>
+                </a:ext>
+              </a:extLst>
+            </p:cNvPr>
+            <p:cNvCxnSpPr>
+              <a:cxnSpLocks/>
+            </p:cNvCxnSpPr>
+            <p:nvPr/>
+          </p:nvCxnSpPr>
+          <p:spPr>
+            <a:xfrm>
+              <a:off x="4658421" y="3869971"/>
+              <a:ext cx="432000" cy="0"/>
+            </a:xfrm>
+            <a:prstGeom prst="straightConnector1">
+              <a:avLst/>
+            </a:prstGeom>
+            <a:ln w="28575">
+              <a:solidFill>
+                <a:srgbClr val="C00000"/>
+              </a:solidFill>
+              <a:headEnd type="none"/>
+              <a:tailEnd type="none" w="med" len="lg"/>
+            </a:ln>
+          </p:spPr>
+          <p:style>
+            <a:lnRef idx="1">
+              <a:schemeClr val="accent1"/>
+            </a:lnRef>
+            <a:fillRef idx="0">
+              <a:schemeClr val="accent1"/>
+            </a:fillRef>
+            <a:effectRef idx="0">
+              <a:schemeClr val="accent1"/>
+            </a:effectRef>
+            <a:fontRef idx="minor">
+              <a:schemeClr val="tx1"/>
+            </a:fontRef>
+          </p:style>
+        </p:cxnSp>
+        <p:cxnSp>
+          <p:nvCxnSpPr>
+            <p:cNvPr id="116" name="Connecteur droit avec flèche 115">
+              <a:extLst>
+                <a:ext uri="{FF2B5EF4-FFF2-40B4-BE49-F238E27FC236}">
+                  <a16:creationId xmlns:a16="http://schemas.microsoft.com/office/drawing/2014/main" id="{CA371C2F-86CF-A51E-0440-DAB29BF749C8}"/>
+                </a:ext>
+              </a:extLst>
+            </p:cNvPr>
+            <p:cNvCxnSpPr>
+              <a:cxnSpLocks/>
+            </p:cNvCxnSpPr>
+            <p:nvPr/>
+          </p:nvCxnSpPr>
+          <p:spPr>
+            <a:xfrm>
+              <a:off x="5090421" y="3869971"/>
+              <a:ext cx="0" cy="715474"/>
+            </a:xfrm>
+            <a:prstGeom prst="straightConnector1">
+              <a:avLst/>
+            </a:prstGeom>
+            <a:ln w="28575">
+              <a:solidFill>
+                <a:srgbClr val="C00000"/>
+              </a:solidFill>
+              <a:headEnd type="none"/>
+              <a:tailEnd type="none" w="med" len="lg"/>
+            </a:ln>
+          </p:spPr>
+          <p:style>
+            <a:lnRef idx="1">
+              <a:schemeClr val="accent1"/>
+            </a:lnRef>
+            <a:fillRef idx="0">
+              <a:schemeClr val="accent1"/>
+            </a:fillRef>
+            <a:effectRef idx="0">
+              <a:schemeClr val="accent1"/>
+            </a:effectRef>
+            <a:fontRef idx="minor">
+              <a:schemeClr val="tx1"/>
+            </a:fontRef>
+          </p:style>
+        </p:cxnSp>
+        <p:cxnSp>
+          <p:nvCxnSpPr>
+            <p:cNvPr id="117" name="Connecteur droit avec flèche 116">
+              <a:extLst>
+                <a:ext uri="{FF2B5EF4-FFF2-40B4-BE49-F238E27FC236}">
+                  <a16:creationId xmlns:a16="http://schemas.microsoft.com/office/drawing/2014/main" id="{AE0B0587-A856-DA98-7682-ABC584F78778}"/>
+                </a:ext>
+              </a:extLst>
+            </p:cNvPr>
+            <p:cNvCxnSpPr>
+              <a:cxnSpLocks/>
+            </p:cNvCxnSpPr>
+            <p:nvPr/>
+          </p:nvCxnSpPr>
+          <p:spPr>
+            <a:xfrm>
+              <a:off x="5090421" y="4585445"/>
+              <a:ext cx="216000" cy="0"/>
+            </a:xfrm>
+            <a:prstGeom prst="straightConnector1">
+              <a:avLst/>
+            </a:prstGeom>
+            <a:ln w="28575">
+              <a:solidFill>
+                <a:srgbClr val="C00000"/>
+              </a:solidFill>
+              <a:headEnd type="none"/>
+              <a:tailEnd type="none" w="med" len="lg"/>
+            </a:ln>
+          </p:spPr>
+          <p:style>
+            <a:lnRef idx="1">
+              <a:schemeClr val="accent1"/>
+            </a:lnRef>
+            <a:fillRef idx="0">
+              <a:schemeClr val="accent1"/>
+            </a:fillRef>
+            <a:effectRef idx="0">
+              <a:schemeClr val="accent1"/>
+            </a:effectRef>
+            <a:fontRef idx="minor">
+              <a:schemeClr val="tx1"/>
+            </a:fontRef>
+          </p:style>
+        </p:cxnSp>
+        <p:cxnSp>
+          <p:nvCxnSpPr>
+            <p:cNvPr id="118" name="Connecteur droit avec flèche 117">
+              <a:extLst>
+                <a:ext uri="{FF2B5EF4-FFF2-40B4-BE49-F238E27FC236}">
+                  <a16:creationId xmlns:a16="http://schemas.microsoft.com/office/drawing/2014/main" id="{8FD82F13-FBE5-FABB-80E1-1F5C6068C2E9}"/>
+                </a:ext>
+              </a:extLst>
+            </p:cNvPr>
+            <p:cNvCxnSpPr>
+              <a:cxnSpLocks/>
+            </p:cNvCxnSpPr>
+            <p:nvPr/>
+          </p:nvCxnSpPr>
+          <p:spPr>
+            <a:xfrm>
+              <a:off x="5306421" y="3869971"/>
+              <a:ext cx="0" cy="715474"/>
+            </a:xfrm>
+            <a:prstGeom prst="straightConnector1">
+              <a:avLst/>
+            </a:prstGeom>
+            <a:ln w="28575">
+              <a:solidFill>
+                <a:srgbClr val="C00000"/>
+              </a:solidFill>
+              <a:headEnd type="none"/>
+              <a:tailEnd type="none" w="med" len="lg"/>
+            </a:ln>
+          </p:spPr>
+          <p:style>
+            <a:lnRef idx="1">
+              <a:schemeClr val="accent1"/>
+            </a:lnRef>
+            <a:fillRef idx="0">
+              <a:schemeClr val="accent1"/>
+            </a:fillRef>
+            <a:effectRef idx="0">
+              <a:schemeClr val="accent1"/>
+            </a:effectRef>
+            <a:fontRef idx="minor">
+              <a:schemeClr val="tx1"/>
+            </a:fontRef>
+          </p:style>
+        </p:cxnSp>
+      </p:grpSp>
+      <p:grpSp>
+        <p:nvGrpSpPr>
+          <p:cNvPr id="119" name="Groupe 118">
+            <a:extLst>
+              <a:ext uri="{FF2B5EF4-FFF2-40B4-BE49-F238E27FC236}">
+                <a16:creationId xmlns:a16="http://schemas.microsoft.com/office/drawing/2014/main" id="{8AD9F2C2-F44A-D2CC-84F2-C1D506567A25}"/>
+              </a:ext>
+            </a:extLst>
+          </p:cNvPr>
+          <p:cNvGrpSpPr/>
+          <p:nvPr/>
+        </p:nvGrpSpPr>
+        <p:grpSpPr>
+          <a:xfrm>
+            <a:off x="7239977" y="3869971"/>
+            <a:ext cx="648000" cy="715474"/>
+            <a:chOff x="4658421" y="3869971"/>
+            <a:chExt cx="648000" cy="715474"/>
+          </a:xfrm>
+        </p:grpSpPr>
+        <p:cxnSp>
+          <p:nvCxnSpPr>
+            <p:cNvPr id="120" name="Connecteur droit avec flèche 119">
+              <a:extLst>
+                <a:ext uri="{FF2B5EF4-FFF2-40B4-BE49-F238E27FC236}">
+                  <a16:creationId xmlns:a16="http://schemas.microsoft.com/office/drawing/2014/main" id="{F1078F76-75B4-5385-3A50-BB575CE8E35F}"/>
+                </a:ext>
+              </a:extLst>
+            </p:cNvPr>
+            <p:cNvCxnSpPr>
+              <a:cxnSpLocks/>
+            </p:cNvCxnSpPr>
+            <p:nvPr/>
+          </p:nvCxnSpPr>
+          <p:spPr>
+            <a:xfrm>
+              <a:off x="4658421" y="3869971"/>
+              <a:ext cx="432000" cy="0"/>
+            </a:xfrm>
+            <a:prstGeom prst="straightConnector1">
+              <a:avLst/>
+            </a:prstGeom>
+            <a:ln w="28575">
+              <a:solidFill>
+                <a:srgbClr val="C00000"/>
+              </a:solidFill>
+              <a:headEnd type="none"/>
+              <a:tailEnd type="none" w="med" len="lg"/>
+            </a:ln>
+          </p:spPr>
+          <p:style>
+            <a:lnRef idx="1">
+              <a:schemeClr val="accent1"/>
+            </a:lnRef>
+            <a:fillRef idx="0">
+              <a:schemeClr val="accent1"/>
+            </a:fillRef>
+            <a:effectRef idx="0">
+              <a:schemeClr val="accent1"/>
+            </a:effectRef>
+            <a:fontRef idx="minor">
+              <a:schemeClr val="tx1"/>
+            </a:fontRef>
+          </p:style>
+        </p:cxnSp>
+        <p:cxnSp>
+          <p:nvCxnSpPr>
+            <p:cNvPr id="121" name="Connecteur droit avec flèche 120">
+              <a:extLst>
+                <a:ext uri="{FF2B5EF4-FFF2-40B4-BE49-F238E27FC236}">
+                  <a16:creationId xmlns:a16="http://schemas.microsoft.com/office/drawing/2014/main" id="{DDFADD16-0E3D-47E5-879F-A20E221951A2}"/>
+                </a:ext>
+              </a:extLst>
+            </p:cNvPr>
+            <p:cNvCxnSpPr>
+              <a:cxnSpLocks/>
+            </p:cNvCxnSpPr>
+            <p:nvPr/>
+          </p:nvCxnSpPr>
+          <p:spPr>
+            <a:xfrm>
+              <a:off x="5090421" y="3869971"/>
+              <a:ext cx="0" cy="715474"/>
+            </a:xfrm>
+            <a:prstGeom prst="straightConnector1">
+              <a:avLst/>
+            </a:prstGeom>
+            <a:ln w="28575">
+              <a:solidFill>
+                <a:srgbClr val="C00000"/>
+              </a:solidFill>
+              <a:headEnd type="none"/>
+              <a:tailEnd type="none" w="med" len="lg"/>
+            </a:ln>
+          </p:spPr>
+          <p:style>
+            <a:lnRef idx="1">
+              <a:schemeClr val="accent1"/>
+            </a:lnRef>
+            <a:fillRef idx="0">
+              <a:schemeClr val="accent1"/>
+            </a:fillRef>
+            <a:effectRef idx="0">
+              <a:schemeClr val="accent1"/>
+            </a:effectRef>
+            <a:fontRef idx="minor">
+              <a:schemeClr val="tx1"/>
+            </a:fontRef>
+          </p:style>
+        </p:cxnSp>
+        <p:cxnSp>
+          <p:nvCxnSpPr>
+            <p:cNvPr id="122" name="Connecteur droit avec flèche 121">
+              <a:extLst>
+                <a:ext uri="{FF2B5EF4-FFF2-40B4-BE49-F238E27FC236}">
+                  <a16:creationId xmlns:a16="http://schemas.microsoft.com/office/drawing/2014/main" id="{738E30A9-6369-FE42-3B3A-9F40773170AC}"/>
+                </a:ext>
+              </a:extLst>
+            </p:cNvPr>
+            <p:cNvCxnSpPr>
+              <a:cxnSpLocks/>
+            </p:cNvCxnSpPr>
+            <p:nvPr/>
+          </p:nvCxnSpPr>
+          <p:spPr>
+            <a:xfrm>
+              <a:off x="5090421" y="4585445"/>
+              <a:ext cx="216000" cy="0"/>
+            </a:xfrm>
+            <a:prstGeom prst="straightConnector1">
+              <a:avLst/>
+            </a:prstGeom>
+            <a:ln w="28575">
+              <a:solidFill>
+                <a:srgbClr val="C00000"/>
+              </a:solidFill>
+              <a:headEnd type="none"/>
+              <a:tailEnd type="none" w="med" len="lg"/>
+            </a:ln>
+          </p:spPr>
+          <p:style>
+            <a:lnRef idx="1">
+              <a:schemeClr val="accent1"/>
+            </a:lnRef>
+            <a:fillRef idx="0">
+              <a:schemeClr val="accent1"/>
+            </a:fillRef>
+            <a:effectRef idx="0">
+              <a:schemeClr val="accent1"/>
+            </a:effectRef>
+            <a:fontRef idx="minor">
+              <a:schemeClr val="tx1"/>
+            </a:fontRef>
+          </p:style>
+        </p:cxnSp>
+        <p:cxnSp>
+          <p:nvCxnSpPr>
+            <p:cNvPr id="123" name="Connecteur droit avec flèche 122">
+              <a:extLst>
+                <a:ext uri="{FF2B5EF4-FFF2-40B4-BE49-F238E27FC236}">
+                  <a16:creationId xmlns:a16="http://schemas.microsoft.com/office/drawing/2014/main" id="{55B98E0C-7B4F-A635-5C95-4EE1617C7B30}"/>
+                </a:ext>
+              </a:extLst>
+            </p:cNvPr>
+            <p:cNvCxnSpPr>
+              <a:cxnSpLocks/>
+            </p:cNvCxnSpPr>
+            <p:nvPr/>
+          </p:nvCxnSpPr>
+          <p:spPr>
+            <a:xfrm>
+              <a:off x="5306421" y="3869971"/>
+              <a:ext cx="0" cy="715474"/>
+            </a:xfrm>
+            <a:prstGeom prst="straightConnector1">
+              <a:avLst/>
+            </a:prstGeom>
+            <a:ln w="28575">
+              <a:solidFill>
+                <a:srgbClr val="C00000"/>
+              </a:solidFill>
+              <a:headEnd type="none"/>
+              <a:tailEnd type="none" w="med" len="lg"/>
+            </a:ln>
+          </p:spPr>
+          <p:style>
+            <a:lnRef idx="1">
+              <a:schemeClr val="accent1"/>
+            </a:lnRef>
+            <a:fillRef idx="0">
+              <a:schemeClr val="accent1"/>
+            </a:fillRef>
+            <a:effectRef idx="0">
+              <a:schemeClr val="accent1"/>
+            </a:effectRef>
+            <a:fontRef idx="minor">
+              <a:schemeClr val="tx1"/>
+            </a:fontRef>
+          </p:style>
+        </p:cxnSp>
+      </p:grpSp>
+      <p:cxnSp>
+        <p:nvCxnSpPr>
+          <p:cNvPr id="125" name="Connecteur droit avec flèche 124">
+            <a:extLst>
+              <a:ext uri="{FF2B5EF4-FFF2-40B4-BE49-F238E27FC236}">
+                <a16:creationId xmlns:a16="http://schemas.microsoft.com/office/drawing/2014/main" id="{26EE3FF1-E183-3EDC-AED7-1BF4AC70E950}"/>
+              </a:ext>
+            </a:extLst>
+          </p:cNvPr>
+          <p:cNvCxnSpPr>
+            <a:cxnSpLocks/>
+          </p:cNvCxnSpPr>
+          <p:nvPr/>
+        </p:nvCxnSpPr>
+        <p:spPr>
+          <a:xfrm>
+            <a:off x="4648353" y="4095588"/>
+            <a:ext cx="3367887" cy="0"/>
+          </a:xfrm>
+          <a:prstGeom prst="straightConnector1">
+            <a:avLst/>
+          </a:prstGeom>
+          <a:ln w="19050">
+            <a:solidFill>
+              <a:srgbClr val="C00000"/>
+            </a:solidFill>
+            <a:headEnd type="none"/>
+            <a:tailEnd type="none" w="med" len="lg"/>
+          </a:ln>
+        </p:spPr>
+        <p:style>
+          <a:lnRef idx="1">
+            <a:schemeClr val="accent1"/>
+          </a:lnRef>
+          <a:fillRef idx="0">
+            <a:schemeClr val="accent1"/>
+          </a:fillRef>
+          <a:effectRef idx="0">
+            <a:schemeClr val="accent1"/>
+          </a:effectRef>
+          <a:fontRef idx="minor">
+            <a:schemeClr val="tx1"/>
+          </a:fontRef>
+        </p:style>
+      </p:cxnSp>
+      <mc:AlternateContent xmlns:mc="http://schemas.openxmlformats.org/markup-compatibility/2006" xmlns:a14="http://schemas.microsoft.com/office/drawing/2010/main">
+        <mc:Choice Requires="a14">
+          <p:sp>
+            <p:nvSpPr>
+              <p:cNvPr id="128" name="ZoneTexte 127">
+                <a:extLst>
+                  <a:ext uri="{FF2B5EF4-FFF2-40B4-BE49-F238E27FC236}">
+                    <a16:creationId xmlns:a16="http://schemas.microsoft.com/office/drawing/2014/main" id="{8F79F13D-7101-3A11-39CD-421B20E3F21F}"/>
+                  </a:ext>
+                </a:extLst>
+              </p:cNvPr>
+              <p:cNvSpPr txBox="1"/>
+              <p:nvPr/>
+            </p:nvSpPr>
+            <p:spPr>
+              <a:xfrm>
+                <a:off x="4093873" y="3996110"/>
+                <a:ext cx="549446" cy="184666"/>
+              </a:xfrm>
+              <a:prstGeom prst="rect">
+                <a:avLst/>
+              </a:prstGeom>
+              <a:noFill/>
+            </p:spPr>
+            <p:txBody>
+              <a:bodyPr wrap="none" lIns="0" tIns="0" rIns="0" bIns="0" rtlCol="0">
+                <a:spAutoFit/>
+              </a:bodyPr>
+              <a:lstStyle/>
+              <a:p>
+                <a:pPr/>
+                <a14:m>
+                  <m:oMathPara xmlns:m="http://schemas.openxmlformats.org/officeDocument/2006/math">
+                    <m:oMathParaPr>
+                      <m:jc m:val="centerGroup"/>
+                    </m:oMathParaPr>
+                    <m:oMath xmlns:m="http://schemas.openxmlformats.org/officeDocument/2006/math">
+                      <m:d>
+                        <m:dPr>
+                          <m:begChr m:val="⟨"/>
+                          <m:endChr m:val="⟩"/>
+                          <m:ctrlPr>
+                            <a:rPr lang="fr-FR" sz="1200" b="0" i="1" smtClean="0">
+                              <a:latin typeface="Cambria Math" panose="02040503050406030204" pitchFamily="18" charset="0"/>
+                            </a:rPr>
+                          </m:ctrlPr>
+                        </m:dPr>
+                        <m:e>
+                          <m:sSub>
+                            <m:sSubPr>
+                              <m:ctrlPr>
+                                <a:rPr lang="fr-FR" sz="1200" i="1">
+                                  <a:latin typeface="Cambria Math" panose="02040503050406030204" pitchFamily="18" charset="0"/>
+                                </a:rPr>
+                              </m:ctrlPr>
+                            </m:sSubPr>
+                            <m:e>
+                              <m:r>
+                                <a:rPr lang="fr-FR" sz="1200" i="1">
+                                  <a:latin typeface="Cambria Math" panose="02040503050406030204" pitchFamily="18" charset="0"/>
+                                </a:rPr>
+                                <m:t>𝑈</m:t>
+                              </m:r>
+                            </m:e>
+                            <m:sub>
+                              <m:r>
+                                <a:rPr lang="fr-FR" sz="1200" i="1">
+                                  <a:latin typeface="Cambria Math" panose="02040503050406030204" pitchFamily="18" charset="0"/>
+                                </a:rPr>
+                                <m:t>𝑚</m:t>
+                              </m:r>
+                            </m:sub>
+                          </m:sSub>
+                          <m:r>
+                            <a:rPr lang="fr-FR" sz="1200" i="1">
+                              <a:latin typeface="Cambria Math" panose="02040503050406030204" pitchFamily="18" charset="0"/>
+                            </a:rPr>
+                            <m:t>(</m:t>
+                          </m:r>
+                          <m:r>
+                            <a:rPr lang="fr-FR" sz="1200" i="1">
+                              <a:latin typeface="Cambria Math" panose="02040503050406030204" pitchFamily="18" charset="0"/>
+                            </a:rPr>
+                            <m:t>𝑡</m:t>
+                          </m:r>
+                          <m:r>
+                            <a:rPr lang="fr-FR" sz="1200" i="1">
+                              <a:latin typeface="Cambria Math" panose="02040503050406030204" pitchFamily="18" charset="0"/>
+                            </a:rPr>
+                            <m:t>)</m:t>
+                          </m:r>
+                        </m:e>
+                      </m:d>
+                    </m:oMath>
+                  </m:oMathPara>
+                </a14:m>
+                <a:endParaRPr lang="fr-FR" sz="1200" dirty="0"/>
+              </a:p>
+            </p:txBody>
+          </p:sp>
+        </mc:Choice>
+        <mc:Fallback xmlns="">
+          <p:sp>
+            <p:nvSpPr>
+              <p:cNvPr id="128" name="ZoneTexte 127">
+                <a:extLst>
+                  <a:ext uri="{FF2B5EF4-FFF2-40B4-BE49-F238E27FC236}">
+                    <a16:creationId xmlns:a16="http://schemas.microsoft.com/office/drawing/2014/main" id="{69DF7473-507F-D180-5BB9-660B3FFBADFA}"/>
+                  </a:ext>
+                </a:extLst>
+              </p:cNvPr>
+              <p:cNvSpPr txBox="1">
+                <a:spLocks noRot="1" noChangeAspect="1" noMove="1" noResize="1" noEditPoints="1" noAdjustHandles="1" noChangeArrowheads="1" noChangeShapeType="1" noTextEdit="1"/>
+              </p:cNvSpPr>
+              <p:nvPr/>
+            </p:nvSpPr>
+            <p:spPr>
+              <a:xfrm>
+                <a:off x="4093873" y="3996110"/>
+                <a:ext cx="549446" cy="184666"/>
+              </a:xfrm>
+              <a:prstGeom prst="rect">
+                <a:avLst/>
+              </a:prstGeom>
+              <a:blipFill>
+                <a:blip r:embed="rId6"/>
+                <a:stretch>
+                  <a:fillRect t="-6667" b="-36667"/>
+                </a:stretch>
+              </a:blipFill>
+            </p:spPr>
+            <p:txBody>
+              <a:bodyPr/>
+              <a:lstStyle/>
+              <a:p>
+                <a:r>
+                  <a:rPr lang="fr-FR">
+                    <a:noFill/>
+                  </a:rPr>
+                  <a:t> </a:t>
+                </a:r>
+              </a:p>
+            </p:txBody>
+          </p:sp>
+        </mc:Fallback>
+      </mc:AlternateContent>
+      <p:cxnSp>
+        <p:nvCxnSpPr>
+          <p:cNvPr id="129" name="Connecteur droit 128">
+            <a:extLst>
+              <a:ext uri="{FF2B5EF4-FFF2-40B4-BE49-F238E27FC236}">
+                <a16:creationId xmlns:a16="http://schemas.microsoft.com/office/drawing/2014/main" id="{AC26374C-558C-FC7E-BC5E-BE47307DEBDD}"/>
+              </a:ext>
+            </a:extLst>
+          </p:cNvPr>
+          <p:cNvCxnSpPr>
+            <a:cxnSpLocks/>
+          </p:cNvCxnSpPr>
+          <p:nvPr/>
+        </p:nvCxnSpPr>
+        <p:spPr>
+          <a:xfrm rot="16200000" flipV="1">
+            <a:off x="2174911" y="2590150"/>
+            <a:ext cx="0" cy="337016"/>
+          </a:xfrm>
+          <a:prstGeom prst="line">
+            <a:avLst/>
+          </a:prstGeom>
+          <a:solidFill>
+            <a:schemeClr val="accent5">
+              <a:lumMod val="20000"/>
+              <a:lumOff val="80000"/>
+            </a:schemeClr>
+          </a:solidFill>
+          <a:ln w="19050">
+            <a:solidFill>
+              <a:srgbClr val="002060"/>
+            </a:solidFill>
+            <a:tailEnd type="stealth" w="med" len="lg"/>
+          </a:ln>
+        </p:spPr>
+        <p:style>
+          <a:lnRef idx="2">
+            <a:schemeClr val="accent1">
+              <a:shade val="15000"/>
+            </a:schemeClr>
+          </a:lnRef>
+          <a:fillRef idx="1">
+            <a:schemeClr val="accent1"/>
+          </a:fillRef>
+          <a:effectRef idx="0">
+            <a:schemeClr val="accent1"/>
+          </a:effectRef>
+          <a:fontRef idx="minor">
+            <a:schemeClr val="lt1"/>
+          </a:fontRef>
+        </p:style>
+      </p:cxnSp>
+      <mc:AlternateContent xmlns:mc="http://schemas.openxmlformats.org/markup-compatibility/2006" xmlns:a14="http://schemas.microsoft.com/office/drawing/2010/main">
+        <mc:Choice Requires="a14">
+          <p:sp>
+            <p:nvSpPr>
+              <p:cNvPr id="131" name="ZoneTexte 130">
+                <a:extLst>
+                  <a:ext uri="{FF2B5EF4-FFF2-40B4-BE49-F238E27FC236}">
+                    <a16:creationId xmlns:a16="http://schemas.microsoft.com/office/drawing/2014/main" id="{4A06E7B1-B650-DD68-9DF3-5FF6640E0820}"/>
+                  </a:ext>
+                </a:extLst>
+              </p:cNvPr>
+              <p:cNvSpPr txBox="1"/>
+              <p:nvPr/>
+            </p:nvSpPr>
+            <p:spPr>
+              <a:xfrm>
+                <a:off x="2006403" y="2485066"/>
+                <a:ext cx="414601" cy="184666"/>
+              </a:xfrm>
+              <a:prstGeom prst="rect">
+                <a:avLst/>
+              </a:prstGeom>
+              <a:noFill/>
+            </p:spPr>
+            <p:txBody>
+              <a:bodyPr wrap="none" lIns="0" tIns="0" rIns="0" bIns="0" rtlCol="0">
+                <a:spAutoFit/>
+              </a:bodyPr>
+              <a:lstStyle/>
+              <a:p>
+                <a:pPr/>
+                <a14:m>
+                  <m:oMathPara xmlns:m="http://schemas.openxmlformats.org/officeDocument/2006/math">
+                    <m:oMathParaPr>
+                      <m:jc m:val="centerGroup"/>
+                    </m:oMathParaPr>
+                    <m:oMath xmlns:m="http://schemas.openxmlformats.org/officeDocument/2006/math">
+                      <m:sSub>
+                        <m:sSubPr>
+                          <m:ctrlPr>
+                            <a:rPr lang="fr-FR" sz="1200" b="0" i="1" smtClean="0">
+                              <a:latin typeface="Cambria Math" panose="02040503050406030204" pitchFamily="18" charset="0"/>
+                            </a:rPr>
+                          </m:ctrlPr>
+                        </m:sSubPr>
+                        <m:e>
+                          <m:r>
+                            <a:rPr lang="fr-FR" sz="1200" b="0" i="1" smtClean="0">
+                              <a:latin typeface="Cambria Math" panose="02040503050406030204" pitchFamily="18" charset="0"/>
+                            </a:rPr>
+                            <m:t>𝑈</m:t>
+                          </m:r>
+                        </m:e>
+                        <m:sub>
+                          <m:r>
+                            <a:rPr lang="fr-FR" sz="1200" b="0" i="1" smtClean="0">
+                              <a:latin typeface="Cambria Math" panose="02040503050406030204" pitchFamily="18" charset="0"/>
+                            </a:rPr>
+                            <m:t>𝐾</m:t>
+                          </m:r>
+                        </m:sub>
+                      </m:sSub>
+                      <m:r>
+                        <a:rPr lang="fr-FR" sz="1200" b="0" i="1" smtClean="0">
+                          <a:latin typeface="Cambria Math" panose="02040503050406030204" pitchFamily="18" charset="0"/>
+                        </a:rPr>
+                        <m:t>(</m:t>
+                      </m:r>
+                      <m:r>
+                        <a:rPr lang="fr-FR" sz="1200" b="0" i="1" smtClean="0">
+                          <a:latin typeface="Cambria Math" panose="02040503050406030204" pitchFamily="18" charset="0"/>
+                        </a:rPr>
+                        <m:t>𝑡</m:t>
+                      </m:r>
+                      <m:r>
+                        <a:rPr lang="fr-FR" sz="1200" b="0" i="1" smtClean="0">
+                          <a:latin typeface="Cambria Math" panose="02040503050406030204" pitchFamily="18" charset="0"/>
+                        </a:rPr>
+                        <m:t>)</m:t>
+                      </m:r>
+                    </m:oMath>
+                  </m:oMathPara>
+                </a14:m>
+                <a:endParaRPr lang="fr-FR" sz="1200" dirty="0"/>
+              </a:p>
+            </p:txBody>
+          </p:sp>
+        </mc:Choice>
+        <mc:Fallback xmlns="">
+          <p:sp>
+            <p:nvSpPr>
+              <p:cNvPr id="131" name="ZoneTexte 130">
+                <a:extLst>
+                  <a:ext uri="{FF2B5EF4-FFF2-40B4-BE49-F238E27FC236}">
+                    <a16:creationId xmlns:a16="http://schemas.microsoft.com/office/drawing/2014/main" id="{3398D9B3-7E49-885C-3863-2567B98B6724}"/>
+                  </a:ext>
+                </a:extLst>
+              </p:cNvPr>
+              <p:cNvSpPr txBox="1">
+                <a:spLocks noRot="1" noChangeAspect="1" noMove="1" noResize="1" noEditPoints="1" noAdjustHandles="1" noChangeArrowheads="1" noChangeShapeType="1" noTextEdit="1"/>
+              </p:cNvSpPr>
+              <p:nvPr/>
+            </p:nvSpPr>
+            <p:spPr>
+              <a:xfrm>
+                <a:off x="2006403" y="2485066"/>
+                <a:ext cx="414601" cy="184666"/>
+              </a:xfrm>
+              <a:prstGeom prst="rect">
+                <a:avLst/>
+              </a:prstGeom>
+              <a:blipFill>
+                <a:blip r:embed="rId7"/>
+                <a:stretch>
+                  <a:fillRect l="-8824" t="-6667" r="-13235" b="-36667"/>
+                </a:stretch>
+              </a:blipFill>
+            </p:spPr>
+            <p:txBody>
+              <a:bodyPr/>
+              <a:lstStyle/>
+              <a:p>
+                <a:r>
+                  <a:rPr lang="fr-FR">
+                    <a:noFill/>
+                  </a:rPr>
+                  <a:t> </a:t>
+                </a:r>
+              </a:p>
+            </p:txBody>
+          </p:sp>
+        </mc:Fallback>
+      </mc:AlternateContent>
+      <p:cxnSp>
+        <p:nvCxnSpPr>
+          <p:cNvPr id="169" name="Connecteur droit avec flèche 168">
+            <a:extLst>
+              <a:ext uri="{FF2B5EF4-FFF2-40B4-BE49-F238E27FC236}">
+                <a16:creationId xmlns:a16="http://schemas.microsoft.com/office/drawing/2014/main" id="{14F8557F-2E66-CB6A-5367-9B2B9EBCBEB5}"/>
+              </a:ext>
+            </a:extLst>
+          </p:cNvPr>
+          <p:cNvCxnSpPr>
+            <a:cxnSpLocks/>
+          </p:cNvCxnSpPr>
+          <p:nvPr/>
+        </p:nvCxnSpPr>
+        <p:spPr>
+          <a:xfrm>
+            <a:off x="5301817" y="3816494"/>
+            <a:ext cx="433993" cy="0"/>
+          </a:xfrm>
+          <a:prstGeom prst="straightConnector1">
+            <a:avLst/>
+          </a:prstGeom>
+          <a:ln w="19050">
+            <a:solidFill>
+              <a:srgbClr val="C00000"/>
+            </a:solidFill>
+            <a:headEnd type="stealth" w="med" len="lg"/>
+            <a:tailEnd type="stealth" w="med" len="lg"/>
+          </a:ln>
+        </p:spPr>
+        <p:style>
+          <a:lnRef idx="1">
+            <a:schemeClr val="accent1"/>
+          </a:lnRef>
+          <a:fillRef idx="0">
+            <a:schemeClr val="accent1"/>
+          </a:fillRef>
+          <a:effectRef idx="0">
+            <a:schemeClr val="accent1"/>
+          </a:effectRef>
+          <a:fontRef idx="minor">
+            <a:schemeClr val="tx1"/>
+          </a:fontRef>
+        </p:style>
+      </p:cxnSp>
+      <mc:AlternateContent xmlns:mc="http://schemas.openxmlformats.org/markup-compatibility/2006" xmlns:a14="http://schemas.microsoft.com/office/drawing/2010/main">
+        <mc:Choice Requires="a14">
+          <p:sp>
+            <p:nvSpPr>
+              <p:cNvPr id="170" name="ZoneTexte 169">
+                <a:extLst>
+                  <a:ext uri="{FF2B5EF4-FFF2-40B4-BE49-F238E27FC236}">
+                    <a16:creationId xmlns:a16="http://schemas.microsoft.com/office/drawing/2014/main" id="{38770BA6-F93C-FD88-775B-DEE9B605C9E9}"/>
+                  </a:ext>
+                </a:extLst>
+              </p:cNvPr>
+              <p:cNvSpPr txBox="1"/>
+              <p:nvPr/>
+            </p:nvSpPr>
+            <p:spPr>
+              <a:xfrm>
+                <a:off x="5448368" y="3649337"/>
+                <a:ext cx="130036" cy="184666"/>
+              </a:xfrm>
+              <a:prstGeom prst="rect">
+                <a:avLst/>
+              </a:prstGeom>
+              <a:noFill/>
+            </p:spPr>
+            <p:txBody>
+              <a:bodyPr wrap="square" lIns="0" tIns="0" rIns="0" bIns="0" rtlCol="0">
+                <a:spAutoFit/>
+              </a:bodyPr>
+              <a:lstStyle/>
+              <a:p>
+                <a:pPr/>
+                <a14:m>
+                  <m:oMathPara xmlns:m="http://schemas.openxmlformats.org/officeDocument/2006/math">
+                    <m:oMathParaPr>
+                      <m:jc m:val="centerGroup"/>
+                    </m:oMathParaPr>
+                    <m:oMath xmlns:m="http://schemas.openxmlformats.org/officeDocument/2006/math">
+                      <m:r>
+                        <a:rPr lang="fr-FR" sz="1200" b="0" i="1" smtClean="0">
+                          <a:latin typeface="Cambria Math" panose="02040503050406030204" pitchFamily="18" charset="0"/>
+                        </a:rPr>
+                        <m:t>𝛼</m:t>
+                      </m:r>
+                      <m:r>
+                        <a:rPr lang="fr-FR" sz="1200" b="0" i="1" smtClean="0">
+                          <a:latin typeface="Cambria Math" panose="02040503050406030204" pitchFamily="18" charset="0"/>
+                        </a:rPr>
+                        <m:t>𝑇</m:t>
+                      </m:r>
+                    </m:oMath>
+                  </m:oMathPara>
+                </a14:m>
+                <a:endParaRPr lang="fr-FR" sz="1200" dirty="0"/>
+              </a:p>
+            </p:txBody>
+          </p:sp>
+        </mc:Choice>
+        <mc:Fallback xmlns="">
+          <p:sp>
+            <p:nvSpPr>
+              <p:cNvPr id="170" name="ZoneTexte 169">
+                <a:extLst>
+                  <a:ext uri="{FF2B5EF4-FFF2-40B4-BE49-F238E27FC236}">
+                    <a16:creationId xmlns:a16="http://schemas.microsoft.com/office/drawing/2014/main" id="{CDAC5CA1-FF94-6941-05F3-AEC0348CDF6D}"/>
+                  </a:ext>
+                </a:extLst>
+              </p:cNvPr>
+              <p:cNvSpPr txBox="1">
+                <a:spLocks noRot="1" noChangeAspect="1" noMove="1" noResize="1" noEditPoints="1" noAdjustHandles="1" noChangeArrowheads="1" noChangeShapeType="1" noTextEdit="1"/>
+              </p:cNvSpPr>
+              <p:nvPr/>
+            </p:nvSpPr>
+            <p:spPr>
+              <a:xfrm>
+                <a:off x="5448368" y="3649337"/>
+                <a:ext cx="130036" cy="184666"/>
+              </a:xfrm>
+              <a:prstGeom prst="rect">
+                <a:avLst/>
+              </a:prstGeom>
+              <a:blipFill>
+                <a:blip r:embed="rId10"/>
+                <a:stretch>
+                  <a:fillRect l="-42857" r="-85714" b="-6667"/>
+                </a:stretch>
+              </a:blipFill>
+            </p:spPr>
+            <p:txBody>
+              <a:bodyPr/>
+              <a:lstStyle/>
+              <a:p>
+                <a:r>
+                  <a:rPr lang="fr-FR">
+                    <a:noFill/>
+                  </a:rPr>
+                  <a:t> </a:t>
+                </a:r>
+              </a:p>
+            </p:txBody>
+          </p:sp>
+        </mc:Fallback>
+      </mc:AlternateContent>
+      <mc:AlternateContent xmlns:mc="http://schemas.openxmlformats.org/markup-compatibility/2006" xmlns:a14="http://schemas.microsoft.com/office/drawing/2010/main">
+        <mc:Choice Requires="a14">
+          <p:sp>
+            <p:nvSpPr>
+              <p:cNvPr id="172" name="ZoneTexte 171">
+                <a:extLst>
+                  <a:ext uri="{FF2B5EF4-FFF2-40B4-BE49-F238E27FC236}">
+                    <a16:creationId xmlns:a16="http://schemas.microsoft.com/office/drawing/2014/main" id="{15620CB9-F702-F9FF-93BA-51167E11F203}"/>
+                  </a:ext>
+                </a:extLst>
+              </p:cNvPr>
+              <p:cNvSpPr txBox="1"/>
+              <p:nvPr/>
+            </p:nvSpPr>
+            <p:spPr>
+              <a:xfrm>
+                <a:off x="8259792" y="3246354"/>
+                <a:ext cx="99963" cy="184666"/>
+              </a:xfrm>
+              <a:prstGeom prst="rect">
+                <a:avLst/>
+              </a:prstGeom>
+              <a:noFill/>
+            </p:spPr>
+            <p:txBody>
+              <a:bodyPr wrap="none" lIns="0" tIns="0" rIns="0" bIns="0" rtlCol="0">
+                <a:spAutoFit/>
+              </a:bodyPr>
+              <a:lstStyle/>
+              <a:p>
+                <a:pPr/>
+                <a14:m>
+                  <m:oMathPara xmlns:m="http://schemas.openxmlformats.org/officeDocument/2006/math">
+                    <m:oMathParaPr>
+                      <m:jc m:val="centerGroup"/>
+                    </m:oMathParaPr>
+                    <m:oMath xmlns:m="http://schemas.openxmlformats.org/officeDocument/2006/math">
+                      <m:r>
+                        <a:rPr lang="fr-FR" sz="1200" b="0" i="1" smtClean="0">
+                          <a:latin typeface="Cambria Math" panose="02040503050406030204" pitchFamily="18" charset="0"/>
+                        </a:rPr>
+                        <m:t>𝑡</m:t>
+                      </m:r>
+                    </m:oMath>
+                  </m:oMathPara>
+                </a14:m>
+                <a:endParaRPr lang="fr-FR" sz="1200" dirty="0"/>
+              </a:p>
+            </p:txBody>
+          </p:sp>
+        </mc:Choice>
+        <mc:Fallback xmlns="">
+          <p:sp>
+            <p:nvSpPr>
+              <p:cNvPr id="172" name="ZoneTexte 171">
+                <a:extLst>
+                  <a:ext uri="{FF2B5EF4-FFF2-40B4-BE49-F238E27FC236}">
+                    <a16:creationId xmlns:a16="http://schemas.microsoft.com/office/drawing/2014/main" id="{C738244D-511B-9F48-FA49-7CB61C947783}"/>
+                  </a:ext>
+                </a:extLst>
+              </p:cNvPr>
+              <p:cNvSpPr txBox="1">
+                <a:spLocks noRot="1" noChangeAspect="1" noMove="1" noResize="1" noEditPoints="1" noAdjustHandles="1" noChangeArrowheads="1" noChangeShapeType="1" noTextEdit="1"/>
+              </p:cNvSpPr>
+              <p:nvPr/>
+            </p:nvSpPr>
+            <p:spPr>
+              <a:xfrm>
+                <a:off x="8259792" y="3246354"/>
+                <a:ext cx="99963" cy="184666"/>
+              </a:xfrm>
+              <a:prstGeom prst="rect">
+                <a:avLst/>
+              </a:prstGeom>
+              <a:blipFill>
+                <a:blip r:embed="rId11"/>
+                <a:stretch>
+                  <a:fillRect l="-31250" r="-31250" b="-3333"/>
+                </a:stretch>
+              </a:blipFill>
+            </p:spPr>
+            <p:txBody>
+              <a:bodyPr/>
+              <a:lstStyle/>
+              <a:p>
+                <a:r>
+                  <a:rPr lang="fr-FR">
+                    <a:noFill/>
+                  </a:rPr>
+                  <a:t> </a:t>
+                </a:r>
+              </a:p>
+            </p:txBody>
+          </p:sp>
+        </mc:Fallback>
+      </mc:AlternateContent>
+      <mc:AlternateContent xmlns:mc="http://schemas.openxmlformats.org/markup-compatibility/2006" xmlns:a14="http://schemas.microsoft.com/office/drawing/2010/main">
+        <mc:Choice Requires="a14">
+          <p:sp>
+            <p:nvSpPr>
+              <p:cNvPr id="173" name="ZoneTexte 172">
+                <a:extLst>
+                  <a:ext uri="{FF2B5EF4-FFF2-40B4-BE49-F238E27FC236}">
+                    <a16:creationId xmlns:a16="http://schemas.microsoft.com/office/drawing/2014/main" id="{6E8AA06A-57B0-FF5C-CF0F-82AB119F55C4}"/>
+                  </a:ext>
+                </a:extLst>
+              </p:cNvPr>
+              <p:cNvSpPr txBox="1"/>
+              <p:nvPr/>
+            </p:nvSpPr>
+            <p:spPr>
+              <a:xfrm>
+                <a:off x="8263761" y="4400779"/>
+                <a:ext cx="99963" cy="184666"/>
+              </a:xfrm>
+              <a:prstGeom prst="rect">
+                <a:avLst/>
+              </a:prstGeom>
+              <a:noFill/>
+            </p:spPr>
+            <p:txBody>
+              <a:bodyPr wrap="none" lIns="0" tIns="0" rIns="0" bIns="0" rtlCol="0">
+                <a:spAutoFit/>
+              </a:bodyPr>
+              <a:lstStyle/>
+              <a:p>
+                <a:pPr/>
+                <a14:m>
+                  <m:oMathPara xmlns:m="http://schemas.openxmlformats.org/officeDocument/2006/math">
+                    <m:oMathParaPr>
+                      <m:jc m:val="centerGroup"/>
+                    </m:oMathParaPr>
+                    <m:oMath xmlns:m="http://schemas.openxmlformats.org/officeDocument/2006/math">
+                      <m:r>
+                        <a:rPr lang="fr-FR" sz="1200" b="0" i="1" smtClean="0">
+                          <a:latin typeface="Cambria Math" panose="02040503050406030204" pitchFamily="18" charset="0"/>
+                        </a:rPr>
+                        <m:t>𝑡</m:t>
+                      </m:r>
+                    </m:oMath>
+                  </m:oMathPara>
+                </a14:m>
+                <a:endParaRPr lang="fr-FR" sz="1200" dirty="0"/>
+              </a:p>
+            </p:txBody>
+          </p:sp>
+        </mc:Choice>
+        <mc:Fallback xmlns="">
+          <p:sp>
+            <p:nvSpPr>
+              <p:cNvPr id="173" name="ZoneTexte 172">
+                <a:extLst>
+                  <a:ext uri="{FF2B5EF4-FFF2-40B4-BE49-F238E27FC236}">
+                    <a16:creationId xmlns:a16="http://schemas.microsoft.com/office/drawing/2014/main" id="{3B4793B4-5A8D-D888-2608-C488E0D7C7D4}"/>
+                  </a:ext>
+                </a:extLst>
+              </p:cNvPr>
+              <p:cNvSpPr txBox="1">
+                <a:spLocks noRot="1" noChangeAspect="1" noMove="1" noResize="1" noEditPoints="1" noAdjustHandles="1" noChangeArrowheads="1" noChangeShapeType="1" noTextEdit="1"/>
+              </p:cNvSpPr>
+              <p:nvPr/>
+            </p:nvSpPr>
+            <p:spPr>
+              <a:xfrm>
+                <a:off x="8263761" y="4400779"/>
+                <a:ext cx="99963" cy="184666"/>
+              </a:xfrm>
+              <a:prstGeom prst="rect">
+                <a:avLst/>
+              </a:prstGeom>
+              <a:blipFill>
+                <a:blip r:embed="rId11"/>
+                <a:stretch>
+                  <a:fillRect l="-31250" r="-31250" b="-3333"/>
+                </a:stretch>
+              </a:blipFill>
+            </p:spPr>
+            <p:txBody>
+              <a:bodyPr/>
+              <a:lstStyle/>
+              <a:p>
+                <a:r>
+                  <a:rPr lang="fr-FR">
+                    <a:noFill/>
+                  </a:rPr>
+                  <a:t> </a:t>
+                </a:r>
+              </a:p>
+            </p:txBody>
+          </p:sp>
+        </mc:Fallback>
+      </mc:AlternateContent>
+      <p:grpSp>
+        <p:nvGrpSpPr>
+          <p:cNvPr id="3" name="Groupe 2">
+            <a:extLst>
+              <a:ext uri="{FF2B5EF4-FFF2-40B4-BE49-F238E27FC236}">
+                <a16:creationId xmlns:a16="http://schemas.microsoft.com/office/drawing/2014/main" id="{C3A6A614-A65B-9B9D-5296-DE8E903F014A}"/>
+              </a:ext>
+            </a:extLst>
+          </p:cNvPr>
+          <p:cNvGrpSpPr/>
+          <p:nvPr/>
+        </p:nvGrpSpPr>
+        <p:grpSpPr>
+          <a:xfrm>
+            <a:off x="4096275" y="5115599"/>
+            <a:ext cx="4160333" cy="1096252"/>
+            <a:chOff x="4096275" y="5115599"/>
+            <a:chExt cx="4160333" cy="1096252"/>
+          </a:xfrm>
+        </p:grpSpPr>
+        <p:grpSp>
+          <p:nvGrpSpPr>
+            <p:cNvPr id="132" name="Groupe 131">
+              <a:extLst>
+                <a:ext uri="{FF2B5EF4-FFF2-40B4-BE49-F238E27FC236}">
+                  <a16:creationId xmlns:a16="http://schemas.microsoft.com/office/drawing/2014/main" id="{EFFA73C6-0D8F-BAD4-2B9A-8F55C0F3B889}"/>
+                </a:ext>
+              </a:extLst>
+            </p:cNvPr>
+            <p:cNvGrpSpPr/>
+            <p:nvPr/>
+          </p:nvGrpSpPr>
+          <p:grpSpPr>
+            <a:xfrm>
+              <a:off x="4555276" y="5232137"/>
+              <a:ext cx="3606451" cy="979714"/>
+              <a:chOff x="326571" y="1730829"/>
+              <a:chExt cx="3606451" cy="979714"/>
+            </a:xfrm>
+          </p:grpSpPr>
+          <p:cxnSp>
+            <p:nvCxnSpPr>
+              <p:cNvPr id="133" name="Connecteur droit avec flèche 132">
+                <a:extLst>
+                  <a:ext uri="{FF2B5EF4-FFF2-40B4-BE49-F238E27FC236}">
+                    <a16:creationId xmlns:a16="http://schemas.microsoft.com/office/drawing/2014/main" id="{8310076E-A705-614A-54E6-10E84E1F5A27}"/>
+                  </a:ext>
+                </a:extLst>
+              </p:cNvPr>
+              <p:cNvCxnSpPr/>
+              <p:nvPr/>
+            </p:nvCxnSpPr>
+            <p:spPr>
+              <a:xfrm flipV="1">
+                <a:off x="326571" y="1730829"/>
+                <a:ext cx="0" cy="979714"/>
+              </a:xfrm>
+              <a:prstGeom prst="straightConnector1">
+                <a:avLst/>
+              </a:prstGeom>
+              <a:ln w="28575">
+                <a:solidFill>
+                  <a:srgbClr val="00547F"/>
+                </a:solidFill>
+                <a:headEnd type="none"/>
+                <a:tailEnd type="stealth" w="med" len="lg"/>
+              </a:ln>
+            </p:spPr>
+            <p:style>
+              <a:lnRef idx="1">
+                <a:schemeClr val="accent1"/>
+              </a:lnRef>
+              <a:fillRef idx="0">
+                <a:schemeClr val="accent1"/>
+              </a:fillRef>
+              <a:effectRef idx="0">
+                <a:schemeClr val="accent1"/>
+              </a:effectRef>
+              <a:fontRef idx="minor">
+                <a:schemeClr val="tx1"/>
+              </a:fontRef>
+            </p:style>
+          </p:cxnSp>
+          <p:cxnSp>
+            <p:nvCxnSpPr>
+              <p:cNvPr id="134" name="Connecteur droit avec flèche 133">
+                <a:extLst>
+                  <a:ext uri="{FF2B5EF4-FFF2-40B4-BE49-F238E27FC236}">
+                    <a16:creationId xmlns:a16="http://schemas.microsoft.com/office/drawing/2014/main" id="{7C49FEC9-8612-84BF-2264-468D93B21BE9}"/>
+                  </a:ext>
+                </a:extLst>
+              </p:cNvPr>
+              <p:cNvCxnSpPr>
+                <a:cxnSpLocks/>
+              </p:cNvCxnSpPr>
+              <p:nvPr/>
+            </p:nvCxnSpPr>
+            <p:spPr>
+              <a:xfrm>
+                <a:off x="326571" y="2710543"/>
+                <a:ext cx="3606451" cy="0"/>
+              </a:xfrm>
+              <a:prstGeom prst="straightConnector1">
+                <a:avLst/>
+              </a:prstGeom>
+              <a:ln w="28575">
+                <a:solidFill>
+                  <a:srgbClr val="00547F"/>
+                </a:solidFill>
+                <a:headEnd type="none"/>
+                <a:tailEnd type="stealth" w="med" len="lg"/>
+              </a:ln>
+            </p:spPr>
+            <p:style>
+              <a:lnRef idx="1">
+                <a:schemeClr val="accent1"/>
+              </a:lnRef>
+              <a:fillRef idx="0">
+                <a:schemeClr val="accent1"/>
+              </a:fillRef>
+              <a:effectRef idx="0">
+                <a:schemeClr val="accent1"/>
+              </a:effectRef>
+              <a:fontRef idx="minor">
+                <a:schemeClr val="tx1"/>
+              </a:fontRef>
+            </p:style>
+          </p:cxnSp>
+        </p:grpSp>
+        <mc:AlternateContent xmlns:mc="http://schemas.openxmlformats.org/markup-compatibility/2006" xmlns:a14="http://schemas.microsoft.com/office/drawing/2010/main">
+          <mc:Choice Requires="a14">
+            <p:sp>
+              <p:nvSpPr>
+                <p:cNvPr id="135" name="ZoneTexte 134">
+                  <a:extLst>
+                    <a:ext uri="{FF2B5EF4-FFF2-40B4-BE49-F238E27FC236}">
+                      <a16:creationId xmlns:a16="http://schemas.microsoft.com/office/drawing/2014/main" id="{18D1C44A-B943-9D51-103F-0F8F6AD8FE4F}"/>
+                    </a:ext>
+                  </a:extLst>
+                </p:cNvPr>
+                <p:cNvSpPr txBox="1"/>
+                <p:nvPr/>
+              </p:nvSpPr>
+              <p:spPr>
+                <a:xfrm>
+                  <a:off x="4096275" y="5232137"/>
+                  <a:ext cx="414601" cy="184666"/>
+                </a:xfrm>
+                <a:prstGeom prst="rect">
+                  <a:avLst/>
+                </a:prstGeom>
+                <a:noFill/>
+              </p:spPr>
+              <p:txBody>
+                <a:bodyPr wrap="none" lIns="0" tIns="0" rIns="0" bIns="0" rtlCol="0">
+                  <a:spAutoFit/>
+                </a:bodyPr>
+                <a:lstStyle/>
+                <a:p>
+                  <a:pPr/>
+                  <a14:m>
+                    <m:oMathPara xmlns:m="http://schemas.openxmlformats.org/officeDocument/2006/math">
+                      <m:oMathParaPr>
+                        <m:jc m:val="centerGroup"/>
+                      </m:oMathParaPr>
+                      <m:oMath xmlns:m="http://schemas.openxmlformats.org/officeDocument/2006/math">
+                        <m:sSub>
+                          <m:sSubPr>
+                            <m:ctrlPr>
+                              <a:rPr lang="fr-FR" sz="1200" b="0" i="1" smtClean="0">
+                                <a:latin typeface="Cambria Math" panose="02040503050406030204" pitchFamily="18" charset="0"/>
+                              </a:rPr>
+                            </m:ctrlPr>
+                          </m:sSubPr>
+                          <m:e>
+                            <m:r>
+                              <a:rPr lang="fr-FR" sz="1200" b="0" i="1" smtClean="0">
+                                <a:latin typeface="Cambria Math" panose="02040503050406030204" pitchFamily="18" charset="0"/>
+                              </a:rPr>
+                              <m:t>𝑈</m:t>
+                            </m:r>
+                          </m:e>
+                          <m:sub>
+                            <m:r>
+                              <a:rPr lang="fr-FR" sz="1200" b="0" i="1" smtClean="0">
+                                <a:latin typeface="Cambria Math" panose="02040503050406030204" pitchFamily="18" charset="0"/>
+                              </a:rPr>
+                              <m:t>𝐾</m:t>
+                            </m:r>
+                          </m:sub>
+                        </m:sSub>
+                        <m:r>
+                          <a:rPr lang="fr-FR" sz="1200" b="0" i="1" smtClean="0">
+                            <a:latin typeface="Cambria Math" panose="02040503050406030204" pitchFamily="18" charset="0"/>
+                          </a:rPr>
+                          <m:t>(</m:t>
+                        </m:r>
+                        <m:r>
+                          <a:rPr lang="fr-FR" sz="1200" b="0" i="1" smtClean="0">
+                            <a:latin typeface="Cambria Math" panose="02040503050406030204" pitchFamily="18" charset="0"/>
+                          </a:rPr>
+                          <m:t>𝑡</m:t>
+                        </m:r>
+                        <m:r>
+                          <a:rPr lang="fr-FR" sz="1200" b="0" i="1" smtClean="0">
+                            <a:latin typeface="Cambria Math" panose="02040503050406030204" pitchFamily="18" charset="0"/>
+                          </a:rPr>
+                          <m:t>)</m:t>
+                        </m:r>
+                      </m:oMath>
+                    </m:oMathPara>
+                  </a14:m>
+                  <a:endParaRPr lang="fr-FR" sz="1200" dirty="0"/>
+                </a:p>
+              </p:txBody>
+            </p:sp>
+          </mc:Choice>
+          <mc:Fallback xmlns="">
+            <p:sp>
+              <p:nvSpPr>
+                <p:cNvPr id="135" name="ZoneTexte 134">
+                  <a:extLst>
+                    <a:ext uri="{FF2B5EF4-FFF2-40B4-BE49-F238E27FC236}">
+                      <a16:creationId xmlns:a16="http://schemas.microsoft.com/office/drawing/2014/main" id="{18D1C44A-B943-9D51-103F-0F8F6AD8FE4F}"/>
+                    </a:ext>
+                  </a:extLst>
+                </p:cNvPr>
+                <p:cNvSpPr txBox="1">
+                  <a:spLocks noRot="1" noChangeAspect="1" noMove="1" noResize="1" noEditPoints="1" noAdjustHandles="1" noChangeArrowheads="1" noChangeShapeType="1" noTextEdit="1"/>
+                </p:cNvSpPr>
+                <p:nvPr/>
+              </p:nvSpPr>
+              <p:spPr>
+                <a:xfrm>
+                  <a:off x="4096275" y="5232137"/>
+                  <a:ext cx="414601" cy="184666"/>
+                </a:xfrm>
+                <a:prstGeom prst="rect">
+                  <a:avLst/>
+                </a:prstGeom>
+                <a:blipFill>
+                  <a:blip r:embed="rId12"/>
+                  <a:stretch>
+                    <a:fillRect l="-8824" t="-3226" r="-11765" b="-35484"/>
+                  </a:stretch>
+                </a:blipFill>
+              </p:spPr>
+              <p:txBody>
+                <a:bodyPr/>
+                <a:lstStyle/>
+                <a:p>
+                  <a:r>
+                    <a:rPr lang="fr-FR">
+                      <a:noFill/>
+                    </a:rPr>
+                    <a:t> </a:t>
+                  </a:r>
+                </a:p>
+              </p:txBody>
+            </p:sp>
+          </mc:Fallback>
+        </mc:AlternateContent>
+        <p:grpSp>
+          <p:nvGrpSpPr>
+            <p:cNvPr id="163" name="Groupe 162">
+              <a:extLst>
+                <a:ext uri="{FF2B5EF4-FFF2-40B4-BE49-F238E27FC236}">
+                  <a16:creationId xmlns:a16="http://schemas.microsoft.com/office/drawing/2014/main" id="{03ADFCFD-0479-6BFB-3AB1-DE1200699C6F}"/>
+                </a:ext>
+              </a:extLst>
+            </p:cNvPr>
+            <p:cNvGrpSpPr/>
+            <p:nvPr/>
+          </p:nvGrpSpPr>
+          <p:grpSpPr>
+            <a:xfrm flipV="1">
+              <a:off x="4555276" y="5496377"/>
+              <a:ext cx="3229556" cy="715474"/>
+              <a:chOff x="4658421" y="4989614"/>
+              <a:chExt cx="3229556" cy="715474"/>
+            </a:xfrm>
+          </p:grpSpPr>
+          <p:grpSp>
+            <p:nvGrpSpPr>
+              <p:cNvPr id="136" name="Groupe 135">
+                <a:extLst>
+                  <a:ext uri="{FF2B5EF4-FFF2-40B4-BE49-F238E27FC236}">
+                    <a16:creationId xmlns:a16="http://schemas.microsoft.com/office/drawing/2014/main" id="{F25A274D-68BB-B748-AE4C-EEA77A63FAF8}"/>
+                  </a:ext>
+                </a:extLst>
+              </p:cNvPr>
+              <p:cNvGrpSpPr/>
+              <p:nvPr/>
+            </p:nvGrpSpPr>
+            <p:grpSpPr>
+              <a:xfrm>
+                <a:off x="4658421" y="4989614"/>
+                <a:ext cx="648000" cy="715474"/>
+                <a:chOff x="4658421" y="3869971"/>
+                <a:chExt cx="648000" cy="715474"/>
+              </a:xfrm>
+            </p:grpSpPr>
+            <p:cxnSp>
+              <p:nvCxnSpPr>
+                <p:cNvPr id="137" name="Connecteur droit avec flèche 136">
+                  <a:extLst>
+                    <a:ext uri="{FF2B5EF4-FFF2-40B4-BE49-F238E27FC236}">
+                      <a16:creationId xmlns:a16="http://schemas.microsoft.com/office/drawing/2014/main" id="{3B66624D-F393-47DC-93CB-AE22459852BF}"/>
+                    </a:ext>
+                  </a:extLst>
+                </p:cNvPr>
+                <p:cNvCxnSpPr>
+                  <a:cxnSpLocks/>
+                </p:cNvCxnSpPr>
+                <p:nvPr/>
+              </p:nvCxnSpPr>
+              <p:spPr>
+                <a:xfrm>
+                  <a:off x="4658421" y="3869971"/>
+                  <a:ext cx="432000" cy="0"/>
+                </a:xfrm>
+                <a:prstGeom prst="straightConnector1">
+                  <a:avLst/>
+                </a:prstGeom>
+                <a:ln w="28575">
+                  <a:solidFill>
+                    <a:srgbClr val="00B050"/>
+                  </a:solidFill>
+                  <a:headEnd type="none"/>
+                  <a:tailEnd type="none" w="med" len="lg"/>
+                </a:ln>
+              </p:spPr>
+              <p:style>
+                <a:lnRef idx="1">
+                  <a:schemeClr val="accent1"/>
+                </a:lnRef>
+                <a:fillRef idx="0">
+                  <a:schemeClr val="accent1"/>
+                </a:fillRef>
+                <a:effectRef idx="0">
+                  <a:schemeClr val="accent1"/>
+                </a:effectRef>
+                <a:fontRef idx="minor">
+                  <a:schemeClr val="tx1"/>
+                </a:fontRef>
+              </p:style>
+            </p:cxnSp>
+            <p:cxnSp>
+              <p:nvCxnSpPr>
+                <p:cNvPr id="138" name="Connecteur droit avec flèche 137">
+                  <a:extLst>
+                    <a:ext uri="{FF2B5EF4-FFF2-40B4-BE49-F238E27FC236}">
+                      <a16:creationId xmlns:a16="http://schemas.microsoft.com/office/drawing/2014/main" id="{E9E77251-207B-2A1C-32A6-689D0D236F09}"/>
+                    </a:ext>
+                  </a:extLst>
+                </p:cNvPr>
+                <p:cNvCxnSpPr>
+                  <a:cxnSpLocks/>
+                </p:cNvCxnSpPr>
+                <p:nvPr/>
+              </p:nvCxnSpPr>
+              <p:spPr>
+                <a:xfrm>
+                  <a:off x="5090421" y="3869971"/>
+                  <a:ext cx="0" cy="715474"/>
+                </a:xfrm>
+                <a:prstGeom prst="straightConnector1">
+                  <a:avLst/>
+                </a:prstGeom>
+                <a:ln w="28575">
+                  <a:solidFill>
+                    <a:srgbClr val="00B050"/>
+                  </a:solidFill>
+                  <a:headEnd type="none"/>
+                  <a:tailEnd type="none" w="med" len="lg"/>
+                </a:ln>
+              </p:spPr>
+              <p:style>
+                <a:lnRef idx="1">
+                  <a:schemeClr val="accent1"/>
+                </a:lnRef>
+                <a:fillRef idx="0">
+                  <a:schemeClr val="accent1"/>
+                </a:fillRef>
+                <a:effectRef idx="0">
+                  <a:schemeClr val="accent1"/>
+                </a:effectRef>
+                <a:fontRef idx="minor">
+                  <a:schemeClr val="tx1"/>
+                </a:fontRef>
+              </p:style>
+            </p:cxnSp>
+            <p:cxnSp>
+              <p:nvCxnSpPr>
+                <p:cNvPr id="139" name="Connecteur droit avec flèche 138">
+                  <a:extLst>
+                    <a:ext uri="{FF2B5EF4-FFF2-40B4-BE49-F238E27FC236}">
+                      <a16:creationId xmlns:a16="http://schemas.microsoft.com/office/drawing/2014/main" id="{3085258B-4236-C844-E404-36AC532777A5}"/>
+                    </a:ext>
+                  </a:extLst>
+                </p:cNvPr>
+                <p:cNvCxnSpPr>
+                  <a:cxnSpLocks/>
+                </p:cNvCxnSpPr>
+                <p:nvPr/>
+              </p:nvCxnSpPr>
+              <p:spPr>
+                <a:xfrm>
+                  <a:off x="5090421" y="4585445"/>
+                  <a:ext cx="216000" cy="0"/>
+                </a:xfrm>
+                <a:prstGeom prst="straightConnector1">
+                  <a:avLst/>
+                </a:prstGeom>
+                <a:ln w="28575">
+                  <a:solidFill>
+                    <a:srgbClr val="00B050"/>
+                  </a:solidFill>
+                  <a:headEnd type="none"/>
+                  <a:tailEnd type="none" w="med" len="lg"/>
+                </a:ln>
+              </p:spPr>
+              <p:style>
+                <a:lnRef idx="1">
+                  <a:schemeClr val="accent1"/>
+                </a:lnRef>
+                <a:fillRef idx="0">
+                  <a:schemeClr val="accent1"/>
+                </a:fillRef>
+                <a:effectRef idx="0">
+                  <a:schemeClr val="accent1"/>
+                </a:effectRef>
+                <a:fontRef idx="minor">
+                  <a:schemeClr val="tx1"/>
+                </a:fontRef>
+              </p:style>
+            </p:cxnSp>
+            <p:cxnSp>
+              <p:nvCxnSpPr>
+                <p:cNvPr id="140" name="Connecteur droit avec flèche 139">
+                  <a:extLst>
+                    <a:ext uri="{FF2B5EF4-FFF2-40B4-BE49-F238E27FC236}">
+                      <a16:creationId xmlns:a16="http://schemas.microsoft.com/office/drawing/2014/main" id="{C7C2728F-C7A3-5432-FDD1-0E91F025B7A6}"/>
+                    </a:ext>
+                  </a:extLst>
+                </p:cNvPr>
+                <p:cNvCxnSpPr>
+                  <a:cxnSpLocks/>
+                </p:cNvCxnSpPr>
+                <p:nvPr/>
+              </p:nvCxnSpPr>
+              <p:spPr>
+                <a:xfrm>
+                  <a:off x="5306421" y="3869971"/>
+                  <a:ext cx="0" cy="715474"/>
+                </a:xfrm>
+                <a:prstGeom prst="straightConnector1">
+                  <a:avLst/>
+                </a:prstGeom>
+                <a:ln w="28575">
+                  <a:solidFill>
+                    <a:srgbClr val="00B050"/>
+                  </a:solidFill>
+                  <a:headEnd type="none"/>
+                  <a:tailEnd type="none" w="med" len="lg"/>
+                </a:ln>
+              </p:spPr>
+              <p:style>
+                <a:lnRef idx="1">
+                  <a:schemeClr val="accent1"/>
+                </a:lnRef>
+                <a:fillRef idx="0">
+                  <a:schemeClr val="accent1"/>
+                </a:fillRef>
+                <a:effectRef idx="0">
+                  <a:schemeClr val="accent1"/>
+                </a:effectRef>
+                <a:fontRef idx="minor">
+                  <a:schemeClr val="tx1"/>
+                </a:fontRef>
+              </p:style>
+            </p:cxnSp>
+          </p:grpSp>
+          <p:grpSp>
+            <p:nvGrpSpPr>
+              <p:cNvPr id="141" name="Groupe 140">
+                <a:extLst>
+                  <a:ext uri="{FF2B5EF4-FFF2-40B4-BE49-F238E27FC236}">
+                    <a16:creationId xmlns:a16="http://schemas.microsoft.com/office/drawing/2014/main" id="{2555494A-78AC-9E7B-6B3B-12492A68C360}"/>
+                  </a:ext>
+                </a:extLst>
+              </p:cNvPr>
+              <p:cNvGrpSpPr/>
+              <p:nvPr/>
+            </p:nvGrpSpPr>
+            <p:grpSpPr>
+              <a:xfrm>
+                <a:off x="5303810" y="4989614"/>
+                <a:ext cx="648000" cy="715474"/>
+                <a:chOff x="4658421" y="3869971"/>
+                <a:chExt cx="648000" cy="715474"/>
+              </a:xfrm>
+            </p:grpSpPr>
+            <p:cxnSp>
+              <p:nvCxnSpPr>
+                <p:cNvPr id="142" name="Connecteur droit avec flèche 141">
+                  <a:extLst>
+                    <a:ext uri="{FF2B5EF4-FFF2-40B4-BE49-F238E27FC236}">
+                      <a16:creationId xmlns:a16="http://schemas.microsoft.com/office/drawing/2014/main" id="{02E3EABA-D8EF-688F-7025-45C52252651F}"/>
+                    </a:ext>
+                  </a:extLst>
+                </p:cNvPr>
+                <p:cNvCxnSpPr>
+                  <a:cxnSpLocks/>
+                </p:cNvCxnSpPr>
+                <p:nvPr/>
+              </p:nvCxnSpPr>
+              <p:spPr>
+                <a:xfrm>
+                  <a:off x="4658421" y="3869971"/>
+                  <a:ext cx="432000" cy="0"/>
+                </a:xfrm>
+                <a:prstGeom prst="straightConnector1">
+                  <a:avLst/>
+                </a:prstGeom>
+                <a:ln w="28575">
+                  <a:solidFill>
+                    <a:srgbClr val="00B050"/>
+                  </a:solidFill>
+                  <a:headEnd type="none"/>
+                  <a:tailEnd type="none" w="med" len="lg"/>
+                </a:ln>
+              </p:spPr>
+              <p:style>
+                <a:lnRef idx="1">
+                  <a:schemeClr val="accent1"/>
+                </a:lnRef>
+                <a:fillRef idx="0">
+                  <a:schemeClr val="accent1"/>
+                </a:fillRef>
+                <a:effectRef idx="0">
+                  <a:schemeClr val="accent1"/>
+                </a:effectRef>
+                <a:fontRef idx="minor">
+                  <a:schemeClr val="tx1"/>
+                </a:fontRef>
+              </p:style>
+            </p:cxnSp>
+            <p:cxnSp>
+              <p:nvCxnSpPr>
+                <p:cNvPr id="143" name="Connecteur droit avec flèche 142">
+                  <a:extLst>
+                    <a:ext uri="{FF2B5EF4-FFF2-40B4-BE49-F238E27FC236}">
+                      <a16:creationId xmlns:a16="http://schemas.microsoft.com/office/drawing/2014/main" id="{C436233C-292E-48FE-813A-1FCC21E2FC8D}"/>
+                    </a:ext>
+                  </a:extLst>
+                </p:cNvPr>
+                <p:cNvCxnSpPr>
+                  <a:cxnSpLocks/>
+                </p:cNvCxnSpPr>
+                <p:nvPr/>
+              </p:nvCxnSpPr>
+              <p:spPr>
+                <a:xfrm>
+                  <a:off x="5090421" y="3869971"/>
+                  <a:ext cx="0" cy="715474"/>
+                </a:xfrm>
+                <a:prstGeom prst="straightConnector1">
+                  <a:avLst/>
+                </a:prstGeom>
+                <a:ln w="28575">
+                  <a:solidFill>
+                    <a:srgbClr val="00B050"/>
+                  </a:solidFill>
+                  <a:headEnd type="none"/>
+                  <a:tailEnd type="none" w="med" len="lg"/>
+                </a:ln>
+              </p:spPr>
+              <p:style>
+                <a:lnRef idx="1">
+                  <a:schemeClr val="accent1"/>
+                </a:lnRef>
+                <a:fillRef idx="0">
+                  <a:schemeClr val="accent1"/>
+                </a:fillRef>
+                <a:effectRef idx="0">
+                  <a:schemeClr val="accent1"/>
+                </a:effectRef>
+                <a:fontRef idx="minor">
+                  <a:schemeClr val="tx1"/>
+                </a:fontRef>
+              </p:style>
+            </p:cxnSp>
+            <p:cxnSp>
+              <p:nvCxnSpPr>
+                <p:cNvPr id="144" name="Connecteur droit avec flèche 143">
+                  <a:extLst>
+                    <a:ext uri="{FF2B5EF4-FFF2-40B4-BE49-F238E27FC236}">
+                      <a16:creationId xmlns:a16="http://schemas.microsoft.com/office/drawing/2014/main" id="{7E58944D-C53B-8F4F-4652-805B993FC508}"/>
+                    </a:ext>
+                  </a:extLst>
+                </p:cNvPr>
+                <p:cNvCxnSpPr>
+                  <a:cxnSpLocks/>
+                </p:cNvCxnSpPr>
+                <p:nvPr/>
+              </p:nvCxnSpPr>
+              <p:spPr>
+                <a:xfrm>
+                  <a:off x="5090421" y="4585445"/>
+                  <a:ext cx="216000" cy="0"/>
+                </a:xfrm>
+                <a:prstGeom prst="straightConnector1">
+                  <a:avLst/>
+                </a:prstGeom>
+                <a:ln w="28575">
+                  <a:solidFill>
+                    <a:srgbClr val="00B050"/>
+                  </a:solidFill>
+                  <a:headEnd type="none"/>
+                  <a:tailEnd type="none" w="med" len="lg"/>
+                </a:ln>
+              </p:spPr>
+              <p:style>
+                <a:lnRef idx="1">
+                  <a:schemeClr val="accent1"/>
+                </a:lnRef>
+                <a:fillRef idx="0">
+                  <a:schemeClr val="accent1"/>
+                </a:fillRef>
+                <a:effectRef idx="0">
+                  <a:schemeClr val="accent1"/>
+                </a:effectRef>
+                <a:fontRef idx="minor">
+                  <a:schemeClr val="tx1"/>
+                </a:fontRef>
+              </p:style>
+            </p:cxnSp>
+            <p:cxnSp>
+              <p:nvCxnSpPr>
+                <p:cNvPr id="145" name="Connecteur droit avec flèche 144">
+                  <a:extLst>
+                    <a:ext uri="{FF2B5EF4-FFF2-40B4-BE49-F238E27FC236}">
+                      <a16:creationId xmlns:a16="http://schemas.microsoft.com/office/drawing/2014/main" id="{1988929A-FF33-E15D-CE60-3C695F1D2546}"/>
+                    </a:ext>
+                  </a:extLst>
+                </p:cNvPr>
+                <p:cNvCxnSpPr>
+                  <a:cxnSpLocks/>
+                </p:cNvCxnSpPr>
+                <p:nvPr/>
+              </p:nvCxnSpPr>
+              <p:spPr>
+                <a:xfrm>
+                  <a:off x="5306421" y="3869971"/>
+                  <a:ext cx="0" cy="715474"/>
+                </a:xfrm>
+                <a:prstGeom prst="straightConnector1">
+                  <a:avLst/>
+                </a:prstGeom>
+                <a:ln w="28575">
+                  <a:solidFill>
+                    <a:srgbClr val="00B050"/>
+                  </a:solidFill>
+                  <a:headEnd type="none"/>
+                  <a:tailEnd type="none" w="med" len="lg"/>
+                </a:ln>
+              </p:spPr>
+              <p:style>
+                <a:lnRef idx="1">
+                  <a:schemeClr val="accent1"/>
+                </a:lnRef>
+                <a:fillRef idx="0">
+                  <a:schemeClr val="accent1"/>
+                </a:fillRef>
+                <a:effectRef idx="0">
+                  <a:schemeClr val="accent1"/>
+                </a:effectRef>
+                <a:fontRef idx="minor">
+                  <a:schemeClr val="tx1"/>
+                </a:fontRef>
+              </p:style>
+            </p:cxnSp>
+          </p:grpSp>
+          <p:grpSp>
+            <p:nvGrpSpPr>
+              <p:cNvPr id="146" name="Groupe 145">
+                <a:extLst>
+                  <a:ext uri="{FF2B5EF4-FFF2-40B4-BE49-F238E27FC236}">
+                    <a16:creationId xmlns:a16="http://schemas.microsoft.com/office/drawing/2014/main" id="{18EF7305-0A60-3CD5-6999-714013FC5846}"/>
+                  </a:ext>
+                </a:extLst>
+              </p:cNvPr>
+              <p:cNvGrpSpPr/>
+              <p:nvPr/>
+            </p:nvGrpSpPr>
+            <p:grpSpPr>
+              <a:xfrm>
+                <a:off x="5949199" y="4989614"/>
+                <a:ext cx="648000" cy="715474"/>
+                <a:chOff x="4658421" y="3869971"/>
+                <a:chExt cx="648000" cy="715474"/>
+              </a:xfrm>
+            </p:grpSpPr>
+            <p:cxnSp>
+              <p:nvCxnSpPr>
+                <p:cNvPr id="147" name="Connecteur droit avec flèche 146">
+                  <a:extLst>
+                    <a:ext uri="{FF2B5EF4-FFF2-40B4-BE49-F238E27FC236}">
+                      <a16:creationId xmlns:a16="http://schemas.microsoft.com/office/drawing/2014/main" id="{27E80777-4BE9-8846-AB34-4DF8163A0EC2}"/>
+                    </a:ext>
+                  </a:extLst>
+                </p:cNvPr>
+                <p:cNvCxnSpPr>
+                  <a:cxnSpLocks/>
+                </p:cNvCxnSpPr>
+                <p:nvPr/>
+              </p:nvCxnSpPr>
+              <p:spPr>
+                <a:xfrm>
+                  <a:off x="4658421" y="3869971"/>
+                  <a:ext cx="432000" cy="0"/>
+                </a:xfrm>
+                <a:prstGeom prst="straightConnector1">
+                  <a:avLst/>
+                </a:prstGeom>
+                <a:ln w="28575">
+                  <a:solidFill>
+                    <a:srgbClr val="00B050"/>
+                  </a:solidFill>
+                  <a:headEnd type="none"/>
+                  <a:tailEnd type="none" w="med" len="lg"/>
+                </a:ln>
+              </p:spPr>
+              <p:style>
+                <a:lnRef idx="1">
+                  <a:schemeClr val="accent1"/>
+                </a:lnRef>
+                <a:fillRef idx="0">
+                  <a:schemeClr val="accent1"/>
+                </a:fillRef>
+                <a:effectRef idx="0">
+                  <a:schemeClr val="accent1"/>
+                </a:effectRef>
+                <a:fontRef idx="minor">
+                  <a:schemeClr val="tx1"/>
+                </a:fontRef>
+              </p:style>
+            </p:cxnSp>
+            <p:cxnSp>
+              <p:nvCxnSpPr>
+                <p:cNvPr id="148" name="Connecteur droit avec flèche 147">
+                  <a:extLst>
+                    <a:ext uri="{FF2B5EF4-FFF2-40B4-BE49-F238E27FC236}">
+                      <a16:creationId xmlns:a16="http://schemas.microsoft.com/office/drawing/2014/main" id="{1120ADD9-D6BD-1325-6EB0-182F4956D60C}"/>
+                    </a:ext>
+                  </a:extLst>
+                </p:cNvPr>
+                <p:cNvCxnSpPr>
+                  <a:cxnSpLocks/>
+                </p:cNvCxnSpPr>
+                <p:nvPr/>
+              </p:nvCxnSpPr>
+              <p:spPr>
+                <a:xfrm>
+                  <a:off x="5090421" y="3869971"/>
+                  <a:ext cx="0" cy="715474"/>
+                </a:xfrm>
+                <a:prstGeom prst="straightConnector1">
+                  <a:avLst/>
+                </a:prstGeom>
+                <a:ln w="28575">
+                  <a:solidFill>
+                    <a:srgbClr val="00B050"/>
+                  </a:solidFill>
+                  <a:headEnd type="none"/>
+                  <a:tailEnd type="none" w="med" len="lg"/>
+                </a:ln>
+              </p:spPr>
+              <p:style>
+                <a:lnRef idx="1">
+                  <a:schemeClr val="accent1"/>
+                </a:lnRef>
+                <a:fillRef idx="0">
+                  <a:schemeClr val="accent1"/>
+                </a:fillRef>
+                <a:effectRef idx="0">
+                  <a:schemeClr val="accent1"/>
+                </a:effectRef>
+                <a:fontRef idx="minor">
+                  <a:schemeClr val="tx1"/>
+                </a:fontRef>
+              </p:style>
+            </p:cxnSp>
+            <p:cxnSp>
+              <p:nvCxnSpPr>
+                <p:cNvPr id="149" name="Connecteur droit avec flèche 148">
+                  <a:extLst>
+                    <a:ext uri="{FF2B5EF4-FFF2-40B4-BE49-F238E27FC236}">
+                      <a16:creationId xmlns:a16="http://schemas.microsoft.com/office/drawing/2014/main" id="{3A1C5BFA-7E09-E77B-BE39-DF9BB5A973BF}"/>
+                    </a:ext>
+                  </a:extLst>
+                </p:cNvPr>
+                <p:cNvCxnSpPr>
+                  <a:cxnSpLocks/>
+                </p:cNvCxnSpPr>
+                <p:nvPr/>
+              </p:nvCxnSpPr>
+              <p:spPr>
+                <a:xfrm>
+                  <a:off x="5090421" y="4585445"/>
+                  <a:ext cx="216000" cy="0"/>
+                </a:xfrm>
+                <a:prstGeom prst="straightConnector1">
+                  <a:avLst/>
+                </a:prstGeom>
+                <a:ln w="28575">
+                  <a:solidFill>
+                    <a:srgbClr val="00B050"/>
+                  </a:solidFill>
+                  <a:headEnd type="none"/>
+                  <a:tailEnd type="none" w="med" len="lg"/>
+                </a:ln>
+              </p:spPr>
+              <p:style>
+                <a:lnRef idx="1">
+                  <a:schemeClr val="accent1"/>
+                </a:lnRef>
+                <a:fillRef idx="0">
+                  <a:schemeClr val="accent1"/>
+                </a:fillRef>
+                <a:effectRef idx="0">
+                  <a:schemeClr val="accent1"/>
+                </a:effectRef>
+                <a:fontRef idx="minor">
+                  <a:schemeClr val="tx1"/>
+                </a:fontRef>
+              </p:style>
+            </p:cxnSp>
+            <p:cxnSp>
+              <p:nvCxnSpPr>
+                <p:cNvPr id="150" name="Connecteur droit avec flèche 149">
+                  <a:extLst>
+                    <a:ext uri="{FF2B5EF4-FFF2-40B4-BE49-F238E27FC236}">
+                      <a16:creationId xmlns:a16="http://schemas.microsoft.com/office/drawing/2014/main" id="{B8AB4E11-1B10-CAF1-8E8A-4F1DBC2A97A0}"/>
+                    </a:ext>
+                  </a:extLst>
+                </p:cNvPr>
+                <p:cNvCxnSpPr>
+                  <a:cxnSpLocks/>
+                </p:cNvCxnSpPr>
+                <p:nvPr/>
+              </p:nvCxnSpPr>
+              <p:spPr>
+                <a:xfrm>
+                  <a:off x="5306421" y="3869971"/>
+                  <a:ext cx="0" cy="715474"/>
+                </a:xfrm>
+                <a:prstGeom prst="straightConnector1">
+                  <a:avLst/>
+                </a:prstGeom>
+                <a:ln w="28575">
+                  <a:solidFill>
+                    <a:srgbClr val="00B050"/>
+                  </a:solidFill>
+                  <a:headEnd type="none"/>
+                  <a:tailEnd type="none" w="med" len="lg"/>
+                </a:ln>
+              </p:spPr>
+              <p:style>
+                <a:lnRef idx="1">
+                  <a:schemeClr val="accent1"/>
+                </a:lnRef>
+                <a:fillRef idx="0">
+                  <a:schemeClr val="accent1"/>
+                </a:fillRef>
+                <a:effectRef idx="0">
+                  <a:schemeClr val="accent1"/>
+                </a:effectRef>
+                <a:fontRef idx="minor">
+                  <a:schemeClr val="tx1"/>
+                </a:fontRef>
+              </p:style>
+            </p:cxnSp>
+          </p:grpSp>
+          <p:grpSp>
+            <p:nvGrpSpPr>
+              <p:cNvPr id="151" name="Groupe 150">
+                <a:extLst>
+                  <a:ext uri="{FF2B5EF4-FFF2-40B4-BE49-F238E27FC236}">
+                    <a16:creationId xmlns:a16="http://schemas.microsoft.com/office/drawing/2014/main" id="{0131E0C6-A8E7-22F4-2109-F73A3628A416}"/>
+                  </a:ext>
+                </a:extLst>
+              </p:cNvPr>
+              <p:cNvGrpSpPr/>
+              <p:nvPr/>
+            </p:nvGrpSpPr>
+            <p:grpSpPr>
+              <a:xfrm>
+                <a:off x="6594588" y="4989614"/>
+                <a:ext cx="648000" cy="715474"/>
+                <a:chOff x="4658421" y="3869971"/>
+                <a:chExt cx="648000" cy="715474"/>
+              </a:xfrm>
+            </p:grpSpPr>
+            <p:cxnSp>
+              <p:nvCxnSpPr>
+                <p:cNvPr id="152" name="Connecteur droit avec flèche 151">
+                  <a:extLst>
+                    <a:ext uri="{FF2B5EF4-FFF2-40B4-BE49-F238E27FC236}">
+                      <a16:creationId xmlns:a16="http://schemas.microsoft.com/office/drawing/2014/main" id="{38340030-B426-BA08-27B0-57E9740518D1}"/>
+                    </a:ext>
+                  </a:extLst>
+                </p:cNvPr>
+                <p:cNvCxnSpPr>
+                  <a:cxnSpLocks/>
+                </p:cNvCxnSpPr>
+                <p:nvPr/>
+              </p:nvCxnSpPr>
+              <p:spPr>
+                <a:xfrm>
+                  <a:off x="4658421" y="3869971"/>
+                  <a:ext cx="432000" cy="0"/>
+                </a:xfrm>
+                <a:prstGeom prst="straightConnector1">
+                  <a:avLst/>
+                </a:prstGeom>
+                <a:ln w="28575">
+                  <a:solidFill>
+                    <a:srgbClr val="00B050"/>
+                  </a:solidFill>
+                  <a:headEnd type="none"/>
+                  <a:tailEnd type="none" w="med" len="lg"/>
+                </a:ln>
+              </p:spPr>
+              <p:style>
+                <a:lnRef idx="1">
+                  <a:schemeClr val="accent1"/>
+                </a:lnRef>
+                <a:fillRef idx="0">
+                  <a:schemeClr val="accent1"/>
+                </a:fillRef>
+                <a:effectRef idx="0">
+                  <a:schemeClr val="accent1"/>
+                </a:effectRef>
+                <a:fontRef idx="minor">
+                  <a:schemeClr val="tx1"/>
+                </a:fontRef>
+              </p:style>
+            </p:cxnSp>
+            <p:cxnSp>
+              <p:nvCxnSpPr>
+                <p:cNvPr id="153" name="Connecteur droit avec flèche 152">
+                  <a:extLst>
+                    <a:ext uri="{FF2B5EF4-FFF2-40B4-BE49-F238E27FC236}">
+                      <a16:creationId xmlns:a16="http://schemas.microsoft.com/office/drawing/2014/main" id="{EE2246F6-1688-3132-4E4E-DD648A96C1D7}"/>
+                    </a:ext>
+                  </a:extLst>
+                </p:cNvPr>
+                <p:cNvCxnSpPr>
+                  <a:cxnSpLocks/>
+                </p:cNvCxnSpPr>
+                <p:nvPr/>
+              </p:nvCxnSpPr>
+              <p:spPr>
+                <a:xfrm>
+                  <a:off x="5090421" y="3869971"/>
+                  <a:ext cx="0" cy="715474"/>
+                </a:xfrm>
+                <a:prstGeom prst="straightConnector1">
+                  <a:avLst/>
+                </a:prstGeom>
+                <a:ln w="28575">
+                  <a:solidFill>
+                    <a:srgbClr val="00B050"/>
+                  </a:solidFill>
+                  <a:headEnd type="none"/>
+                  <a:tailEnd type="none" w="med" len="lg"/>
+                </a:ln>
+              </p:spPr>
+              <p:style>
+                <a:lnRef idx="1">
+                  <a:schemeClr val="accent1"/>
+                </a:lnRef>
+                <a:fillRef idx="0">
+                  <a:schemeClr val="accent1"/>
+                </a:fillRef>
+                <a:effectRef idx="0">
+                  <a:schemeClr val="accent1"/>
+                </a:effectRef>
+                <a:fontRef idx="minor">
+                  <a:schemeClr val="tx1"/>
+                </a:fontRef>
+              </p:style>
+            </p:cxnSp>
+            <p:cxnSp>
+              <p:nvCxnSpPr>
+                <p:cNvPr id="154" name="Connecteur droit avec flèche 153">
+                  <a:extLst>
+                    <a:ext uri="{FF2B5EF4-FFF2-40B4-BE49-F238E27FC236}">
+                      <a16:creationId xmlns:a16="http://schemas.microsoft.com/office/drawing/2014/main" id="{5863889C-1D53-8E9A-47EB-E117578F0A62}"/>
+                    </a:ext>
+                  </a:extLst>
+                </p:cNvPr>
+                <p:cNvCxnSpPr>
+                  <a:cxnSpLocks/>
+                </p:cNvCxnSpPr>
+                <p:nvPr/>
+              </p:nvCxnSpPr>
+              <p:spPr>
+                <a:xfrm>
+                  <a:off x="5090421" y="4585445"/>
+                  <a:ext cx="216000" cy="0"/>
+                </a:xfrm>
+                <a:prstGeom prst="straightConnector1">
+                  <a:avLst/>
+                </a:prstGeom>
+                <a:ln w="28575">
+                  <a:solidFill>
+                    <a:srgbClr val="00B050"/>
+                  </a:solidFill>
+                  <a:headEnd type="none"/>
+                  <a:tailEnd type="none" w="med" len="lg"/>
+                </a:ln>
+              </p:spPr>
+              <p:style>
+                <a:lnRef idx="1">
+                  <a:schemeClr val="accent1"/>
+                </a:lnRef>
+                <a:fillRef idx="0">
+                  <a:schemeClr val="accent1"/>
+                </a:fillRef>
+                <a:effectRef idx="0">
+                  <a:schemeClr val="accent1"/>
+                </a:effectRef>
+                <a:fontRef idx="minor">
+                  <a:schemeClr val="tx1"/>
+                </a:fontRef>
+              </p:style>
+            </p:cxnSp>
+            <p:cxnSp>
+              <p:nvCxnSpPr>
+                <p:cNvPr id="155" name="Connecteur droit avec flèche 154">
+                  <a:extLst>
+                    <a:ext uri="{FF2B5EF4-FFF2-40B4-BE49-F238E27FC236}">
+                      <a16:creationId xmlns:a16="http://schemas.microsoft.com/office/drawing/2014/main" id="{4A2F713D-4DD5-E942-199A-4B751A9F7638}"/>
+                    </a:ext>
+                  </a:extLst>
+                </p:cNvPr>
+                <p:cNvCxnSpPr>
+                  <a:cxnSpLocks/>
+                </p:cNvCxnSpPr>
+                <p:nvPr/>
+              </p:nvCxnSpPr>
+              <p:spPr>
+                <a:xfrm>
+                  <a:off x="5306421" y="3869971"/>
+                  <a:ext cx="0" cy="715474"/>
+                </a:xfrm>
+                <a:prstGeom prst="straightConnector1">
+                  <a:avLst/>
+                </a:prstGeom>
+                <a:ln w="28575">
+                  <a:solidFill>
+                    <a:srgbClr val="00B050"/>
+                  </a:solidFill>
+                  <a:headEnd type="none"/>
+                  <a:tailEnd type="none" w="med" len="lg"/>
+                </a:ln>
+              </p:spPr>
+              <p:style>
+                <a:lnRef idx="1">
+                  <a:schemeClr val="accent1"/>
+                </a:lnRef>
+                <a:fillRef idx="0">
+                  <a:schemeClr val="accent1"/>
+                </a:fillRef>
+                <a:effectRef idx="0">
+                  <a:schemeClr val="accent1"/>
+                </a:effectRef>
+                <a:fontRef idx="minor">
+                  <a:schemeClr val="tx1"/>
+                </a:fontRef>
+              </p:style>
+            </p:cxnSp>
+          </p:grpSp>
+          <p:grpSp>
+            <p:nvGrpSpPr>
+              <p:cNvPr id="156" name="Groupe 155">
+                <a:extLst>
+                  <a:ext uri="{FF2B5EF4-FFF2-40B4-BE49-F238E27FC236}">
+                    <a16:creationId xmlns:a16="http://schemas.microsoft.com/office/drawing/2014/main" id="{E7AE1D1B-BAD6-85AE-03E5-46382687C532}"/>
+                  </a:ext>
+                </a:extLst>
+              </p:cNvPr>
+              <p:cNvGrpSpPr/>
+              <p:nvPr/>
+            </p:nvGrpSpPr>
+            <p:grpSpPr>
+              <a:xfrm>
+                <a:off x="7239977" y="4989614"/>
+                <a:ext cx="648000" cy="715474"/>
+                <a:chOff x="4658421" y="3869971"/>
+                <a:chExt cx="648000" cy="715474"/>
+              </a:xfrm>
+            </p:grpSpPr>
+            <p:cxnSp>
+              <p:nvCxnSpPr>
+                <p:cNvPr id="157" name="Connecteur droit avec flèche 156">
+                  <a:extLst>
+                    <a:ext uri="{FF2B5EF4-FFF2-40B4-BE49-F238E27FC236}">
+                      <a16:creationId xmlns:a16="http://schemas.microsoft.com/office/drawing/2014/main" id="{A9AE4E3C-DAEC-68BD-1BA0-D43E0E0A5CDA}"/>
+                    </a:ext>
+                  </a:extLst>
+                </p:cNvPr>
+                <p:cNvCxnSpPr>
+                  <a:cxnSpLocks/>
+                </p:cNvCxnSpPr>
+                <p:nvPr/>
+              </p:nvCxnSpPr>
+              <p:spPr>
+                <a:xfrm>
+                  <a:off x="4658421" y="3869971"/>
+                  <a:ext cx="432000" cy="0"/>
+                </a:xfrm>
+                <a:prstGeom prst="straightConnector1">
+                  <a:avLst/>
+                </a:prstGeom>
+                <a:ln w="28575">
+                  <a:solidFill>
+                    <a:srgbClr val="00B050"/>
+                  </a:solidFill>
+                  <a:headEnd type="none"/>
+                  <a:tailEnd type="none" w="med" len="lg"/>
+                </a:ln>
+              </p:spPr>
+              <p:style>
+                <a:lnRef idx="1">
+                  <a:schemeClr val="accent1"/>
+                </a:lnRef>
+                <a:fillRef idx="0">
+                  <a:schemeClr val="accent1"/>
+                </a:fillRef>
+                <a:effectRef idx="0">
+                  <a:schemeClr val="accent1"/>
+                </a:effectRef>
+                <a:fontRef idx="minor">
+                  <a:schemeClr val="tx1"/>
+                </a:fontRef>
+              </p:style>
+            </p:cxnSp>
+            <p:cxnSp>
+              <p:nvCxnSpPr>
+                <p:cNvPr id="158" name="Connecteur droit avec flèche 157">
+                  <a:extLst>
+                    <a:ext uri="{FF2B5EF4-FFF2-40B4-BE49-F238E27FC236}">
+                      <a16:creationId xmlns:a16="http://schemas.microsoft.com/office/drawing/2014/main" id="{9FD354C3-38A5-9560-3895-5A05BE0B2106}"/>
+                    </a:ext>
+                  </a:extLst>
+                </p:cNvPr>
+                <p:cNvCxnSpPr>
+                  <a:cxnSpLocks/>
+                </p:cNvCxnSpPr>
+                <p:nvPr/>
+              </p:nvCxnSpPr>
+              <p:spPr>
+                <a:xfrm>
+                  <a:off x="5090421" y="3869971"/>
+                  <a:ext cx="0" cy="715474"/>
+                </a:xfrm>
+                <a:prstGeom prst="straightConnector1">
+                  <a:avLst/>
+                </a:prstGeom>
+                <a:ln w="28575">
+                  <a:solidFill>
+                    <a:srgbClr val="00B050"/>
+                  </a:solidFill>
+                  <a:headEnd type="none"/>
+                  <a:tailEnd type="none" w="med" len="lg"/>
+                </a:ln>
+              </p:spPr>
+              <p:style>
+                <a:lnRef idx="1">
+                  <a:schemeClr val="accent1"/>
+                </a:lnRef>
+                <a:fillRef idx="0">
+                  <a:schemeClr val="accent1"/>
+                </a:fillRef>
+                <a:effectRef idx="0">
+                  <a:schemeClr val="accent1"/>
+                </a:effectRef>
+                <a:fontRef idx="minor">
+                  <a:schemeClr val="tx1"/>
+                </a:fontRef>
+              </p:style>
+            </p:cxnSp>
+            <p:cxnSp>
+              <p:nvCxnSpPr>
+                <p:cNvPr id="159" name="Connecteur droit avec flèche 158">
+                  <a:extLst>
+                    <a:ext uri="{FF2B5EF4-FFF2-40B4-BE49-F238E27FC236}">
+                      <a16:creationId xmlns:a16="http://schemas.microsoft.com/office/drawing/2014/main" id="{411DC00A-0EED-863D-38EF-711C0FCAEA57}"/>
+                    </a:ext>
+                  </a:extLst>
+                </p:cNvPr>
+                <p:cNvCxnSpPr>
+                  <a:cxnSpLocks/>
+                </p:cNvCxnSpPr>
+                <p:nvPr/>
+              </p:nvCxnSpPr>
+              <p:spPr>
+                <a:xfrm>
+                  <a:off x="5090421" y="4585445"/>
+                  <a:ext cx="216000" cy="0"/>
+                </a:xfrm>
+                <a:prstGeom prst="straightConnector1">
+                  <a:avLst/>
+                </a:prstGeom>
+                <a:ln w="28575">
+                  <a:solidFill>
+                    <a:srgbClr val="00B050"/>
+                  </a:solidFill>
+                  <a:headEnd type="none"/>
+                  <a:tailEnd type="none" w="med" len="lg"/>
+                </a:ln>
+              </p:spPr>
+              <p:style>
+                <a:lnRef idx="1">
+                  <a:schemeClr val="accent1"/>
+                </a:lnRef>
+                <a:fillRef idx="0">
+                  <a:schemeClr val="accent1"/>
+                </a:fillRef>
+                <a:effectRef idx="0">
+                  <a:schemeClr val="accent1"/>
+                </a:effectRef>
+                <a:fontRef idx="minor">
+                  <a:schemeClr val="tx1"/>
+                </a:fontRef>
+              </p:style>
+            </p:cxnSp>
+            <p:cxnSp>
+              <p:nvCxnSpPr>
+                <p:cNvPr id="160" name="Connecteur droit avec flèche 159">
+                  <a:extLst>
+                    <a:ext uri="{FF2B5EF4-FFF2-40B4-BE49-F238E27FC236}">
+                      <a16:creationId xmlns:a16="http://schemas.microsoft.com/office/drawing/2014/main" id="{6F89B913-820E-ACF2-CDAB-814C3E3CCCF0}"/>
+                    </a:ext>
+                  </a:extLst>
+                </p:cNvPr>
+                <p:cNvCxnSpPr>
+                  <a:cxnSpLocks/>
+                </p:cNvCxnSpPr>
+                <p:nvPr/>
+              </p:nvCxnSpPr>
+              <p:spPr>
+                <a:xfrm>
+                  <a:off x="5306421" y="3869971"/>
+                  <a:ext cx="0" cy="715474"/>
+                </a:xfrm>
+                <a:prstGeom prst="straightConnector1">
+                  <a:avLst/>
+                </a:prstGeom>
+                <a:ln w="28575">
+                  <a:solidFill>
+                    <a:srgbClr val="00B050"/>
+                  </a:solidFill>
+                  <a:headEnd type="none"/>
+                  <a:tailEnd type="none" w="med" len="lg"/>
+                </a:ln>
+              </p:spPr>
+              <p:style>
+                <a:lnRef idx="1">
+                  <a:schemeClr val="accent1"/>
+                </a:lnRef>
+                <a:fillRef idx="0">
+                  <a:schemeClr val="accent1"/>
+                </a:fillRef>
+                <a:effectRef idx="0">
+                  <a:schemeClr val="accent1"/>
+                </a:effectRef>
+                <a:fontRef idx="minor">
+                  <a:schemeClr val="tx1"/>
+                </a:fontRef>
+              </p:style>
+            </p:cxnSp>
+          </p:grpSp>
+        </p:grpSp>
+        <p:cxnSp>
+          <p:nvCxnSpPr>
+            <p:cNvPr id="164" name="Connecteur droit avec flèche 163">
+              <a:extLst>
+                <a:ext uri="{FF2B5EF4-FFF2-40B4-BE49-F238E27FC236}">
+                  <a16:creationId xmlns:a16="http://schemas.microsoft.com/office/drawing/2014/main" id="{13E803D0-E9DF-2204-6419-6D28856A88B9}"/>
+                </a:ext>
+              </a:extLst>
+            </p:cNvPr>
+            <p:cNvCxnSpPr>
+              <a:cxnSpLocks/>
+            </p:cNvCxnSpPr>
+            <p:nvPr/>
+          </p:nvCxnSpPr>
+          <p:spPr>
+            <a:xfrm>
+              <a:off x="5200665" y="5279581"/>
+              <a:ext cx="645389" cy="0"/>
+            </a:xfrm>
+            <a:prstGeom prst="straightConnector1">
+              <a:avLst/>
+            </a:prstGeom>
+            <a:ln w="19050">
+              <a:solidFill>
+                <a:srgbClr val="C00000"/>
+              </a:solidFill>
+              <a:headEnd type="stealth" w="med" len="lg"/>
+              <a:tailEnd type="stealth" w="med" len="lg"/>
+            </a:ln>
+          </p:spPr>
+          <p:style>
+            <a:lnRef idx="1">
+              <a:schemeClr val="accent1"/>
+            </a:lnRef>
+            <a:fillRef idx="0">
+              <a:schemeClr val="accent1"/>
+            </a:fillRef>
+            <a:effectRef idx="0">
+              <a:schemeClr val="accent1"/>
+            </a:effectRef>
+            <a:fontRef idx="minor">
+              <a:schemeClr val="tx1"/>
+            </a:fontRef>
+          </p:style>
+        </p:cxnSp>
+        <mc:AlternateContent xmlns:mc="http://schemas.openxmlformats.org/markup-compatibility/2006" xmlns:a14="http://schemas.microsoft.com/office/drawing/2010/main">
+          <mc:Choice Requires="a14">
+            <p:sp>
+              <p:nvSpPr>
+                <p:cNvPr id="168" name="ZoneTexte 167">
+                  <a:extLst>
+                    <a:ext uri="{FF2B5EF4-FFF2-40B4-BE49-F238E27FC236}">
+                      <a16:creationId xmlns:a16="http://schemas.microsoft.com/office/drawing/2014/main" id="{3518663B-3B1E-F097-A6BB-FF3711883FA8}"/>
+                    </a:ext>
+                  </a:extLst>
+                </p:cNvPr>
+                <p:cNvSpPr txBox="1"/>
+                <p:nvPr/>
+              </p:nvSpPr>
+              <p:spPr>
+                <a:xfrm>
+                  <a:off x="5458341" y="5115599"/>
+                  <a:ext cx="130036" cy="184666"/>
+                </a:xfrm>
+                <a:prstGeom prst="rect">
+                  <a:avLst/>
+                </a:prstGeom>
+                <a:noFill/>
+              </p:spPr>
+              <p:txBody>
+                <a:bodyPr wrap="none" lIns="0" tIns="0" rIns="0" bIns="0" rtlCol="0">
+                  <a:spAutoFit/>
+                </a:bodyPr>
+                <a:lstStyle/>
+                <a:p>
+                  <a:pPr/>
+                  <a14:m>
+                    <m:oMathPara xmlns:m="http://schemas.openxmlformats.org/officeDocument/2006/math">
+                      <m:oMathParaPr>
+                        <m:jc m:val="centerGroup"/>
+                      </m:oMathParaPr>
+                      <m:oMath xmlns:m="http://schemas.openxmlformats.org/officeDocument/2006/math">
+                        <m:r>
+                          <a:rPr lang="fr-FR" sz="1200" b="0" i="1" smtClean="0">
+                            <a:latin typeface="Cambria Math" panose="02040503050406030204" pitchFamily="18" charset="0"/>
+                          </a:rPr>
+                          <m:t>𝑇</m:t>
+                        </m:r>
+                      </m:oMath>
+                    </m:oMathPara>
+                  </a14:m>
+                  <a:endParaRPr lang="fr-FR" sz="1200" dirty="0"/>
+                </a:p>
+              </p:txBody>
+            </p:sp>
+          </mc:Choice>
+          <mc:Fallback xmlns="">
+            <p:sp>
+              <p:nvSpPr>
+                <p:cNvPr id="168" name="ZoneTexte 167">
+                  <a:extLst>
+                    <a:ext uri="{FF2B5EF4-FFF2-40B4-BE49-F238E27FC236}">
+                      <a16:creationId xmlns:a16="http://schemas.microsoft.com/office/drawing/2014/main" id="{3518663B-3B1E-F097-A6BB-FF3711883FA8}"/>
+                    </a:ext>
+                  </a:extLst>
+                </p:cNvPr>
+                <p:cNvSpPr txBox="1">
+                  <a:spLocks noRot="1" noChangeAspect="1" noMove="1" noResize="1" noEditPoints="1" noAdjustHandles="1" noChangeArrowheads="1" noChangeShapeType="1" noTextEdit="1"/>
+                </p:cNvSpPr>
+                <p:nvPr/>
+              </p:nvSpPr>
+              <p:spPr>
+                <a:xfrm>
+                  <a:off x="5458341" y="5115599"/>
+                  <a:ext cx="130036" cy="184666"/>
+                </a:xfrm>
+                <a:prstGeom prst="rect">
+                  <a:avLst/>
+                </a:prstGeom>
+                <a:blipFill>
+                  <a:blip r:embed="rId13"/>
+                  <a:stretch>
+                    <a:fillRect l="-27273" r="-22727" b="-6667"/>
+                  </a:stretch>
+                </a:blipFill>
+              </p:spPr>
+              <p:txBody>
+                <a:bodyPr/>
+                <a:lstStyle/>
+                <a:p>
+                  <a:r>
+                    <a:rPr lang="fr-FR">
+                      <a:noFill/>
+                    </a:rPr>
+                    <a:t> </a:t>
+                  </a:r>
+                </a:p>
+              </p:txBody>
+            </p:sp>
+          </mc:Fallback>
+        </mc:AlternateContent>
+        <mc:AlternateContent xmlns:mc="http://schemas.openxmlformats.org/markup-compatibility/2006" xmlns:a14="http://schemas.microsoft.com/office/drawing/2010/main">
+          <mc:Choice Requires="a14">
+            <p:sp>
+              <p:nvSpPr>
+                <p:cNvPr id="174" name="ZoneTexte 173">
+                  <a:extLst>
+                    <a:ext uri="{FF2B5EF4-FFF2-40B4-BE49-F238E27FC236}">
+                      <a16:creationId xmlns:a16="http://schemas.microsoft.com/office/drawing/2014/main" id="{14310797-2D9B-01EE-3053-ECB9A48F38F4}"/>
+                    </a:ext>
+                  </a:extLst>
+                </p:cNvPr>
+                <p:cNvSpPr txBox="1"/>
+                <p:nvPr/>
+              </p:nvSpPr>
+              <p:spPr>
+                <a:xfrm>
+                  <a:off x="8156645" y="6024478"/>
+                  <a:ext cx="99963" cy="184666"/>
+                </a:xfrm>
+                <a:prstGeom prst="rect">
+                  <a:avLst/>
+                </a:prstGeom>
+                <a:noFill/>
+              </p:spPr>
+              <p:txBody>
+                <a:bodyPr wrap="none" lIns="0" tIns="0" rIns="0" bIns="0" rtlCol="0">
+                  <a:spAutoFit/>
+                </a:bodyPr>
+                <a:lstStyle/>
+                <a:p>
+                  <a:pPr/>
+                  <a14:m>
+                    <m:oMathPara xmlns:m="http://schemas.openxmlformats.org/officeDocument/2006/math">
+                      <m:oMathParaPr>
+                        <m:jc m:val="centerGroup"/>
+                      </m:oMathParaPr>
+                      <m:oMath xmlns:m="http://schemas.openxmlformats.org/officeDocument/2006/math">
+                        <m:r>
+                          <a:rPr lang="fr-FR" sz="1200" b="0" i="1" smtClean="0">
+                            <a:latin typeface="Cambria Math" panose="02040503050406030204" pitchFamily="18" charset="0"/>
+                          </a:rPr>
+                          <m:t>𝑡</m:t>
+                        </m:r>
+                      </m:oMath>
+                    </m:oMathPara>
+                  </a14:m>
+                  <a:endParaRPr lang="fr-FR" sz="1200" dirty="0"/>
+                </a:p>
+              </p:txBody>
+            </p:sp>
+          </mc:Choice>
+          <mc:Fallback xmlns="">
+            <p:sp>
+              <p:nvSpPr>
+                <p:cNvPr id="174" name="ZoneTexte 173">
+                  <a:extLst>
+                    <a:ext uri="{FF2B5EF4-FFF2-40B4-BE49-F238E27FC236}">
+                      <a16:creationId xmlns:a16="http://schemas.microsoft.com/office/drawing/2014/main" id="{14310797-2D9B-01EE-3053-ECB9A48F38F4}"/>
+                    </a:ext>
+                  </a:extLst>
+                </p:cNvPr>
+                <p:cNvSpPr txBox="1">
+                  <a:spLocks noRot="1" noChangeAspect="1" noMove="1" noResize="1" noEditPoints="1" noAdjustHandles="1" noChangeArrowheads="1" noChangeShapeType="1" noTextEdit="1"/>
+                </p:cNvSpPr>
+                <p:nvPr/>
+              </p:nvSpPr>
+              <p:spPr>
+                <a:xfrm>
+                  <a:off x="8156645" y="6024478"/>
+                  <a:ext cx="99963" cy="184666"/>
+                </a:xfrm>
+                <a:prstGeom prst="rect">
+                  <a:avLst/>
+                </a:prstGeom>
+                <a:blipFill>
+                  <a:blip r:embed="rId14"/>
+                  <a:stretch>
+                    <a:fillRect l="-31250" r="-31250"/>
+                  </a:stretch>
+                </a:blipFill>
+              </p:spPr>
+              <p:txBody>
+                <a:bodyPr/>
+                <a:lstStyle/>
+                <a:p>
+                  <a:r>
+                    <a:rPr lang="fr-FR">
+                      <a:noFill/>
+                    </a:rPr>
+                    <a:t> </a:t>
+                  </a:r>
+                </a:p>
+              </p:txBody>
+            </p:sp>
+          </mc:Fallback>
+        </mc:AlternateContent>
+      </p:grpSp>
+    </p:spTree>
+    <p:extLst>
+      <p:ext uri="{BB962C8B-B14F-4D97-AF65-F5344CB8AC3E}">
+        <p14:creationId xmlns:p14="http://schemas.microsoft.com/office/powerpoint/2010/main" val="996282614"/>
+      </p:ext>
+    </p:extLst>
+  </p:cSld>
+  <p:clrMapOvr>
+    <a:masterClrMapping/>
+  </p:clrMapOvr>
+</p:sld>
+</file>
+
+<file path=ppt/slides/slide14.xml><?xml version="1.0" encoding="utf-8"?>
+<p:sld xmlns:a="http://schemas.openxmlformats.org/drawingml/2006/main" xmlns:r="http://schemas.openxmlformats.org/officeDocument/2006/relationships" xmlns:p="http://schemas.openxmlformats.org/presentationml/2006/main">
+  <p:cSld>
+    <p:spTree>
+      <p:nvGrpSpPr>
+        <p:cNvPr id="1" name=""/>
+        <p:cNvGrpSpPr/>
+        <p:nvPr/>
+      </p:nvGrpSpPr>
+      <p:grpSpPr>
+        <a:xfrm>
+          <a:off x="0" y="0"/>
+          <a:ext cx="0" cy="0"/>
+          <a:chOff x="0" y="0"/>
+          <a:chExt cx="0" cy="0"/>
+        </a:xfrm>
+      </p:grpSpPr>
+      <p:sp>
+        <p:nvSpPr>
+          <p:cNvPr id="2" name="Titre 1">
+            <a:extLst>
+              <a:ext uri="{FF2B5EF4-FFF2-40B4-BE49-F238E27FC236}">
+                <a16:creationId xmlns:a16="http://schemas.microsoft.com/office/drawing/2014/main" id="{C007B6BA-62AE-70F7-6190-DE2DA4BEA917}"/>
+              </a:ext>
+            </a:extLst>
+          </p:cNvPr>
+          <p:cNvSpPr>
+            <a:spLocks noGrp="1"/>
+          </p:cNvSpPr>
+          <p:nvPr>
+            <p:ph type="title"/>
+          </p:nvPr>
+        </p:nvSpPr>
+        <p:spPr/>
+        <p:txBody>
+          <a:bodyPr/>
+          <a:lstStyle/>
+          <a:p>
+            <a:endParaRPr lang="fr-FR"/>
+          </a:p>
+        </p:txBody>
+      </p:sp>
+      <p:sp>
+        <p:nvSpPr>
+          <p:cNvPr id="4" name="Rectangle 3">
+            <a:extLst>
+              <a:ext uri="{FF2B5EF4-FFF2-40B4-BE49-F238E27FC236}">
+                <a16:creationId xmlns:a16="http://schemas.microsoft.com/office/drawing/2014/main" id="{8D1C2178-4351-F7DD-8301-7849D6470646}"/>
+              </a:ext>
+            </a:extLst>
+          </p:cNvPr>
+          <p:cNvSpPr/>
+          <p:nvPr/>
+        </p:nvSpPr>
+        <p:spPr>
+          <a:xfrm>
+            <a:off x="2506131" y="2925000"/>
+            <a:ext cx="2340000" cy="1008000"/>
+          </a:xfrm>
+          <a:prstGeom prst="rect">
+            <a:avLst/>
+          </a:prstGeom>
+          <a:solidFill>
+            <a:srgbClr val="FFB9B9">
+              <a:alpha val="20000"/>
+            </a:srgbClr>
+          </a:solidFill>
+          <a:ln>
+            <a:solidFill>
+              <a:srgbClr val="C00000"/>
+            </a:solidFill>
+          </a:ln>
+        </p:spPr>
+        <p:style>
+          <a:lnRef idx="2">
+            <a:schemeClr val="accent1">
+              <a:shade val="15000"/>
+            </a:schemeClr>
+          </a:lnRef>
+          <a:fillRef idx="1">
+            <a:schemeClr val="accent1"/>
+          </a:fillRef>
+          <a:effectRef idx="0">
+            <a:schemeClr val="accent1"/>
+          </a:effectRef>
+          <a:fontRef idx="minor">
+            <a:schemeClr val="lt1"/>
+          </a:fontRef>
+        </p:style>
+        <p:txBody>
+          <a:bodyPr rtlCol="0" anchor="ctr"/>
+          <a:lstStyle/>
+          <a:p>
+            <a:pPr algn="ctr"/>
+            <a:r>
+              <a:rPr lang="fr-FR" b="1" dirty="0">
+                <a:solidFill>
+                  <a:schemeClr val="tx1"/>
+                </a:solidFill>
+              </a:rPr>
+              <a:t>Distribuer – Moduler </a:t>
+            </a:r>
+          </a:p>
+          <a:p>
+            <a:pPr algn="ctr"/>
+            <a:endParaRPr lang="fr-FR" b="1" dirty="0">
+              <a:solidFill>
+                <a:schemeClr val="tx1"/>
+              </a:solidFill>
+            </a:endParaRPr>
+          </a:p>
+          <a:p>
+            <a:pPr algn="ctr"/>
+            <a:r>
+              <a:rPr lang="fr-FR" b="1" dirty="0">
+                <a:solidFill>
+                  <a:schemeClr val="tx1"/>
+                </a:solidFill>
+              </a:rPr>
+              <a:t>Hacheur</a:t>
+            </a:r>
+          </a:p>
+        </p:txBody>
+      </p:sp>
+      <p:cxnSp>
+        <p:nvCxnSpPr>
+          <p:cNvPr id="5" name="Connecteur droit avec flèche 4">
+            <a:extLst>
+              <a:ext uri="{FF2B5EF4-FFF2-40B4-BE49-F238E27FC236}">
+                <a16:creationId xmlns:a16="http://schemas.microsoft.com/office/drawing/2014/main" id="{CFB786EE-D37D-E6D0-6ADE-24E28D528283}"/>
+              </a:ext>
+            </a:extLst>
+          </p:cNvPr>
+          <p:cNvCxnSpPr>
+            <a:cxnSpLocks/>
+          </p:cNvCxnSpPr>
+          <p:nvPr/>
+        </p:nvCxnSpPr>
+        <p:spPr>
+          <a:xfrm>
+            <a:off x="1775637" y="3429000"/>
+            <a:ext cx="730494" cy="0"/>
+          </a:xfrm>
+          <a:prstGeom prst="straightConnector1">
+            <a:avLst/>
+          </a:prstGeom>
+          <a:ln w="28575">
+            <a:solidFill>
+              <a:srgbClr val="00547F"/>
+            </a:solidFill>
+            <a:headEnd type="none"/>
+            <a:tailEnd type="stealth" w="med" len="lg"/>
+          </a:ln>
+        </p:spPr>
+        <p:style>
+          <a:lnRef idx="1">
+            <a:schemeClr val="accent1"/>
+          </a:lnRef>
+          <a:fillRef idx="0">
+            <a:schemeClr val="accent1"/>
+          </a:fillRef>
+          <a:effectRef idx="0">
+            <a:schemeClr val="accent1"/>
+          </a:effectRef>
+          <a:fontRef idx="minor">
+            <a:schemeClr val="tx1"/>
+          </a:fontRef>
+        </p:style>
+      </p:cxnSp>
+      <p:cxnSp>
+        <p:nvCxnSpPr>
+          <p:cNvPr id="7" name="Connecteur droit avec flèche 6">
+            <a:extLst>
+              <a:ext uri="{FF2B5EF4-FFF2-40B4-BE49-F238E27FC236}">
+                <a16:creationId xmlns:a16="http://schemas.microsoft.com/office/drawing/2014/main" id="{30BE5794-8346-2403-5C5E-8D655AAEB5A9}"/>
+              </a:ext>
+            </a:extLst>
+          </p:cNvPr>
+          <p:cNvCxnSpPr>
+            <a:cxnSpLocks/>
+          </p:cNvCxnSpPr>
+          <p:nvPr/>
+        </p:nvCxnSpPr>
+        <p:spPr>
+          <a:xfrm>
+            <a:off x="4846131" y="3429000"/>
+            <a:ext cx="1820483" cy="0"/>
+          </a:xfrm>
+          <a:prstGeom prst="straightConnector1">
+            <a:avLst/>
+          </a:prstGeom>
+          <a:ln w="28575">
+            <a:solidFill>
+              <a:srgbClr val="00547F"/>
+            </a:solidFill>
+            <a:headEnd type="none"/>
+            <a:tailEnd type="stealth" w="med" len="lg"/>
+          </a:ln>
+        </p:spPr>
+        <p:style>
+          <a:lnRef idx="1">
+            <a:schemeClr val="accent1"/>
+          </a:lnRef>
+          <a:fillRef idx="0">
+            <a:schemeClr val="accent1"/>
+          </a:fillRef>
+          <a:effectRef idx="0">
+            <a:schemeClr val="accent1"/>
+          </a:effectRef>
+          <a:fontRef idx="minor">
+            <a:schemeClr val="tx1"/>
+          </a:fontRef>
+        </p:style>
+      </p:cxnSp>
+      <p:cxnSp>
+        <p:nvCxnSpPr>
+          <p:cNvPr id="8" name="Connecteur droit avec flèche 7">
+            <a:extLst>
+              <a:ext uri="{FF2B5EF4-FFF2-40B4-BE49-F238E27FC236}">
+                <a16:creationId xmlns:a16="http://schemas.microsoft.com/office/drawing/2014/main" id="{D830220E-2E7A-197B-5075-F5B169F6A4B3}"/>
+              </a:ext>
+            </a:extLst>
+          </p:cNvPr>
+          <p:cNvCxnSpPr>
+            <a:cxnSpLocks/>
+          </p:cNvCxnSpPr>
+          <p:nvPr/>
+        </p:nvCxnSpPr>
+        <p:spPr>
+          <a:xfrm rot="5400000">
+            <a:off x="3323361" y="2559753"/>
+            <a:ext cx="730494" cy="0"/>
+          </a:xfrm>
+          <a:prstGeom prst="straightConnector1">
+            <a:avLst/>
+          </a:prstGeom>
+          <a:ln w="28575">
+            <a:solidFill>
+              <a:srgbClr val="00547F"/>
+            </a:solidFill>
+            <a:headEnd type="none"/>
+            <a:tailEnd type="stealth" w="med" len="lg"/>
+          </a:ln>
+        </p:spPr>
+        <p:style>
+          <a:lnRef idx="1">
+            <a:schemeClr val="accent1"/>
+          </a:lnRef>
+          <a:fillRef idx="0">
+            <a:schemeClr val="accent1"/>
+          </a:fillRef>
+          <a:effectRef idx="0">
+            <a:schemeClr val="accent1"/>
+          </a:effectRef>
+          <a:fontRef idx="minor">
+            <a:schemeClr val="tx1"/>
+          </a:fontRef>
+        </p:style>
+      </p:cxnSp>
+      <p:sp>
+        <p:nvSpPr>
+          <p:cNvPr id="9" name="ZoneTexte 8">
+            <a:extLst>
+              <a:ext uri="{FF2B5EF4-FFF2-40B4-BE49-F238E27FC236}">
+                <a16:creationId xmlns:a16="http://schemas.microsoft.com/office/drawing/2014/main" id="{494962B7-E7A7-F7C1-5A3F-601BBE61C2FC}"/>
+              </a:ext>
+            </a:extLst>
+          </p:cNvPr>
+          <p:cNvSpPr txBox="1"/>
+          <p:nvPr/>
+        </p:nvSpPr>
+        <p:spPr>
+          <a:xfrm>
+            <a:off x="1578784" y="3105834"/>
+            <a:ext cx="1081668" cy="646331"/>
+          </a:xfrm>
+          <a:prstGeom prst="rect">
+            <a:avLst/>
+          </a:prstGeom>
+          <a:noFill/>
+        </p:spPr>
+        <p:txBody>
+          <a:bodyPr wrap="square" rtlCol="0">
+            <a:spAutoFit/>
+          </a:bodyPr>
+          <a:lstStyle/>
+          <a:p>
+            <a:pPr algn="ctr"/>
+            <a:r>
+              <a:rPr lang="fr-FR" dirty="0"/>
+              <a:t>24 V continu</a:t>
+            </a:r>
+          </a:p>
+        </p:txBody>
+      </p:sp>
+      <p:sp>
+        <p:nvSpPr>
+          <p:cNvPr id="10" name="ZoneTexte 9">
+            <a:extLst>
+              <a:ext uri="{FF2B5EF4-FFF2-40B4-BE49-F238E27FC236}">
+                <a16:creationId xmlns:a16="http://schemas.microsoft.com/office/drawing/2014/main" id="{EA83515F-8E1D-91CE-6B9B-823E73587D3E}"/>
+              </a:ext>
+            </a:extLst>
+          </p:cNvPr>
+          <p:cNvSpPr txBox="1"/>
+          <p:nvPr/>
+        </p:nvSpPr>
+        <p:spPr>
+          <a:xfrm>
+            <a:off x="4744974" y="3105833"/>
+            <a:ext cx="1772784" cy="369332"/>
+          </a:xfrm>
+          <a:prstGeom prst="rect">
+            <a:avLst/>
+          </a:prstGeom>
+          <a:noFill/>
+        </p:spPr>
+        <p:txBody>
+          <a:bodyPr wrap="square" rtlCol="0">
+            <a:spAutoFit/>
+          </a:bodyPr>
+          <a:lstStyle/>
+          <a:p>
+            <a:pPr algn="ctr"/>
+            <a:r>
+              <a:rPr lang="fr-FR" dirty="0"/>
+              <a:t> [ – 24 V, + 24 V]</a:t>
+            </a:r>
+          </a:p>
+        </p:txBody>
+      </p:sp>
+      <p:pic>
+        <p:nvPicPr>
+          <p:cNvPr id="12" name="Image 11">
+            <a:extLst>
+              <a:ext uri="{FF2B5EF4-FFF2-40B4-BE49-F238E27FC236}">
+                <a16:creationId xmlns:a16="http://schemas.microsoft.com/office/drawing/2014/main" id="{88CE5F90-4439-9546-37EC-7792AF981987}"/>
+              </a:ext>
+            </a:extLst>
+          </p:cNvPr>
+          <p:cNvPicPr>
+            <a:picLocks noChangeAspect="1"/>
+          </p:cNvPicPr>
+          <p:nvPr/>
+        </p:nvPicPr>
+        <p:blipFill>
+          <a:blip r:embed="rId2"/>
+          <a:stretch>
+            <a:fillRect/>
+          </a:stretch>
+        </p:blipFill>
+        <p:spPr>
+          <a:xfrm>
+            <a:off x="3746304" y="2332184"/>
+            <a:ext cx="1237621" cy="369333"/>
+          </a:xfrm>
+          <a:prstGeom prst="rect">
+            <a:avLst/>
+          </a:prstGeom>
+        </p:spPr>
+      </p:pic>
+      <p:sp>
+        <p:nvSpPr>
+          <p:cNvPr id="13" name="ZoneTexte 12">
+            <a:extLst>
+              <a:ext uri="{FF2B5EF4-FFF2-40B4-BE49-F238E27FC236}">
+                <a16:creationId xmlns:a16="http://schemas.microsoft.com/office/drawing/2014/main" id="{CE906A2E-ABA8-4708-6FFC-346E3FE92CD7}"/>
+              </a:ext>
+            </a:extLst>
+          </p:cNvPr>
+          <p:cNvSpPr txBox="1"/>
+          <p:nvPr/>
+        </p:nvSpPr>
+        <p:spPr>
+          <a:xfrm>
+            <a:off x="2977134" y="2282754"/>
+            <a:ext cx="853182" cy="553998"/>
+          </a:xfrm>
+          <a:prstGeom prst="rect">
+            <a:avLst/>
+          </a:prstGeom>
+          <a:noFill/>
+        </p:spPr>
+        <p:txBody>
+          <a:bodyPr wrap="square" rtlCol="0">
+            <a:spAutoFit/>
+          </a:bodyPr>
+          <a:lstStyle/>
+          <a:p>
+            <a:pPr algn="ctr"/>
+            <a:r>
+              <a:rPr lang="fr-FR" dirty="0"/>
+              <a:t>MLI </a:t>
+            </a:r>
+          </a:p>
+          <a:p>
+            <a:pPr algn="ctr"/>
+            <a:r>
+              <a:rPr lang="fr-FR" sz="1200" dirty="0"/>
+              <a:t>(</a:t>
+            </a:r>
+            <a:r>
+              <a:rPr lang="fr-FR" sz="1200" i="1" dirty="0"/>
+              <a:t>PWM</a:t>
+            </a:r>
+            <a:r>
+              <a:rPr lang="fr-FR" sz="1200" dirty="0"/>
+              <a:t>)</a:t>
+            </a:r>
+          </a:p>
+        </p:txBody>
+      </p:sp>
+    </p:spTree>
+    <p:extLst>
+      <p:ext uri="{BB962C8B-B14F-4D97-AF65-F5344CB8AC3E}">
+        <p14:creationId xmlns:p14="http://schemas.microsoft.com/office/powerpoint/2010/main" val="2425144887"/>
+      </p:ext>
+    </p:extLst>
+  </p:cSld>
+  <p:clrMapOvr>
+    <a:masterClrMapping/>
+  </p:clrMapOvr>
+</p:sld>
+</file>
+
+<file path=ppt/slides/slide15.xml><?xml version="1.0" encoding="utf-8"?>
+<p:sld xmlns:a="http://schemas.openxmlformats.org/drawingml/2006/main" xmlns:r="http://schemas.openxmlformats.org/officeDocument/2006/relationships" xmlns:p="http://schemas.openxmlformats.org/presentationml/2006/main">
+  <p:cSld>
+    <p:spTree>
+      <p:nvGrpSpPr>
+        <p:cNvPr id="1" name=""/>
+        <p:cNvGrpSpPr/>
+        <p:nvPr/>
+      </p:nvGrpSpPr>
+      <p:grpSpPr>
+        <a:xfrm>
+          <a:off x="0" y="0"/>
+          <a:ext cx="0" cy="0"/>
+          <a:chOff x="0" y="0"/>
+          <a:chExt cx="0" cy="0"/>
+        </a:xfrm>
+      </p:grpSpPr>
+      <p:sp>
+        <p:nvSpPr>
+          <p:cNvPr id="2" name="Titre 1">
+            <a:extLst>
+              <a:ext uri="{FF2B5EF4-FFF2-40B4-BE49-F238E27FC236}">
+                <a16:creationId xmlns:a16="http://schemas.microsoft.com/office/drawing/2014/main" id="{7FF9B18D-3696-9227-D7F6-BFD0E1A37450}"/>
+              </a:ext>
+            </a:extLst>
+          </p:cNvPr>
+          <p:cNvSpPr>
+            <a:spLocks noGrp="1"/>
+          </p:cNvSpPr>
+          <p:nvPr>
+            <p:ph type="title"/>
+          </p:nvPr>
+        </p:nvSpPr>
+        <p:spPr/>
+        <p:txBody>
+          <a:bodyPr/>
+          <a:lstStyle/>
+          <a:p>
+            <a:endParaRPr lang="fr-FR"/>
+          </a:p>
+        </p:txBody>
+      </p:sp>
+      <p:pic>
+        <p:nvPicPr>
+          <p:cNvPr id="4" name="Image 3" descr="Une image contenant capture d’écran, graphisme, Modélisation 3D, dessin humoristique&#10;&#10;Le contenu généré par l’IA peut être incorrect.">
+            <a:extLst>
+              <a:ext uri="{FF2B5EF4-FFF2-40B4-BE49-F238E27FC236}">
+                <a16:creationId xmlns:a16="http://schemas.microsoft.com/office/drawing/2014/main" id="{4F62FE59-3BC8-B692-C1E4-8DB2D12867C4}"/>
+              </a:ext>
+            </a:extLst>
+          </p:cNvPr>
+          <p:cNvPicPr>
+            <a:picLocks noChangeAspect="1"/>
+          </p:cNvPicPr>
+          <p:nvPr/>
+        </p:nvPicPr>
+        <p:blipFill>
+          <a:blip r:embed="rId2"/>
+          <a:stretch>
+            <a:fillRect/>
+          </a:stretch>
+        </p:blipFill>
+        <p:spPr>
+          <a:xfrm>
+            <a:off x="1149667" y="2913909"/>
+            <a:ext cx="2780665" cy="1605915"/>
+          </a:xfrm>
+          <a:prstGeom prst="rect">
+            <a:avLst/>
+          </a:prstGeom>
+        </p:spPr>
+      </p:pic>
+      <p:cxnSp>
+        <p:nvCxnSpPr>
+          <p:cNvPr id="6" name="Connecteur droit avec flèche 5">
+            <a:extLst>
+              <a:ext uri="{FF2B5EF4-FFF2-40B4-BE49-F238E27FC236}">
+                <a16:creationId xmlns:a16="http://schemas.microsoft.com/office/drawing/2014/main" id="{81325DDD-53C7-23A1-CBF9-4A5655496638}"/>
+              </a:ext>
+            </a:extLst>
+          </p:cNvPr>
+          <p:cNvCxnSpPr>
+            <a:cxnSpLocks/>
+          </p:cNvCxnSpPr>
+          <p:nvPr/>
+        </p:nvCxnSpPr>
+        <p:spPr>
+          <a:xfrm>
+            <a:off x="1456267" y="2709332"/>
+            <a:ext cx="0" cy="719668"/>
+          </a:xfrm>
+          <a:prstGeom prst="straightConnector1">
+            <a:avLst/>
+          </a:prstGeom>
+          <a:ln w="38100">
+            <a:solidFill>
+              <a:srgbClr val="002060"/>
+            </a:solidFill>
+            <a:tailEnd type="oval"/>
+          </a:ln>
+        </p:spPr>
+        <p:style>
+          <a:lnRef idx="1">
+            <a:schemeClr val="accent1"/>
+          </a:lnRef>
+          <a:fillRef idx="0">
+            <a:schemeClr val="accent1"/>
+          </a:fillRef>
+          <a:effectRef idx="0">
+            <a:schemeClr val="accent1"/>
+          </a:effectRef>
+          <a:fontRef idx="minor">
+            <a:schemeClr val="tx1"/>
+          </a:fontRef>
+        </p:style>
+      </p:cxnSp>
+      <p:cxnSp>
+        <p:nvCxnSpPr>
+          <p:cNvPr id="9" name="Connecteur droit avec flèche 8">
+            <a:extLst>
+              <a:ext uri="{FF2B5EF4-FFF2-40B4-BE49-F238E27FC236}">
+                <a16:creationId xmlns:a16="http://schemas.microsoft.com/office/drawing/2014/main" id="{648C9BAB-3C72-E781-3AD3-E6EEEF234E0E}"/>
+              </a:ext>
+            </a:extLst>
+          </p:cNvPr>
+          <p:cNvCxnSpPr>
+            <a:cxnSpLocks/>
+          </p:cNvCxnSpPr>
+          <p:nvPr/>
+        </p:nvCxnSpPr>
+        <p:spPr>
+          <a:xfrm>
+            <a:off x="3420534" y="2709332"/>
+            <a:ext cx="0" cy="613834"/>
+          </a:xfrm>
+          <a:prstGeom prst="straightConnector1">
+            <a:avLst/>
+          </a:prstGeom>
+          <a:ln w="38100">
+            <a:solidFill>
+              <a:srgbClr val="002060"/>
+            </a:solidFill>
+            <a:tailEnd type="oval"/>
+          </a:ln>
+        </p:spPr>
+        <p:style>
+          <a:lnRef idx="1">
+            <a:schemeClr val="accent1"/>
+          </a:lnRef>
+          <a:fillRef idx="0">
+            <a:schemeClr val="accent1"/>
+          </a:fillRef>
+          <a:effectRef idx="0">
+            <a:schemeClr val="accent1"/>
+          </a:effectRef>
+          <a:fontRef idx="minor">
+            <a:schemeClr val="tx1"/>
+          </a:fontRef>
+        </p:style>
+      </p:cxnSp>
+      <p:cxnSp>
+        <p:nvCxnSpPr>
+          <p:cNvPr id="10" name="Connecteur droit avec flèche 9">
+            <a:extLst>
+              <a:ext uri="{FF2B5EF4-FFF2-40B4-BE49-F238E27FC236}">
+                <a16:creationId xmlns:a16="http://schemas.microsoft.com/office/drawing/2014/main" id="{3BF66401-99E0-28C0-1283-799156380926}"/>
+              </a:ext>
+            </a:extLst>
+          </p:cNvPr>
+          <p:cNvCxnSpPr>
+            <a:cxnSpLocks/>
+          </p:cNvCxnSpPr>
+          <p:nvPr/>
+        </p:nvCxnSpPr>
+        <p:spPr>
+          <a:xfrm>
+            <a:off x="1456267" y="2709332"/>
+            <a:ext cx="2766483" cy="0"/>
+          </a:xfrm>
+          <a:prstGeom prst="straightConnector1">
+            <a:avLst/>
+          </a:prstGeom>
+          <a:ln w="38100">
+            <a:solidFill>
+              <a:srgbClr val="002060"/>
+            </a:solidFill>
+            <a:tailEnd type="none"/>
+          </a:ln>
+        </p:spPr>
+        <p:style>
+          <a:lnRef idx="1">
+            <a:schemeClr val="accent1"/>
+          </a:lnRef>
+          <a:fillRef idx="0">
+            <a:schemeClr val="accent1"/>
+          </a:fillRef>
+          <a:effectRef idx="0">
+            <a:schemeClr val="accent1"/>
+          </a:effectRef>
+          <a:fontRef idx="minor">
+            <a:schemeClr val="tx1"/>
+          </a:fontRef>
+        </p:style>
+      </p:cxnSp>
+      <p:cxnSp>
+        <p:nvCxnSpPr>
+          <p:cNvPr id="15" name="Connecteur droit avec flèche 14">
+            <a:extLst>
+              <a:ext uri="{FF2B5EF4-FFF2-40B4-BE49-F238E27FC236}">
+                <a16:creationId xmlns:a16="http://schemas.microsoft.com/office/drawing/2014/main" id="{F273EAFA-6859-68C3-AB0D-9D8AFC88FE6D}"/>
+              </a:ext>
+            </a:extLst>
+          </p:cNvPr>
+          <p:cNvCxnSpPr>
+            <a:cxnSpLocks/>
+          </p:cNvCxnSpPr>
+          <p:nvPr/>
+        </p:nvCxnSpPr>
+        <p:spPr>
+          <a:xfrm flipV="1">
+            <a:off x="2131484" y="3831158"/>
+            <a:ext cx="0" cy="1414522"/>
+          </a:xfrm>
+          <a:prstGeom prst="straightConnector1">
+            <a:avLst/>
+          </a:prstGeom>
+          <a:ln w="38100">
+            <a:solidFill>
+              <a:srgbClr val="002060"/>
+            </a:solidFill>
+            <a:tailEnd type="oval"/>
+          </a:ln>
+        </p:spPr>
+        <p:style>
+          <a:lnRef idx="1">
+            <a:schemeClr val="accent1"/>
+          </a:lnRef>
+          <a:fillRef idx="0">
+            <a:schemeClr val="accent1"/>
+          </a:fillRef>
+          <a:effectRef idx="0">
+            <a:schemeClr val="accent1"/>
+          </a:effectRef>
+          <a:fontRef idx="minor">
+            <a:schemeClr val="tx1"/>
+          </a:fontRef>
+        </p:style>
+      </p:cxnSp>
+      <p:cxnSp>
+        <p:nvCxnSpPr>
+          <p:cNvPr id="17" name="Connecteur droit avec flèche 16">
+            <a:extLst>
+              <a:ext uri="{FF2B5EF4-FFF2-40B4-BE49-F238E27FC236}">
+                <a16:creationId xmlns:a16="http://schemas.microsoft.com/office/drawing/2014/main" id="{5B75468C-E6E6-72FC-6B6F-C719C35F9A28}"/>
+              </a:ext>
+            </a:extLst>
+          </p:cNvPr>
+          <p:cNvCxnSpPr>
+            <a:cxnSpLocks/>
+          </p:cNvCxnSpPr>
+          <p:nvPr/>
+        </p:nvCxnSpPr>
+        <p:spPr>
+          <a:xfrm flipV="1">
+            <a:off x="2908301" y="4368798"/>
+            <a:ext cx="0" cy="507549"/>
+          </a:xfrm>
+          <a:prstGeom prst="straightConnector1">
+            <a:avLst/>
+          </a:prstGeom>
+          <a:ln w="38100">
+            <a:solidFill>
+              <a:srgbClr val="002060"/>
+            </a:solidFill>
+            <a:tailEnd type="oval"/>
+          </a:ln>
+        </p:spPr>
+        <p:style>
+          <a:lnRef idx="1">
+            <a:schemeClr val="accent1"/>
+          </a:lnRef>
+          <a:fillRef idx="0">
+            <a:schemeClr val="accent1"/>
+          </a:fillRef>
+          <a:effectRef idx="0">
+            <a:schemeClr val="accent1"/>
+          </a:effectRef>
+          <a:fontRef idx="minor">
+            <a:schemeClr val="tx1"/>
+          </a:fontRef>
+        </p:style>
+      </p:cxnSp>
+      <p:cxnSp>
+        <p:nvCxnSpPr>
+          <p:cNvPr id="20" name="Connecteur droit avec flèche 19">
+            <a:extLst>
+              <a:ext uri="{FF2B5EF4-FFF2-40B4-BE49-F238E27FC236}">
+                <a16:creationId xmlns:a16="http://schemas.microsoft.com/office/drawing/2014/main" id="{5AD1D158-EB9F-CC61-4EAD-9926475B5B0F}"/>
+              </a:ext>
+            </a:extLst>
+          </p:cNvPr>
+          <p:cNvCxnSpPr>
+            <a:cxnSpLocks/>
+          </p:cNvCxnSpPr>
+          <p:nvPr/>
+        </p:nvCxnSpPr>
+        <p:spPr>
+          <a:xfrm flipV="1">
+            <a:off x="3175002" y="4199462"/>
+            <a:ext cx="0" cy="333059"/>
+          </a:xfrm>
+          <a:prstGeom prst="straightConnector1">
+            <a:avLst/>
+          </a:prstGeom>
+          <a:ln w="38100">
+            <a:solidFill>
+              <a:srgbClr val="002060"/>
+            </a:solidFill>
+            <a:tailEnd type="oval"/>
+          </a:ln>
+        </p:spPr>
+        <p:style>
+          <a:lnRef idx="1">
+            <a:schemeClr val="accent1"/>
+          </a:lnRef>
+          <a:fillRef idx="0">
+            <a:schemeClr val="accent1"/>
+          </a:fillRef>
+          <a:effectRef idx="0">
+            <a:schemeClr val="accent1"/>
+          </a:effectRef>
+          <a:fontRef idx="minor">
+            <a:schemeClr val="tx1"/>
+          </a:fontRef>
+        </p:style>
+      </p:cxnSp>
+      <p:cxnSp>
+        <p:nvCxnSpPr>
+          <p:cNvPr id="23" name="Connecteur droit avec flèche 22">
+            <a:extLst>
+              <a:ext uri="{FF2B5EF4-FFF2-40B4-BE49-F238E27FC236}">
+                <a16:creationId xmlns:a16="http://schemas.microsoft.com/office/drawing/2014/main" id="{4B1B9820-05EC-D4DB-B9B7-9DF32D38F20E}"/>
+              </a:ext>
+            </a:extLst>
+          </p:cNvPr>
+          <p:cNvCxnSpPr>
+            <a:cxnSpLocks/>
+          </p:cNvCxnSpPr>
+          <p:nvPr/>
+        </p:nvCxnSpPr>
+        <p:spPr>
+          <a:xfrm>
+            <a:off x="3175002" y="4532521"/>
+            <a:ext cx="1047748" cy="0"/>
+          </a:xfrm>
+          <a:prstGeom prst="straightConnector1">
+            <a:avLst/>
+          </a:prstGeom>
+          <a:ln w="38100">
+            <a:solidFill>
+              <a:srgbClr val="002060"/>
+            </a:solidFill>
+            <a:tailEnd type="none"/>
+          </a:ln>
+        </p:spPr>
+        <p:style>
+          <a:lnRef idx="1">
+            <a:schemeClr val="accent1"/>
+          </a:lnRef>
+          <a:fillRef idx="0">
+            <a:schemeClr val="accent1"/>
+          </a:fillRef>
+          <a:effectRef idx="0">
+            <a:schemeClr val="accent1"/>
+          </a:effectRef>
+          <a:fontRef idx="minor">
+            <a:schemeClr val="tx1"/>
+          </a:fontRef>
+        </p:style>
+      </p:cxnSp>
+      <p:cxnSp>
+        <p:nvCxnSpPr>
+          <p:cNvPr id="29" name="Connecteur droit avec flèche 28">
+            <a:extLst>
+              <a:ext uri="{FF2B5EF4-FFF2-40B4-BE49-F238E27FC236}">
+                <a16:creationId xmlns:a16="http://schemas.microsoft.com/office/drawing/2014/main" id="{4E7324D8-5A54-ED77-0FC6-4DE8C2FBF7A6}"/>
+              </a:ext>
+            </a:extLst>
+          </p:cNvPr>
+          <p:cNvCxnSpPr>
+            <a:cxnSpLocks/>
+            <a:endCxn id="40" idx="1"/>
+          </p:cNvCxnSpPr>
+          <p:nvPr/>
+        </p:nvCxnSpPr>
+        <p:spPr>
+          <a:xfrm>
+            <a:off x="2908301" y="4876347"/>
+            <a:ext cx="1310219" cy="1"/>
+          </a:xfrm>
+          <a:prstGeom prst="straightConnector1">
+            <a:avLst/>
+          </a:prstGeom>
+          <a:ln w="38100">
+            <a:solidFill>
+              <a:srgbClr val="002060"/>
+            </a:solidFill>
+            <a:tailEnd type="none"/>
+          </a:ln>
+        </p:spPr>
+        <p:style>
+          <a:lnRef idx="1">
+            <a:schemeClr val="accent1"/>
+          </a:lnRef>
+          <a:fillRef idx="0">
+            <a:schemeClr val="accent1"/>
+          </a:fillRef>
+          <a:effectRef idx="0">
+            <a:schemeClr val="accent1"/>
+          </a:effectRef>
+          <a:fontRef idx="minor">
+            <a:schemeClr val="tx1"/>
+          </a:fontRef>
+        </p:style>
+      </p:cxnSp>
+      <p:cxnSp>
+        <p:nvCxnSpPr>
+          <p:cNvPr id="32" name="Connecteur droit avec flèche 31">
+            <a:extLst>
+              <a:ext uri="{FF2B5EF4-FFF2-40B4-BE49-F238E27FC236}">
+                <a16:creationId xmlns:a16="http://schemas.microsoft.com/office/drawing/2014/main" id="{91794F32-8605-7441-8F5F-C3DC9A78AE8A}"/>
+              </a:ext>
+            </a:extLst>
+          </p:cNvPr>
+          <p:cNvCxnSpPr>
+            <a:cxnSpLocks/>
+            <a:endCxn id="41" idx="1"/>
+          </p:cNvCxnSpPr>
+          <p:nvPr/>
+        </p:nvCxnSpPr>
+        <p:spPr>
+          <a:xfrm>
+            <a:off x="2131484" y="5245680"/>
+            <a:ext cx="2087035" cy="0"/>
+          </a:xfrm>
+          <a:prstGeom prst="straightConnector1">
+            <a:avLst/>
+          </a:prstGeom>
+          <a:ln w="38100">
+            <a:solidFill>
+              <a:srgbClr val="002060"/>
+            </a:solidFill>
+            <a:tailEnd type="none"/>
+          </a:ln>
+        </p:spPr>
+        <p:style>
+          <a:lnRef idx="1">
+            <a:schemeClr val="accent1"/>
+          </a:lnRef>
+          <a:fillRef idx="0">
+            <a:schemeClr val="accent1"/>
+          </a:fillRef>
+          <a:effectRef idx="0">
+            <a:schemeClr val="accent1"/>
+          </a:effectRef>
+          <a:fontRef idx="minor">
+            <a:schemeClr val="tx1"/>
+          </a:fontRef>
+        </p:style>
+      </p:cxnSp>
+      <p:sp>
+        <p:nvSpPr>
+          <p:cNvPr id="38" name="ZoneTexte 37">
+            <a:extLst>
+              <a:ext uri="{FF2B5EF4-FFF2-40B4-BE49-F238E27FC236}">
+                <a16:creationId xmlns:a16="http://schemas.microsoft.com/office/drawing/2014/main" id="{586CB134-9DD7-6FF3-A625-096F02980E73}"/>
+              </a:ext>
+            </a:extLst>
+          </p:cNvPr>
+          <p:cNvSpPr txBox="1"/>
+          <p:nvPr/>
+        </p:nvSpPr>
+        <p:spPr>
+          <a:xfrm>
+            <a:off x="4236932" y="2553398"/>
+            <a:ext cx="1772784" cy="646331"/>
+          </a:xfrm>
+          <a:prstGeom prst="rect">
+            <a:avLst/>
+          </a:prstGeom>
+          <a:noFill/>
+        </p:spPr>
+        <p:txBody>
+          <a:bodyPr wrap="square" rtlCol="0">
+            <a:spAutoFit/>
+          </a:bodyPr>
+          <a:lstStyle/>
+          <a:p>
+            <a:r>
+              <a:rPr lang="fr-FR" dirty="0"/>
+              <a:t>Stator – Aimants permanents</a:t>
+            </a:r>
+          </a:p>
+        </p:txBody>
+      </p:sp>
+      <p:sp>
+        <p:nvSpPr>
+          <p:cNvPr id="39" name="ZoneTexte 38">
+            <a:extLst>
+              <a:ext uri="{FF2B5EF4-FFF2-40B4-BE49-F238E27FC236}">
+                <a16:creationId xmlns:a16="http://schemas.microsoft.com/office/drawing/2014/main" id="{6CE2984E-4D93-2489-3EBB-553698577017}"/>
+              </a:ext>
+            </a:extLst>
+          </p:cNvPr>
+          <p:cNvSpPr txBox="1"/>
+          <p:nvPr/>
+        </p:nvSpPr>
+        <p:spPr>
+          <a:xfrm>
+            <a:off x="4218520" y="4361818"/>
+            <a:ext cx="1772784" cy="369332"/>
+          </a:xfrm>
+          <a:prstGeom prst="rect">
+            <a:avLst/>
+          </a:prstGeom>
+          <a:noFill/>
+        </p:spPr>
+        <p:txBody>
+          <a:bodyPr wrap="square" rtlCol="0">
+            <a:spAutoFit/>
+          </a:bodyPr>
+          <a:lstStyle/>
+          <a:p>
+            <a:r>
+              <a:rPr lang="fr-FR" dirty="0"/>
+              <a:t>Balais</a:t>
+            </a:r>
+          </a:p>
+        </p:txBody>
+      </p:sp>
+      <p:sp>
+        <p:nvSpPr>
+          <p:cNvPr id="40" name="ZoneTexte 39">
+            <a:extLst>
+              <a:ext uri="{FF2B5EF4-FFF2-40B4-BE49-F238E27FC236}">
+                <a16:creationId xmlns:a16="http://schemas.microsoft.com/office/drawing/2014/main" id="{551DEFB2-F68A-8BF0-8C0C-E1153D15C556}"/>
+              </a:ext>
+            </a:extLst>
+          </p:cNvPr>
+          <p:cNvSpPr txBox="1"/>
+          <p:nvPr/>
+        </p:nvSpPr>
+        <p:spPr>
+          <a:xfrm>
+            <a:off x="4218520" y="4691682"/>
+            <a:ext cx="1772784" cy="369332"/>
+          </a:xfrm>
+          <a:prstGeom prst="rect">
+            <a:avLst/>
+          </a:prstGeom>
+          <a:noFill/>
+        </p:spPr>
+        <p:txBody>
+          <a:bodyPr wrap="square" rtlCol="0">
+            <a:spAutoFit/>
+          </a:bodyPr>
+          <a:lstStyle/>
+          <a:p>
+            <a:r>
+              <a:rPr lang="fr-FR" dirty="0"/>
+              <a:t>Collecteur</a:t>
+            </a:r>
+          </a:p>
+        </p:txBody>
+      </p:sp>
+      <p:sp>
+        <p:nvSpPr>
+          <p:cNvPr id="41" name="ZoneTexte 40">
+            <a:extLst>
+              <a:ext uri="{FF2B5EF4-FFF2-40B4-BE49-F238E27FC236}">
+                <a16:creationId xmlns:a16="http://schemas.microsoft.com/office/drawing/2014/main" id="{9A7A53A2-22BC-67B2-CBA4-9D3304BBCC25}"/>
+              </a:ext>
+            </a:extLst>
+          </p:cNvPr>
+          <p:cNvSpPr txBox="1"/>
+          <p:nvPr/>
+        </p:nvSpPr>
+        <p:spPr>
+          <a:xfrm>
+            <a:off x="4218519" y="5061014"/>
+            <a:ext cx="2620429" cy="369332"/>
+          </a:xfrm>
+          <a:prstGeom prst="rect">
+            <a:avLst/>
+          </a:prstGeom>
+          <a:noFill/>
+        </p:spPr>
+        <p:txBody>
+          <a:bodyPr wrap="square" rtlCol="0">
+            <a:spAutoFit/>
+          </a:bodyPr>
+          <a:lstStyle/>
+          <a:p>
+            <a:r>
+              <a:rPr lang="fr-FR" dirty="0"/>
+              <a:t>Rotor – Bobine tournante</a:t>
+            </a:r>
+          </a:p>
+        </p:txBody>
+      </p:sp>
+    </p:spTree>
+    <p:extLst>
+      <p:ext uri="{BB962C8B-B14F-4D97-AF65-F5344CB8AC3E}">
+        <p14:creationId xmlns:p14="http://schemas.microsoft.com/office/powerpoint/2010/main" val="2427288193"/>
+      </p:ext>
+    </p:extLst>
+  </p:cSld>
+  <p:clrMapOvr>
+    <a:masterClrMapping/>
+  </p:clrMapOvr>
+</p:sld>
+</file>
+
+<file path=ppt/slides/slide16.xml><?xml version="1.0" encoding="utf-8"?>
+<p:sld xmlns:a="http://schemas.openxmlformats.org/drawingml/2006/main" xmlns:r="http://schemas.openxmlformats.org/officeDocument/2006/relationships" xmlns:p="http://schemas.openxmlformats.org/presentationml/2006/main">
+  <p:cSld>
+    <p:spTree>
+      <p:nvGrpSpPr>
+        <p:cNvPr id="1" name=""/>
+        <p:cNvGrpSpPr/>
+        <p:nvPr/>
+      </p:nvGrpSpPr>
+      <p:grpSpPr>
+        <a:xfrm>
+          <a:off x="0" y="0"/>
+          <a:ext cx="0" cy="0"/>
+          <a:chOff x="0" y="0"/>
+          <a:chExt cx="0" cy="0"/>
+        </a:xfrm>
+      </p:grpSpPr>
+      <p:sp>
+        <p:nvSpPr>
+          <p:cNvPr id="24" name="Rectangle 23">
+            <a:extLst>
+              <a:ext uri="{FF2B5EF4-FFF2-40B4-BE49-F238E27FC236}">
+                <a16:creationId xmlns:a16="http://schemas.microsoft.com/office/drawing/2014/main" id="{77CFD38A-3CE5-59D3-79CC-7F5337BFA31E}"/>
+              </a:ext>
+            </a:extLst>
+          </p:cNvPr>
+          <p:cNvSpPr/>
+          <p:nvPr/>
+        </p:nvSpPr>
+        <p:spPr>
+          <a:xfrm>
+            <a:off x="4020872" y="3178179"/>
+            <a:ext cx="180000" cy="1720841"/>
+          </a:xfrm>
+          <a:prstGeom prst="rect">
+            <a:avLst/>
+          </a:prstGeom>
+          <a:solidFill>
+            <a:schemeClr val="accent5">
+              <a:lumMod val="20000"/>
+              <a:lumOff val="80000"/>
+            </a:schemeClr>
+          </a:solidFill>
+          <a:ln w="19050">
+            <a:solidFill>
+              <a:srgbClr val="002060"/>
+            </a:solidFill>
+          </a:ln>
+        </p:spPr>
+        <p:style>
+          <a:lnRef idx="2">
+            <a:schemeClr val="accent1">
+              <a:shade val="15000"/>
+            </a:schemeClr>
+          </a:lnRef>
+          <a:fillRef idx="1">
+            <a:schemeClr val="accent1"/>
+          </a:fillRef>
+          <a:effectRef idx="0">
+            <a:schemeClr val="accent1"/>
+          </a:effectRef>
+          <a:fontRef idx="minor">
+            <a:schemeClr val="lt1"/>
+          </a:fontRef>
+        </p:style>
+        <p:txBody>
+          <a:bodyPr rtlCol="0" anchor="ctr"/>
+          <a:lstStyle/>
+          <a:p>
+            <a:pPr algn="ctr"/>
+            <a:endParaRPr lang="fr-FR"/>
+          </a:p>
+        </p:txBody>
+      </p:sp>
+      <p:sp>
+        <p:nvSpPr>
+          <p:cNvPr id="5" name="Ellipse 4">
+            <a:extLst>
+              <a:ext uri="{FF2B5EF4-FFF2-40B4-BE49-F238E27FC236}">
+                <a16:creationId xmlns:a16="http://schemas.microsoft.com/office/drawing/2014/main" id="{CEEF8F5D-BF48-4B77-3BFA-15A0C6928AC9}"/>
+              </a:ext>
+            </a:extLst>
+          </p:cNvPr>
+          <p:cNvSpPr/>
+          <p:nvPr/>
+        </p:nvSpPr>
+        <p:spPr>
+          <a:xfrm>
+            <a:off x="3355306" y="3284388"/>
+            <a:ext cx="1511132" cy="1511132"/>
+          </a:xfrm>
+          <a:prstGeom prst="ellipse">
+            <a:avLst/>
+          </a:prstGeom>
+          <a:solidFill>
+            <a:schemeClr val="accent5">
+              <a:lumMod val="20000"/>
+              <a:lumOff val="80000"/>
+            </a:schemeClr>
+          </a:solidFill>
+          <a:ln w="19050">
+            <a:solidFill>
+              <a:srgbClr val="002060"/>
+            </a:solidFill>
+          </a:ln>
+        </p:spPr>
+        <p:style>
+          <a:lnRef idx="2">
+            <a:schemeClr val="accent1">
+              <a:shade val="15000"/>
+            </a:schemeClr>
+          </a:lnRef>
+          <a:fillRef idx="1">
+            <a:schemeClr val="accent1"/>
+          </a:fillRef>
+          <a:effectRef idx="0">
+            <a:schemeClr val="accent1"/>
+          </a:effectRef>
+          <a:fontRef idx="minor">
+            <a:schemeClr val="lt1"/>
+          </a:fontRef>
+        </p:style>
+        <p:txBody>
+          <a:bodyPr rtlCol="0" anchor="ctr"/>
+          <a:lstStyle/>
+          <a:p>
+            <a:pPr algn="ctr"/>
+            <a:endParaRPr lang="fr-FR"/>
+          </a:p>
+        </p:txBody>
+      </p:sp>
+      <p:sp>
+        <p:nvSpPr>
+          <p:cNvPr id="4" name="Rectangle 3">
+            <a:extLst>
+              <a:ext uri="{FF2B5EF4-FFF2-40B4-BE49-F238E27FC236}">
+                <a16:creationId xmlns:a16="http://schemas.microsoft.com/office/drawing/2014/main" id="{5C232142-E71C-95C1-E0AD-2F12C01CD0FC}"/>
+              </a:ext>
+            </a:extLst>
+          </p:cNvPr>
+          <p:cNvSpPr/>
+          <p:nvPr/>
+        </p:nvSpPr>
+        <p:spPr>
+          <a:xfrm>
+            <a:off x="4020872" y="3941906"/>
+            <a:ext cx="180000" cy="360000"/>
+          </a:xfrm>
+          <a:prstGeom prst="rect">
+            <a:avLst/>
+          </a:prstGeom>
+          <a:solidFill>
+            <a:schemeClr val="accent5">
+              <a:lumMod val="20000"/>
+              <a:lumOff val="80000"/>
+            </a:schemeClr>
+          </a:solidFill>
+          <a:ln w="19050">
+            <a:solidFill>
+              <a:srgbClr val="002060"/>
+            </a:solidFill>
+          </a:ln>
+        </p:spPr>
+        <p:style>
+          <a:lnRef idx="2">
+            <a:schemeClr val="accent1">
+              <a:shade val="15000"/>
+            </a:schemeClr>
+          </a:lnRef>
+          <a:fillRef idx="1">
+            <a:schemeClr val="accent1"/>
+          </a:fillRef>
+          <a:effectRef idx="0">
+            <a:schemeClr val="accent1"/>
+          </a:effectRef>
+          <a:fontRef idx="minor">
+            <a:schemeClr val="lt1"/>
+          </a:fontRef>
+        </p:style>
+        <p:txBody>
+          <a:bodyPr rtlCol="0" anchor="ctr"/>
+          <a:lstStyle/>
+          <a:p>
+            <a:pPr algn="ctr"/>
+            <a:endParaRPr lang="fr-FR"/>
+          </a:p>
+        </p:txBody>
+      </p:sp>
+      <p:grpSp>
+        <p:nvGrpSpPr>
+          <p:cNvPr id="20" name="Groupe 19">
+            <a:extLst>
+              <a:ext uri="{FF2B5EF4-FFF2-40B4-BE49-F238E27FC236}">
+                <a16:creationId xmlns:a16="http://schemas.microsoft.com/office/drawing/2014/main" id="{3D3ED757-EDE5-A349-8A9B-F03C115F914B}"/>
+              </a:ext>
+            </a:extLst>
+          </p:cNvPr>
+          <p:cNvGrpSpPr/>
+          <p:nvPr/>
+        </p:nvGrpSpPr>
+        <p:grpSpPr>
+          <a:xfrm>
+            <a:off x="3930872" y="4545066"/>
+            <a:ext cx="360000" cy="65546"/>
+            <a:chOff x="3930872" y="4545066"/>
+            <a:chExt cx="360000" cy="65546"/>
+          </a:xfrm>
+        </p:grpSpPr>
+        <p:cxnSp>
+          <p:nvCxnSpPr>
+            <p:cNvPr id="6" name="Connecteur droit 5">
+              <a:extLst>
+                <a:ext uri="{FF2B5EF4-FFF2-40B4-BE49-F238E27FC236}">
+                  <a16:creationId xmlns:a16="http://schemas.microsoft.com/office/drawing/2014/main" id="{B003CC26-400E-F092-2EB9-9FE284E5EC19}"/>
+                </a:ext>
+              </a:extLst>
+            </p:cNvPr>
+            <p:cNvCxnSpPr>
+              <a:cxnSpLocks/>
+            </p:cNvCxnSpPr>
+            <p:nvPr/>
+          </p:nvCxnSpPr>
+          <p:spPr>
+            <a:xfrm>
+              <a:off x="3930872" y="4545066"/>
+              <a:ext cx="360000" cy="0"/>
+            </a:xfrm>
+            <a:prstGeom prst="line">
+              <a:avLst/>
+            </a:prstGeom>
+            <a:solidFill>
+              <a:schemeClr val="accent5">
+                <a:lumMod val="20000"/>
+                <a:lumOff val="80000"/>
+              </a:schemeClr>
+            </a:solidFill>
+            <a:ln w="19050">
+              <a:solidFill>
+                <a:srgbClr val="002060"/>
+              </a:solidFill>
+            </a:ln>
+          </p:spPr>
+          <p:style>
+            <a:lnRef idx="2">
+              <a:schemeClr val="accent1">
+                <a:shade val="15000"/>
+              </a:schemeClr>
+            </a:lnRef>
+            <a:fillRef idx="1">
+              <a:schemeClr val="accent1"/>
+            </a:fillRef>
+            <a:effectRef idx="0">
+              <a:schemeClr val="accent1"/>
+            </a:effectRef>
+            <a:fontRef idx="minor">
+              <a:schemeClr val="lt1"/>
+            </a:fontRef>
+          </p:style>
+        </p:cxnSp>
+        <p:cxnSp>
+          <p:nvCxnSpPr>
+            <p:cNvPr id="9" name="Connecteur droit 8">
+              <a:extLst>
+                <a:ext uri="{FF2B5EF4-FFF2-40B4-BE49-F238E27FC236}">
+                  <a16:creationId xmlns:a16="http://schemas.microsoft.com/office/drawing/2014/main" id="{8B35D299-7719-7BB5-0FC7-BE3F39DF21F7}"/>
+                </a:ext>
+              </a:extLst>
+            </p:cNvPr>
+            <p:cNvCxnSpPr>
+              <a:cxnSpLocks/>
+            </p:cNvCxnSpPr>
+            <p:nvPr/>
+          </p:nvCxnSpPr>
+          <p:spPr>
+            <a:xfrm flipH="1">
+              <a:off x="4020872" y="4610612"/>
+              <a:ext cx="180000" cy="0"/>
+            </a:xfrm>
+            <a:prstGeom prst="line">
+              <a:avLst/>
+            </a:prstGeom>
+            <a:solidFill>
+              <a:schemeClr val="accent5">
+                <a:lumMod val="20000"/>
+                <a:lumOff val="80000"/>
+              </a:schemeClr>
+            </a:solidFill>
+            <a:ln w="19050">
+              <a:solidFill>
+                <a:srgbClr val="002060"/>
+              </a:solidFill>
+            </a:ln>
+          </p:spPr>
+          <p:style>
+            <a:lnRef idx="2">
+              <a:schemeClr val="accent1">
+                <a:shade val="15000"/>
+              </a:schemeClr>
+            </a:lnRef>
+            <a:fillRef idx="1">
+              <a:schemeClr val="accent1"/>
+            </a:fillRef>
+            <a:effectRef idx="0">
+              <a:schemeClr val="accent1"/>
+            </a:effectRef>
+            <a:fontRef idx="minor">
+              <a:schemeClr val="lt1"/>
+            </a:fontRef>
+          </p:style>
+        </p:cxnSp>
+      </p:grpSp>
+      <p:cxnSp>
+        <p:nvCxnSpPr>
+          <p:cNvPr id="10" name="Connecteur droit 9">
+            <a:extLst>
+              <a:ext uri="{FF2B5EF4-FFF2-40B4-BE49-F238E27FC236}">
+                <a16:creationId xmlns:a16="http://schemas.microsoft.com/office/drawing/2014/main" id="{DCA2F480-84C8-5BA4-D287-ECCE2C88CD2F}"/>
+              </a:ext>
+            </a:extLst>
+          </p:cNvPr>
+          <p:cNvCxnSpPr>
+            <a:cxnSpLocks/>
+          </p:cNvCxnSpPr>
+          <p:nvPr/>
+        </p:nvCxnSpPr>
+        <p:spPr>
+          <a:xfrm>
+            <a:off x="4110872" y="3761906"/>
+            <a:ext cx="0" cy="180000"/>
+          </a:xfrm>
+          <a:prstGeom prst="line">
+            <a:avLst/>
+          </a:prstGeom>
+          <a:solidFill>
+            <a:schemeClr val="accent5">
+              <a:lumMod val="20000"/>
+              <a:lumOff val="80000"/>
+            </a:schemeClr>
+          </a:solidFill>
+          <a:ln w="19050">
+            <a:solidFill>
+              <a:srgbClr val="002060"/>
+            </a:solidFill>
+          </a:ln>
+        </p:spPr>
+        <p:style>
+          <a:lnRef idx="2">
+            <a:schemeClr val="accent1">
+              <a:shade val="15000"/>
+            </a:schemeClr>
+          </a:lnRef>
+          <a:fillRef idx="1">
+            <a:schemeClr val="accent1"/>
+          </a:fillRef>
+          <a:effectRef idx="0">
+            <a:schemeClr val="accent1"/>
+          </a:effectRef>
+          <a:fontRef idx="minor">
+            <a:schemeClr val="lt1"/>
+          </a:fontRef>
+        </p:style>
+      </p:cxnSp>
+      <p:grpSp>
+        <p:nvGrpSpPr>
+          <p:cNvPr id="15" name="Groupe 14">
+            <a:extLst>
+              <a:ext uri="{FF2B5EF4-FFF2-40B4-BE49-F238E27FC236}">
+                <a16:creationId xmlns:a16="http://schemas.microsoft.com/office/drawing/2014/main" id="{3DD5E8E0-0BDC-7085-EC51-5C7E0A02820C}"/>
+              </a:ext>
+            </a:extLst>
+          </p:cNvPr>
+          <p:cNvGrpSpPr/>
+          <p:nvPr/>
+        </p:nvGrpSpPr>
+        <p:grpSpPr>
+          <a:xfrm rot="5400000">
+            <a:off x="3935376" y="3527906"/>
+            <a:ext cx="360000" cy="108000"/>
+            <a:chOff x="3265586" y="4301906"/>
+            <a:chExt cx="720000" cy="180000"/>
+          </a:xfrm>
+        </p:grpSpPr>
+        <p:sp>
+          <p:nvSpPr>
+            <p:cNvPr id="11" name="Arc 10">
+              <a:extLst>
+                <a:ext uri="{FF2B5EF4-FFF2-40B4-BE49-F238E27FC236}">
+                  <a16:creationId xmlns:a16="http://schemas.microsoft.com/office/drawing/2014/main" id="{6A0B86AF-1A9D-CFAF-764B-CA8CED5D044A}"/>
+                </a:ext>
+              </a:extLst>
+            </p:cNvPr>
+            <p:cNvSpPr/>
+            <p:nvPr/>
+          </p:nvSpPr>
+          <p:spPr>
+            <a:xfrm>
+              <a:off x="3265586" y="4301906"/>
+              <a:ext cx="180000" cy="180000"/>
+            </a:xfrm>
+            <a:prstGeom prst="arc">
+              <a:avLst>
+                <a:gd name="adj1" fmla="val 10831576"/>
+                <a:gd name="adj2" fmla="val 0"/>
+              </a:avLst>
+            </a:prstGeom>
+            <a:noFill/>
+            <a:ln w="19050">
+              <a:solidFill>
+                <a:srgbClr val="002060"/>
+              </a:solidFill>
+            </a:ln>
+          </p:spPr>
+          <p:style>
+            <a:lnRef idx="2">
+              <a:schemeClr val="accent1">
+                <a:shade val="15000"/>
+              </a:schemeClr>
+            </a:lnRef>
+            <a:fillRef idx="1">
+              <a:schemeClr val="accent1"/>
+            </a:fillRef>
+            <a:effectRef idx="0">
+              <a:schemeClr val="accent1"/>
+            </a:effectRef>
+            <a:fontRef idx="minor">
+              <a:schemeClr val="lt1"/>
+            </a:fontRef>
+          </p:style>
+          <p:txBody>
+            <a:bodyPr rtlCol="0" anchor="ctr"/>
+            <a:lstStyle/>
+            <a:p>
+              <a:pPr algn="ctr"/>
+              <a:endParaRPr lang="fr-FR">
+                <a:solidFill>
+                  <a:schemeClr val="lt1"/>
+                </a:solidFill>
+              </a:endParaRPr>
+            </a:p>
+          </p:txBody>
+        </p:sp>
+        <p:sp>
+          <p:nvSpPr>
+            <p:cNvPr id="12" name="Arc 11">
+              <a:extLst>
+                <a:ext uri="{FF2B5EF4-FFF2-40B4-BE49-F238E27FC236}">
+                  <a16:creationId xmlns:a16="http://schemas.microsoft.com/office/drawing/2014/main" id="{CAE630E1-F5D8-17E2-8437-24FA6E6A38C4}"/>
+                </a:ext>
+              </a:extLst>
+            </p:cNvPr>
+            <p:cNvSpPr/>
+            <p:nvPr/>
+          </p:nvSpPr>
+          <p:spPr>
+            <a:xfrm>
+              <a:off x="3445586" y="4301906"/>
+              <a:ext cx="180000" cy="180000"/>
+            </a:xfrm>
+            <a:prstGeom prst="arc">
+              <a:avLst>
+                <a:gd name="adj1" fmla="val 10831576"/>
+                <a:gd name="adj2" fmla="val 0"/>
+              </a:avLst>
+            </a:prstGeom>
+            <a:noFill/>
+            <a:ln w="19050">
+              <a:solidFill>
+                <a:srgbClr val="002060"/>
+              </a:solidFill>
+            </a:ln>
+          </p:spPr>
+          <p:style>
+            <a:lnRef idx="2">
+              <a:schemeClr val="accent1">
+                <a:shade val="15000"/>
+              </a:schemeClr>
+            </a:lnRef>
+            <a:fillRef idx="1">
+              <a:schemeClr val="accent1"/>
+            </a:fillRef>
+            <a:effectRef idx="0">
+              <a:schemeClr val="accent1"/>
+            </a:effectRef>
+            <a:fontRef idx="minor">
+              <a:schemeClr val="lt1"/>
+            </a:fontRef>
+          </p:style>
+          <p:txBody>
+            <a:bodyPr rtlCol="0" anchor="ctr"/>
+            <a:lstStyle/>
+            <a:p>
+              <a:pPr algn="ctr"/>
+              <a:endParaRPr lang="fr-FR">
+                <a:solidFill>
+                  <a:schemeClr val="lt1"/>
+                </a:solidFill>
+              </a:endParaRPr>
+            </a:p>
+          </p:txBody>
+        </p:sp>
+        <p:sp>
+          <p:nvSpPr>
+            <p:cNvPr id="13" name="Arc 12">
+              <a:extLst>
+                <a:ext uri="{FF2B5EF4-FFF2-40B4-BE49-F238E27FC236}">
+                  <a16:creationId xmlns:a16="http://schemas.microsoft.com/office/drawing/2014/main" id="{F7FDDE88-3D25-F04C-C1F3-E24068E16C7A}"/>
+                </a:ext>
+              </a:extLst>
+            </p:cNvPr>
+            <p:cNvSpPr/>
+            <p:nvPr/>
+          </p:nvSpPr>
+          <p:spPr>
+            <a:xfrm>
+              <a:off x="3625586" y="4301906"/>
+              <a:ext cx="180000" cy="180000"/>
+            </a:xfrm>
+            <a:prstGeom prst="arc">
+              <a:avLst>
+                <a:gd name="adj1" fmla="val 10831576"/>
+                <a:gd name="adj2" fmla="val 0"/>
+              </a:avLst>
+            </a:prstGeom>
+            <a:noFill/>
+            <a:ln w="19050">
+              <a:solidFill>
+                <a:srgbClr val="002060"/>
+              </a:solidFill>
+            </a:ln>
+          </p:spPr>
+          <p:style>
+            <a:lnRef idx="2">
+              <a:schemeClr val="accent1">
+                <a:shade val="15000"/>
+              </a:schemeClr>
+            </a:lnRef>
+            <a:fillRef idx="1">
+              <a:schemeClr val="accent1"/>
+            </a:fillRef>
+            <a:effectRef idx="0">
+              <a:schemeClr val="accent1"/>
+            </a:effectRef>
+            <a:fontRef idx="minor">
+              <a:schemeClr val="lt1"/>
+            </a:fontRef>
+          </p:style>
+          <p:txBody>
+            <a:bodyPr rtlCol="0" anchor="ctr"/>
+            <a:lstStyle/>
+            <a:p>
+              <a:pPr algn="ctr"/>
+              <a:endParaRPr lang="fr-FR">
+                <a:solidFill>
+                  <a:schemeClr val="lt1"/>
+                </a:solidFill>
+              </a:endParaRPr>
+            </a:p>
+          </p:txBody>
+        </p:sp>
+        <p:sp>
+          <p:nvSpPr>
+            <p:cNvPr id="14" name="Arc 13">
+              <a:extLst>
+                <a:ext uri="{FF2B5EF4-FFF2-40B4-BE49-F238E27FC236}">
+                  <a16:creationId xmlns:a16="http://schemas.microsoft.com/office/drawing/2014/main" id="{4542B955-52FA-87AB-84CA-26BD98A7275A}"/>
+                </a:ext>
+              </a:extLst>
+            </p:cNvPr>
+            <p:cNvSpPr/>
+            <p:nvPr/>
+          </p:nvSpPr>
+          <p:spPr>
+            <a:xfrm>
+              <a:off x="3805586" y="4301906"/>
+              <a:ext cx="180000" cy="180000"/>
+            </a:xfrm>
+            <a:prstGeom prst="arc">
+              <a:avLst>
+                <a:gd name="adj1" fmla="val 10831576"/>
+                <a:gd name="adj2" fmla="val 0"/>
+              </a:avLst>
+            </a:prstGeom>
+            <a:noFill/>
+            <a:ln w="19050">
+              <a:solidFill>
+                <a:srgbClr val="002060"/>
+              </a:solidFill>
+            </a:ln>
+          </p:spPr>
+          <p:style>
+            <a:lnRef idx="2">
+              <a:schemeClr val="accent1">
+                <a:shade val="15000"/>
+              </a:schemeClr>
+            </a:lnRef>
+            <a:fillRef idx="1">
+              <a:schemeClr val="accent1"/>
+            </a:fillRef>
+            <a:effectRef idx="0">
+              <a:schemeClr val="accent1"/>
+            </a:effectRef>
+            <a:fontRef idx="minor">
+              <a:schemeClr val="lt1"/>
+            </a:fontRef>
+          </p:style>
+          <p:txBody>
+            <a:bodyPr rtlCol="0" anchor="ctr"/>
+            <a:lstStyle/>
+            <a:p>
+              <a:pPr algn="ctr"/>
+              <a:endParaRPr lang="fr-FR">
+                <a:solidFill>
+                  <a:schemeClr val="lt1"/>
+                </a:solidFill>
+              </a:endParaRPr>
+            </a:p>
+          </p:txBody>
+        </p:sp>
+      </p:grpSp>
+      <p:cxnSp>
+        <p:nvCxnSpPr>
+          <p:cNvPr id="18" name="Connecteur droit 17">
+            <a:extLst>
+              <a:ext uri="{FF2B5EF4-FFF2-40B4-BE49-F238E27FC236}">
+                <a16:creationId xmlns:a16="http://schemas.microsoft.com/office/drawing/2014/main" id="{8FF8BCEB-CF86-12CD-921A-70DCE087445F}"/>
+              </a:ext>
+            </a:extLst>
+          </p:cNvPr>
+          <p:cNvCxnSpPr>
+            <a:cxnSpLocks/>
+            <a:stCxn id="5" idx="0"/>
+          </p:cNvCxnSpPr>
+          <p:nvPr/>
+        </p:nvCxnSpPr>
+        <p:spPr>
+          <a:xfrm>
+            <a:off x="4110872" y="3284388"/>
+            <a:ext cx="0" cy="117518"/>
+          </a:xfrm>
+          <a:prstGeom prst="line">
+            <a:avLst/>
+          </a:prstGeom>
+          <a:solidFill>
+            <a:schemeClr val="accent5">
+              <a:lumMod val="20000"/>
+              <a:lumOff val="80000"/>
+            </a:schemeClr>
+          </a:solidFill>
+          <a:ln w="19050">
+            <a:solidFill>
+              <a:srgbClr val="002060"/>
+            </a:solidFill>
+          </a:ln>
+        </p:spPr>
+        <p:style>
+          <a:lnRef idx="2">
+            <a:schemeClr val="accent1">
+              <a:shade val="15000"/>
+            </a:schemeClr>
+          </a:lnRef>
+          <a:fillRef idx="1">
+            <a:schemeClr val="accent1"/>
+          </a:fillRef>
+          <a:effectRef idx="0">
+            <a:schemeClr val="accent1"/>
+          </a:effectRef>
+          <a:fontRef idx="minor">
+            <a:schemeClr val="lt1"/>
+          </a:fontRef>
+        </p:style>
+      </p:cxnSp>
+      <p:cxnSp>
+        <p:nvCxnSpPr>
+          <p:cNvPr id="21" name="Connecteur droit 20">
+            <a:extLst>
+              <a:ext uri="{FF2B5EF4-FFF2-40B4-BE49-F238E27FC236}">
+                <a16:creationId xmlns:a16="http://schemas.microsoft.com/office/drawing/2014/main" id="{C030ED91-8978-23AD-967E-E5CC72467A46}"/>
+              </a:ext>
+            </a:extLst>
+          </p:cNvPr>
+          <p:cNvCxnSpPr>
+            <a:cxnSpLocks/>
+          </p:cNvCxnSpPr>
+          <p:nvPr/>
+        </p:nvCxnSpPr>
+        <p:spPr>
+          <a:xfrm>
+            <a:off x="4110872" y="4292432"/>
+            <a:ext cx="0" cy="252634"/>
+          </a:xfrm>
+          <a:prstGeom prst="line">
+            <a:avLst/>
+          </a:prstGeom>
+          <a:solidFill>
+            <a:schemeClr val="accent5">
+              <a:lumMod val="20000"/>
+              <a:lumOff val="80000"/>
+            </a:schemeClr>
+          </a:solidFill>
+          <a:ln w="19050">
+            <a:solidFill>
+              <a:srgbClr val="002060"/>
+            </a:solidFill>
+          </a:ln>
+        </p:spPr>
+        <p:style>
+          <a:lnRef idx="2">
+            <a:schemeClr val="accent1">
+              <a:shade val="15000"/>
+            </a:schemeClr>
+          </a:lnRef>
+          <a:fillRef idx="1">
+            <a:schemeClr val="accent1"/>
+          </a:fillRef>
+          <a:effectRef idx="0">
+            <a:schemeClr val="accent1"/>
+          </a:effectRef>
+          <a:fontRef idx="minor">
+            <a:schemeClr val="lt1"/>
+          </a:fontRef>
+        </p:style>
+      </p:cxnSp>
+      <p:cxnSp>
+        <p:nvCxnSpPr>
+          <p:cNvPr id="23" name="Connecteur droit 22">
+            <a:extLst>
+              <a:ext uri="{FF2B5EF4-FFF2-40B4-BE49-F238E27FC236}">
+                <a16:creationId xmlns:a16="http://schemas.microsoft.com/office/drawing/2014/main" id="{74F37F39-0440-5621-8AFC-497F77F85236}"/>
+              </a:ext>
+            </a:extLst>
+          </p:cNvPr>
+          <p:cNvCxnSpPr>
+            <a:cxnSpLocks/>
+            <a:endCxn id="5" idx="4"/>
+          </p:cNvCxnSpPr>
+          <p:nvPr/>
+        </p:nvCxnSpPr>
+        <p:spPr>
+          <a:xfrm>
+            <a:off x="4110872" y="4610612"/>
+            <a:ext cx="0" cy="184908"/>
+          </a:xfrm>
+          <a:prstGeom prst="line">
+            <a:avLst/>
+          </a:prstGeom>
+          <a:solidFill>
+            <a:schemeClr val="accent5">
+              <a:lumMod val="20000"/>
+              <a:lumOff val="80000"/>
+            </a:schemeClr>
+          </a:solidFill>
+          <a:ln w="19050">
+            <a:solidFill>
+              <a:srgbClr val="002060"/>
+            </a:solidFill>
+          </a:ln>
+        </p:spPr>
+        <p:style>
+          <a:lnRef idx="2">
+            <a:schemeClr val="accent1">
+              <a:shade val="15000"/>
+            </a:schemeClr>
+          </a:lnRef>
+          <a:fillRef idx="1">
+            <a:schemeClr val="accent1"/>
+          </a:fillRef>
+          <a:effectRef idx="0">
+            <a:schemeClr val="accent1"/>
+          </a:effectRef>
+          <a:fontRef idx="minor">
+            <a:schemeClr val="lt1"/>
+          </a:fontRef>
+        </p:style>
+      </p:cxnSp>
+      <p:cxnSp>
+        <p:nvCxnSpPr>
+          <p:cNvPr id="29" name="Connecteur droit 28">
+            <a:extLst>
+              <a:ext uri="{FF2B5EF4-FFF2-40B4-BE49-F238E27FC236}">
+                <a16:creationId xmlns:a16="http://schemas.microsoft.com/office/drawing/2014/main" id="{5AC4C143-BAFF-8E61-E5C7-F41292C5849F}"/>
+              </a:ext>
+            </a:extLst>
+          </p:cNvPr>
+          <p:cNvCxnSpPr>
+            <a:cxnSpLocks/>
+          </p:cNvCxnSpPr>
+          <p:nvPr/>
+        </p:nvCxnSpPr>
+        <p:spPr>
+          <a:xfrm>
+            <a:off x="4110872" y="4899020"/>
+            <a:ext cx="0" cy="184908"/>
+          </a:xfrm>
+          <a:prstGeom prst="line">
+            <a:avLst/>
+          </a:prstGeom>
+          <a:solidFill>
+            <a:schemeClr val="accent5">
+              <a:lumMod val="20000"/>
+              <a:lumOff val="80000"/>
+            </a:schemeClr>
+          </a:solidFill>
+          <a:ln w="19050">
+            <a:solidFill>
+              <a:srgbClr val="002060"/>
+            </a:solidFill>
+          </a:ln>
+        </p:spPr>
+        <p:style>
+          <a:lnRef idx="2">
+            <a:schemeClr val="accent1">
+              <a:shade val="15000"/>
+            </a:schemeClr>
+          </a:lnRef>
+          <a:fillRef idx="1">
+            <a:schemeClr val="accent1"/>
+          </a:fillRef>
+          <a:effectRef idx="0">
+            <a:schemeClr val="accent1"/>
+          </a:effectRef>
+          <a:fontRef idx="minor">
+            <a:schemeClr val="lt1"/>
+          </a:fontRef>
+        </p:style>
+      </p:cxnSp>
+      <p:cxnSp>
+        <p:nvCxnSpPr>
+          <p:cNvPr id="30" name="Connecteur droit 29">
+            <a:extLst>
+              <a:ext uri="{FF2B5EF4-FFF2-40B4-BE49-F238E27FC236}">
+                <a16:creationId xmlns:a16="http://schemas.microsoft.com/office/drawing/2014/main" id="{657F8CF2-C4C9-1C38-2B44-2167898974AC}"/>
+              </a:ext>
+            </a:extLst>
+          </p:cNvPr>
+          <p:cNvCxnSpPr>
+            <a:cxnSpLocks/>
+          </p:cNvCxnSpPr>
+          <p:nvPr/>
+        </p:nvCxnSpPr>
+        <p:spPr>
+          <a:xfrm>
+            <a:off x="4099358" y="2993271"/>
+            <a:ext cx="0" cy="184908"/>
+          </a:xfrm>
+          <a:prstGeom prst="line">
+            <a:avLst/>
+          </a:prstGeom>
+          <a:solidFill>
+            <a:schemeClr val="accent5">
+              <a:lumMod val="20000"/>
+              <a:lumOff val="80000"/>
+            </a:schemeClr>
+          </a:solidFill>
+          <a:ln w="19050">
+            <a:solidFill>
+              <a:srgbClr val="002060"/>
+            </a:solidFill>
+          </a:ln>
+        </p:spPr>
+        <p:style>
+          <a:lnRef idx="2">
+            <a:schemeClr val="accent1">
+              <a:shade val="15000"/>
+            </a:schemeClr>
+          </a:lnRef>
+          <a:fillRef idx="1">
+            <a:schemeClr val="accent1"/>
+          </a:fillRef>
+          <a:effectRef idx="0">
+            <a:schemeClr val="accent1"/>
+          </a:effectRef>
+          <a:fontRef idx="minor">
+            <a:schemeClr val="lt1"/>
+          </a:fontRef>
+        </p:style>
+      </p:cxnSp>
+      <p:cxnSp>
+        <p:nvCxnSpPr>
+          <p:cNvPr id="31" name="Connecteur droit 30">
+            <a:extLst>
+              <a:ext uri="{FF2B5EF4-FFF2-40B4-BE49-F238E27FC236}">
+                <a16:creationId xmlns:a16="http://schemas.microsoft.com/office/drawing/2014/main" id="{39461D5F-7A1B-29E8-A1E4-A3CD46358EDA}"/>
+              </a:ext>
+            </a:extLst>
+          </p:cNvPr>
+          <p:cNvCxnSpPr>
+            <a:cxnSpLocks/>
+          </p:cNvCxnSpPr>
+          <p:nvPr/>
+        </p:nvCxnSpPr>
+        <p:spPr>
+          <a:xfrm>
+            <a:off x="2850872" y="2989342"/>
+            <a:ext cx="1260000" cy="0"/>
+          </a:xfrm>
+          <a:prstGeom prst="line">
+            <a:avLst/>
+          </a:prstGeom>
+          <a:solidFill>
+            <a:schemeClr val="accent5">
+              <a:lumMod val="20000"/>
+              <a:lumOff val="80000"/>
+            </a:schemeClr>
+          </a:solidFill>
+          <a:ln w="19050">
+            <a:solidFill>
+              <a:srgbClr val="002060"/>
+            </a:solidFill>
+          </a:ln>
+        </p:spPr>
+        <p:style>
+          <a:lnRef idx="2">
+            <a:schemeClr val="accent1">
+              <a:shade val="15000"/>
+            </a:schemeClr>
+          </a:lnRef>
+          <a:fillRef idx="1">
+            <a:schemeClr val="accent1"/>
+          </a:fillRef>
+          <a:effectRef idx="0">
+            <a:schemeClr val="accent1"/>
+          </a:effectRef>
+          <a:fontRef idx="minor">
+            <a:schemeClr val="lt1"/>
+          </a:fontRef>
+        </p:style>
+      </p:cxnSp>
+      <p:cxnSp>
+        <p:nvCxnSpPr>
+          <p:cNvPr id="32" name="Connecteur droit 31">
+            <a:extLst>
+              <a:ext uri="{FF2B5EF4-FFF2-40B4-BE49-F238E27FC236}">
+                <a16:creationId xmlns:a16="http://schemas.microsoft.com/office/drawing/2014/main" id="{F66AD0A9-5559-EE34-CD33-9FB9E5F6E7D0}"/>
+              </a:ext>
+            </a:extLst>
+          </p:cNvPr>
+          <p:cNvCxnSpPr>
+            <a:cxnSpLocks/>
+          </p:cNvCxnSpPr>
+          <p:nvPr/>
+        </p:nvCxnSpPr>
+        <p:spPr>
+          <a:xfrm>
+            <a:off x="2850872" y="5083928"/>
+            <a:ext cx="1260000" cy="0"/>
+          </a:xfrm>
+          <a:prstGeom prst="line">
+            <a:avLst/>
+          </a:prstGeom>
+          <a:solidFill>
+            <a:schemeClr val="accent5">
+              <a:lumMod val="20000"/>
+              <a:lumOff val="80000"/>
+            </a:schemeClr>
+          </a:solidFill>
+          <a:ln w="19050">
+            <a:solidFill>
+              <a:srgbClr val="002060"/>
+            </a:solidFill>
+          </a:ln>
+        </p:spPr>
+        <p:style>
+          <a:lnRef idx="2">
+            <a:schemeClr val="accent1">
+              <a:shade val="15000"/>
+            </a:schemeClr>
+          </a:lnRef>
+          <a:fillRef idx="1">
+            <a:schemeClr val="accent1"/>
+          </a:fillRef>
+          <a:effectRef idx="0">
+            <a:schemeClr val="accent1"/>
+          </a:effectRef>
+          <a:fontRef idx="minor">
+            <a:schemeClr val="lt1"/>
+          </a:fontRef>
+        </p:style>
+      </p:cxnSp>
+      <p:cxnSp>
+        <p:nvCxnSpPr>
+          <p:cNvPr id="33" name="Connecteur droit 32">
+            <a:extLst>
+              <a:ext uri="{FF2B5EF4-FFF2-40B4-BE49-F238E27FC236}">
+                <a16:creationId xmlns:a16="http://schemas.microsoft.com/office/drawing/2014/main" id="{661B1E4D-4FE5-1F6E-A018-D291EFB3432F}"/>
+              </a:ext>
+            </a:extLst>
+          </p:cNvPr>
+          <p:cNvCxnSpPr>
+            <a:cxnSpLocks/>
+          </p:cNvCxnSpPr>
+          <p:nvPr/>
+        </p:nvCxnSpPr>
+        <p:spPr>
+          <a:xfrm>
+            <a:off x="2886910" y="3178179"/>
+            <a:ext cx="0" cy="1620000"/>
+          </a:xfrm>
+          <a:prstGeom prst="line">
+            <a:avLst/>
+          </a:prstGeom>
+          <a:solidFill>
+            <a:schemeClr val="accent5">
+              <a:lumMod val="20000"/>
+              <a:lumOff val="80000"/>
+            </a:schemeClr>
+          </a:solidFill>
+          <a:ln w="19050">
+            <a:solidFill>
+              <a:srgbClr val="002060"/>
+            </a:solidFill>
+            <a:headEnd type="stealth" w="med" len="lg"/>
+          </a:ln>
+        </p:spPr>
+        <p:style>
+          <a:lnRef idx="2">
+            <a:schemeClr val="accent1">
+              <a:shade val="15000"/>
+            </a:schemeClr>
+          </a:lnRef>
+          <a:fillRef idx="1">
+            <a:schemeClr val="accent1"/>
+          </a:fillRef>
+          <a:effectRef idx="0">
+            <a:schemeClr val="accent1"/>
+          </a:effectRef>
+          <a:fontRef idx="minor">
+            <a:schemeClr val="lt1"/>
+          </a:fontRef>
+        </p:style>
+      </p:cxnSp>
+      <p:cxnSp>
+        <p:nvCxnSpPr>
+          <p:cNvPr id="34" name="Connecteur droit 33">
+            <a:extLst>
+              <a:ext uri="{FF2B5EF4-FFF2-40B4-BE49-F238E27FC236}">
+                <a16:creationId xmlns:a16="http://schemas.microsoft.com/office/drawing/2014/main" id="{FFB2E22C-731D-6DED-718F-745B154DA740}"/>
+              </a:ext>
+            </a:extLst>
+          </p:cNvPr>
+          <p:cNvCxnSpPr>
+            <a:cxnSpLocks/>
+          </p:cNvCxnSpPr>
+          <p:nvPr/>
+        </p:nvCxnSpPr>
+        <p:spPr>
+          <a:xfrm flipH="1">
+            <a:off x="3355306" y="2988986"/>
+            <a:ext cx="216000" cy="0"/>
+          </a:xfrm>
+          <a:prstGeom prst="line">
+            <a:avLst/>
+          </a:prstGeom>
+          <a:solidFill>
+            <a:schemeClr val="accent5">
+              <a:lumMod val="20000"/>
+              <a:lumOff val="80000"/>
+            </a:schemeClr>
+          </a:solidFill>
+          <a:ln w="19050">
+            <a:solidFill>
+              <a:srgbClr val="002060"/>
+            </a:solidFill>
+            <a:headEnd type="stealth" w="med" len="lg"/>
+          </a:ln>
+        </p:spPr>
+        <p:style>
+          <a:lnRef idx="2">
+            <a:schemeClr val="accent1">
+              <a:shade val="15000"/>
+            </a:schemeClr>
+          </a:lnRef>
+          <a:fillRef idx="1">
+            <a:schemeClr val="accent1"/>
+          </a:fillRef>
+          <a:effectRef idx="0">
+            <a:schemeClr val="accent1"/>
+          </a:effectRef>
+          <a:fontRef idx="minor">
+            <a:schemeClr val="lt1"/>
+          </a:fontRef>
+        </p:style>
+      </p:cxnSp>
+      <mc:AlternateContent xmlns:mc="http://schemas.openxmlformats.org/markup-compatibility/2006">
+        <mc:Choice xmlns:a14="http://schemas.microsoft.com/office/drawing/2010/main" Requires="a14">
+          <p:sp>
+            <p:nvSpPr>
+              <p:cNvPr id="38" name="ZoneTexte 37">
+                <a:extLst>
+                  <a:ext uri="{FF2B5EF4-FFF2-40B4-BE49-F238E27FC236}">
+                    <a16:creationId xmlns:a16="http://schemas.microsoft.com/office/drawing/2014/main" id="{5379CB82-65DC-2ACC-D3A4-292BFDC35E6C}"/>
+                  </a:ext>
+                </a:extLst>
+              </p:cNvPr>
+              <p:cNvSpPr txBox="1"/>
+              <p:nvPr/>
+            </p:nvSpPr>
+            <p:spPr>
+              <a:xfrm>
+                <a:off x="2572240" y="3880852"/>
+                <a:ext cx="216085" cy="276999"/>
+              </a:xfrm>
+              <a:prstGeom prst="rect">
+                <a:avLst/>
+              </a:prstGeom>
+              <a:noFill/>
+            </p:spPr>
+            <p:txBody>
+              <a:bodyPr wrap="none" lIns="0" tIns="0" rIns="0" bIns="0" rtlCol="0">
+                <a:spAutoFit/>
+              </a:bodyPr>
+              <a:lstStyle/>
+              <a:p>
+                <a14:m>
+                  <m:oMathPara xmlns:m="http://schemas.openxmlformats.org/officeDocument/2006/math">
+                    <m:oMathParaPr>
+                      <m:jc m:val="centerGroup"/>
+                    </m:oMathParaPr>
+                    <m:oMath xmlns:m="http://schemas.openxmlformats.org/officeDocument/2006/math">
+                      <m:r>
+                        <a:rPr lang="fr-FR" b="0" i="1" smtClean="0">
+                          <a:latin typeface="Cambria Math" panose="02040503050406030204" pitchFamily="18" charset="0"/>
+                        </a:rPr>
+                        <m:t>𝑈</m:t>
+                      </m:r>
+                    </m:oMath>
+                  </m:oMathPara>
+                </a14:m>
+                <a:endParaRPr lang="fr-FR" dirty="0"/>
+              </a:p>
+            </p:txBody>
+          </p:sp>
+        </mc:Choice>
+        <mc:Fallback>
+          <p:sp>
+            <p:nvSpPr>
+              <p:cNvPr id="38" name="ZoneTexte 37">
+                <a:extLst>
+                  <a:ext uri="{FF2B5EF4-FFF2-40B4-BE49-F238E27FC236}">
+                    <a16:creationId xmlns:a16="http://schemas.microsoft.com/office/drawing/2014/main" id="{5379CB82-65DC-2ACC-D3A4-292BFDC35E6C}"/>
+                  </a:ext>
+                </a:extLst>
+              </p:cNvPr>
+              <p:cNvSpPr txBox="1">
+                <a:spLocks noRot="1" noChangeAspect="1" noMove="1" noResize="1" noEditPoints="1" noAdjustHandles="1" noChangeArrowheads="1" noChangeShapeType="1" noTextEdit="1"/>
+              </p:cNvSpPr>
+              <p:nvPr/>
+            </p:nvSpPr>
+            <p:spPr>
+              <a:xfrm>
+                <a:off x="2572240" y="3880852"/>
+                <a:ext cx="216085" cy="276999"/>
+              </a:xfrm>
+              <a:prstGeom prst="rect">
+                <a:avLst/>
+              </a:prstGeom>
+              <a:blipFill>
+                <a:blip r:embed="rId2"/>
+                <a:stretch>
+                  <a:fillRect l="-28571" r="-22857" b="-6667"/>
+                </a:stretch>
+              </a:blipFill>
+            </p:spPr>
+            <p:txBody>
+              <a:bodyPr/>
+              <a:lstStyle/>
+              <a:p>
+                <a:r>
+                  <a:rPr lang="fr-FR">
+                    <a:noFill/>
+                  </a:rPr>
+                  <a:t> </a:t>
+                </a:r>
+              </a:p>
+            </p:txBody>
+          </p:sp>
+        </mc:Fallback>
+      </mc:AlternateContent>
+      <mc:AlternateContent xmlns:mc="http://schemas.openxmlformats.org/markup-compatibility/2006">
+        <mc:Choice xmlns:a14="http://schemas.microsoft.com/office/drawing/2010/main" Requires="a14">
+          <p:sp>
+            <p:nvSpPr>
+              <p:cNvPr id="39" name="ZoneTexte 38">
+                <a:extLst>
+                  <a:ext uri="{FF2B5EF4-FFF2-40B4-BE49-F238E27FC236}">
+                    <a16:creationId xmlns:a16="http://schemas.microsoft.com/office/drawing/2014/main" id="{83550E27-F98C-A8BE-D65A-58184BC76F93}"/>
+                  </a:ext>
+                </a:extLst>
+              </p:cNvPr>
+              <p:cNvSpPr txBox="1"/>
+              <p:nvPr/>
+            </p:nvSpPr>
+            <p:spPr>
+              <a:xfrm>
+                <a:off x="3247221" y="2658882"/>
+                <a:ext cx="148374" cy="276999"/>
+              </a:xfrm>
+              <a:prstGeom prst="rect">
+                <a:avLst/>
+              </a:prstGeom>
+              <a:noFill/>
+            </p:spPr>
+            <p:txBody>
+              <a:bodyPr wrap="none" lIns="0" tIns="0" rIns="0" bIns="0" rtlCol="0">
+                <a:spAutoFit/>
+              </a:bodyPr>
+              <a:lstStyle/>
+              <a:p>
+                <a14:m>
+                  <m:oMathPara xmlns:m="http://schemas.openxmlformats.org/officeDocument/2006/math">
+                    <m:oMathParaPr>
+                      <m:jc m:val="centerGroup"/>
+                    </m:oMathParaPr>
+                    <m:oMath xmlns:m="http://schemas.openxmlformats.org/officeDocument/2006/math">
+                      <m:r>
+                        <a:rPr lang="fr-FR" b="0" i="1" smtClean="0">
+                          <a:latin typeface="Cambria Math" panose="02040503050406030204" pitchFamily="18" charset="0"/>
+                        </a:rPr>
+                        <m:t>𝐼</m:t>
+                      </m:r>
+                    </m:oMath>
+                  </m:oMathPara>
+                </a14:m>
+                <a:endParaRPr lang="fr-FR" dirty="0"/>
+              </a:p>
+            </p:txBody>
+          </p:sp>
+        </mc:Choice>
+        <mc:Fallback>
+          <p:sp>
+            <p:nvSpPr>
+              <p:cNvPr id="39" name="ZoneTexte 38">
+                <a:extLst>
+                  <a:ext uri="{FF2B5EF4-FFF2-40B4-BE49-F238E27FC236}">
+                    <a16:creationId xmlns:a16="http://schemas.microsoft.com/office/drawing/2014/main" id="{83550E27-F98C-A8BE-D65A-58184BC76F93}"/>
+                  </a:ext>
+                </a:extLst>
+              </p:cNvPr>
+              <p:cNvSpPr txBox="1">
+                <a:spLocks noRot="1" noChangeAspect="1" noMove="1" noResize="1" noEditPoints="1" noAdjustHandles="1" noChangeArrowheads="1" noChangeShapeType="1" noTextEdit="1"/>
+              </p:cNvSpPr>
+              <p:nvPr/>
+            </p:nvSpPr>
+            <p:spPr>
+              <a:xfrm>
+                <a:off x="3247221" y="2658882"/>
+                <a:ext cx="148374" cy="276999"/>
+              </a:xfrm>
+              <a:prstGeom prst="rect">
+                <a:avLst/>
+              </a:prstGeom>
+              <a:blipFill>
+                <a:blip r:embed="rId3"/>
+                <a:stretch>
+                  <a:fillRect l="-41667" r="-29167" b="-6522"/>
+                </a:stretch>
+              </a:blipFill>
+            </p:spPr>
+            <p:txBody>
+              <a:bodyPr/>
+              <a:lstStyle/>
+              <a:p>
+                <a:r>
+                  <a:rPr lang="fr-FR">
+                    <a:noFill/>
+                  </a:rPr>
+                  <a:t> </a:t>
+                </a:r>
+              </a:p>
+            </p:txBody>
+          </p:sp>
+        </mc:Fallback>
+      </mc:AlternateContent>
+      <p:cxnSp>
+        <p:nvCxnSpPr>
+          <p:cNvPr id="40" name="Connecteur droit 39">
+            <a:extLst>
+              <a:ext uri="{FF2B5EF4-FFF2-40B4-BE49-F238E27FC236}">
+                <a16:creationId xmlns:a16="http://schemas.microsoft.com/office/drawing/2014/main" id="{CF7133AB-1073-2AFC-51C5-3E99DAF484F1}"/>
+              </a:ext>
+            </a:extLst>
+          </p:cNvPr>
+          <p:cNvCxnSpPr>
+            <a:cxnSpLocks/>
+          </p:cNvCxnSpPr>
+          <p:nvPr/>
+        </p:nvCxnSpPr>
+        <p:spPr>
+          <a:xfrm>
+            <a:off x="3862270" y="4470400"/>
+            <a:ext cx="0" cy="244649"/>
+          </a:xfrm>
+          <a:prstGeom prst="line">
+            <a:avLst/>
+          </a:prstGeom>
+          <a:solidFill>
+            <a:schemeClr val="accent5">
+              <a:lumMod val="20000"/>
+              <a:lumOff val="80000"/>
+            </a:schemeClr>
+          </a:solidFill>
+          <a:ln w="19050">
+            <a:solidFill>
+              <a:srgbClr val="002060"/>
+            </a:solidFill>
+            <a:headEnd type="stealth" w="med" len="lg"/>
+          </a:ln>
+        </p:spPr>
+        <p:style>
+          <a:lnRef idx="2">
+            <a:schemeClr val="accent1">
+              <a:shade val="15000"/>
+            </a:schemeClr>
+          </a:lnRef>
+          <a:fillRef idx="1">
+            <a:schemeClr val="accent1"/>
+          </a:fillRef>
+          <a:effectRef idx="0">
+            <a:schemeClr val="accent1"/>
+          </a:effectRef>
+          <a:fontRef idx="minor">
+            <a:schemeClr val="lt1"/>
+          </a:fontRef>
+        </p:style>
+      </p:cxnSp>
+      <p:cxnSp>
+        <p:nvCxnSpPr>
+          <p:cNvPr id="43" name="Connecteur droit 42">
+            <a:extLst>
+              <a:ext uri="{FF2B5EF4-FFF2-40B4-BE49-F238E27FC236}">
+                <a16:creationId xmlns:a16="http://schemas.microsoft.com/office/drawing/2014/main" id="{5875F686-BA96-4C0F-52C3-A5C9A2AC5352}"/>
+              </a:ext>
+            </a:extLst>
+          </p:cNvPr>
+          <p:cNvCxnSpPr>
+            <a:cxnSpLocks/>
+          </p:cNvCxnSpPr>
+          <p:nvPr/>
+        </p:nvCxnSpPr>
+        <p:spPr>
+          <a:xfrm>
+            <a:off x="3862270" y="3880852"/>
+            <a:ext cx="0" cy="543378"/>
+          </a:xfrm>
+          <a:prstGeom prst="line">
+            <a:avLst/>
+          </a:prstGeom>
+          <a:solidFill>
+            <a:schemeClr val="accent5">
+              <a:lumMod val="20000"/>
+              <a:lumOff val="80000"/>
+            </a:schemeClr>
+          </a:solidFill>
+          <a:ln w="19050">
+            <a:solidFill>
+              <a:srgbClr val="002060"/>
+            </a:solidFill>
+            <a:headEnd type="stealth" w="med" len="lg"/>
+          </a:ln>
+        </p:spPr>
+        <p:style>
+          <a:lnRef idx="2">
+            <a:schemeClr val="accent1">
+              <a:shade val="15000"/>
+            </a:schemeClr>
+          </a:lnRef>
+          <a:fillRef idx="1">
+            <a:schemeClr val="accent1"/>
+          </a:fillRef>
+          <a:effectRef idx="0">
+            <a:schemeClr val="accent1"/>
+          </a:effectRef>
+          <a:fontRef idx="minor">
+            <a:schemeClr val="lt1"/>
+          </a:fontRef>
+        </p:style>
+      </p:cxnSp>
+      <p:cxnSp>
+        <p:nvCxnSpPr>
+          <p:cNvPr id="47" name="Connecteur droit 46">
+            <a:extLst>
+              <a:ext uri="{FF2B5EF4-FFF2-40B4-BE49-F238E27FC236}">
+                <a16:creationId xmlns:a16="http://schemas.microsoft.com/office/drawing/2014/main" id="{9603F7C3-9A01-D29B-9760-E84003F0A7F4}"/>
+              </a:ext>
+            </a:extLst>
+          </p:cNvPr>
+          <p:cNvCxnSpPr>
+            <a:cxnSpLocks/>
+          </p:cNvCxnSpPr>
+          <p:nvPr/>
+        </p:nvCxnSpPr>
+        <p:spPr>
+          <a:xfrm>
+            <a:off x="3991387" y="3401906"/>
+            <a:ext cx="0" cy="397555"/>
+          </a:xfrm>
+          <a:prstGeom prst="line">
+            <a:avLst/>
+          </a:prstGeom>
+          <a:solidFill>
+            <a:schemeClr val="accent5">
+              <a:lumMod val="20000"/>
+              <a:lumOff val="80000"/>
+            </a:schemeClr>
+          </a:solidFill>
+          <a:ln w="19050">
+            <a:solidFill>
+              <a:srgbClr val="002060"/>
+            </a:solidFill>
+            <a:headEnd type="stealth" w="med" len="lg"/>
+          </a:ln>
+        </p:spPr>
+        <p:style>
+          <a:lnRef idx="2">
+            <a:schemeClr val="accent1">
+              <a:shade val="15000"/>
+            </a:schemeClr>
+          </a:lnRef>
+          <a:fillRef idx="1">
+            <a:schemeClr val="accent1"/>
+          </a:fillRef>
+          <a:effectRef idx="0">
+            <a:schemeClr val="accent1"/>
+          </a:effectRef>
+          <a:fontRef idx="minor">
+            <a:schemeClr val="lt1"/>
+          </a:fontRef>
+        </p:style>
+      </p:cxnSp>
+      <mc:AlternateContent xmlns:mc="http://schemas.openxmlformats.org/markup-compatibility/2006">
+        <mc:Choice xmlns:a14="http://schemas.microsoft.com/office/drawing/2010/main" Requires="a14">
+          <p:sp>
+            <p:nvSpPr>
+              <p:cNvPr id="49" name="ZoneTexte 48">
+                <a:extLst>
+                  <a:ext uri="{FF2B5EF4-FFF2-40B4-BE49-F238E27FC236}">
+                    <a16:creationId xmlns:a16="http://schemas.microsoft.com/office/drawing/2014/main" id="{4DEE699E-4955-D4AF-C775-3EE882A47042}"/>
+                  </a:ext>
+                </a:extLst>
+              </p:cNvPr>
+              <p:cNvSpPr txBox="1"/>
+              <p:nvPr/>
+            </p:nvSpPr>
+            <p:spPr>
+              <a:xfrm>
+                <a:off x="3679661" y="4500391"/>
+                <a:ext cx="137474" cy="184666"/>
+              </a:xfrm>
+              <a:prstGeom prst="rect">
+                <a:avLst/>
+              </a:prstGeom>
+              <a:noFill/>
+            </p:spPr>
+            <p:txBody>
+              <a:bodyPr wrap="none" lIns="0" tIns="0" rIns="0" bIns="0" rtlCol="0">
+                <a:spAutoFit/>
+              </a:bodyPr>
+              <a:lstStyle/>
+              <a:p>
+                <a14:m>
+                  <m:oMathPara xmlns:m="http://schemas.openxmlformats.org/officeDocument/2006/math">
+                    <m:oMathParaPr>
+                      <m:jc m:val="centerGroup"/>
+                    </m:oMathParaPr>
+                    <m:oMath xmlns:m="http://schemas.openxmlformats.org/officeDocument/2006/math">
+                      <m:r>
+                        <a:rPr lang="fr-FR" sz="1200" b="0" i="1" smtClean="0">
+                          <a:latin typeface="Cambria Math" panose="02040503050406030204" pitchFamily="18" charset="0"/>
+                        </a:rPr>
+                        <m:t>𝐸</m:t>
+                      </m:r>
+                    </m:oMath>
+                  </m:oMathPara>
+                </a14:m>
+                <a:endParaRPr lang="fr-FR" sz="1200" dirty="0"/>
+              </a:p>
+            </p:txBody>
+          </p:sp>
+        </mc:Choice>
+        <mc:Fallback>
+          <p:sp>
+            <p:nvSpPr>
+              <p:cNvPr id="49" name="ZoneTexte 48">
+                <a:extLst>
+                  <a:ext uri="{FF2B5EF4-FFF2-40B4-BE49-F238E27FC236}">
+                    <a16:creationId xmlns:a16="http://schemas.microsoft.com/office/drawing/2014/main" id="{4DEE699E-4955-D4AF-C775-3EE882A47042}"/>
+                  </a:ext>
+                </a:extLst>
+              </p:cNvPr>
+              <p:cNvSpPr txBox="1">
+                <a:spLocks noRot="1" noChangeAspect="1" noMove="1" noResize="1" noEditPoints="1" noAdjustHandles="1" noChangeArrowheads="1" noChangeShapeType="1" noTextEdit="1"/>
+              </p:cNvSpPr>
+              <p:nvPr/>
+            </p:nvSpPr>
+            <p:spPr>
+              <a:xfrm>
+                <a:off x="3679661" y="4500391"/>
+                <a:ext cx="137474" cy="184666"/>
+              </a:xfrm>
+              <a:prstGeom prst="rect">
+                <a:avLst/>
+              </a:prstGeom>
+              <a:blipFill>
+                <a:blip r:embed="rId4"/>
+                <a:stretch>
+                  <a:fillRect l="-27273" r="-27273" b="-3226"/>
+                </a:stretch>
+              </a:blipFill>
+            </p:spPr>
+            <p:txBody>
+              <a:bodyPr/>
+              <a:lstStyle/>
+              <a:p>
+                <a:r>
+                  <a:rPr lang="fr-FR">
+                    <a:noFill/>
+                  </a:rPr>
+                  <a:t> </a:t>
+                </a:r>
+              </a:p>
+            </p:txBody>
+          </p:sp>
+        </mc:Fallback>
+      </mc:AlternateContent>
+      <mc:AlternateContent xmlns:mc="http://schemas.openxmlformats.org/markup-compatibility/2006">
+        <mc:Choice xmlns:a14="http://schemas.microsoft.com/office/drawing/2010/main" Requires="a14">
+          <p:sp>
+            <p:nvSpPr>
+              <p:cNvPr id="50" name="ZoneTexte 49">
+                <a:extLst>
+                  <a:ext uri="{FF2B5EF4-FFF2-40B4-BE49-F238E27FC236}">
+                    <a16:creationId xmlns:a16="http://schemas.microsoft.com/office/drawing/2014/main" id="{41288294-9D77-453E-655D-DEC190702035}"/>
+                  </a:ext>
+                </a:extLst>
+              </p:cNvPr>
+              <p:cNvSpPr txBox="1"/>
+              <p:nvPr/>
+            </p:nvSpPr>
+            <p:spPr>
+              <a:xfrm>
+                <a:off x="3594720" y="4024998"/>
+                <a:ext cx="235321" cy="284693"/>
+              </a:xfrm>
+              <a:prstGeom prst="rect">
+                <a:avLst/>
+              </a:prstGeom>
+              <a:noFill/>
+            </p:spPr>
+            <p:txBody>
+              <a:bodyPr wrap="none" lIns="0" tIns="0" rIns="0" bIns="0" rtlCol="0">
+                <a:spAutoFit/>
+              </a:bodyPr>
+              <a:lstStyle/>
+              <a:p>
+                <a14:m>
+                  <m:oMathPara xmlns:m="http://schemas.openxmlformats.org/officeDocument/2006/math">
+                    <m:oMathParaPr>
+                      <m:jc m:val="centerGroup"/>
+                    </m:oMathParaPr>
+                    <m:oMath xmlns:m="http://schemas.openxmlformats.org/officeDocument/2006/math">
+                      <m:sSub>
+                        <m:sSubPr>
+                          <m:ctrlPr>
+                            <a:rPr lang="fr-FR" sz="1050" b="0" i="1" smtClean="0">
+                              <a:latin typeface="Cambria Math" panose="02040503050406030204" pitchFamily="18" charset="0"/>
+                            </a:rPr>
+                          </m:ctrlPr>
+                        </m:sSubPr>
+                        <m:e>
+                          <m:r>
+                            <a:rPr lang="fr-FR" sz="1050" b="0" i="1" smtClean="0">
+                              <a:latin typeface="Cambria Math" panose="02040503050406030204" pitchFamily="18" charset="0"/>
+                            </a:rPr>
+                            <m:t>𝑈</m:t>
+                          </m:r>
+                        </m:e>
+                        <m:sub>
+                          <m:r>
+                            <a:rPr lang="fr-FR" sz="1050" b="0" i="1" smtClean="0">
+                              <a:latin typeface="Cambria Math" panose="02040503050406030204" pitchFamily="18" charset="0"/>
+                            </a:rPr>
+                            <m:t>𝑅</m:t>
+                          </m:r>
+                        </m:sub>
+                      </m:sSub>
+                    </m:oMath>
+                  </m:oMathPara>
+                </a14:m>
+                <a:endParaRPr lang="fr-FR" sz="1050" b="0" i="1" dirty="0">
+                  <a:latin typeface="Cambria Math" panose="02040503050406030204" pitchFamily="18" charset="0"/>
+                </a:endParaRPr>
+              </a:p>
+              <a:p>
+                <a14:m>
+                  <m:oMathPara xmlns:m="http://schemas.openxmlformats.org/officeDocument/2006/math">
+                    <m:oMathParaPr>
+                      <m:jc m:val="centerGroup"/>
+                    </m:oMathParaPr>
+                    <m:oMath xmlns:m="http://schemas.openxmlformats.org/officeDocument/2006/math">
+                      <m:r>
+                        <a:rPr lang="fr-FR" sz="800" b="0" i="1" smtClean="0">
+                          <a:latin typeface="Cambria Math" panose="02040503050406030204" pitchFamily="18" charset="0"/>
+                        </a:rPr>
+                        <m:t>=</m:t>
+                      </m:r>
+                      <m:r>
+                        <a:rPr lang="fr-FR" sz="800" b="0" i="1" smtClean="0">
+                          <a:latin typeface="Cambria Math" panose="02040503050406030204" pitchFamily="18" charset="0"/>
+                        </a:rPr>
+                        <m:t>𝑅𝐼</m:t>
+                      </m:r>
+                    </m:oMath>
+                  </m:oMathPara>
+                </a14:m>
+                <a:endParaRPr lang="fr-FR" sz="800" dirty="0"/>
+              </a:p>
+            </p:txBody>
+          </p:sp>
+        </mc:Choice>
+        <mc:Fallback>
+          <p:sp>
+            <p:nvSpPr>
+              <p:cNvPr id="50" name="ZoneTexte 49">
+                <a:extLst>
+                  <a:ext uri="{FF2B5EF4-FFF2-40B4-BE49-F238E27FC236}">
+                    <a16:creationId xmlns:a16="http://schemas.microsoft.com/office/drawing/2014/main" id="{41288294-9D77-453E-655D-DEC190702035}"/>
+                  </a:ext>
+                </a:extLst>
+              </p:cNvPr>
+              <p:cNvSpPr txBox="1">
+                <a:spLocks noRot="1" noChangeAspect="1" noMove="1" noResize="1" noEditPoints="1" noAdjustHandles="1" noChangeArrowheads="1" noChangeShapeType="1" noTextEdit="1"/>
+              </p:cNvSpPr>
+              <p:nvPr/>
+            </p:nvSpPr>
+            <p:spPr>
+              <a:xfrm>
+                <a:off x="3594720" y="4024998"/>
+                <a:ext cx="235321" cy="284693"/>
+              </a:xfrm>
+              <a:prstGeom prst="rect">
+                <a:avLst/>
+              </a:prstGeom>
+              <a:blipFill>
+                <a:blip r:embed="rId5"/>
+                <a:stretch>
+                  <a:fillRect l="-5263" r="-10526" b="-2128"/>
+                </a:stretch>
+              </a:blipFill>
+            </p:spPr>
+            <p:txBody>
+              <a:bodyPr/>
+              <a:lstStyle/>
+              <a:p>
+                <a:r>
+                  <a:rPr lang="fr-FR">
+                    <a:noFill/>
+                  </a:rPr>
+                  <a:t> </a:t>
+                </a:r>
+              </a:p>
+            </p:txBody>
+          </p:sp>
+        </mc:Fallback>
+      </mc:AlternateContent>
+      <mc:AlternateContent xmlns:mc="http://schemas.openxmlformats.org/markup-compatibility/2006">
+        <mc:Choice xmlns:a14="http://schemas.microsoft.com/office/drawing/2010/main" Requires="a14">
+          <p:sp>
+            <p:nvSpPr>
+              <p:cNvPr id="51" name="ZoneTexte 50">
+                <a:extLst>
+                  <a:ext uri="{FF2B5EF4-FFF2-40B4-BE49-F238E27FC236}">
+                    <a16:creationId xmlns:a16="http://schemas.microsoft.com/office/drawing/2014/main" id="{9EE4FDF9-A316-D4B3-425D-1764BA379372}"/>
+                  </a:ext>
+                </a:extLst>
+              </p:cNvPr>
+              <p:cNvSpPr txBox="1"/>
+              <p:nvPr/>
+            </p:nvSpPr>
+            <p:spPr>
+              <a:xfrm>
+                <a:off x="3215718" y="3508115"/>
+                <a:ext cx="1065359" cy="263021"/>
+              </a:xfrm>
+              <a:prstGeom prst="rect">
+                <a:avLst/>
+              </a:prstGeom>
+              <a:noFill/>
+            </p:spPr>
+            <p:txBody>
+              <a:bodyPr wrap="square" lIns="0" tIns="0" rIns="0" bIns="0" rtlCol="0">
+                <a:spAutoFit/>
+              </a:bodyPr>
+              <a:lstStyle/>
+              <a:p>
+                <a14:m>
+                  <m:oMathPara xmlns:m="http://schemas.openxmlformats.org/officeDocument/2006/math">
+                    <m:oMathParaPr>
+                      <m:jc m:val="centerGroup"/>
+                    </m:oMathParaPr>
+                    <m:oMath xmlns:m="http://schemas.openxmlformats.org/officeDocument/2006/math">
+                      <m:sSub>
+                        <m:sSubPr>
+                          <m:ctrlPr>
+                            <a:rPr lang="fr-FR" sz="900" b="0" i="1" smtClean="0">
+                              <a:latin typeface="Cambria Math" panose="02040503050406030204" pitchFamily="18" charset="0"/>
+                            </a:rPr>
+                          </m:ctrlPr>
+                        </m:sSubPr>
+                        <m:e>
+                          <m:r>
+                            <a:rPr lang="fr-FR" sz="900" b="0" i="1" smtClean="0">
+                              <a:latin typeface="Cambria Math" panose="02040503050406030204" pitchFamily="18" charset="0"/>
+                            </a:rPr>
+                            <m:t>𝑈</m:t>
+                          </m:r>
+                        </m:e>
+                        <m:sub>
+                          <m:r>
+                            <a:rPr lang="fr-FR" sz="900" b="0" i="1" smtClean="0">
+                              <a:latin typeface="Cambria Math" panose="02040503050406030204" pitchFamily="18" charset="0"/>
+                            </a:rPr>
+                            <m:t>𝐿</m:t>
+                          </m:r>
+                        </m:sub>
+                      </m:sSub>
+                      <m:r>
+                        <a:rPr lang="fr-FR" sz="900" b="0" i="1" smtClean="0">
+                          <a:latin typeface="Cambria Math" panose="02040503050406030204" pitchFamily="18" charset="0"/>
+                        </a:rPr>
+                        <m:t>=</m:t>
+                      </m:r>
+                      <m:f>
+                        <m:fPr>
+                          <m:ctrlPr>
+                            <a:rPr lang="fr-FR" sz="900" b="0" i="1" smtClean="0">
+                              <a:latin typeface="Cambria Math" panose="02040503050406030204" pitchFamily="18" charset="0"/>
+                            </a:rPr>
+                          </m:ctrlPr>
+                        </m:fPr>
+                        <m:num>
+                          <m:r>
+                            <a:rPr lang="fr-FR" sz="900" b="0" i="1" smtClean="0">
+                              <a:latin typeface="Cambria Math" panose="02040503050406030204" pitchFamily="18" charset="0"/>
+                            </a:rPr>
+                            <m:t>𝐿</m:t>
+                          </m:r>
+                          <m:r>
+                            <m:rPr>
+                              <m:sty m:val="p"/>
+                            </m:rPr>
+                            <a:rPr lang="fr-FR" sz="900" b="0" i="0" smtClean="0">
+                              <a:latin typeface="Cambria Math" panose="02040503050406030204" pitchFamily="18" charset="0"/>
+                            </a:rPr>
+                            <m:t>d</m:t>
+                          </m:r>
+                          <m:r>
+                            <a:rPr lang="fr-FR" sz="900" b="0" i="1" smtClean="0">
+                              <a:latin typeface="Cambria Math" panose="02040503050406030204" pitchFamily="18" charset="0"/>
+                            </a:rPr>
+                            <m:t>𝑖</m:t>
+                          </m:r>
+                        </m:num>
+                        <m:den>
+                          <m:r>
+                            <m:rPr>
+                              <m:sty m:val="p"/>
+                            </m:rPr>
+                            <a:rPr lang="fr-FR" sz="900" b="0" i="0" smtClean="0">
+                              <a:latin typeface="Cambria Math" panose="02040503050406030204" pitchFamily="18" charset="0"/>
+                            </a:rPr>
+                            <m:t>d</m:t>
+                          </m:r>
+                          <m:r>
+                            <a:rPr lang="fr-FR" sz="900" b="0" i="1" smtClean="0">
+                              <a:latin typeface="Cambria Math" panose="02040503050406030204" pitchFamily="18" charset="0"/>
+                            </a:rPr>
+                            <m:t>𝑡</m:t>
+                          </m:r>
+                        </m:den>
+                      </m:f>
+                    </m:oMath>
+                  </m:oMathPara>
+                </a14:m>
+                <a:endParaRPr lang="fr-FR" sz="800" dirty="0"/>
+              </a:p>
+            </p:txBody>
+          </p:sp>
+        </mc:Choice>
+        <mc:Fallback>
+          <p:sp>
+            <p:nvSpPr>
+              <p:cNvPr id="51" name="ZoneTexte 50">
+                <a:extLst>
+                  <a:ext uri="{FF2B5EF4-FFF2-40B4-BE49-F238E27FC236}">
+                    <a16:creationId xmlns:a16="http://schemas.microsoft.com/office/drawing/2014/main" id="{9EE4FDF9-A316-D4B3-425D-1764BA379372}"/>
+                  </a:ext>
+                </a:extLst>
+              </p:cNvPr>
+              <p:cNvSpPr txBox="1">
+                <a:spLocks noRot="1" noChangeAspect="1" noMove="1" noResize="1" noEditPoints="1" noAdjustHandles="1" noChangeArrowheads="1" noChangeShapeType="1" noTextEdit="1"/>
+              </p:cNvSpPr>
+              <p:nvPr/>
+            </p:nvSpPr>
+            <p:spPr>
+              <a:xfrm>
+                <a:off x="3215718" y="3508115"/>
+                <a:ext cx="1065359" cy="263021"/>
+              </a:xfrm>
+              <a:prstGeom prst="rect">
+                <a:avLst/>
+              </a:prstGeom>
+              <a:blipFill>
+                <a:blip r:embed="rId6"/>
+                <a:stretch>
+                  <a:fillRect b="-13636"/>
+                </a:stretch>
+              </a:blipFill>
+            </p:spPr>
+            <p:txBody>
+              <a:bodyPr/>
+              <a:lstStyle/>
+              <a:p>
+                <a:r>
+                  <a:rPr lang="fr-FR">
+                    <a:noFill/>
+                  </a:rPr>
+                  <a:t> </a:t>
+                </a:r>
+              </a:p>
+            </p:txBody>
+          </p:sp>
+        </mc:Fallback>
+      </mc:AlternateContent>
+    </p:spTree>
+    <p:extLst>
+      <p:ext uri="{BB962C8B-B14F-4D97-AF65-F5344CB8AC3E}">
+        <p14:creationId xmlns:p14="http://schemas.microsoft.com/office/powerpoint/2010/main" val="2359150373"/>
       </p:ext>
     </p:extLst>
   </p:cSld>
@@ -15335,8 +23408,8 @@
           </a:p>
         </p:txBody>
       </p:sp>
-      <mc:AlternateContent xmlns:mc="http://schemas.openxmlformats.org/markup-compatibility/2006">
-        <mc:Choice xmlns:a14="http://schemas.microsoft.com/office/drawing/2010/main" Requires="a14">
+      <mc:AlternateContent xmlns:mc="http://schemas.openxmlformats.org/markup-compatibility/2006" xmlns:a14="http://schemas.microsoft.com/office/drawing/2010/main">
+        <mc:Choice Requires="a14">
           <p:sp>
             <p:nvSpPr>
               <p:cNvPr id="47" name="ZoneTexte 46">
@@ -15386,7 +23459,7 @@
             </p:txBody>
           </p:sp>
         </mc:Choice>
-        <mc:Fallback>
+        <mc:Fallback xmlns="">
           <p:sp>
             <p:nvSpPr>
               <p:cNvPr id="47" name="ZoneTexte 46">
@@ -15431,8 +23504,8 @@
           </p:sp>
         </mc:Fallback>
       </mc:AlternateContent>
-      <mc:AlternateContent xmlns:mc="http://schemas.openxmlformats.org/markup-compatibility/2006">
-        <mc:Choice xmlns:a14="http://schemas.microsoft.com/office/drawing/2010/main" Requires="a14">
+      <mc:AlternateContent xmlns:mc="http://schemas.openxmlformats.org/markup-compatibility/2006" xmlns:a14="http://schemas.microsoft.com/office/drawing/2010/main">
+        <mc:Choice Requires="a14">
           <p:sp>
             <p:nvSpPr>
               <p:cNvPr id="48" name="ZoneTexte 47">
@@ -15494,7 +23567,7 @@
             </p:txBody>
           </p:sp>
         </mc:Choice>
-        <mc:Fallback>
+        <mc:Fallback xmlns="">
           <p:sp>
             <p:nvSpPr>
               <p:cNvPr id="48" name="ZoneTexte 47">
@@ -15539,8 +23612,8 @@
           </p:sp>
         </mc:Fallback>
       </mc:AlternateContent>
-      <mc:AlternateContent xmlns:mc="http://schemas.openxmlformats.org/markup-compatibility/2006">
-        <mc:Choice xmlns:a14="http://schemas.microsoft.com/office/drawing/2010/main" Requires="a14">
+      <mc:AlternateContent xmlns:mc="http://schemas.openxmlformats.org/markup-compatibility/2006" xmlns:a14="http://schemas.microsoft.com/office/drawing/2010/main">
+        <mc:Choice Requires="a14">
           <p:sp>
             <p:nvSpPr>
               <p:cNvPr id="49" name="ZoneTexte 48">
@@ -15590,7 +23663,7 @@
             </p:txBody>
           </p:sp>
         </mc:Choice>
-        <mc:Fallback>
+        <mc:Fallback xmlns="">
           <p:sp>
             <p:nvSpPr>
               <p:cNvPr id="49" name="ZoneTexte 48">
@@ -15635,8 +23708,8 @@
           </p:sp>
         </mc:Fallback>
       </mc:AlternateContent>
-      <mc:AlternateContent xmlns:mc="http://schemas.openxmlformats.org/markup-compatibility/2006">
-        <mc:Choice xmlns:a14="http://schemas.microsoft.com/office/drawing/2010/main" Requires="a14">
+      <mc:AlternateContent xmlns:mc="http://schemas.openxmlformats.org/markup-compatibility/2006" xmlns:a14="http://schemas.microsoft.com/office/drawing/2010/main">
+        <mc:Choice Requires="a14">
           <p:sp>
             <p:nvSpPr>
               <p:cNvPr id="50" name="ZoneTexte 49">
@@ -15698,7 +23771,7 @@
             </p:txBody>
           </p:sp>
         </mc:Choice>
-        <mc:Fallback>
+        <mc:Fallback xmlns="">
           <p:sp>
             <p:nvSpPr>
               <p:cNvPr id="50" name="ZoneTexte 49">
@@ -15743,8 +23816,8 @@
           </p:sp>
         </mc:Fallback>
       </mc:AlternateContent>
-      <mc:AlternateContent xmlns:mc="http://schemas.openxmlformats.org/markup-compatibility/2006">
-        <mc:Choice xmlns:a14="http://schemas.microsoft.com/office/drawing/2010/main" Requires="a14">
+      <mc:AlternateContent xmlns:mc="http://schemas.openxmlformats.org/markup-compatibility/2006" xmlns:a14="http://schemas.microsoft.com/office/drawing/2010/main">
+        <mc:Choice Requires="a14">
           <p:sp>
             <p:nvSpPr>
               <p:cNvPr id="51" name="ZoneTexte 50">
@@ -15802,7 +23875,7 @@
             </p:txBody>
           </p:sp>
         </mc:Choice>
-        <mc:Fallback>
+        <mc:Fallback xmlns="">
           <p:sp>
             <p:nvSpPr>
               <p:cNvPr id="51" name="ZoneTexte 50">
@@ -15847,8 +23920,8 @@
           </p:sp>
         </mc:Fallback>
       </mc:AlternateContent>
-      <mc:AlternateContent xmlns:mc="http://schemas.openxmlformats.org/markup-compatibility/2006">
-        <mc:Choice xmlns:a14="http://schemas.microsoft.com/office/drawing/2010/main" Requires="a14">
+      <mc:AlternateContent xmlns:mc="http://schemas.openxmlformats.org/markup-compatibility/2006" xmlns:a14="http://schemas.microsoft.com/office/drawing/2010/main">
+        <mc:Choice Requires="a14">
           <p:sp>
             <p:nvSpPr>
               <p:cNvPr id="52" name="ZoneTexte 51">
@@ -15906,7 +23979,7 @@
             </p:txBody>
           </p:sp>
         </mc:Choice>
-        <mc:Fallback>
+        <mc:Fallback xmlns="">
           <p:sp>
             <p:nvSpPr>
               <p:cNvPr id="52" name="ZoneTexte 51">
@@ -18603,8 +26676,8 @@
           </a:p>
         </p:txBody>
       </p:sp>
-      <mc:AlternateContent xmlns:mc="http://schemas.openxmlformats.org/markup-compatibility/2006">
-        <mc:Choice xmlns:a14="http://schemas.microsoft.com/office/drawing/2010/main" Requires="a14">
+      <mc:AlternateContent xmlns:mc="http://schemas.openxmlformats.org/markup-compatibility/2006" xmlns:a14="http://schemas.microsoft.com/office/drawing/2010/main">
+        <mc:Choice Requires="a14">
           <p:sp>
             <p:nvSpPr>
               <p:cNvPr id="150" name="ZoneTexte 149">
@@ -18654,7 +26727,7 @@
             </p:txBody>
           </p:sp>
         </mc:Choice>
-        <mc:Fallback>
+        <mc:Fallback xmlns="">
           <p:sp>
             <p:nvSpPr>
               <p:cNvPr id="150" name="ZoneTexte 149">
@@ -18699,8 +26772,8 @@
           </p:sp>
         </mc:Fallback>
       </mc:AlternateContent>
-      <mc:AlternateContent xmlns:mc="http://schemas.openxmlformats.org/markup-compatibility/2006">
-        <mc:Choice xmlns:a14="http://schemas.microsoft.com/office/drawing/2010/main" Requires="a14">
+      <mc:AlternateContent xmlns:mc="http://schemas.openxmlformats.org/markup-compatibility/2006" xmlns:a14="http://schemas.microsoft.com/office/drawing/2010/main">
+        <mc:Choice Requires="a14">
           <p:sp>
             <p:nvSpPr>
               <p:cNvPr id="151" name="ZoneTexte 150">
@@ -18762,7 +26835,7 @@
             </p:txBody>
           </p:sp>
         </mc:Choice>
-        <mc:Fallback>
+        <mc:Fallback xmlns="">
           <p:sp>
             <p:nvSpPr>
               <p:cNvPr id="151" name="ZoneTexte 150">
@@ -18807,8 +26880,8 @@
           </p:sp>
         </mc:Fallback>
       </mc:AlternateContent>
-      <mc:AlternateContent xmlns:mc="http://schemas.openxmlformats.org/markup-compatibility/2006">
-        <mc:Choice xmlns:a14="http://schemas.microsoft.com/office/drawing/2010/main" Requires="a14">
+      <mc:AlternateContent xmlns:mc="http://schemas.openxmlformats.org/markup-compatibility/2006" xmlns:a14="http://schemas.microsoft.com/office/drawing/2010/main">
+        <mc:Choice Requires="a14">
           <p:sp>
             <p:nvSpPr>
               <p:cNvPr id="152" name="ZoneTexte 151">
@@ -18858,7 +26931,7 @@
             </p:txBody>
           </p:sp>
         </mc:Choice>
-        <mc:Fallback>
+        <mc:Fallback xmlns="">
           <p:sp>
             <p:nvSpPr>
               <p:cNvPr id="152" name="ZoneTexte 151">
@@ -18903,8 +26976,8 @@
           </p:sp>
         </mc:Fallback>
       </mc:AlternateContent>
-      <mc:AlternateContent xmlns:mc="http://schemas.openxmlformats.org/markup-compatibility/2006">
-        <mc:Choice xmlns:a14="http://schemas.microsoft.com/office/drawing/2010/main" Requires="a14">
+      <mc:AlternateContent xmlns:mc="http://schemas.openxmlformats.org/markup-compatibility/2006" xmlns:a14="http://schemas.microsoft.com/office/drawing/2010/main">
+        <mc:Choice Requires="a14">
           <p:sp>
             <p:nvSpPr>
               <p:cNvPr id="153" name="ZoneTexte 152">
@@ -18966,7 +27039,7 @@
             </p:txBody>
           </p:sp>
         </mc:Choice>
-        <mc:Fallback>
+        <mc:Fallback xmlns="">
           <p:sp>
             <p:nvSpPr>
               <p:cNvPr id="153" name="ZoneTexte 152">
@@ -21779,8 +29852,8 @@
           </a:p>
         </p:txBody>
       </p:sp>
-      <mc:AlternateContent xmlns:mc="http://schemas.openxmlformats.org/markup-compatibility/2006">
-        <mc:Choice xmlns:a14="http://schemas.microsoft.com/office/drawing/2010/main" Requires="a14">
+      <mc:AlternateContent xmlns:mc="http://schemas.openxmlformats.org/markup-compatibility/2006" xmlns:a14="http://schemas.microsoft.com/office/drawing/2010/main">
+        <mc:Choice Requires="a14">
           <p:sp>
             <p:nvSpPr>
               <p:cNvPr id="47" name="ZoneTexte 46">
@@ -21830,7 +29903,7 @@
             </p:txBody>
           </p:sp>
         </mc:Choice>
-        <mc:Fallback>
+        <mc:Fallback xmlns="">
           <p:sp>
             <p:nvSpPr>
               <p:cNvPr id="47" name="ZoneTexte 46">
@@ -21875,8 +29948,8 @@
           </p:sp>
         </mc:Fallback>
       </mc:AlternateContent>
-      <mc:AlternateContent xmlns:mc="http://schemas.openxmlformats.org/markup-compatibility/2006">
-        <mc:Choice xmlns:a14="http://schemas.microsoft.com/office/drawing/2010/main" Requires="a14">
+      <mc:AlternateContent xmlns:mc="http://schemas.openxmlformats.org/markup-compatibility/2006" xmlns:a14="http://schemas.microsoft.com/office/drawing/2010/main">
+        <mc:Choice Requires="a14">
           <p:sp>
             <p:nvSpPr>
               <p:cNvPr id="48" name="ZoneTexte 47">
@@ -21938,7 +30011,7 @@
             </p:txBody>
           </p:sp>
         </mc:Choice>
-        <mc:Fallback>
+        <mc:Fallback xmlns="">
           <p:sp>
             <p:nvSpPr>
               <p:cNvPr id="48" name="ZoneTexte 47">
@@ -21983,8 +30056,8 @@
           </p:sp>
         </mc:Fallback>
       </mc:AlternateContent>
-      <mc:AlternateContent xmlns:mc="http://schemas.openxmlformats.org/markup-compatibility/2006">
-        <mc:Choice xmlns:a14="http://schemas.microsoft.com/office/drawing/2010/main" Requires="a14">
+      <mc:AlternateContent xmlns:mc="http://schemas.openxmlformats.org/markup-compatibility/2006" xmlns:a14="http://schemas.microsoft.com/office/drawing/2010/main">
+        <mc:Choice Requires="a14">
           <p:sp>
             <p:nvSpPr>
               <p:cNvPr id="49" name="ZoneTexte 48">
@@ -22034,7 +30107,7 @@
             </p:txBody>
           </p:sp>
         </mc:Choice>
-        <mc:Fallback>
+        <mc:Fallback xmlns="">
           <p:sp>
             <p:nvSpPr>
               <p:cNvPr id="49" name="ZoneTexte 48">
@@ -22079,8 +30152,8 @@
           </p:sp>
         </mc:Fallback>
       </mc:AlternateContent>
-      <mc:AlternateContent xmlns:mc="http://schemas.openxmlformats.org/markup-compatibility/2006">
-        <mc:Choice xmlns:a14="http://schemas.microsoft.com/office/drawing/2010/main" Requires="a14">
+      <mc:AlternateContent xmlns:mc="http://schemas.openxmlformats.org/markup-compatibility/2006" xmlns:a14="http://schemas.microsoft.com/office/drawing/2010/main">
+        <mc:Choice Requires="a14">
           <p:sp>
             <p:nvSpPr>
               <p:cNvPr id="50" name="ZoneTexte 49">
@@ -22142,7 +30215,7 @@
             </p:txBody>
           </p:sp>
         </mc:Choice>
-        <mc:Fallback>
+        <mc:Fallback xmlns="">
           <p:sp>
             <p:nvSpPr>
               <p:cNvPr id="50" name="ZoneTexte 49">
@@ -22187,8 +30260,8 @@
           </p:sp>
         </mc:Fallback>
       </mc:AlternateContent>
-      <mc:AlternateContent xmlns:mc="http://schemas.openxmlformats.org/markup-compatibility/2006">
-        <mc:Choice xmlns:a14="http://schemas.microsoft.com/office/drawing/2010/main" Requires="a14">
+      <mc:AlternateContent xmlns:mc="http://schemas.openxmlformats.org/markup-compatibility/2006" xmlns:a14="http://schemas.microsoft.com/office/drawing/2010/main">
+        <mc:Choice Requires="a14">
           <p:sp>
             <p:nvSpPr>
               <p:cNvPr id="51" name="ZoneTexte 50">
@@ -22246,7 +30319,7 @@
             </p:txBody>
           </p:sp>
         </mc:Choice>
-        <mc:Fallback>
+        <mc:Fallback xmlns="">
           <p:sp>
             <p:nvSpPr>
               <p:cNvPr id="51" name="ZoneTexte 50">
@@ -22291,8 +30364,8 @@
           </p:sp>
         </mc:Fallback>
       </mc:AlternateContent>
-      <mc:AlternateContent xmlns:mc="http://schemas.openxmlformats.org/markup-compatibility/2006">
-        <mc:Choice xmlns:a14="http://schemas.microsoft.com/office/drawing/2010/main" Requires="a14">
+      <mc:AlternateContent xmlns:mc="http://schemas.openxmlformats.org/markup-compatibility/2006" xmlns:a14="http://schemas.microsoft.com/office/drawing/2010/main">
+        <mc:Choice Requires="a14">
           <p:sp>
             <p:nvSpPr>
               <p:cNvPr id="52" name="ZoneTexte 51">
@@ -22350,7 +30423,7 @@
             </p:txBody>
           </p:sp>
         </mc:Choice>
-        <mc:Fallback>
+        <mc:Fallback xmlns="">
           <p:sp>
             <p:nvSpPr>
               <p:cNvPr id="52" name="ZoneTexte 51">
@@ -25630,8 +33703,8 @@
           </a:p>
         </p:txBody>
       </p:sp>
-      <mc:AlternateContent xmlns:mc="http://schemas.openxmlformats.org/markup-compatibility/2006">
-        <mc:Choice xmlns:a14="http://schemas.microsoft.com/office/drawing/2010/main" Requires="a14">
+      <mc:AlternateContent xmlns:mc="http://schemas.openxmlformats.org/markup-compatibility/2006" xmlns:a14="http://schemas.microsoft.com/office/drawing/2010/main">
+        <mc:Choice Requires="a14">
           <p:sp>
             <p:nvSpPr>
               <p:cNvPr id="6" name="ZoneTexte 5">
@@ -25681,7 +33754,7 @@
             </p:txBody>
           </p:sp>
         </mc:Choice>
-        <mc:Fallback>
+        <mc:Fallback xmlns="">
           <p:sp>
             <p:nvSpPr>
               <p:cNvPr id="6" name="ZoneTexte 5">
@@ -25726,8 +33799,8 @@
           </p:sp>
         </mc:Fallback>
       </mc:AlternateContent>
-      <mc:AlternateContent xmlns:mc="http://schemas.openxmlformats.org/markup-compatibility/2006">
-        <mc:Choice xmlns:a14="http://schemas.microsoft.com/office/drawing/2010/main" Requires="a14">
+      <mc:AlternateContent xmlns:mc="http://schemas.openxmlformats.org/markup-compatibility/2006" xmlns:a14="http://schemas.microsoft.com/office/drawing/2010/main">
+        <mc:Choice Requires="a14">
           <p:sp>
             <p:nvSpPr>
               <p:cNvPr id="7" name="ZoneTexte 6">
@@ -25789,7 +33862,7 @@
             </p:txBody>
           </p:sp>
         </mc:Choice>
-        <mc:Fallback>
+        <mc:Fallback xmlns="">
           <p:sp>
             <p:nvSpPr>
               <p:cNvPr id="7" name="ZoneTexte 6">
@@ -25834,8 +33907,8 @@
           </p:sp>
         </mc:Fallback>
       </mc:AlternateContent>
-      <mc:AlternateContent xmlns:mc="http://schemas.openxmlformats.org/markup-compatibility/2006">
-        <mc:Choice xmlns:a14="http://schemas.microsoft.com/office/drawing/2010/main" Requires="a14">
+      <mc:AlternateContent xmlns:mc="http://schemas.openxmlformats.org/markup-compatibility/2006" xmlns:a14="http://schemas.microsoft.com/office/drawing/2010/main">
+        <mc:Choice Requires="a14">
           <p:sp>
             <p:nvSpPr>
               <p:cNvPr id="8" name="ZoneTexte 7">
@@ -25885,7 +33958,7 @@
             </p:txBody>
           </p:sp>
         </mc:Choice>
-        <mc:Fallback>
+        <mc:Fallback xmlns="">
           <p:sp>
             <p:nvSpPr>
               <p:cNvPr id="8" name="ZoneTexte 7">
@@ -25930,8 +34003,8 @@
           </p:sp>
         </mc:Fallback>
       </mc:AlternateContent>
-      <mc:AlternateContent xmlns:mc="http://schemas.openxmlformats.org/markup-compatibility/2006">
-        <mc:Choice xmlns:a14="http://schemas.microsoft.com/office/drawing/2010/main" Requires="a14">
+      <mc:AlternateContent xmlns:mc="http://schemas.openxmlformats.org/markup-compatibility/2006" xmlns:a14="http://schemas.microsoft.com/office/drawing/2010/main">
+        <mc:Choice Requires="a14">
           <p:sp>
             <p:nvSpPr>
               <p:cNvPr id="9" name="ZoneTexte 8">
@@ -25993,7 +34066,7 @@
             </p:txBody>
           </p:sp>
         </mc:Choice>
-        <mc:Fallback>
+        <mc:Fallback xmlns="">
           <p:sp>
             <p:nvSpPr>
               <p:cNvPr id="9" name="ZoneTexte 8">
@@ -26038,8 +34111,8 @@
           </p:sp>
         </mc:Fallback>
       </mc:AlternateContent>
-      <mc:AlternateContent xmlns:mc="http://schemas.openxmlformats.org/markup-compatibility/2006">
-        <mc:Choice xmlns:a14="http://schemas.microsoft.com/office/drawing/2010/main" Requires="a14">
+      <mc:AlternateContent xmlns:mc="http://schemas.openxmlformats.org/markup-compatibility/2006" xmlns:a14="http://schemas.microsoft.com/office/drawing/2010/main">
+        <mc:Choice Requires="a14">
           <p:sp>
             <p:nvSpPr>
               <p:cNvPr id="10" name="ZoneTexte 9">
@@ -26097,7 +34170,7 @@
             </p:txBody>
           </p:sp>
         </mc:Choice>
-        <mc:Fallback>
+        <mc:Fallback xmlns="">
           <p:sp>
             <p:nvSpPr>
               <p:cNvPr id="10" name="ZoneTexte 9">
@@ -26142,8 +34215,8 @@
           </p:sp>
         </mc:Fallback>
       </mc:AlternateContent>
-      <mc:AlternateContent xmlns:mc="http://schemas.openxmlformats.org/markup-compatibility/2006">
-        <mc:Choice xmlns:a14="http://schemas.microsoft.com/office/drawing/2010/main" Requires="a14">
+      <mc:AlternateContent xmlns:mc="http://schemas.openxmlformats.org/markup-compatibility/2006" xmlns:a14="http://schemas.microsoft.com/office/drawing/2010/main">
+        <mc:Choice Requires="a14">
           <p:sp>
             <p:nvSpPr>
               <p:cNvPr id="11" name="ZoneTexte 10">
@@ -26201,7 +34274,7 @@
             </p:txBody>
           </p:sp>
         </mc:Choice>
-        <mc:Fallback>
+        <mc:Fallback xmlns="">
           <p:sp>
             <p:nvSpPr>
               <p:cNvPr id="11" name="ZoneTexte 10">
@@ -26470,8 +34543,8 @@
           </a:p>
         </p:txBody>
       </p:sp>
-      <mc:AlternateContent xmlns:mc="http://schemas.openxmlformats.org/markup-compatibility/2006">
-        <mc:Choice xmlns:a14="http://schemas.microsoft.com/office/drawing/2010/main" Requires="a14">
+      <mc:AlternateContent xmlns:mc="http://schemas.openxmlformats.org/markup-compatibility/2006" xmlns:a14="http://schemas.microsoft.com/office/drawing/2010/main">
+        <mc:Choice Requires="a14">
           <p:sp>
             <p:nvSpPr>
               <p:cNvPr id="16" name="ZoneTexte 15">
@@ -26543,7 +34616,7 @@
             </p:txBody>
           </p:sp>
         </mc:Choice>
-        <mc:Fallback>
+        <mc:Fallback xmlns="">
           <p:sp>
             <p:nvSpPr>
               <p:cNvPr id="16" name="ZoneTexte 15">
@@ -26588,8 +34661,8 @@
           </p:sp>
         </mc:Fallback>
       </mc:AlternateContent>
-      <mc:AlternateContent xmlns:mc="http://schemas.openxmlformats.org/markup-compatibility/2006">
-        <mc:Choice xmlns:a14="http://schemas.microsoft.com/office/drawing/2010/main" Requires="a14">
+      <mc:AlternateContent xmlns:mc="http://schemas.openxmlformats.org/markup-compatibility/2006" xmlns:a14="http://schemas.microsoft.com/office/drawing/2010/main">
+        <mc:Choice Requires="a14">
           <p:sp>
             <p:nvSpPr>
               <p:cNvPr id="17" name="ZoneTexte 16">
@@ -26674,7 +34747,7 @@
             </p:txBody>
           </p:sp>
         </mc:Choice>
-        <mc:Fallback>
+        <mc:Fallback xmlns="">
           <p:sp>
             <p:nvSpPr>
               <p:cNvPr id="17" name="ZoneTexte 16">
@@ -26719,8 +34792,8 @@
           </p:sp>
         </mc:Fallback>
       </mc:AlternateContent>
-      <mc:AlternateContent xmlns:mc="http://schemas.openxmlformats.org/markup-compatibility/2006">
-        <mc:Choice xmlns:a14="http://schemas.microsoft.com/office/drawing/2010/main" Requires="a14">
+      <mc:AlternateContent xmlns:mc="http://schemas.openxmlformats.org/markup-compatibility/2006" xmlns:a14="http://schemas.microsoft.com/office/drawing/2010/main">
+        <mc:Choice Requires="a14">
           <p:sp>
             <p:nvSpPr>
               <p:cNvPr id="18" name="ZoneTexte 17">
@@ -26805,7 +34878,7 @@
             </p:txBody>
           </p:sp>
         </mc:Choice>
-        <mc:Fallback>
+        <mc:Fallback xmlns="">
           <p:sp>
             <p:nvSpPr>
               <p:cNvPr id="18" name="ZoneTexte 17">
@@ -26850,8 +34923,8 @@
           </p:sp>
         </mc:Fallback>
       </mc:AlternateContent>
-      <mc:AlternateContent xmlns:mc="http://schemas.openxmlformats.org/markup-compatibility/2006">
-        <mc:Choice xmlns:a14="http://schemas.microsoft.com/office/drawing/2010/main" Requires="a14">
+      <mc:AlternateContent xmlns:mc="http://schemas.openxmlformats.org/markup-compatibility/2006" xmlns:a14="http://schemas.microsoft.com/office/drawing/2010/main">
+        <mc:Choice Requires="a14">
           <p:sp>
             <p:nvSpPr>
               <p:cNvPr id="19" name="ZoneTexte 18">
@@ -26923,7 +34996,7 @@
             </p:txBody>
           </p:sp>
         </mc:Choice>
-        <mc:Fallback>
+        <mc:Fallback xmlns="">
           <p:sp>
             <p:nvSpPr>
               <p:cNvPr id="19" name="ZoneTexte 18">
@@ -27546,8 +35619,8 @@
           </a:p>
         </p:txBody>
       </p:sp>
-      <mc:AlternateContent xmlns:mc="http://schemas.openxmlformats.org/markup-compatibility/2006">
-        <mc:Choice xmlns:a14="http://schemas.microsoft.com/office/drawing/2010/main" Requires="a14">
+      <mc:AlternateContent xmlns:mc="http://schemas.openxmlformats.org/markup-compatibility/2006" xmlns:a14="http://schemas.microsoft.com/office/drawing/2010/main">
+        <mc:Choice Requires="a14">
           <p:sp>
             <p:nvSpPr>
               <p:cNvPr id="66" name="ZoneTexte 65">
@@ -27990,7 +36063,7 @@
             </p:txBody>
           </p:sp>
         </mc:Choice>
-        <mc:Fallback>
+        <mc:Fallback xmlns="">
           <p:sp>
             <p:nvSpPr>
               <p:cNvPr id="66" name="ZoneTexte 65">

--- a/Fiches_Protocoles_Techno/Fiches_Technologie.pptx
+++ b/Fiches_Protocoles_Techno/Fiches_Technologie.pptx
@@ -16,11 +16,12 @@
     <p:sldId id="275" r:id="rId10"/>
     <p:sldId id="277" r:id="rId11"/>
     <p:sldId id="282" r:id="rId12"/>
-    <p:sldId id="283" r:id="rId13"/>
-    <p:sldId id="285" r:id="rId14"/>
-    <p:sldId id="284" r:id="rId15"/>
-    <p:sldId id="286" r:id="rId16"/>
-    <p:sldId id="287" r:id="rId17"/>
+    <p:sldId id="288" r:id="rId13"/>
+    <p:sldId id="283" r:id="rId14"/>
+    <p:sldId id="285" r:id="rId15"/>
+    <p:sldId id="284" r:id="rId16"/>
+    <p:sldId id="286" r:id="rId17"/>
+    <p:sldId id="287" r:id="rId18"/>
   </p:sldIdLst>
   <p:sldSz cx="12192000" cy="6858000"/>
   <p:notesSz cx="6858000" cy="9144000"/>
@@ -259,7 +260,7 @@
           <a:p>
             <a:fld id="{1A3D9B3B-1EC8-4BC4-B783-7630517B3190}" type="datetimeFigureOut">
               <a:rPr lang="fr-FR" smtClean="0"/>
-              <a:t>13/07/2025</a:t>
+              <a:t>16/07/2025</a:t>
             </a:fld>
             <a:endParaRPr lang="fr-FR"/>
           </a:p>
@@ -668,7 +669,7 @@
           <a:p>
             <a:fld id="{1A3D9B3B-1EC8-4BC4-B783-7630517B3190}" type="datetimeFigureOut">
               <a:rPr lang="fr-FR" smtClean="0"/>
-              <a:t>13/07/2025</a:t>
+              <a:t>16/07/2025</a:t>
             </a:fld>
             <a:endParaRPr lang="fr-FR"/>
           </a:p>
@@ -854,7 +855,7 @@
           <a:p>
             <a:fld id="{1A3D9B3B-1EC8-4BC4-B783-7630517B3190}" type="datetimeFigureOut">
               <a:rPr lang="fr-FR" smtClean="0"/>
-              <a:t>13/07/2025</a:t>
+              <a:t>16/07/2025</a:t>
             </a:fld>
             <a:endParaRPr lang="fr-FR"/>
           </a:p>
@@ -1030,7 +1031,7 @@
           <a:p>
             <a:fld id="{1A3D9B3B-1EC8-4BC4-B783-7630517B3190}" type="datetimeFigureOut">
               <a:rPr lang="fr-FR" smtClean="0"/>
-              <a:t>13/07/2025</a:t>
+              <a:t>16/07/2025</a:t>
             </a:fld>
             <a:endParaRPr lang="fr-FR"/>
           </a:p>
@@ -1329,7 +1330,7 @@
           <a:p>
             <a:fld id="{1A3D9B3B-1EC8-4BC4-B783-7630517B3190}" type="datetimeFigureOut">
               <a:rPr lang="fr-FR" smtClean="0"/>
-              <a:t>13/07/2025</a:t>
+              <a:t>16/07/2025</a:t>
             </a:fld>
             <a:endParaRPr lang="fr-FR"/>
           </a:p>
@@ -1566,7 +1567,7 @@
           <a:p>
             <a:fld id="{1A3D9B3B-1EC8-4BC4-B783-7630517B3190}" type="datetimeFigureOut">
               <a:rPr lang="fr-FR" smtClean="0"/>
-              <a:t>13/07/2025</a:t>
+              <a:t>16/07/2025</a:t>
             </a:fld>
             <a:endParaRPr lang="fr-FR"/>
           </a:p>
@@ -1984,7 +1985,7 @@
           <a:p>
             <a:fld id="{1A3D9B3B-1EC8-4BC4-B783-7630517B3190}" type="datetimeFigureOut">
               <a:rPr lang="fr-FR" smtClean="0"/>
-              <a:t>13/07/2025</a:t>
+              <a:t>16/07/2025</a:t>
             </a:fld>
             <a:endParaRPr lang="fr-FR"/>
           </a:p>
@@ -2109,7 +2110,7 @@
           <a:p>
             <a:fld id="{1A3D9B3B-1EC8-4BC4-B783-7630517B3190}" type="datetimeFigureOut">
               <a:rPr lang="fr-FR" smtClean="0"/>
-              <a:t>13/07/2025</a:t>
+              <a:t>16/07/2025</a:t>
             </a:fld>
             <a:endParaRPr lang="fr-FR"/>
           </a:p>
@@ -2258,7 +2259,7 @@
           <a:p>
             <a:fld id="{1A3D9B3B-1EC8-4BC4-B783-7630517B3190}" type="datetimeFigureOut">
               <a:rPr lang="fr-FR" smtClean="0"/>
-              <a:t>13/07/2025</a:t>
+              <a:t>16/07/2025</a:t>
             </a:fld>
             <a:endParaRPr lang="fr-FR"/>
           </a:p>
@@ -2541,7 +2542,7 @@
           <a:p>
             <a:fld id="{1A3D9B3B-1EC8-4BC4-B783-7630517B3190}" type="datetimeFigureOut">
               <a:rPr lang="fr-FR" smtClean="0"/>
-              <a:t>13/07/2025</a:t>
+              <a:t>16/07/2025</a:t>
             </a:fld>
             <a:endParaRPr lang="fr-FR"/>
           </a:p>
@@ -2801,7 +2802,7 @@
           <a:p>
             <a:fld id="{1A3D9B3B-1EC8-4BC4-B783-7630517B3190}" type="datetimeFigureOut">
               <a:rPr lang="fr-FR" smtClean="0"/>
-              <a:t>13/07/2025</a:t>
+              <a:t>16/07/2025</a:t>
             </a:fld>
             <a:endParaRPr lang="fr-FR"/>
           </a:p>
@@ -3021,7 +3022,7 @@
             <a:fld id="{1A3D9B3B-1EC8-4BC4-B783-7630517B3190}" type="datetimeFigureOut">
               <a:rPr lang="fr-FR" smtClean="0"/>
               <a:pPr/>
-              <a:t>13/07/2025</a:t>
+              <a:t>16/07/2025</a:t>
             </a:fld>
             <a:endParaRPr lang="fr-FR"/>
           </a:p>
@@ -7310,6 +7311,1519 @@
   <p:cSld>
     <p:spTree>
       <p:nvGrpSpPr>
+        <p:cNvPr id="1" name="">
+          <a:extLst>
+            <a:ext uri="{FF2B5EF4-FFF2-40B4-BE49-F238E27FC236}">
+              <a16:creationId xmlns:a16="http://schemas.microsoft.com/office/drawing/2014/main" id="{53560272-B171-327E-0904-0F594F991D42}"/>
+            </a:ext>
+          </a:extLst>
+        </p:cNvPr>
+        <p:cNvGrpSpPr/>
+        <p:nvPr/>
+      </p:nvGrpSpPr>
+      <p:grpSpPr>
+        <a:xfrm>
+          <a:off x="0" y="0"/>
+          <a:ext cx="0" cy="0"/>
+          <a:chOff x="0" y="0"/>
+          <a:chExt cx="0" cy="0"/>
+        </a:xfrm>
+      </p:grpSpPr>
+      <p:sp>
+        <p:nvSpPr>
+          <p:cNvPr id="5" name="Ellipse 4">
+            <a:extLst>
+              <a:ext uri="{FF2B5EF4-FFF2-40B4-BE49-F238E27FC236}">
+                <a16:creationId xmlns:a16="http://schemas.microsoft.com/office/drawing/2014/main" id="{C078CB10-25AC-77C0-BC75-6D924F855B9B}"/>
+              </a:ext>
+            </a:extLst>
+          </p:cNvPr>
+          <p:cNvSpPr/>
+          <p:nvPr/>
+        </p:nvSpPr>
+        <p:spPr>
+          <a:xfrm>
+            <a:off x="7536075" y="1271885"/>
+            <a:ext cx="1440000" cy="1440000"/>
+          </a:xfrm>
+          <a:prstGeom prst="ellipse">
+            <a:avLst/>
+          </a:prstGeom>
+          <a:noFill/>
+          <a:ln w="19050">
+            <a:solidFill>
+              <a:srgbClr val="002060"/>
+            </a:solidFill>
+          </a:ln>
+        </p:spPr>
+        <p:style>
+          <a:lnRef idx="2">
+            <a:schemeClr val="accent1">
+              <a:shade val="15000"/>
+            </a:schemeClr>
+          </a:lnRef>
+          <a:fillRef idx="1">
+            <a:schemeClr val="accent1"/>
+          </a:fillRef>
+          <a:effectRef idx="0">
+            <a:schemeClr val="accent1"/>
+          </a:effectRef>
+          <a:fontRef idx="minor">
+            <a:schemeClr val="lt1"/>
+          </a:fontRef>
+        </p:style>
+        <p:txBody>
+          <a:bodyPr rtlCol="0" anchor="ctr"/>
+          <a:lstStyle/>
+          <a:p>
+            <a:pPr algn="ctr"/>
+            <a:r>
+              <a:rPr lang="fr-FR" dirty="0"/>
+              <a:t> </a:t>
+            </a:r>
+          </a:p>
+        </p:txBody>
+      </p:sp>
+      <p:sp>
+        <p:nvSpPr>
+          <p:cNvPr id="4" name="Rectangle 3">
+            <a:extLst>
+              <a:ext uri="{FF2B5EF4-FFF2-40B4-BE49-F238E27FC236}">
+                <a16:creationId xmlns:a16="http://schemas.microsoft.com/office/drawing/2014/main" id="{078648C5-36CC-E6EF-B643-6569280A98D6}"/>
+              </a:ext>
+            </a:extLst>
+          </p:cNvPr>
+          <p:cNvSpPr/>
+          <p:nvPr/>
+        </p:nvSpPr>
+        <p:spPr>
+          <a:xfrm>
+            <a:off x="8096250" y="2689225"/>
+            <a:ext cx="319650" cy="382659"/>
+          </a:xfrm>
+          <a:prstGeom prst="rect">
+            <a:avLst/>
+          </a:prstGeom>
+          <a:solidFill>
+            <a:schemeClr val="bg1"/>
+          </a:solidFill>
+          <a:ln w="19050">
+            <a:solidFill>
+              <a:schemeClr val="bg1"/>
+            </a:solidFill>
+          </a:ln>
+        </p:spPr>
+        <p:style>
+          <a:lnRef idx="2">
+            <a:schemeClr val="accent1">
+              <a:shade val="15000"/>
+            </a:schemeClr>
+          </a:lnRef>
+          <a:fillRef idx="1">
+            <a:schemeClr val="accent1"/>
+          </a:fillRef>
+          <a:effectRef idx="0">
+            <a:schemeClr val="accent1"/>
+          </a:effectRef>
+          <a:fontRef idx="minor">
+            <a:schemeClr val="lt1"/>
+          </a:fontRef>
+        </p:style>
+        <p:txBody>
+          <a:bodyPr rtlCol="0" anchor="ctr"/>
+          <a:lstStyle/>
+          <a:p>
+            <a:pPr algn="ctr"/>
+            <a:endParaRPr lang="fr-FR"/>
+          </a:p>
+        </p:txBody>
+      </p:sp>
+      <p:cxnSp>
+        <p:nvCxnSpPr>
+          <p:cNvPr id="7" name="Connecteur droit 6">
+            <a:extLst>
+              <a:ext uri="{FF2B5EF4-FFF2-40B4-BE49-F238E27FC236}">
+                <a16:creationId xmlns:a16="http://schemas.microsoft.com/office/drawing/2014/main" id="{699EDF1F-35F8-A294-EEB1-547D162D93E5}"/>
+              </a:ext>
+            </a:extLst>
+          </p:cNvPr>
+          <p:cNvCxnSpPr>
+            <a:cxnSpLocks/>
+          </p:cNvCxnSpPr>
+          <p:nvPr/>
+        </p:nvCxnSpPr>
+        <p:spPr>
+          <a:xfrm flipV="1">
+            <a:off x="8096250" y="2689224"/>
+            <a:ext cx="0" cy="739776"/>
+          </a:xfrm>
+          <a:prstGeom prst="line">
+            <a:avLst/>
+          </a:prstGeom>
+          <a:solidFill>
+            <a:schemeClr val="accent5">
+              <a:lumMod val="20000"/>
+              <a:lumOff val="80000"/>
+            </a:schemeClr>
+          </a:solidFill>
+          <a:ln w="57150">
+            <a:solidFill>
+              <a:schemeClr val="tx1"/>
+            </a:solidFill>
+          </a:ln>
+        </p:spPr>
+        <p:style>
+          <a:lnRef idx="2">
+            <a:schemeClr val="accent1">
+              <a:shade val="15000"/>
+            </a:schemeClr>
+          </a:lnRef>
+          <a:fillRef idx="1">
+            <a:schemeClr val="accent1"/>
+          </a:fillRef>
+          <a:effectRef idx="0">
+            <a:schemeClr val="accent1"/>
+          </a:effectRef>
+          <a:fontRef idx="minor">
+            <a:schemeClr val="lt1"/>
+          </a:fontRef>
+        </p:style>
+      </p:cxnSp>
+      <mc:AlternateContent xmlns:mc="http://schemas.openxmlformats.org/markup-compatibility/2006" xmlns:a14="http://schemas.microsoft.com/office/drawing/2010/main">
+        <mc:Choice Requires="a14">
+          <p:sp>
+            <p:nvSpPr>
+              <p:cNvPr id="8" name="ZoneTexte 7">
+                <a:extLst>
+                  <a:ext uri="{FF2B5EF4-FFF2-40B4-BE49-F238E27FC236}">
+                    <a16:creationId xmlns:a16="http://schemas.microsoft.com/office/drawing/2014/main" id="{E582E999-D975-3399-E554-62A828E5D6B1}"/>
+                  </a:ext>
+                </a:extLst>
+              </p:cNvPr>
+              <p:cNvSpPr txBox="1"/>
+              <p:nvPr/>
+            </p:nvSpPr>
+            <p:spPr>
+              <a:xfrm>
+                <a:off x="2031582" y="3225032"/>
+                <a:ext cx="410690" cy="369332"/>
+              </a:xfrm>
+              <a:prstGeom prst="rect">
+                <a:avLst/>
+              </a:prstGeom>
+              <a:noFill/>
+            </p:spPr>
+            <p:txBody>
+              <a:bodyPr wrap="none" rtlCol="0">
+                <a:spAutoFit/>
+              </a:bodyPr>
+              <a:lstStyle/>
+              <a:p>
+                <a:pPr/>
+                <a14:m>
+                  <m:oMathPara xmlns:m="http://schemas.openxmlformats.org/officeDocument/2006/math">
+                    <m:oMathParaPr>
+                      <m:jc m:val="centerGroup"/>
+                    </m:oMathParaPr>
+                    <m:oMath xmlns:m="http://schemas.openxmlformats.org/officeDocument/2006/math">
+                      <m:r>
+                        <a:rPr lang="fr-FR" b="1" i="1" dirty="0" smtClean="0">
+                          <a:latin typeface="Cambria Math" panose="02040503050406030204" pitchFamily="18" charset="0"/>
+                        </a:rPr>
+                        <m:t>=</m:t>
+                      </m:r>
+                    </m:oMath>
+                  </m:oMathPara>
+                </a14:m>
+                <a:endParaRPr lang="fr-FR" b="1" dirty="0"/>
+              </a:p>
+            </p:txBody>
+          </p:sp>
+        </mc:Choice>
+        <mc:Fallback xmlns="">
+          <p:sp>
+            <p:nvSpPr>
+              <p:cNvPr id="8" name="ZoneTexte 7">
+                <a:extLst>
+                  <a:ext uri="{FF2B5EF4-FFF2-40B4-BE49-F238E27FC236}">
+                    <a16:creationId xmlns:a16="http://schemas.microsoft.com/office/drawing/2014/main" id="{6FAC9423-45F7-D9F9-9C06-C7F012F010B8}"/>
+                  </a:ext>
+                </a:extLst>
+              </p:cNvPr>
+              <p:cNvSpPr txBox="1">
+                <a:spLocks noRot="1" noChangeAspect="1" noMove="1" noResize="1" noEditPoints="1" noAdjustHandles="1" noChangeArrowheads="1" noChangeShapeType="1" noTextEdit="1"/>
+              </p:cNvSpPr>
+              <p:nvPr/>
+            </p:nvSpPr>
+            <p:spPr>
+              <a:xfrm>
+                <a:off x="2031582" y="3225032"/>
+                <a:ext cx="410690" cy="369332"/>
+              </a:xfrm>
+              <a:prstGeom prst="rect">
+                <a:avLst/>
+              </a:prstGeom>
+              <a:blipFill>
+                <a:blip r:embed="rId2"/>
+                <a:stretch>
+                  <a:fillRect/>
+                </a:stretch>
+              </a:blipFill>
+            </p:spPr>
+            <p:txBody>
+              <a:bodyPr/>
+              <a:lstStyle/>
+              <a:p>
+                <a:r>
+                  <a:rPr lang="fr-FR">
+                    <a:noFill/>
+                  </a:rPr>
+                  <a:t> </a:t>
+                </a:r>
+              </a:p>
+            </p:txBody>
+          </p:sp>
+        </mc:Fallback>
+      </mc:AlternateContent>
+      <mc:AlternateContent xmlns:mc="http://schemas.openxmlformats.org/markup-compatibility/2006" xmlns:a14="http://schemas.microsoft.com/office/drawing/2010/main">
+        <mc:Choice Requires="a14">
+          <p:sp>
+            <p:nvSpPr>
+              <p:cNvPr id="9" name="ZoneTexte 8">
+                <a:extLst>
+                  <a:ext uri="{FF2B5EF4-FFF2-40B4-BE49-F238E27FC236}">
+                    <a16:creationId xmlns:a16="http://schemas.microsoft.com/office/drawing/2014/main" id="{8AC0B3D7-5F6C-217B-B8EE-89D581ABC1DB}"/>
+                  </a:ext>
+                </a:extLst>
+              </p:cNvPr>
+              <p:cNvSpPr txBox="1"/>
+              <p:nvPr/>
+            </p:nvSpPr>
+            <p:spPr>
+              <a:xfrm>
+                <a:off x="2340241" y="3555864"/>
+                <a:ext cx="410690" cy="369332"/>
+              </a:xfrm>
+              <a:prstGeom prst="rect">
+                <a:avLst/>
+              </a:prstGeom>
+              <a:noFill/>
+            </p:spPr>
+            <p:txBody>
+              <a:bodyPr wrap="none" rtlCol="0">
+                <a:spAutoFit/>
+              </a:bodyPr>
+              <a:lstStyle/>
+              <a:p>
+                <a:pPr/>
+                <a14:m>
+                  <m:oMathPara xmlns:m="http://schemas.openxmlformats.org/officeDocument/2006/math">
+                    <m:oMathParaPr>
+                      <m:jc m:val="centerGroup"/>
+                    </m:oMathParaPr>
+                    <m:oMath xmlns:m="http://schemas.openxmlformats.org/officeDocument/2006/math">
+                      <m:r>
+                        <a:rPr lang="fr-FR" b="1" i="1" dirty="0" smtClean="0">
+                          <a:latin typeface="Cambria Math" panose="02040503050406030204" pitchFamily="18" charset="0"/>
+                        </a:rPr>
+                        <m:t>=</m:t>
+                      </m:r>
+                    </m:oMath>
+                  </m:oMathPara>
+                </a14:m>
+                <a:endParaRPr lang="fr-FR" b="1" dirty="0"/>
+              </a:p>
+            </p:txBody>
+          </p:sp>
+        </mc:Choice>
+        <mc:Fallback xmlns="">
+          <p:sp>
+            <p:nvSpPr>
+              <p:cNvPr id="9" name="ZoneTexte 8">
+                <a:extLst>
+                  <a:ext uri="{FF2B5EF4-FFF2-40B4-BE49-F238E27FC236}">
+                    <a16:creationId xmlns:a16="http://schemas.microsoft.com/office/drawing/2014/main" id="{C9AE9B06-C3C9-F711-6B2A-E837873FACB2}"/>
+                  </a:ext>
+                </a:extLst>
+              </p:cNvPr>
+              <p:cNvSpPr txBox="1">
+                <a:spLocks noRot="1" noChangeAspect="1" noMove="1" noResize="1" noEditPoints="1" noAdjustHandles="1" noChangeArrowheads="1" noChangeShapeType="1" noTextEdit="1"/>
+              </p:cNvSpPr>
+              <p:nvPr/>
+            </p:nvSpPr>
+            <p:spPr>
+              <a:xfrm>
+                <a:off x="2340241" y="3555864"/>
+                <a:ext cx="410690" cy="369332"/>
+              </a:xfrm>
+              <a:prstGeom prst="rect">
+                <a:avLst/>
+              </a:prstGeom>
+              <a:blipFill>
+                <a:blip r:embed="rId3"/>
+                <a:stretch>
+                  <a:fillRect/>
+                </a:stretch>
+              </a:blipFill>
+            </p:spPr>
+            <p:txBody>
+              <a:bodyPr/>
+              <a:lstStyle/>
+              <a:p>
+                <a:r>
+                  <a:rPr lang="fr-FR">
+                    <a:noFill/>
+                  </a:rPr>
+                  <a:t> </a:t>
+                </a:r>
+              </a:p>
+            </p:txBody>
+          </p:sp>
+        </mc:Fallback>
+      </mc:AlternateContent>
+      <p:cxnSp>
+        <p:nvCxnSpPr>
+          <p:cNvPr id="10" name="Connecteur droit 9">
+            <a:extLst>
+              <a:ext uri="{FF2B5EF4-FFF2-40B4-BE49-F238E27FC236}">
+                <a16:creationId xmlns:a16="http://schemas.microsoft.com/office/drawing/2014/main" id="{87235240-11FA-40C8-DFF5-293F9FE30C39}"/>
+              </a:ext>
+            </a:extLst>
+          </p:cNvPr>
+          <p:cNvCxnSpPr>
+            <a:cxnSpLocks/>
+          </p:cNvCxnSpPr>
+          <p:nvPr/>
+        </p:nvCxnSpPr>
+        <p:spPr>
+          <a:xfrm flipH="1">
+            <a:off x="1850488" y="3579372"/>
+            <a:ext cx="180000" cy="0"/>
+          </a:xfrm>
+          <a:prstGeom prst="line">
+            <a:avLst/>
+          </a:prstGeom>
+          <a:solidFill>
+            <a:schemeClr val="accent5">
+              <a:lumMod val="20000"/>
+              <a:lumOff val="80000"/>
+            </a:schemeClr>
+          </a:solidFill>
+          <a:ln w="19050">
+            <a:solidFill>
+              <a:srgbClr val="002060"/>
+            </a:solidFill>
+          </a:ln>
+        </p:spPr>
+        <p:style>
+          <a:lnRef idx="2">
+            <a:schemeClr val="accent1">
+              <a:shade val="15000"/>
+            </a:schemeClr>
+          </a:lnRef>
+          <a:fillRef idx="1">
+            <a:schemeClr val="accent1"/>
+          </a:fillRef>
+          <a:effectRef idx="0">
+            <a:schemeClr val="accent1"/>
+          </a:effectRef>
+          <a:fontRef idx="minor">
+            <a:schemeClr val="lt1"/>
+          </a:fontRef>
+        </p:style>
+      </p:cxnSp>
+      <p:cxnSp>
+        <p:nvCxnSpPr>
+          <p:cNvPr id="16" name="Connecteur droit 15">
+            <a:extLst>
+              <a:ext uri="{FF2B5EF4-FFF2-40B4-BE49-F238E27FC236}">
+                <a16:creationId xmlns:a16="http://schemas.microsoft.com/office/drawing/2014/main" id="{16E69BCE-7B2A-9E22-B496-EC8F6DC70E23}"/>
+              </a:ext>
+            </a:extLst>
+          </p:cNvPr>
+          <p:cNvCxnSpPr>
+            <a:cxnSpLocks/>
+          </p:cNvCxnSpPr>
+          <p:nvPr/>
+        </p:nvCxnSpPr>
+        <p:spPr>
+          <a:xfrm flipH="1">
+            <a:off x="2750931" y="3579372"/>
+            <a:ext cx="180000" cy="0"/>
+          </a:xfrm>
+          <a:prstGeom prst="line">
+            <a:avLst/>
+          </a:prstGeom>
+          <a:solidFill>
+            <a:schemeClr val="accent5">
+              <a:lumMod val="20000"/>
+              <a:lumOff val="80000"/>
+            </a:schemeClr>
+          </a:solidFill>
+          <a:ln w="19050">
+            <a:solidFill>
+              <a:srgbClr val="002060"/>
+            </a:solidFill>
+          </a:ln>
+        </p:spPr>
+        <p:style>
+          <a:lnRef idx="2">
+            <a:schemeClr val="accent1">
+              <a:shade val="15000"/>
+            </a:schemeClr>
+          </a:lnRef>
+          <a:fillRef idx="1">
+            <a:schemeClr val="accent1"/>
+          </a:fillRef>
+          <a:effectRef idx="0">
+            <a:schemeClr val="accent1"/>
+          </a:effectRef>
+          <a:fontRef idx="minor">
+            <a:schemeClr val="lt1"/>
+          </a:fontRef>
+        </p:style>
+      </p:cxnSp>
+      <p:cxnSp>
+        <p:nvCxnSpPr>
+          <p:cNvPr id="12" name="Connecteur droit 11">
+            <a:extLst>
+              <a:ext uri="{FF2B5EF4-FFF2-40B4-BE49-F238E27FC236}">
+                <a16:creationId xmlns:a16="http://schemas.microsoft.com/office/drawing/2014/main" id="{80B65E96-12F8-7C2C-1EAE-DBB7B44AD046}"/>
+              </a:ext>
+            </a:extLst>
+          </p:cNvPr>
+          <p:cNvCxnSpPr>
+            <a:cxnSpLocks/>
+          </p:cNvCxnSpPr>
+          <p:nvPr/>
+        </p:nvCxnSpPr>
+        <p:spPr>
+          <a:xfrm flipV="1">
+            <a:off x="8415900" y="2689224"/>
+            <a:ext cx="3175" cy="739776"/>
+          </a:xfrm>
+          <a:prstGeom prst="line">
+            <a:avLst/>
+          </a:prstGeom>
+          <a:solidFill>
+            <a:schemeClr val="accent5">
+              <a:lumMod val="20000"/>
+              <a:lumOff val="80000"/>
+            </a:schemeClr>
+          </a:solidFill>
+          <a:ln w="57150">
+            <a:solidFill>
+              <a:srgbClr val="FF0000"/>
+            </a:solidFill>
+          </a:ln>
+        </p:spPr>
+        <p:style>
+          <a:lnRef idx="2">
+            <a:schemeClr val="accent1">
+              <a:shade val="15000"/>
+            </a:schemeClr>
+          </a:lnRef>
+          <a:fillRef idx="1">
+            <a:schemeClr val="accent1"/>
+          </a:fillRef>
+          <a:effectRef idx="0">
+            <a:schemeClr val="accent1"/>
+          </a:effectRef>
+          <a:fontRef idx="minor">
+            <a:schemeClr val="lt1"/>
+          </a:fontRef>
+        </p:style>
+      </p:cxnSp>
+      <p:sp>
+        <p:nvSpPr>
+          <p:cNvPr id="13" name="Arc plein 12">
+            <a:extLst>
+              <a:ext uri="{FF2B5EF4-FFF2-40B4-BE49-F238E27FC236}">
+                <a16:creationId xmlns:a16="http://schemas.microsoft.com/office/drawing/2014/main" id="{1DB21DD2-2ACC-5616-51CA-87E80EAF3EB8}"/>
+              </a:ext>
+            </a:extLst>
+          </p:cNvPr>
+          <p:cNvSpPr/>
+          <p:nvPr/>
+        </p:nvSpPr>
+        <p:spPr>
+          <a:xfrm>
+            <a:off x="7446075" y="1181885"/>
+            <a:ext cx="1620000" cy="1620000"/>
+          </a:xfrm>
+          <a:prstGeom prst="blockArc">
+            <a:avLst>
+              <a:gd name="adj1" fmla="val 8099949"/>
+              <a:gd name="adj2" fmla="val 2975057"/>
+              <a:gd name="adj3" fmla="val 12245"/>
+            </a:avLst>
+          </a:prstGeom>
+          <a:solidFill>
+            <a:schemeClr val="accent5">
+              <a:lumMod val="20000"/>
+              <a:lumOff val="80000"/>
+            </a:schemeClr>
+          </a:solidFill>
+          <a:ln w="19050">
+            <a:solidFill>
+              <a:srgbClr val="002060"/>
+            </a:solidFill>
+          </a:ln>
+        </p:spPr>
+        <p:style>
+          <a:lnRef idx="2">
+            <a:schemeClr val="accent1">
+              <a:shade val="15000"/>
+            </a:schemeClr>
+          </a:lnRef>
+          <a:fillRef idx="1">
+            <a:schemeClr val="accent1"/>
+          </a:fillRef>
+          <a:effectRef idx="0">
+            <a:schemeClr val="accent1"/>
+          </a:effectRef>
+          <a:fontRef idx="minor">
+            <a:schemeClr val="lt1"/>
+          </a:fontRef>
+        </p:style>
+        <p:txBody>
+          <a:bodyPr rtlCol="0" anchor="ctr"/>
+          <a:lstStyle/>
+          <a:p>
+            <a:pPr algn="ctr"/>
+            <a:endParaRPr lang="fr-FR"/>
+          </a:p>
+        </p:txBody>
+      </p:sp>
+      <p:sp>
+        <p:nvSpPr>
+          <p:cNvPr id="22" name="Ellipse 21">
+            <a:extLst>
+              <a:ext uri="{FF2B5EF4-FFF2-40B4-BE49-F238E27FC236}">
+                <a16:creationId xmlns:a16="http://schemas.microsoft.com/office/drawing/2014/main" id="{1F3C5E2A-90A6-F67B-D60A-256C1B4F113E}"/>
+              </a:ext>
+            </a:extLst>
+          </p:cNvPr>
+          <p:cNvSpPr/>
+          <p:nvPr/>
+        </p:nvSpPr>
+        <p:spPr>
+          <a:xfrm>
+            <a:off x="8148075" y="1872555"/>
+            <a:ext cx="216000" cy="216000"/>
+          </a:xfrm>
+          <a:prstGeom prst="ellipse">
+            <a:avLst/>
+          </a:prstGeom>
+          <a:noFill/>
+          <a:ln w="19050">
+            <a:solidFill>
+              <a:srgbClr val="002060"/>
+            </a:solidFill>
+          </a:ln>
+        </p:spPr>
+        <p:style>
+          <a:lnRef idx="2">
+            <a:schemeClr val="accent1">
+              <a:shade val="15000"/>
+            </a:schemeClr>
+          </a:lnRef>
+          <a:fillRef idx="1">
+            <a:schemeClr val="accent1"/>
+          </a:fillRef>
+          <a:effectRef idx="0">
+            <a:schemeClr val="accent1"/>
+          </a:effectRef>
+          <a:fontRef idx="minor">
+            <a:schemeClr val="lt1"/>
+          </a:fontRef>
+        </p:style>
+        <p:txBody>
+          <a:bodyPr rtlCol="0" anchor="ctr"/>
+          <a:lstStyle/>
+          <a:p>
+            <a:pPr algn="ctr"/>
+            <a:endParaRPr lang="fr-FR"/>
+          </a:p>
+        </p:txBody>
+      </p:sp>
+      <p:cxnSp>
+        <p:nvCxnSpPr>
+          <p:cNvPr id="23" name="Connecteur droit 22">
+            <a:extLst>
+              <a:ext uri="{FF2B5EF4-FFF2-40B4-BE49-F238E27FC236}">
+                <a16:creationId xmlns:a16="http://schemas.microsoft.com/office/drawing/2014/main" id="{43A50EC7-AF92-B58D-7456-C60868A653A2}"/>
+              </a:ext>
+            </a:extLst>
+          </p:cNvPr>
+          <p:cNvCxnSpPr>
+            <a:cxnSpLocks/>
+            <a:endCxn id="22" idx="1"/>
+          </p:cNvCxnSpPr>
+          <p:nvPr/>
+        </p:nvCxnSpPr>
+        <p:spPr>
+          <a:xfrm>
+            <a:off x="7681671" y="1507067"/>
+            <a:ext cx="498036" cy="397120"/>
+          </a:xfrm>
+          <a:prstGeom prst="line">
+            <a:avLst/>
+          </a:prstGeom>
+          <a:solidFill>
+            <a:schemeClr val="accent5">
+              <a:lumMod val="20000"/>
+              <a:lumOff val="80000"/>
+            </a:schemeClr>
+          </a:solidFill>
+          <a:ln w="28575">
+            <a:solidFill>
+              <a:srgbClr val="00B050"/>
+            </a:solidFill>
+            <a:headEnd type="stealth" w="med" len="lg"/>
+          </a:ln>
+        </p:spPr>
+        <p:style>
+          <a:lnRef idx="2">
+            <a:schemeClr val="accent1">
+              <a:shade val="15000"/>
+            </a:schemeClr>
+          </a:lnRef>
+          <a:fillRef idx="1">
+            <a:schemeClr val="accent1"/>
+          </a:fillRef>
+          <a:effectRef idx="0">
+            <a:schemeClr val="accent1"/>
+          </a:effectRef>
+          <a:fontRef idx="minor">
+            <a:schemeClr val="lt1"/>
+          </a:fontRef>
+        </p:style>
+      </p:cxnSp>
+      <p:cxnSp>
+        <p:nvCxnSpPr>
+          <p:cNvPr id="28" name="Connecteur droit 27">
+            <a:extLst>
+              <a:ext uri="{FF2B5EF4-FFF2-40B4-BE49-F238E27FC236}">
+                <a16:creationId xmlns:a16="http://schemas.microsoft.com/office/drawing/2014/main" id="{1160F79F-1512-6F38-FC30-5375F7C54FDD}"/>
+              </a:ext>
+            </a:extLst>
+          </p:cNvPr>
+          <p:cNvCxnSpPr>
+            <a:cxnSpLocks/>
+          </p:cNvCxnSpPr>
+          <p:nvPr/>
+        </p:nvCxnSpPr>
+        <p:spPr>
+          <a:xfrm rot="16200000" flipV="1">
+            <a:off x="8411255" y="1945681"/>
+            <a:ext cx="0" cy="89999"/>
+          </a:xfrm>
+          <a:prstGeom prst="line">
+            <a:avLst/>
+          </a:prstGeom>
+          <a:solidFill>
+            <a:schemeClr val="bg1"/>
+          </a:solidFill>
+          <a:ln w="19050">
+            <a:solidFill>
+              <a:srgbClr val="002060"/>
+            </a:solidFill>
+          </a:ln>
+        </p:spPr>
+        <p:style>
+          <a:lnRef idx="2">
+            <a:schemeClr val="accent1">
+              <a:shade val="15000"/>
+            </a:schemeClr>
+          </a:lnRef>
+          <a:fillRef idx="1">
+            <a:schemeClr val="accent1"/>
+          </a:fillRef>
+          <a:effectRef idx="0">
+            <a:schemeClr val="accent1"/>
+          </a:effectRef>
+          <a:fontRef idx="minor">
+            <a:schemeClr val="lt1"/>
+          </a:fontRef>
+        </p:style>
+      </p:cxnSp>
+      <p:sp>
+        <p:nvSpPr>
+          <p:cNvPr id="29" name="Rectangle 28">
+            <a:extLst>
+              <a:ext uri="{FF2B5EF4-FFF2-40B4-BE49-F238E27FC236}">
+                <a16:creationId xmlns:a16="http://schemas.microsoft.com/office/drawing/2014/main" id="{C212B0F0-22B0-4263-39EF-797C6834C495}"/>
+              </a:ext>
+            </a:extLst>
+          </p:cNvPr>
+          <p:cNvSpPr/>
+          <p:nvPr/>
+        </p:nvSpPr>
+        <p:spPr>
+          <a:xfrm rot="16200000">
+            <a:off x="8388194" y="1920622"/>
+            <a:ext cx="288000" cy="144000"/>
+          </a:xfrm>
+          <a:prstGeom prst="rect">
+            <a:avLst/>
+          </a:prstGeom>
+          <a:solidFill>
+            <a:schemeClr val="accent5">
+              <a:lumMod val="20000"/>
+              <a:lumOff val="80000"/>
+            </a:schemeClr>
+          </a:solidFill>
+          <a:ln w="19050">
+            <a:noFill/>
+          </a:ln>
+        </p:spPr>
+        <p:style>
+          <a:lnRef idx="2">
+            <a:schemeClr val="accent1">
+              <a:shade val="15000"/>
+            </a:schemeClr>
+          </a:lnRef>
+          <a:fillRef idx="1">
+            <a:schemeClr val="accent1"/>
+          </a:fillRef>
+          <a:effectRef idx="0">
+            <a:schemeClr val="accent1"/>
+          </a:effectRef>
+          <a:fontRef idx="minor">
+            <a:schemeClr val="lt1"/>
+          </a:fontRef>
+        </p:style>
+        <p:txBody>
+          <a:bodyPr rtlCol="0" anchor="ctr"/>
+          <a:lstStyle/>
+          <a:p>
+            <a:pPr algn="ctr"/>
+            <a:endParaRPr lang="fr-FR"/>
+          </a:p>
+        </p:txBody>
+      </p:sp>
+      <p:cxnSp>
+        <p:nvCxnSpPr>
+          <p:cNvPr id="30" name="Connecteur droit 29">
+            <a:extLst>
+              <a:ext uri="{FF2B5EF4-FFF2-40B4-BE49-F238E27FC236}">
+                <a16:creationId xmlns:a16="http://schemas.microsoft.com/office/drawing/2014/main" id="{67908A2B-0762-A5A0-30FB-DD015AAE6B5C}"/>
+              </a:ext>
+            </a:extLst>
+          </p:cNvPr>
+          <p:cNvCxnSpPr>
+            <a:cxnSpLocks/>
+          </p:cNvCxnSpPr>
+          <p:nvPr/>
+        </p:nvCxnSpPr>
+        <p:spPr>
+          <a:xfrm rot="16200000" flipH="1">
+            <a:off x="8312254" y="1992204"/>
+            <a:ext cx="288000" cy="0"/>
+          </a:xfrm>
+          <a:prstGeom prst="line">
+            <a:avLst/>
+          </a:prstGeom>
+          <a:solidFill>
+            <a:schemeClr val="bg1"/>
+          </a:solidFill>
+          <a:ln w="19050">
+            <a:solidFill>
+              <a:srgbClr val="002060"/>
+            </a:solidFill>
+          </a:ln>
+        </p:spPr>
+        <p:style>
+          <a:lnRef idx="2">
+            <a:schemeClr val="accent1">
+              <a:shade val="15000"/>
+            </a:schemeClr>
+          </a:lnRef>
+          <a:fillRef idx="1">
+            <a:schemeClr val="accent1"/>
+          </a:fillRef>
+          <a:effectRef idx="0">
+            <a:schemeClr val="accent1"/>
+          </a:effectRef>
+          <a:fontRef idx="minor">
+            <a:schemeClr val="lt1"/>
+          </a:fontRef>
+        </p:style>
+      </p:cxnSp>
+      <p:cxnSp>
+        <p:nvCxnSpPr>
+          <p:cNvPr id="32" name="Connecteur droit 31">
+            <a:extLst>
+              <a:ext uri="{FF2B5EF4-FFF2-40B4-BE49-F238E27FC236}">
+                <a16:creationId xmlns:a16="http://schemas.microsoft.com/office/drawing/2014/main" id="{3FD61AF0-3ED3-6339-5D2A-AFFEC7516204}"/>
+              </a:ext>
+            </a:extLst>
+          </p:cNvPr>
+          <p:cNvCxnSpPr>
+            <a:cxnSpLocks/>
+          </p:cNvCxnSpPr>
+          <p:nvPr/>
+        </p:nvCxnSpPr>
+        <p:spPr>
+          <a:xfrm flipV="1">
+            <a:off x="8256075" y="2236272"/>
+            <a:ext cx="0" cy="2213808"/>
+          </a:xfrm>
+          <a:prstGeom prst="line">
+            <a:avLst/>
+          </a:prstGeom>
+          <a:solidFill>
+            <a:schemeClr val="accent5">
+              <a:lumMod val="20000"/>
+              <a:lumOff val="80000"/>
+            </a:schemeClr>
+          </a:solidFill>
+          <a:ln w="57150">
+            <a:solidFill>
+              <a:srgbClr val="00B050"/>
+            </a:solidFill>
+          </a:ln>
+        </p:spPr>
+        <p:style>
+          <a:lnRef idx="2">
+            <a:schemeClr val="accent1">
+              <a:shade val="15000"/>
+            </a:schemeClr>
+          </a:lnRef>
+          <a:fillRef idx="1">
+            <a:schemeClr val="accent1"/>
+          </a:fillRef>
+          <a:effectRef idx="0">
+            <a:schemeClr val="accent1"/>
+          </a:effectRef>
+          <a:fontRef idx="minor">
+            <a:schemeClr val="lt1"/>
+          </a:fontRef>
+        </p:style>
+      </p:cxnSp>
+      <p:sp>
+        <p:nvSpPr>
+          <p:cNvPr id="33" name="Arc 32">
+            <a:extLst>
+              <a:ext uri="{FF2B5EF4-FFF2-40B4-BE49-F238E27FC236}">
+                <a16:creationId xmlns:a16="http://schemas.microsoft.com/office/drawing/2014/main" id="{FB6FCD74-8109-45EF-24E9-0312958068D4}"/>
+              </a:ext>
+            </a:extLst>
+          </p:cNvPr>
+          <p:cNvSpPr/>
+          <p:nvPr/>
+        </p:nvSpPr>
+        <p:spPr>
+          <a:xfrm>
+            <a:off x="7997055" y="1752600"/>
+            <a:ext cx="483672" cy="483672"/>
+          </a:xfrm>
+          <a:prstGeom prst="arc">
+            <a:avLst>
+              <a:gd name="adj1" fmla="val 5054769"/>
+              <a:gd name="adj2" fmla="val 13716099"/>
+            </a:avLst>
+          </a:prstGeom>
+          <a:noFill/>
+          <a:ln w="28575">
+            <a:solidFill>
+              <a:srgbClr val="00B050"/>
+            </a:solidFill>
+          </a:ln>
+        </p:spPr>
+        <p:style>
+          <a:lnRef idx="2">
+            <a:schemeClr val="accent1">
+              <a:shade val="15000"/>
+            </a:schemeClr>
+          </a:lnRef>
+          <a:fillRef idx="1">
+            <a:schemeClr val="accent1"/>
+          </a:fillRef>
+          <a:effectRef idx="0">
+            <a:schemeClr val="accent1"/>
+          </a:effectRef>
+          <a:fontRef idx="minor">
+            <a:schemeClr val="lt1"/>
+          </a:fontRef>
+        </p:style>
+        <p:txBody>
+          <a:bodyPr rtlCol="0" anchor="ctr"/>
+          <a:lstStyle/>
+          <a:p>
+            <a:pPr algn="ctr"/>
+            <a:endParaRPr lang="fr-FR"/>
+          </a:p>
+        </p:txBody>
+      </p:sp>
+      <p:cxnSp>
+        <p:nvCxnSpPr>
+          <p:cNvPr id="38" name="Connecteur droit 37">
+            <a:extLst>
+              <a:ext uri="{FF2B5EF4-FFF2-40B4-BE49-F238E27FC236}">
+                <a16:creationId xmlns:a16="http://schemas.microsoft.com/office/drawing/2014/main" id="{D052A12D-21CD-F638-A34B-295AE9CE1EE0}"/>
+              </a:ext>
+            </a:extLst>
+          </p:cNvPr>
+          <p:cNvCxnSpPr>
+            <a:cxnSpLocks/>
+          </p:cNvCxnSpPr>
+          <p:nvPr/>
+        </p:nvCxnSpPr>
+        <p:spPr>
+          <a:xfrm flipH="1">
+            <a:off x="7536075" y="3429000"/>
+            <a:ext cx="560175" cy="701040"/>
+          </a:xfrm>
+          <a:prstGeom prst="line">
+            <a:avLst/>
+          </a:prstGeom>
+          <a:solidFill>
+            <a:schemeClr val="accent5">
+              <a:lumMod val="20000"/>
+              <a:lumOff val="80000"/>
+            </a:schemeClr>
+          </a:solidFill>
+          <a:ln w="57150">
+            <a:solidFill>
+              <a:schemeClr val="tx1"/>
+            </a:solidFill>
+          </a:ln>
+        </p:spPr>
+        <p:style>
+          <a:lnRef idx="2">
+            <a:schemeClr val="accent1">
+              <a:shade val="15000"/>
+            </a:schemeClr>
+          </a:lnRef>
+          <a:fillRef idx="1">
+            <a:schemeClr val="accent1"/>
+          </a:fillRef>
+          <a:effectRef idx="0">
+            <a:schemeClr val="accent1"/>
+          </a:effectRef>
+          <a:fontRef idx="minor">
+            <a:schemeClr val="lt1"/>
+          </a:fontRef>
+        </p:style>
+      </p:cxnSp>
+      <p:cxnSp>
+        <p:nvCxnSpPr>
+          <p:cNvPr id="41" name="Connecteur droit 40">
+            <a:extLst>
+              <a:ext uri="{FF2B5EF4-FFF2-40B4-BE49-F238E27FC236}">
+                <a16:creationId xmlns:a16="http://schemas.microsoft.com/office/drawing/2014/main" id="{C2A8E738-29DA-78BB-B105-990F80D996A6}"/>
+              </a:ext>
+            </a:extLst>
+          </p:cNvPr>
+          <p:cNvCxnSpPr>
+            <a:cxnSpLocks/>
+          </p:cNvCxnSpPr>
+          <p:nvPr/>
+        </p:nvCxnSpPr>
+        <p:spPr>
+          <a:xfrm flipH="1" flipV="1">
+            <a:off x="8414313" y="3409698"/>
+            <a:ext cx="561762" cy="755902"/>
+          </a:xfrm>
+          <a:prstGeom prst="line">
+            <a:avLst/>
+          </a:prstGeom>
+          <a:solidFill>
+            <a:schemeClr val="accent5">
+              <a:lumMod val="20000"/>
+              <a:lumOff val="80000"/>
+            </a:schemeClr>
+          </a:solidFill>
+          <a:ln w="57150">
+            <a:solidFill>
+              <a:srgbClr val="FF0000"/>
+            </a:solidFill>
+          </a:ln>
+        </p:spPr>
+        <p:style>
+          <a:lnRef idx="2">
+            <a:schemeClr val="accent1">
+              <a:shade val="15000"/>
+            </a:schemeClr>
+          </a:lnRef>
+          <a:fillRef idx="1">
+            <a:schemeClr val="accent1"/>
+          </a:fillRef>
+          <a:effectRef idx="0">
+            <a:schemeClr val="accent1"/>
+          </a:effectRef>
+          <a:fontRef idx="minor">
+            <a:schemeClr val="lt1"/>
+          </a:fontRef>
+        </p:style>
+      </p:cxnSp>
+      <p:cxnSp>
+        <p:nvCxnSpPr>
+          <p:cNvPr id="45" name="Connecteur droit 44">
+            <a:extLst>
+              <a:ext uri="{FF2B5EF4-FFF2-40B4-BE49-F238E27FC236}">
+                <a16:creationId xmlns:a16="http://schemas.microsoft.com/office/drawing/2014/main" id="{B01D8BB2-7104-3CC4-3DC1-0697CDCA7DD1}"/>
+              </a:ext>
+            </a:extLst>
+          </p:cNvPr>
+          <p:cNvCxnSpPr>
+            <a:cxnSpLocks/>
+          </p:cNvCxnSpPr>
+          <p:nvPr/>
+        </p:nvCxnSpPr>
+        <p:spPr>
+          <a:xfrm flipV="1">
+            <a:off x="7536075" y="4130040"/>
+            <a:ext cx="0" cy="320040"/>
+          </a:xfrm>
+          <a:prstGeom prst="line">
+            <a:avLst/>
+          </a:prstGeom>
+          <a:solidFill>
+            <a:schemeClr val="accent5">
+              <a:lumMod val="20000"/>
+              <a:lumOff val="80000"/>
+            </a:schemeClr>
+          </a:solidFill>
+          <a:ln w="57150">
+            <a:solidFill>
+              <a:schemeClr val="tx1"/>
+            </a:solidFill>
+          </a:ln>
+        </p:spPr>
+        <p:style>
+          <a:lnRef idx="2">
+            <a:schemeClr val="accent1">
+              <a:shade val="15000"/>
+            </a:schemeClr>
+          </a:lnRef>
+          <a:fillRef idx="1">
+            <a:schemeClr val="accent1"/>
+          </a:fillRef>
+          <a:effectRef idx="0">
+            <a:schemeClr val="accent1"/>
+          </a:effectRef>
+          <a:fontRef idx="minor">
+            <a:schemeClr val="lt1"/>
+          </a:fontRef>
+        </p:style>
+      </p:cxnSp>
+      <p:cxnSp>
+        <p:nvCxnSpPr>
+          <p:cNvPr id="47" name="Connecteur droit 46">
+            <a:extLst>
+              <a:ext uri="{FF2B5EF4-FFF2-40B4-BE49-F238E27FC236}">
+                <a16:creationId xmlns:a16="http://schemas.microsoft.com/office/drawing/2014/main" id="{ED55E8A7-DA95-997A-BE52-553210457BE5}"/>
+              </a:ext>
+            </a:extLst>
+          </p:cNvPr>
+          <p:cNvCxnSpPr>
+            <a:cxnSpLocks/>
+          </p:cNvCxnSpPr>
+          <p:nvPr/>
+        </p:nvCxnSpPr>
+        <p:spPr>
+          <a:xfrm flipV="1">
+            <a:off x="8976075" y="4165600"/>
+            <a:ext cx="0" cy="284480"/>
+          </a:xfrm>
+          <a:prstGeom prst="line">
+            <a:avLst/>
+          </a:prstGeom>
+          <a:solidFill>
+            <a:schemeClr val="accent5">
+              <a:lumMod val="20000"/>
+              <a:lumOff val="80000"/>
+            </a:schemeClr>
+          </a:solidFill>
+          <a:ln w="57150">
+            <a:solidFill>
+              <a:srgbClr val="FF0000"/>
+            </a:solidFill>
+          </a:ln>
+        </p:spPr>
+        <p:style>
+          <a:lnRef idx="2">
+            <a:schemeClr val="accent1">
+              <a:shade val="15000"/>
+            </a:schemeClr>
+          </a:lnRef>
+          <a:fillRef idx="1">
+            <a:schemeClr val="accent1"/>
+          </a:fillRef>
+          <a:effectRef idx="0">
+            <a:schemeClr val="accent1"/>
+          </a:effectRef>
+          <a:fontRef idx="minor">
+            <a:schemeClr val="lt1"/>
+          </a:fontRef>
+        </p:style>
+      </p:cxnSp>
+      <p:cxnSp>
+        <p:nvCxnSpPr>
+          <p:cNvPr id="50" name="Connecteur droit 49">
+            <a:extLst>
+              <a:ext uri="{FF2B5EF4-FFF2-40B4-BE49-F238E27FC236}">
+                <a16:creationId xmlns:a16="http://schemas.microsoft.com/office/drawing/2014/main" id="{D3BD692F-61F9-0592-6FAA-0907559644C3}"/>
+              </a:ext>
+            </a:extLst>
+          </p:cNvPr>
+          <p:cNvCxnSpPr>
+            <a:cxnSpLocks/>
+          </p:cNvCxnSpPr>
+          <p:nvPr/>
+        </p:nvCxnSpPr>
+        <p:spPr>
+          <a:xfrm flipH="1">
+            <a:off x="7536075" y="5046631"/>
+            <a:ext cx="1440000" cy="0"/>
+          </a:xfrm>
+          <a:prstGeom prst="line">
+            <a:avLst/>
+          </a:prstGeom>
+          <a:solidFill>
+            <a:schemeClr val="accent5">
+              <a:lumMod val="20000"/>
+              <a:lumOff val="80000"/>
+            </a:schemeClr>
+          </a:solidFill>
+          <a:ln w="28575">
+            <a:solidFill>
+              <a:srgbClr val="00B050"/>
+            </a:solidFill>
+            <a:headEnd type="stealth" w="med" len="lg"/>
+          </a:ln>
+        </p:spPr>
+        <p:style>
+          <a:lnRef idx="2">
+            <a:schemeClr val="accent1">
+              <a:shade val="15000"/>
+            </a:schemeClr>
+          </a:lnRef>
+          <a:fillRef idx="1">
+            <a:schemeClr val="accent1"/>
+          </a:fillRef>
+          <a:effectRef idx="0">
+            <a:schemeClr val="accent1"/>
+          </a:effectRef>
+          <a:fontRef idx="minor">
+            <a:schemeClr val="lt1"/>
+          </a:fontRef>
+        </p:style>
+      </p:cxnSp>
+      <p:pic>
+        <p:nvPicPr>
+          <p:cNvPr id="55" name="Image 54">
+            <a:extLst>
+              <a:ext uri="{FF2B5EF4-FFF2-40B4-BE49-F238E27FC236}">
+                <a16:creationId xmlns:a16="http://schemas.microsoft.com/office/drawing/2014/main" id="{B09DE07E-C203-CE97-6BD4-6CAEBCCAE93C}"/>
+              </a:ext>
+            </a:extLst>
+          </p:cNvPr>
+          <p:cNvPicPr>
+            <a:picLocks noChangeAspect="1"/>
+          </p:cNvPicPr>
+          <p:nvPr/>
+        </p:nvPicPr>
+        <p:blipFill>
+          <a:blip r:embed="rId4"/>
+          <a:stretch>
+            <a:fillRect/>
+          </a:stretch>
+        </p:blipFill>
+        <p:spPr>
+          <a:xfrm rot="2509935">
+            <a:off x="4291980" y="795758"/>
+            <a:ext cx="2805006" cy="2680890"/>
+          </a:xfrm>
+          <a:prstGeom prst="rect">
+            <a:avLst/>
+          </a:prstGeom>
+        </p:spPr>
+      </p:pic>
+      <mc:AlternateContent xmlns:mc="http://schemas.openxmlformats.org/markup-compatibility/2006">
+        <mc:Choice xmlns:a14="http://schemas.microsoft.com/office/drawing/2010/main" Requires="a14">
+          <p:sp>
+            <p:nvSpPr>
+              <p:cNvPr id="56" name="ZoneTexte 55">
+                <a:extLst>
+                  <a:ext uri="{FF2B5EF4-FFF2-40B4-BE49-F238E27FC236}">
+                    <a16:creationId xmlns:a16="http://schemas.microsoft.com/office/drawing/2014/main" id="{47F25DEE-50C0-A1F7-5D14-3487CC2EF3BE}"/>
+                  </a:ext>
+                </a:extLst>
+              </p:cNvPr>
+              <p:cNvSpPr txBox="1"/>
+              <p:nvPr/>
+            </p:nvSpPr>
+            <p:spPr>
+              <a:xfrm>
+                <a:off x="8130848" y="4751163"/>
+                <a:ext cx="216085" cy="276999"/>
+              </a:xfrm>
+              <a:prstGeom prst="rect">
+                <a:avLst/>
+              </a:prstGeom>
+              <a:noFill/>
+            </p:spPr>
+            <p:txBody>
+              <a:bodyPr wrap="none" lIns="0" tIns="0" rIns="0" bIns="0" rtlCol="0">
+                <a:spAutoFit/>
+              </a:bodyPr>
+              <a:lstStyle/>
+              <a:p>
+                <a:pPr/>
+                <a14:m>
+                  <m:oMathPara xmlns:m="http://schemas.openxmlformats.org/officeDocument/2006/math">
+                    <m:oMathParaPr>
+                      <m:jc m:val="centerGroup"/>
+                    </m:oMathParaPr>
+                    <m:oMath xmlns:m="http://schemas.openxmlformats.org/officeDocument/2006/math">
+                      <m:r>
+                        <a:rPr lang="fr-FR" b="0" i="1" smtClean="0">
+                          <a:latin typeface="Cambria Math" panose="02040503050406030204" pitchFamily="18" charset="0"/>
+                        </a:rPr>
+                        <m:t>𝑈</m:t>
+                      </m:r>
+                    </m:oMath>
+                  </m:oMathPara>
+                </a14:m>
+                <a:endParaRPr lang="fr-FR" dirty="0"/>
+              </a:p>
+            </p:txBody>
+          </p:sp>
+        </mc:Choice>
+        <mc:Fallback>
+          <p:sp>
+            <p:nvSpPr>
+              <p:cNvPr id="56" name="ZoneTexte 55">
+                <a:extLst>
+                  <a:ext uri="{FF2B5EF4-FFF2-40B4-BE49-F238E27FC236}">
+                    <a16:creationId xmlns:a16="http://schemas.microsoft.com/office/drawing/2014/main" id="{47F25DEE-50C0-A1F7-5D14-3487CC2EF3BE}"/>
+                  </a:ext>
+                </a:extLst>
+              </p:cNvPr>
+              <p:cNvSpPr txBox="1">
+                <a:spLocks noRot="1" noChangeAspect="1" noMove="1" noResize="1" noEditPoints="1" noAdjustHandles="1" noChangeArrowheads="1" noChangeShapeType="1" noTextEdit="1"/>
+              </p:cNvSpPr>
+              <p:nvPr/>
+            </p:nvSpPr>
+            <p:spPr>
+              <a:xfrm>
+                <a:off x="8130848" y="4751163"/>
+                <a:ext cx="216085" cy="276999"/>
+              </a:xfrm>
+              <a:prstGeom prst="rect">
+                <a:avLst/>
+              </a:prstGeom>
+              <a:blipFill>
+                <a:blip r:embed="rId5"/>
+                <a:stretch>
+                  <a:fillRect l="-28571" r="-22857" b="-6522"/>
+                </a:stretch>
+              </a:blipFill>
+            </p:spPr>
+            <p:txBody>
+              <a:bodyPr/>
+              <a:lstStyle/>
+              <a:p>
+                <a:r>
+                  <a:rPr lang="fr-FR">
+                    <a:noFill/>
+                  </a:rPr>
+                  <a:t> </a:t>
+                </a:r>
+              </a:p>
+            </p:txBody>
+          </p:sp>
+        </mc:Fallback>
+      </mc:AlternateContent>
+      <p:cxnSp>
+        <p:nvCxnSpPr>
+          <p:cNvPr id="57" name="Connecteur droit 56">
+            <a:extLst>
+              <a:ext uri="{FF2B5EF4-FFF2-40B4-BE49-F238E27FC236}">
+                <a16:creationId xmlns:a16="http://schemas.microsoft.com/office/drawing/2014/main" id="{28B12D35-9CFA-05AF-E04F-888169CB66A4}"/>
+              </a:ext>
+            </a:extLst>
+          </p:cNvPr>
+          <p:cNvCxnSpPr>
+            <a:cxnSpLocks/>
+          </p:cNvCxnSpPr>
+          <p:nvPr/>
+        </p:nvCxnSpPr>
+        <p:spPr>
+          <a:xfrm flipH="1">
+            <a:off x="7536075" y="4626034"/>
+            <a:ext cx="720000" cy="0"/>
+          </a:xfrm>
+          <a:prstGeom prst="line">
+            <a:avLst/>
+          </a:prstGeom>
+          <a:solidFill>
+            <a:schemeClr val="accent5">
+              <a:lumMod val="20000"/>
+              <a:lumOff val="80000"/>
+            </a:schemeClr>
+          </a:solidFill>
+          <a:ln w="28575">
+            <a:solidFill>
+              <a:srgbClr val="00B050"/>
+            </a:solidFill>
+            <a:headEnd type="stealth" w="med" len="lg"/>
+          </a:ln>
+        </p:spPr>
+        <p:style>
+          <a:lnRef idx="2">
+            <a:schemeClr val="accent1">
+              <a:shade val="15000"/>
+            </a:schemeClr>
+          </a:lnRef>
+          <a:fillRef idx="1">
+            <a:schemeClr val="accent1"/>
+          </a:fillRef>
+          <a:effectRef idx="0">
+            <a:schemeClr val="accent1"/>
+          </a:effectRef>
+          <a:fontRef idx="minor">
+            <a:schemeClr val="lt1"/>
+          </a:fontRef>
+        </p:style>
+      </p:cxnSp>
+      <mc:AlternateContent xmlns:mc="http://schemas.openxmlformats.org/markup-compatibility/2006">
+        <mc:Choice xmlns:a14="http://schemas.microsoft.com/office/drawing/2010/main" Requires="a14">
+          <p:sp>
+            <p:nvSpPr>
+              <p:cNvPr id="60" name="ZoneTexte 59">
+                <a:extLst>
+                  <a:ext uri="{FF2B5EF4-FFF2-40B4-BE49-F238E27FC236}">
+                    <a16:creationId xmlns:a16="http://schemas.microsoft.com/office/drawing/2014/main" id="{9F1963C3-93C9-2D83-469F-9BA08DE42CDA}"/>
+                  </a:ext>
+                </a:extLst>
+              </p:cNvPr>
+              <p:cNvSpPr txBox="1"/>
+              <p:nvPr/>
+            </p:nvSpPr>
+            <p:spPr>
+              <a:xfrm>
+                <a:off x="7759109" y="4348656"/>
+                <a:ext cx="302134" cy="276999"/>
+              </a:xfrm>
+              <a:prstGeom prst="rect">
+                <a:avLst/>
+              </a:prstGeom>
+              <a:noFill/>
+            </p:spPr>
+            <p:txBody>
+              <a:bodyPr wrap="none" lIns="0" tIns="0" rIns="0" bIns="0" rtlCol="0">
+                <a:spAutoFit/>
+              </a:bodyPr>
+              <a:lstStyle/>
+              <a:p>
+                <a:pPr/>
+                <a14:m>
+                  <m:oMathPara xmlns:m="http://schemas.openxmlformats.org/officeDocument/2006/math">
+                    <m:oMathParaPr>
+                      <m:jc m:val="centerGroup"/>
+                    </m:oMathParaPr>
+                    <m:oMath xmlns:m="http://schemas.openxmlformats.org/officeDocument/2006/math">
+                      <m:sSub>
+                        <m:sSubPr>
+                          <m:ctrlPr>
+                            <a:rPr lang="fr-FR" b="0" i="1" smtClean="0">
+                              <a:latin typeface="Cambria Math" panose="02040503050406030204" pitchFamily="18" charset="0"/>
+                            </a:rPr>
+                          </m:ctrlPr>
+                        </m:sSubPr>
+                        <m:e>
+                          <m:r>
+                            <a:rPr lang="fr-FR" b="0" i="1" smtClean="0">
+                              <a:latin typeface="Cambria Math" panose="02040503050406030204" pitchFamily="18" charset="0"/>
+                            </a:rPr>
+                            <m:t>𝑈</m:t>
+                          </m:r>
+                        </m:e>
+                        <m:sub>
+                          <m:r>
+                            <a:rPr lang="fr-FR" b="0" i="1" smtClean="0">
+                              <a:latin typeface="Cambria Math" panose="02040503050406030204" pitchFamily="18" charset="0"/>
+                            </a:rPr>
+                            <m:t>𝑟</m:t>
+                          </m:r>
+                        </m:sub>
+                      </m:sSub>
+                    </m:oMath>
+                  </m:oMathPara>
+                </a14:m>
+                <a:endParaRPr lang="fr-FR" dirty="0"/>
+              </a:p>
+            </p:txBody>
+          </p:sp>
+        </mc:Choice>
+        <mc:Fallback>
+          <p:sp>
+            <p:nvSpPr>
+              <p:cNvPr id="60" name="ZoneTexte 59">
+                <a:extLst>
+                  <a:ext uri="{FF2B5EF4-FFF2-40B4-BE49-F238E27FC236}">
+                    <a16:creationId xmlns:a16="http://schemas.microsoft.com/office/drawing/2014/main" id="{9F1963C3-93C9-2D83-469F-9BA08DE42CDA}"/>
+                  </a:ext>
+                </a:extLst>
+              </p:cNvPr>
+              <p:cNvSpPr txBox="1">
+                <a:spLocks noRot="1" noChangeAspect="1" noMove="1" noResize="1" noEditPoints="1" noAdjustHandles="1" noChangeArrowheads="1" noChangeShapeType="1" noTextEdit="1"/>
+              </p:cNvSpPr>
+              <p:nvPr/>
+            </p:nvSpPr>
+            <p:spPr>
+              <a:xfrm>
+                <a:off x="7759109" y="4348656"/>
+                <a:ext cx="302134" cy="276999"/>
+              </a:xfrm>
+              <a:prstGeom prst="rect">
+                <a:avLst/>
+              </a:prstGeom>
+              <a:blipFill>
+                <a:blip r:embed="rId6"/>
+                <a:stretch>
+                  <a:fillRect l="-20408" b="-8696"/>
+                </a:stretch>
+              </a:blipFill>
+            </p:spPr>
+            <p:txBody>
+              <a:bodyPr/>
+              <a:lstStyle/>
+              <a:p>
+                <a:r>
+                  <a:rPr lang="fr-FR">
+                    <a:noFill/>
+                  </a:rPr>
+                  <a:t> </a:t>
+                </a:r>
+              </a:p>
+            </p:txBody>
+          </p:sp>
+        </mc:Fallback>
+      </mc:AlternateContent>
+    </p:spTree>
+    <p:extLst>
+      <p:ext uri="{BB962C8B-B14F-4D97-AF65-F5344CB8AC3E}">
+        <p14:creationId xmlns:p14="http://schemas.microsoft.com/office/powerpoint/2010/main" val="4242642082"/>
+      </p:ext>
+    </p:extLst>
+  </p:cSld>
+  <p:clrMapOvr>
+    <a:masterClrMapping/>
+  </p:clrMapOvr>
+</p:sld>
+</file>
+
+<file path=ppt/slides/slide13.xml><?xml version="1.0" encoding="utf-8"?>
+<p:sld xmlns:a="http://schemas.openxmlformats.org/drawingml/2006/main" xmlns:r="http://schemas.openxmlformats.org/officeDocument/2006/relationships" xmlns:p="http://schemas.openxmlformats.org/presentationml/2006/main">
+  <p:cSld>
+    <p:spTree>
+      <p:nvGrpSpPr>
         <p:cNvPr id="1" name=""/>
         <p:cNvGrpSpPr/>
         <p:nvPr/>
@@ -12452,7 +13966,7 @@
 </p:sld>
 </file>
 
-<file path=ppt/slides/slide13.xml><?xml version="1.0" encoding="utf-8"?>
+<file path=ppt/slides/slide14.xml><?xml version="1.0" encoding="utf-8"?>
 <p:sld xmlns:a="http://schemas.openxmlformats.org/drawingml/2006/main" xmlns:r="http://schemas.openxmlformats.org/officeDocument/2006/relationships" xmlns:p="http://schemas.openxmlformats.org/presentationml/2006/main">
   <p:cSld>
     <p:spTree>
@@ -17626,7 +19140,7 @@
 </p:sld>
 </file>
 
-<file path=ppt/slides/slide14.xml><?xml version="1.0" encoding="utf-8"?>
+<file path=ppt/slides/slide15.xml><?xml version="1.0" encoding="utf-8"?>
 <p:sld xmlns:a="http://schemas.openxmlformats.org/drawingml/2006/main" xmlns:r="http://schemas.openxmlformats.org/officeDocument/2006/relationships" xmlns:p="http://schemas.openxmlformats.org/presentationml/2006/main">
   <p:cSld>
     <p:spTree>
@@ -18051,7 +19565,7 @@
 </p:sld>
 </file>
 
-<file path=ppt/slides/slide15.xml><?xml version="1.0" encoding="utf-8"?>
+<file path=ppt/slides/slide16.xml><?xml version="1.0" encoding="utf-8"?>
 <p:sld xmlns:a="http://schemas.openxmlformats.org/drawingml/2006/main" xmlns:r="http://schemas.openxmlformats.org/officeDocument/2006/relationships" xmlns:p="http://schemas.openxmlformats.org/presentationml/2006/main">
   <p:cSld>
     <p:spTree>
@@ -18674,7 +20188,7 @@
 </p:sld>
 </file>
 
-<file path=ppt/slides/slide16.xml><?xml version="1.0" encoding="utf-8"?>
+<file path=ppt/slides/slide17.xml><?xml version="1.0" encoding="utf-8"?>
 <p:sld xmlns:a="http://schemas.openxmlformats.org/drawingml/2006/main" xmlns:r="http://schemas.openxmlformats.org/officeDocument/2006/relationships" xmlns:p="http://schemas.openxmlformats.org/presentationml/2006/main">
   <p:cSld>
     <p:spTree>
@@ -19756,8 +21270,8 @@
           </a:fontRef>
         </p:style>
       </p:cxnSp>
-      <mc:AlternateContent xmlns:mc="http://schemas.openxmlformats.org/markup-compatibility/2006">
-        <mc:Choice xmlns:a14="http://schemas.microsoft.com/office/drawing/2010/main" Requires="a14">
+      <mc:AlternateContent xmlns:mc="http://schemas.openxmlformats.org/markup-compatibility/2006" xmlns:a14="http://schemas.microsoft.com/office/drawing/2010/main">
+        <mc:Choice Requires="a14">
           <p:sp>
             <p:nvSpPr>
               <p:cNvPr id="38" name="ZoneTexte 37">
@@ -19786,6 +21300,7 @@
               </a:bodyPr>
               <a:lstStyle/>
               <a:p>
+                <a:pPr/>
                 <a14:m>
                   <m:oMathPara xmlns:m="http://schemas.openxmlformats.org/officeDocument/2006/math">
                     <m:oMathParaPr>
@@ -19806,7 +21321,7 @@
             </p:txBody>
           </p:sp>
         </mc:Choice>
-        <mc:Fallback>
+        <mc:Fallback xmlns="">
           <p:sp>
             <p:nvSpPr>
               <p:cNvPr id="38" name="ZoneTexte 37">
@@ -19851,8 +21366,8 @@
           </p:sp>
         </mc:Fallback>
       </mc:AlternateContent>
-      <mc:AlternateContent xmlns:mc="http://schemas.openxmlformats.org/markup-compatibility/2006">
-        <mc:Choice xmlns:a14="http://schemas.microsoft.com/office/drawing/2010/main" Requires="a14">
+      <mc:AlternateContent xmlns:mc="http://schemas.openxmlformats.org/markup-compatibility/2006" xmlns:a14="http://schemas.microsoft.com/office/drawing/2010/main">
+        <mc:Choice Requires="a14">
           <p:sp>
             <p:nvSpPr>
               <p:cNvPr id="39" name="ZoneTexte 38">
@@ -19881,6 +21396,7 @@
               </a:bodyPr>
               <a:lstStyle/>
               <a:p>
+                <a:pPr/>
                 <a14:m>
                   <m:oMathPara xmlns:m="http://schemas.openxmlformats.org/officeDocument/2006/math">
                     <m:oMathParaPr>
@@ -19901,7 +21417,7 @@
             </p:txBody>
           </p:sp>
         </mc:Choice>
-        <mc:Fallback>
+        <mc:Fallback xmlns="">
           <p:sp>
             <p:nvSpPr>
               <p:cNvPr id="39" name="ZoneTexte 38">
@@ -20102,8 +21618,8 @@
           </a:fontRef>
         </p:style>
       </p:cxnSp>
-      <mc:AlternateContent xmlns:mc="http://schemas.openxmlformats.org/markup-compatibility/2006">
-        <mc:Choice xmlns:a14="http://schemas.microsoft.com/office/drawing/2010/main" Requires="a14">
+      <mc:AlternateContent xmlns:mc="http://schemas.openxmlformats.org/markup-compatibility/2006" xmlns:a14="http://schemas.microsoft.com/office/drawing/2010/main">
+        <mc:Choice Requires="a14">
           <p:sp>
             <p:nvSpPr>
               <p:cNvPr id="49" name="ZoneTexte 48">
@@ -20132,6 +21648,7 @@
               </a:bodyPr>
               <a:lstStyle/>
               <a:p>
+                <a:pPr/>
                 <a14:m>
                   <m:oMathPara xmlns:m="http://schemas.openxmlformats.org/officeDocument/2006/math">
                     <m:oMathParaPr>
@@ -20152,7 +21669,7 @@
             </p:txBody>
           </p:sp>
         </mc:Choice>
-        <mc:Fallback>
+        <mc:Fallback xmlns="">
           <p:sp>
             <p:nvSpPr>
               <p:cNvPr id="49" name="ZoneTexte 48">
@@ -20197,8 +21714,8 @@
           </p:sp>
         </mc:Fallback>
       </mc:AlternateContent>
-      <mc:AlternateContent xmlns:mc="http://schemas.openxmlformats.org/markup-compatibility/2006">
-        <mc:Choice xmlns:a14="http://schemas.microsoft.com/office/drawing/2010/main" Requires="a14">
+      <mc:AlternateContent xmlns:mc="http://schemas.openxmlformats.org/markup-compatibility/2006" xmlns:a14="http://schemas.microsoft.com/office/drawing/2010/main">
+        <mc:Choice Requires="a14">
           <p:sp>
             <p:nvSpPr>
               <p:cNvPr id="50" name="ZoneTexte 49">
@@ -20227,6 +21744,7 @@
               </a:bodyPr>
               <a:lstStyle/>
               <a:p>
+                <a:pPr/>
                 <a14:m>
                   <m:oMathPara xmlns:m="http://schemas.openxmlformats.org/officeDocument/2006/math">
                     <m:oMathParaPr>
@@ -20266,6 +21784,7 @@
                 </a:endParaRPr>
               </a:p>
               <a:p>
+                <a:pPr/>
                 <a14:m>
                   <m:oMathPara xmlns:m="http://schemas.openxmlformats.org/officeDocument/2006/math">
                     <m:oMathParaPr>
@@ -20292,7 +21811,7 @@
             </p:txBody>
           </p:sp>
         </mc:Choice>
-        <mc:Fallback>
+        <mc:Fallback xmlns="">
           <p:sp>
             <p:nvSpPr>
               <p:cNvPr id="50" name="ZoneTexte 49">
@@ -20337,8 +21856,8 @@
           </p:sp>
         </mc:Fallback>
       </mc:AlternateContent>
-      <mc:AlternateContent xmlns:mc="http://schemas.openxmlformats.org/markup-compatibility/2006">
-        <mc:Choice xmlns:a14="http://schemas.microsoft.com/office/drawing/2010/main" Requires="a14">
+      <mc:AlternateContent xmlns:mc="http://schemas.openxmlformats.org/markup-compatibility/2006" xmlns:a14="http://schemas.microsoft.com/office/drawing/2010/main">
+        <mc:Choice Requires="a14">
           <p:sp>
             <p:nvSpPr>
               <p:cNvPr id="51" name="ZoneTexte 50">
@@ -20367,6 +21886,7 @@
               </a:bodyPr>
               <a:lstStyle/>
               <a:p>
+                <a:pPr/>
                 <a14:m>
                   <m:oMathPara xmlns:m="http://schemas.openxmlformats.org/officeDocument/2006/math">
                     <m:oMathParaPr>
@@ -20461,7 +21981,7 @@
             </p:txBody>
           </p:sp>
         </mc:Choice>
-        <mc:Fallback>
+        <mc:Fallback xmlns="">
           <p:sp>
             <p:nvSpPr>
               <p:cNvPr id="51" name="ZoneTexte 50">

--- a/Fiches_Protocoles_Techno/Fiches_Technologie.pptx
+++ b/Fiches_Protocoles_Techno/Fiches_Technologie.pptx
@@ -22,6 +22,9 @@
     <p:sldId id="284" r:id="rId16"/>
     <p:sldId id="286" r:id="rId17"/>
     <p:sldId id="287" r:id="rId18"/>
+    <p:sldId id="289" r:id="rId19"/>
+    <p:sldId id="290" r:id="rId20"/>
+    <p:sldId id="291" r:id="rId21"/>
   </p:sldIdLst>
   <p:sldSz cx="12192000" cy="6858000"/>
   <p:notesSz cx="6858000" cy="9144000"/>
@@ -260,7 +263,7 @@
           <a:p>
             <a:fld id="{1A3D9B3B-1EC8-4BC4-B783-7630517B3190}" type="datetimeFigureOut">
               <a:rPr lang="fr-FR" smtClean="0"/>
-              <a:t>16/07/2025</a:t>
+              <a:t>12/06/2026</a:t>
             </a:fld>
             <a:endParaRPr lang="fr-FR"/>
           </a:p>
@@ -669,7 +672,7 @@
           <a:p>
             <a:fld id="{1A3D9B3B-1EC8-4BC4-B783-7630517B3190}" type="datetimeFigureOut">
               <a:rPr lang="fr-FR" smtClean="0"/>
-              <a:t>16/07/2025</a:t>
+              <a:t>12/06/2026</a:t>
             </a:fld>
             <a:endParaRPr lang="fr-FR"/>
           </a:p>
@@ -855,7 +858,7 @@
           <a:p>
             <a:fld id="{1A3D9B3B-1EC8-4BC4-B783-7630517B3190}" type="datetimeFigureOut">
               <a:rPr lang="fr-FR" smtClean="0"/>
-              <a:t>16/07/2025</a:t>
+              <a:t>12/06/2026</a:t>
             </a:fld>
             <a:endParaRPr lang="fr-FR"/>
           </a:p>
@@ -1031,7 +1034,7 @@
           <a:p>
             <a:fld id="{1A3D9B3B-1EC8-4BC4-B783-7630517B3190}" type="datetimeFigureOut">
               <a:rPr lang="fr-FR" smtClean="0"/>
-              <a:t>16/07/2025</a:t>
+              <a:t>12/06/2026</a:t>
             </a:fld>
             <a:endParaRPr lang="fr-FR"/>
           </a:p>
@@ -1330,7 +1333,7 @@
           <a:p>
             <a:fld id="{1A3D9B3B-1EC8-4BC4-B783-7630517B3190}" type="datetimeFigureOut">
               <a:rPr lang="fr-FR" smtClean="0"/>
-              <a:t>16/07/2025</a:t>
+              <a:t>12/06/2026</a:t>
             </a:fld>
             <a:endParaRPr lang="fr-FR"/>
           </a:p>
@@ -1567,7 +1570,7 @@
           <a:p>
             <a:fld id="{1A3D9B3B-1EC8-4BC4-B783-7630517B3190}" type="datetimeFigureOut">
               <a:rPr lang="fr-FR" smtClean="0"/>
-              <a:t>16/07/2025</a:t>
+              <a:t>12/06/2026</a:t>
             </a:fld>
             <a:endParaRPr lang="fr-FR"/>
           </a:p>
@@ -1985,7 +1988,7 @@
           <a:p>
             <a:fld id="{1A3D9B3B-1EC8-4BC4-B783-7630517B3190}" type="datetimeFigureOut">
               <a:rPr lang="fr-FR" smtClean="0"/>
-              <a:t>16/07/2025</a:t>
+              <a:t>12/06/2026</a:t>
             </a:fld>
             <a:endParaRPr lang="fr-FR"/>
           </a:p>
@@ -2110,7 +2113,7 @@
           <a:p>
             <a:fld id="{1A3D9B3B-1EC8-4BC4-B783-7630517B3190}" type="datetimeFigureOut">
               <a:rPr lang="fr-FR" smtClean="0"/>
-              <a:t>16/07/2025</a:t>
+              <a:t>12/06/2026</a:t>
             </a:fld>
             <a:endParaRPr lang="fr-FR"/>
           </a:p>
@@ -2259,7 +2262,7 @@
           <a:p>
             <a:fld id="{1A3D9B3B-1EC8-4BC4-B783-7630517B3190}" type="datetimeFigureOut">
               <a:rPr lang="fr-FR" smtClean="0"/>
-              <a:t>16/07/2025</a:t>
+              <a:t>12/06/2026</a:t>
             </a:fld>
             <a:endParaRPr lang="fr-FR"/>
           </a:p>
@@ -2542,7 +2545,7 @@
           <a:p>
             <a:fld id="{1A3D9B3B-1EC8-4BC4-B783-7630517B3190}" type="datetimeFigureOut">
               <a:rPr lang="fr-FR" smtClean="0"/>
-              <a:t>16/07/2025</a:t>
+              <a:t>12/06/2026</a:t>
             </a:fld>
             <a:endParaRPr lang="fr-FR"/>
           </a:p>
@@ -2802,7 +2805,7 @@
           <a:p>
             <a:fld id="{1A3D9B3B-1EC8-4BC4-B783-7630517B3190}" type="datetimeFigureOut">
               <a:rPr lang="fr-FR" smtClean="0"/>
-              <a:t>16/07/2025</a:t>
+              <a:t>12/06/2026</a:t>
             </a:fld>
             <a:endParaRPr lang="fr-FR"/>
           </a:p>
@@ -3022,7 +3025,7 @@
             <a:fld id="{1A3D9B3B-1EC8-4BC4-B783-7630517B3190}" type="datetimeFigureOut">
               <a:rPr lang="fr-FR" smtClean="0"/>
               <a:pPr/>
-              <a:t>16/07/2025</a:t>
+              <a:t>12/06/2026</a:t>
             </a:fld>
             <a:endParaRPr lang="fr-FR"/>
           </a:p>
@@ -8543,8 +8546,8 @@
           </a:prstGeom>
         </p:spPr>
       </p:pic>
-      <mc:AlternateContent xmlns:mc="http://schemas.openxmlformats.org/markup-compatibility/2006">
-        <mc:Choice xmlns:a14="http://schemas.microsoft.com/office/drawing/2010/main" Requires="a14">
+      <mc:AlternateContent xmlns:mc="http://schemas.openxmlformats.org/markup-compatibility/2006" xmlns:a14="http://schemas.microsoft.com/office/drawing/2010/main">
+        <mc:Choice Requires="a14">
           <p:sp>
             <p:nvSpPr>
               <p:cNvPr id="56" name="ZoneTexte 55">
@@ -8594,7 +8597,7 @@
             </p:txBody>
           </p:sp>
         </mc:Choice>
-        <mc:Fallback>
+        <mc:Fallback xmlns="">
           <p:sp>
             <p:nvSpPr>
               <p:cNvPr id="56" name="ZoneTexte 55">
@@ -8691,8 +8694,8 @@
           </a:fontRef>
         </p:style>
       </p:cxnSp>
-      <mc:AlternateContent xmlns:mc="http://schemas.openxmlformats.org/markup-compatibility/2006">
-        <mc:Choice xmlns:a14="http://schemas.microsoft.com/office/drawing/2010/main" Requires="a14">
+      <mc:AlternateContent xmlns:mc="http://schemas.openxmlformats.org/markup-compatibility/2006" xmlns:a14="http://schemas.microsoft.com/office/drawing/2010/main">
+        <mc:Choice Requires="a14">
           <p:sp>
             <p:nvSpPr>
               <p:cNvPr id="60" name="ZoneTexte 59">
@@ -8761,7 +8764,7 @@
             </p:txBody>
           </p:sp>
         </mc:Choice>
-        <mc:Fallback>
+        <mc:Fallback xmlns="">
           <p:sp>
             <p:nvSpPr>
               <p:cNvPr id="60" name="ZoneTexte 59">
@@ -22039,6 +22042,6164 @@
 </p:sld>
 </file>
 
+<file path=ppt/slides/slide18.xml><?xml version="1.0" encoding="utf-8"?>
+<p:sld xmlns:a="http://schemas.openxmlformats.org/drawingml/2006/main" xmlns:r="http://schemas.openxmlformats.org/officeDocument/2006/relationships" xmlns:p="http://schemas.openxmlformats.org/presentationml/2006/main">
+  <p:cSld>
+    <p:spTree>
+      <p:nvGrpSpPr>
+        <p:cNvPr id="1" name=""/>
+        <p:cNvGrpSpPr/>
+        <p:nvPr/>
+      </p:nvGrpSpPr>
+      <p:grpSpPr>
+        <a:xfrm>
+          <a:off x="0" y="0"/>
+          <a:ext cx="0" cy="0"/>
+          <a:chOff x="0" y="0"/>
+          <a:chExt cx="0" cy="0"/>
+        </a:xfrm>
+      </p:grpSpPr>
+      <p:sp>
+        <p:nvSpPr>
+          <p:cNvPr id="5" name="Rectangle 4">
+            <a:extLst>
+              <a:ext uri="{FF2B5EF4-FFF2-40B4-BE49-F238E27FC236}">
+                <a16:creationId xmlns:a16="http://schemas.microsoft.com/office/drawing/2014/main" id="{1AF62752-3ECA-55F9-B2B6-0748EFE93F6B}"/>
+              </a:ext>
+            </a:extLst>
+          </p:cNvPr>
+          <p:cNvSpPr/>
+          <p:nvPr/>
+        </p:nvSpPr>
+        <p:spPr>
+          <a:xfrm>
+            <a:off x="3937978" y="2717800"/>
+            <a:ext cx="701756" cy="2163125"/>
+          </a:xfrm>
+          <a:prstGeom prst="rect">
+            <a:avLst/>
+          </a:prstGeom>
+          <a:noFill/>
+          <a:ln w="19050">
+            <a:solidFill>
+              <a:srgbClr val="002060"/>
+            </a:solidFill>
+          </a:ln>
+        </p:spPr>
+        <p:style>
+          <a:lnRef idx="2">
+            <a:schemeClr val="accent1">
+              <a:shade val="15000"/>
+            </a:schemeClr>
+          </a:lnRef>
+          <a:fillRef idx="1">
+            <a:schemeClr val="accent1"/>
+          </a:fillRef>
+          <a:effectRef idx="0">
+            <a:schemeClr val="accent1"/>
+          </a:effectRef>
+          <a:fontRef idx="minor">
+            <a:schemeClr val="lt1"/>
+          </a:fontRef>
+        </p:style>
+        <p:txBody>
+          <a:bodyPr rtlCol="0" anchor="ctr"/>
+          <a:lstStyle/>
+          <a:p>
+            <a:pPr algn="ctr"/>
+            <a:endParaRPr lang="fr-FR"/>
+          </a:p>
+        </p:txBody>
+      </p:sp>
+      <p:sp>
+        <p:nvSpPr>
+          <p:cNvPr id="6" name="Cube 5">
+            <a:extLst>
+              <a:ext uri="{FF2B5EF4-FFF2-40B4-BE49-F238E27FC236}">
+                <a16:creationId xmlns:a16="http://schemas.microsoft.com/office/drawing/2014/main" id="{36B27FF1-9688-ECB0-D48C-548C34A48C53}"/>
+              </a:ext>
+            </a:extLst>
+          </p:cNvPr>
+          <p:cNvSpPr/>
+          <p:nvPr/>
+        </p:nvSpPr>
+        <p:spPr>
+          <a:xfrm>
+            <a:off x="1058530" y="2483737"/>
+            <a:ext cx="948070" cy="2386604"/>
+          </a:xfrm>
+          <a:prstGeom prst="cube">
+            <a:avLst/>
+          </a:prstGeom>
+          <a:noFill/>
+          <a:ln w="19050">
+            <a:solidFill>
+              <a:srgbClr val="002060"/>
+            </a:solidFill>
+          </a:ln>
+        </p:spPr>
+        <p:style>
+          <a:lnRef idx="2">
+            <a:schemeClr val="accent1">
+              <a:shade val="15000"/>
+            </a:schemeClr>
+          </a:lnRef>
+          <a:fillRef idx="1">
+            <a:schemeClr val="accent1"/>
+          </a:fillRef>
+          <a:effectRef idx="0">
+            <a:schemeClr val="accent1"/>
+          </a:effectRef>
+          <a:fontRef idx="minor">
+            <a:schemeClr val="lt1"/>
+          </a:fontRef>
+        </p:style>
+        <p:txBody>
+          <a:bodyPr rtlCol="0" anchor="ctr"/>
+          <a:lstStyle/>
+          <a:p>
+            <a:pPr algn="ctr"/>
+            <a:endParaRPr lang="fr-FR"/>
+          </a:p>
+        </p:txBody>
+      </p:sp>
+      <p:cxnSp>
+        <p:nvCxnSpPr>
+          <p:cNvPr id="7" name="Connecteur droit avec flèche 6">
+            <a:extLst>
+              <a:ext uri="{FF2B5EF4-FFF2-40B4-BE49-F238E27FC236}">
+                <a16:creationId xmlns:a16="http://schemas.microsoft.com/office/drawing/2014/main" id="{3DEB9D42-FF67-B001-1CAC-0B66EEFE0F83}"/>
+              </a:ext>
+            </a:extLst>
+          </p:cNvPr>
+          <p:cNvCxnSpPr>
+            <a:cxnSpLocks/>
+          </p:cNvCxnSpPr>
+          <p:nvPr/>
+        </p:nvCxnSpPr>
+        <p:spPr>
+          <a:xfrm>
+            <a:off x="1913163" y="2845988"/>
+            <a:ext cx="1012987" cy="0"/>
+          </a:xfrm>
+          <a:prstGeom prst="straightConnector1">
+            <a:avLst/>
+          </a:prstGeom>
+          <a:ln w="28575">
+            <a:solidFill>
+              <a:srgbClr val="C00000"/>
+            </a:solidFill>
+            <a:headEnd type="none"/>
+            <a:tailEnd type="stealth" w="med" len="lg"/>
+          </a:ln>
+        </p:spPr>
+        <p:style>
+          <a:lnRef idx="1">
+            <a:schemeClr val="accent1"/>
+          </a:lnRef>
+          <a:fillRef idx="0">
+            <a:schemeClr val="accent1"/>
+          </a:fillRef>
+          <a:effectRef idx="0">
+            <a:schemeClr val="accent1"/>
+          </a:effectRef>
+          <a:fontRef idx="minor">
+            <a:schemeClr val="tx1"/>
+          </a:fontRef>
+        </p:style>
+      </p:cxnSp>
+      <p:grpSp>
+        <p:nvGrpSpPr>
+          <p:cNvPr id="24" name="Groupe 23">
+            <a:extLst>
+              <a:ext uri="{FF2B5EF4-FFF2-40B4-BE49-F238E27FC236}">
+                <a16:creationId xmlns:a16="http://schemas.microsoft.com/office/drawing/2014/main" id="{46ACC618-F02A-3C44-9A28-7592DE1211F9}"/>
+              </a:ext>
+            </a:extLst>
+          </p:cNvPr>
+          <p:cNvGrpSpPr/>
+          <p:nvPr/>
+        </p:nvGrpSpPr>
+        <p:grpSpPr>
+          <a:xfrm>
+            <a:off x="878530" y="4277175"/>
+            <a:ext cx="180000" cy="762532"/>
+            <a:chOff x="776931" y="3968201"/>
+            <a:chExt cx="180000" cy="762532"/>
+          </a:xfrm>
+        </p:grpSpPr>
+        <p:cxnSp>
+          <p:nvCxnSpPr>
+            <p:cNvPr id="13" name="Connecteur droit 12">
+              <a:extLst>
+                <a:ext uri="{FF2B5EF4-FFF2-40B4-BE49-F238E27FC236}">
+                  <a16:creationId xmlns:a16="http://schemas.microsoft.com/office/drawing/2014/main" id="{19775F2A-1FCB-FDF9-C67B-AD8A73953BB0}"/>
+                </a:ext>
+              </a:extLst>
+            </p:cNvPr>
+            <p:cNvCxnSpPr>
+              <a:cxnSpLocks/>
+            </p:cNvCxnSpPr>
+            <p:nvPr/>
+          </p:nvCxnSpPr>
+          <p:spPr>
+            <a:xfrm flipH="1">
+              <a:off x="776931" y="4550733"/>
+              <a:ext cx="180000" cy="180000"/>
+            </a:xfrm>
+            <a:prstGeom prst="line">
+              <a:avLst/>
+            </a:prstGeom>
+            <a:noFill/>
+            <a:ln w="19050">
+              <a:solidFill>
+                <a:srgbClr val="002060"/>
+              </a:solidFill>
+            </a:ln>
+          </p:spPr>
+          <p:style>
+            <a:lnRef idx="2">
+              <a:schemeClr val="accent1">
+                <a:shade val="15000"/>
+              </a:schemeClr>
+            </a:lnRef>
+            <a:fillRef idx="1">
+              <a:schemeClr val="accent1"/>
+            </a:fillRef>
+            <a:effectRef idx="0">
+              <a:schemeClr val="accent1"/>
+            </a:effectRef>
+            <a:fontRef idx="minor">
+              <a:schemeClr val="lt1"/>
+            </a:fontRef>
+          </p:style>
+        </p:cxnSp>
+        <p:cxnSp>
+          <p:nvCxnSpPr>
+            <p:cNvPr id="18" name="Connecteur droit 17">
+              <a:extLst>
+                <a:ext uri="{FF2B5EF4-FFF2-40B4-BE49-F238E27FC236}">
+                  <a16:creationId xmlns:a16="http://schemas.microsoft.com/office/drawing/2014/main" id="{1D9D2B0E-B66D-8393-A802-37516CCE197B}"/>
+                </a:ext>
+              </a:extLst>
+            </p:cNvPr>
+            <p:cNvCxnSpPr>
+              <a:cxnSpLocks/>
+            </p:cNvCxnSpPr>
+            <p:nvPr/>
+          </p:nvCxnSpPr>
+          <p:spPr>
+            <a:xfrm flipH="1">
+              <a:off x="776931" y="4453646"/>
+              <a:ext cx="180000" cy="180000"/>
+            </a:xfrm>
+            <a:prstGeom prst="line">
+              <a:avLst/>
+            </a:prstGeom>
+            <a:noFill/>
+            <a:ln w="19050">
+              <a:solidFill>
+                <a:srgbClr val="002060"/>
+              </a:solidFill>
+            </a:ln>
+          </p:spPr>
+          <p:style>
+            <a:lnRef idx="2">
+              <a:schemeClr val="accent1">
+                <a:shade val="15000"/>
+              </a:schemeClr>
+            </a:lnRef>
+            <a:fillRef idx="1">
+              <a:schemeClr val="accent1"/>
+            </a:fillRef>
+            <a:effectRef idx="0">
+              <a:schemeClr val="accent1"/>
+            </a:effectRef>
+            <a:fontRef idx="minor">
+              <a:schemeClr val="lt1"/>
+            </a:fontRef>
+          </p:style>
+        </p:cxnSp>
+        <p:cxnSp>
+          <p:nvCxnSpPr>
+            <p:cNvPr id="19" name="Connecteur droit 18">
+              <a:extLst>
+                <a:ext uri="{FF2B5EF4-FFF2-40B4-BE49-F238E27FC236}">
+                  <a16:creationId xmlns:a16="http://schemas.microsoft.com/office/drawing/2014/main" id="{17B1A189-BAD1-8633-DD7E-2232FA6A7C57}"/>
+                </a:ext>
+              </a:extLst>
+            </p:cNvPr>
+            <p:cNvCxnSpPr>
+              <a:cxnSpLocks/>
+            </p:cNvCxnSpPr>
+            <p:nvPr/>
+          </p:nvCxnSpPr>
+          <p:spPr>
+            <a:xfrm flipH="1">
+              <a:off x="776931" y="4356557"/>
+              <a:ext cx="180000" cy="180000"/>
+            </a:xfrm>
+            <a:prstGeom prst="line">
+              <a:avLst/>
+            </a:prstGeom>
+            <a:noFill/>
+            <a:ln w="19050">
+              <a:solidFill>
+                <a:srgbClr val="002060"/>
+              </a:solidFill>
+            </a:ln>
+          </p:spPr>
+          <p:style>
+            <a:lnRef idx="2">
+              <a:schemeClr val="accent1">
+                <a:shade val="15000"/>
+              </a:schemeClr>
+            </a:lnRef>
+            <a:fillRef idx="1">
+              <a:schemeClr val="accent1"/>
+            </a:fillRef>
+            <a:effectRef idx="0">
+              <a:schemeClr val="accent1"/>
+            </a:effectRef>
+            <a:fontRef idx="minor">
+              <a:schemeClr val="lt1"/>
+            </a:fontRef>
+          </p:style>
+        </p:cxnSp>
+        <p:cxnSp>
+          <p:nvCxnSpPr>
+            <p:cNvPr id="20" name="Connecteur droit 19">
+              <a:extLst>
+                <a:ext uri="{FF2B5EF4-FFF2-40B4-BE49-F238E27FC236}">
+                  <a16:creationId xmlns:a16="http://schemas.microsoft.com/office/drawing/2014/main" id="{5A009F0E-29D3-1475-8C34-8AE9CDCF3BCC}"/>
+                </a:ext>
+              </a:extLst>
+            </p:cNvPr>
+            <p:cNvCxnSpPr>
+              <a:cxnSpLocks/>
+            </p:cNvCxnSpPr>
+            <p:nvPr/>
+          </p:nvCxnSpPr>
+          <p:spPr>
+            <a:xfrm flipH="1">
+              <a:off x="776931" y="4259468"/>
+              <a:ext cx="180000" cy="180000"/>
+            </a:xfrm>
+            <a:prstGeom prst="line">
+              <a:avLst/>
+            </a:prstGeom>
+            <a:noFill/>
+            <a:ln w="19050">
+              <a:solidFill>
+                <a:srgbClr val="002060"/>
+              </a:solidFill>
+            </a:ln>
+          </p:spPr>
+          <p:style>
+            <a:lnRef idx="2">
+              <a:schemeClr val="accent1">
+                <a:shade val="15000"/>
+              </a:schemeClr>
+            </a:lnRef>
+            <a:fillRef idx="1">
+              <a:schemeClr val="accent1"/>
+            </a:fillRef>
+            <a:effectRef idx="0">
+              <a:schemeClr val="accent1"/>
+            </a:effectRef>
+            <a:fontRef idx="minor">
+              <a:schemeClr val="lt1"/>
+            </a:fontRef>
+          </p:style>
+        </p:cxnSp>
+        <p:cxnSp>
+          <p:nvCxnSpPr>
+            <p:cNvPr id="21" name="Connecteur droit 20">
+              <a:extLst>
+                <a:ext uri="{FF2B5EF4-FFF2-40B4-BE49-F238E27FC236}">
+                  <a16:creationId xmlns:a16="http://schemas.microsoft.com/office/drawing/2014/main" id="{D5E81B36-6F56-FD1A-1A49-89205915A4B8}"/>
+                </a:ext>
+              </a:extLst>
+            </p:cNvPr>
+            <p:cNvCxnSpPr>
+              <a:cxnSpLocks/>
+            </p:cNvCxnSpPr>
+            <p:nvPr/>
+          </p:nvCxnSpPr>
+          <p:spPr>
+            <a:xfrm flipH="1">
+              <a:off x="776931" y="4162379"/>
+              <a:ext cx="180000" cy="180000"/>
+            </a:xfrm>
+            <a:prstGeom prst="line">
+              <a:avLst/>
+            </a:prstGeom>
+            <a:noFill/>
+            <a:ln w="19050">
+              <a:solidFill>
+                <a:srgbClr val="002060"/>
+              </a:solidFill>
+            </a:ln>
+          </p:spPr>
+          <p:style>
+            <a:lnRef idx="2">
+              <a:schemeClr val="accent1">
+                <a:shade val="15000"/>
+              </a:schemeClr>
+            </a:lnRef>
+            <a:fillRef idx="1">
+              <a:schemeClr val="accent1"/>
+            </a:fillRef>
+            <a:effectRef idx="0">
+              <a:schemeClr val="accent1"/>
+            </a:effectRef>
+            <a:fontRef idx="minor">
+              <a:schemeClr val="lt1"/>
+            </a:fontRef>
+          </p:style>
+        </p:cxnSp>
+        <p:cxnSp>
+          <p:nvCxnSpPr>
+            <p:cNvPr id="22" name="Connecteur droit 21">
+              <a:extLst>
+                <a:ext uri="{FF2B5EF4-FFF2-40B4-BE49-F238E27FC236}">
+                  <a16:creationId xmlns:a16="http://schemas.microsoft.com/office/drawing/2014/main" id="{EAF44D57-1735-F0E7-5EC5-AC27000D242E}"/>
+                </a:ext>
+              </a:extLst>
+            </p:cNvPr>
+            <p:cNvCxnSpPr>
+              <a:cxnSpLocks/>
+            </p:cNvCxnSpPr>
+            <p:nvPr/>
+          </p:nvCxnSpPr>
+          <p:spPr>
+            <a:xfrm flipH="1">
+              <a:off x="776931" y="4065290"/>
+              <a:ext cx="180000" cy="180000"/>
+            </a:xfrm>
+            <a:prstGeom prst="line">
+              <a:avLst/>
+            </a:prstGeom>
+            <a:noFill/>
+            <a:ln w="19050">
+              <a:solidFill>
+                <a:srgbClr val="002060"/>
+              </a:solidFill>
+            </a:ln>
+          </p:spPr>
+          <p:style>
+            <a:lnRef idx="2">
+              <a:schemeClr val="accent1">
+                <a:shade val="15000"/>
+              </a:schemeClr>
+            </a:lnRef>
+            <a:fillRef idx="1">
+              <a:schemeClr val="accent1"/>
+            </a:fillRef>
+            <a:effectRef idx="0">
+              <a:schemeClr val="accent1"/>
+            </a:effectRef>
+            <a:fontRef idx="minor">
+              <a:schemeClr val="lt1"/>
+            </a:fontRef>
+          </p:style>
+        </p:cxnSp>
+        <p:cxnSp>
+          <p:nvCxnSpPr>
+            <p:cNvPr id="23" name="Connecteur droit 22">
+              <a:extLst>
+                <a:ext uri="{FF2B5EF4-FFF2-40B4-BE49-F238E27FC236}">
+                  <a16:creationId xmlns:a16="http://schemas.microsoft.com/office/drawing/2014/main" id="{9E24E4B5-420E-9922-8596-DA15A68AE288}"/>
+                </a:ext>
+              </a:extLst>
+            </p:cNvPr>
+            <p:cNvCxnSpPr>
+              <a:cxnSpLocks/>
+            </p:cNvCxnSpPr>
+            <p:nvPr/>
+          </p:nvCxnSpPr>
+          <p:spPr>
+            <a:xfrm flipH="1">
+              <a:off x="776931" y="3968201"/>
+              <a:ext cx="180000" cy="180000"/>
+            </a:xfrm>
+            <a:prstGeom prst="line">
+              <a:avLst/>
+            </a:prstGeom>
+            <a:noFill/>
+            <a:ln w="19050">
+              <a:solidFill>
+                <a:srgbClr val="002060"/>
+              </a:solidFill>
+            </a:ln>
+          </p:spPr>
+          <p:style>
+            <a:lnRef idx="2">
+              <a:schemeClr val="accent1">
+                <a:shade val="15000"/>
+              </a:schemeClr>
+            </a:lnRef>
+            <a:fillRef idx="1">
+              <a:schemeClr val="accent1"/>
+            </a:fillRef>
+            <a:effectRef idx="0">
+              <a:schemeClr val="accent1"/>
+            </a:effectRef>
+            <a:fontRef idx="minor">
+              <a:schemeClr val="lt1"/>
+            </a:fontRef>
+          </p:style>
+        </p:cxnSp>
+      </p:grpSp>
+      <p:sp>
+        <p:nvSpPr>
+          <p:cNvPr id="26" name="ZoneTexte 25">
+            <a:extLst>
+              <a:ext uri="{FF2B5EF4-FFF2-40B4-BE49-F238E27FC236}">
+                <a16:creationId xmlns:a16="http://schemas.microsoft.com/office/drawing/2014/main" id="{7E24FE62-8DE7-44CE-3F16-3245E4D8336A}"/>
+              </a:ext>
+            </a:extLst>
+          </p:cNvPr>
+          <p:cNvSpPr txBox="1"/>
+          <p:nvPr/>
+        </p:nvSpPr>
+        <p:spPr>
+          <a:xfrm>
+            <a:off x="2085923" y="2384323"/>
+            <a:ext cx="853182" cy="461665"/>
+          </a:xfrm>
+          <a:prstGeom prst="rect">
+            <a:avLst/>
+          </a:prstGeom>
+          <a:noFill/>
+        </p:spPr>
+        <p:txBody>
+          <a:bodyPr wrap="square" rtlCol="0">
+            <a:spAutoFit/>
+          </a:bodyPr>
+          <a:lstStyle/>
+          <a:p>
+            <a:pPr algn="ctr"/>
+            <a:r>
+              <a:rPr lang="fr-FR" sz="1200" dirty="0"/>
+              <a:t>Effort de traction</a:t>
+            </a:r>
+          </a:p>
+        </p:txBody>
+      </p:sp>
+      <p:sp>
+        <p:nvSpPr>
+          <p:cNvPr id="27" name="ZoneTexte 26">
+            <a:extLst>
+              <a:ext uri="{FF2B5EF4-FFF2-40B4-BE49-F238E27FC236}">
+                <a16:creationId xmlns:a16="http://schemas.microsoft.com/office/drawing/2014/main" id="{CA4101EE-7294-367B-9575-4C950C01A04A}"/>
+              </a:ext>
+            </a:extLst>
+          </p:cNvPr>
+          <p:cNvSpPr txBox="1"/>
+          <p:nvPr/>
+        </p:nvSpPr>
+        <p:spPr>
+          <a:xfrm>
+            <a:off x="16668" y="4582167"/>
+            <a:ext cx="951862" cy="461665"/>
+          </a:xfrm>
+          <a:prstGeom prst="rect">
+            <a:avLst/>
+          </a:prstGeom>
+          <a:noFill/>
+        </p:spPr>
+        <p:txBody>
+          <a:bodyPr wrap="square" rtlCol="0">
+            <a:spAutoFit/>
+          </a:bodyPr>
+          <a:lstStyle/>
+          <a:p>
+            <a:pPr algn="ctr"/>
+            <a:r>
+              <a:rPr lang="fr-FR" sz="1200" dirty="0"/>
+              <a:t>Liaison avec le bâti</a:t>
+            </a:r>
+          </a:p>
+        </p:txBody>
+      </p:sp>
+      <p:grpSp>
+        <p:nvGrpSpPr>
+          <p:cNvPr id="34" name="Groupe 33">
+            <a:extLst>
+              <a:ext uri="{FF2B5EF4-FFF2-40B4-BE49-F238E27FC236}">
+                <a16:creationId xmlns:a16="http://schemas.microsoft.com/office/drawing/2014/main" id="{604C1FA8-AEA5-BFB1-04E1-2688287E6BD6}"/>
+              </a:ext>
+            </a:extLst>
+          </p:cNvPr>
+          <p:cNvGrpSpPr/>
+          <p:nvPr/>
+        </p:nvGrpSpPr>
+        <p:grpSpPr>
+          <a:xfrm>
+            <a:off x="4042527" y="3089879"/>
+            <a:ext cx="492658" cy="1464385"/>
+            <a:chOff x="5955769" y="2966755"/>
+            <a:chExt cx="492658" cy="1464385"/>
+          </a:xfrm>
+        </p:grpSpPr>
+        <p:grpSp>
+          <p:nvGrpSpPr>
+            <p:cNvPr id="32" name="Groupe 31">
+              <a:extLst>
+                <a:ext uri="{FF2B5EF4-FFF2-40B4-BE49-F238E27FC236}">
+                  <a16:creationId xmlns:a16="http://schemas.microsoft.com/office/drawing/2014/main" id="{C8A9D9B7-AFA5-7FC3-D6BA-24235386C8B1}"/>
+                </a:ext>
+              </a:extLst>
+            </p:cNvPr>
+            <p:cNvGrpSpPr/>
+            <p:nvPr/>
+          </p:nvGrpSpPr>
+          <p:grpSpPr>
+            <a:xfrm>
+              <a:off x="6096000" y="3429000"/>
+              <a:ext cx="213784" cy="540000"/>
+              <a:chOff x="6096000" y="3429000"/>
+              <a:chExt cx="213784" cy="540000"/>
+            </a:xfrm>
+          </p:grpSpPr>
+          <p:cxnSp>
+            <p:nvCxnSpPr>
+              <p:cNvPr id="29" name="Connecteur droit 28">
+                <a:extLst>
+                  <a:ext uri="{FF2B5EF4-FFF2-40B4-BE49-F238E27FC236}">
+                    <a16:creationId xmlns:a16="http://schemas.microsoft.com/office/drawing/2014/main" id="{8CA87378-3669-A693-EABE-9453B68A6DA7}"/>
+                  </a:ext>
+                </a:extLst>
+              </p:cNvPr>
+              <p:cNvCxnSpPr/>
+              <p:nvPr/>
+            </p:nvCxnSpPr>
+            <p:spPr>
+              <a:xfrm>
+                <a:off x="6096000" y="3429000"/>
+                <a:ext cx="0" cy="540000"/>
+              </a:xfrm>
+              <a:prstGeom prst="line">
+                <a:avLst/>
+              </a:prstGeom>
+              <a:noFill/>
+              <a:ln w="19050">
+                <a:solidFill>
+                  <a:srgbClr val="002060"/>
+                </a:solidFill>
+              </a:ln>
+            </p:spPr>
+            <p:style>
+              <a:lnRef idx="2">
+                <a:schemeClr val="accent1">
+                  <a:shade val="15000"/>
+                </a:schemeClr>
+              </a:lnRef>
+              <a:fillRef idx="1">
+                <a:schemeClr val="accent1"/>
+              </a:fillRef>
+              <a:effectRef idx="0">
+                <a:schemeClr val="accent1"/>
+              </a:effectRef>
+              <a:fontRef idx="minor">
+                <a:schemeClr val="lt1"/>
+              </a:fontRef>
+            </p:style>
+          </p:cxnSp>
+          <p:cxnSp>
+            <p:nvCxnSpPr>
+              <p:cNvPr id="30" name="Connecteur droit 29">
+                <a:extLst>
+                  <a:ext uri="{FF2B5EF4-FFF2-40B4-BE49-F238E27FC236}">
+                    <a16:creationId xmlns:a16="http://schemas.microsoft.com/office/drawing/2014/main" id="{7F79B118-A4A1-D4F6-B229-A398F57C3098}"/>
+                  </a:ext>
+                </a:extLst>
+              </p:cNvPr>
+              <p:cNvCxnSpPr/>
+              <p:nvPr/>
+            </p:nvCxnSpPr>
+            <p:spPr>
+              <a:xfrm>
+                <a:off x="6309784" y="3429000"/>
+                <a:ext cx="0" cy="540000"/>
+              </a:xfrm>
+              <a:prstGeom prst="line">
+                <a:avLst/>
+              </a:prstGeom>
+              <a:noFill/>
+              <a:ln w="19050">
+                <a:solidFill>
+                  <a:srgbClr val="002060"/>
+                </a:solidFill>
+              </a:ln>
+            </p:spPr>
+            <p:style>
+              <a:lnRef idx="2">
+                <a:schemeClr val="accent1">
+                  <a:shade val="15000"/>
+                </a:schemeClr>
+              </a:lnRef>
+              <a:fillRef idx="1">
+                <a:schemeClr val="accent1"/>
+              </a:fillRef>
+              <a:effectRef idx="0">
+                <a:schemeClr val="accent1"/>
+              </a:effectRef>
+              <a:fontRef idx="minor">
+                <a:schemeClr val="lt1"/>
+              </a:fontRef>
+            </p:style>
+          </p:cxnSp>
+        </p:grpSp>
+        <p:sp>
+          <p:nvSpPr>
+            <p:cNvPr id="31" name="Arc 30">
+              <a:extLst>
+                <a:ext uri="{FF2B5EF4-FFF2-40B4-BE49-F238E27FC236}">
+                  <a16:creationId xmlns:a16="http://schemas.microsoft.com/office/drawing/2014/main" id="{C0D8C796-FE01-2F24-CE8C-42575E1646D0}"/>
+                </a:ext>
+              </a:extLst>
+            </p:cNvPr>
+            <p:cNvSpPr/>
+            <p:nvPr/>
+          </p:nvSpPr>
+          <p:spPr>
+            <a:xfrm>
+              <a:off x="5957357" y="2966755"/>
+              <a:ext cx="491070" cy="497100"/>
+            </a:xfrm>
+            <a:prstGeom prst="arc">
+              <a:avLst>
+                <a:gd name="adj1" fmla="val 6880296"/>
+                <a:gd name="adj2" fmla="val 3892021"/>
+              </a:avLst>
+            </a:prstGeom>
+            <a:noFill/>
+            <a:ln w="19050">
+              <a:solidFill>
+                <a:srgbClr val="002060"/>
+              </a:solidFill>
+            </a:ln>
+          </p:spPr>
+          <p:style>
+            <a:lnRef idx="2">
+              <a:schemeClr val="accent1">
+                <a:shade val="15000"/>
+              </a:schemeClr>
+            </a:lnRef>
+            <a:fillRef idx="1">
+              <a:schemeClr val="accent1"/>
+            </a:fillRef>
+            <a:effectRef idx="0">
+              <a:schemeClr val="accent1"/>
+            </a:effectRef>
+            <a:fontRef idx="minor">
+              <a:schemeClr val="lt1"/>
+            </a:fontRef>
+          </p:style>
+          <p:txBody>
+            <a:bodyPr rtlCol="0" anchor="ctr"/>
+            <a:lstStyle/>
+            <a:p>
+              <a:pPr algn="ctr"/>
+              <a:endParaRPr lang="fr-FR"/>
+            </a:p>
+          </p:txBody>
+        </p:sp>
+        <p:sp>
+          <p:nvSpPr>
+            <p:cNvPr id="33" name="Arc 32">
+              <a:extLst>
+                <a:ext uri="{FF2B5EF4-FFF2-40B4-BE49-F238E27FC236}">
+                  <a16:creationId xmlns:a16="http://schemas.microsoft.com/office/drawing/2014/main" id="{7A77D687-7EC8-6A67-69FC-3304AE4ADF89}"/>
+                </a:ext>
+              </a:extLst>
+            </p:cNvPr>
+            <p:cNvSpPr/>
+            <p:nvPr/>
+          </p:nvSpPr>
+          <p:spPr>
+            <a:xfrm flipV="1">
+              <a:off x="5955769" y="3934040"/>
+              <a:ext cx="491070" cy="497100"/>
+            </a:xfrm>
+            <a:prstGeom prst="arc">
+              <a:avLst>
+                <a:gd name="adj1" fmla="val 6880296"/>
+                <a:gd name="adj2" fmla="val 3892021"/>
+              </a:avLst>
+            </a:prstGeom>
+            <a:noFill/>
+            <a:ln w="19050">
+              <a:solidFill>
+                <a:srgbClr val="002060"/>
+              </a:solidFill>
+            </a:ln>
+          </p:spPr>
+          <p:style>
+            <a:lnRef idx="2">
+              <a:schemeClr val="accent1">
+                <a:shade val="15000"/>
+              </a:schemeClr>
+            </a:lnRef>
+            <a:fillRef idx="1">
+              <a:schemeClr val="accent1"/>
+            </a:fillRef>
+            <a:effectRef idx="0">
+              <a:schemeClr val="accent1"/>
+            </a:effectRef>
+            <a:fontRef idx="minor">
+              <a:schemeClr val="lt1"/>
+            </a:fontRef>
+          </p:style>
+          <p:txBody>
+            <a:bodyPr rtlCol="0" anchor="ctr"/>
+            <a:lstStyle/>
+            <a:p>
+              <a:pPr algn="ctr"/>
+              <a:endParaRPr lang="fr-FR"/>
+            </a:p>
+          </p:txBody>
+        </p:sp>
+      </p:grpSp>
+      <p:grpSp>
+        <p:nvGrpSpPr>
+          <p:cNvPr id="35" name="Groupe 34">
+            <a:extLst>
+              <a:ext uri="{FF2B5EF4-FFF2-40B4-BE49-F238E27FC236}">
+                <a16:creationId xmlns:a16="http://schemas.microsoft.com/office/drawing/2014/main" id="{6527F633-1C95-C28B-1264-D06574E5AAF7}"/>
+              </a:ext>
+            </a:extLst>
+          </p:cNvPr>
+          <p:cNvGrpSpPr/>
+          <p:nvPr/>
+        </p:nvGrpSpPr>
+        <p:grpSpPr>
+          <a:xfrm>
+            <a:off x="1197173" y="3067169"/>
+            <a:ext cx="492658" cy="1464385"/>
+            <a:chOff x="5955769" y="2966755"/>
+            <a:chExt cx="492658" cy="1464385"/>
+          </a:xfrm>
+        </p:grpSpPr>
+        <p:grpSp>
+          <p:nvGrpSpPr>
+            <p:cNvPr id="36" name="Groupe 35">
+              <a:extLst>
+                <a:ext uri="{FF2B5EF4-FFF2-40B4-BE49-F238E27FC236}">
+                  <a16:creationId xmlns:a16="http://schemas.microsoft.com/office/drawing/2014/main" id="{D0212C4B-7188-F643-D9CB-E244D800A816}"/>
+                </a:ext>
+              </a:extLst>
+            </p:cNvPr>
+            <p:cNvGrpSpPr/>
+            <p:nvPr/>
+          </p:nvGrpSpPr>
+          <p:grpSpPr>
+            <a:xfrm>
+              <a:off x="6096000" y="3220748"/>
+              <a:ext cx="215397" cy="748252"/>
+              <a:chOff x="6096000" y="3220748"/>
+              <a:chExt cx="215397" cy="748252"/>
+            </a:xfrm>
+          </p:grpSpPr>
+          <p:cxnSp>
+            <p:nvCxnSpPr>
+              <p:cNvPr id="39" name="Connecteur droit 38">
+                <a:extLst>
+                  <a:ext uri="{FF2B5EF4-FFF2-40B4-BE49-F238E27FC236}">
+                    <a16:creationId xmlns:a16="http://schemas.microsoft.com/office/drawing/2014/main" id="{30E1502D-6758-DE16-25ED-A0F7A6F40F6D}"/>
+                  </a:ext>
+                </a:extLst>
+              </p:cNvPr>
+              <p:cNvCxnSpPr/>
+              <p:nvPr/>
+            </p:nvCxnSpPr>
+            <p:spPr>
+              <a:xfrm>
+                <a:off x="6096000" y="3429000"/>
+                <a:ext cx="0" cy="540000"/>
+              </a:xfrm>
+              <a:prstGeom prst="line">
+                <a:avLst/>
+              </a:prstGeom>
+              <a:noFill/>
+              <a:ln w="19050">
+                <a:solidFill>
+                  <a:srgbClr val="002060"/>
+                </a:solidFill>
+              </a:ln>
+            </p:spPr>
+            <p:style>
+              <a:lnRef idx="2">
+                <a:schemeClr val="accent1">
+                  <a:shade val="15000"/>
+                </a:schemeClr>
+              </a:lnRef>
+              <a:fillRef idx="1">
+                <a:schemeClr val="accent1"/>
+              </a:fillRef>
+              <a:effectRef idx="0">
+                <a:schemeClr val="accent1"/>
+              </a:effectRef>
+              <a:fontRef idx="minor">
+                <a:schemeClr val="lt1"/>
+              </a:fontRef>
+            </p:style>
+          </p:cxnSp>
+          <p:cxnSp>
+            <p:nvCxnSpPr>
+              <p:cNvPr id="40" name="Connecteur droit 39">
+                <a:extLst>
+                  <a:ext uri="{FF2B5EF4-FFF2-40B4-BE49-F238E27FC236}">
+                    <a16:creationId xmlns:a16="http://schemas.microsoft.com/office/drawing/2014/main" id="{736E939F-0C3F-8D59-3690-10750E40875D}"/>
+                  </a:ext>
+                </a:extLst>
+              </p:cNvPr>
+              <p:cNvCxnSpPr/>
+              <p:nvPr/>
+            </p:nvCxnSpPr>
+            <p:spPr>
+              <a:xfrm>
+                <a:off x="6309784" y="3429000"/>
+                <a:ext cx="0" cy="540000"/>
+              </a:xfrm>
+              <a:prstGeom prst="line">
+                <a:avLst/>
+              </a:prstGeom>
+              <a:noFill/>
+              <a:ln w="19050">
+                <a:solidFill>
+                  <a:srgbClr val="002060"/>
+                </a:solidFill>
+              </a:ln>
+            </p:spPr>
+            <p:style>
+              <a:lnRef idx="2">
+                <a:schemeClr val="accent1">
+                  <a:shade val="15000"/>
+                </a:schemeClr>
+              </a:lnRef>
+              <a:fillRef idx="1">
+                <a:schemeClr val="accent1"/>
+              </a:fillRef>
+              <a:effectRef idx="0">
+                <a:schemeClr val="accent1"/>
+              </a:effectRef>
+              <a:fontRef idx="minor">
+                <a:schemeClr val="lt1"/>
+              </a:fontRef>
+            </p:style>
+          </p:cxnSp>
+          <p:cxnSp>
+            <p:nvCxnSpPr>
+              <p:cNvPr id="50" name="Connecteur droit 49">
+                <a:extLst>
+                  <a:ext uri="{FF2B5EF4-FFF2-40B4-BE49-F238E27FC236}">
+                    <a16:creationId xmlns:a16="http://schemas.microsoft.com/office/drawing/2014/main" id="{049098C9-6E25-CB7B-AC34-BBBEAD365FCE}"/>
+                  </a:ext>
+                </a:extLst>
+              </p:cNvPr>
+              <p:cNvCxnSpPr>
+                <a:cxnSpLocks/>
+              </p:cNvCxnSpPr>
+              <p:nvPr/>
+            </p:nvCxnSpPr>
+            <p:spPr>
+              <a:xfrm>
+                <a:off x="6309575" y="3220748"/>
+                <a:ext cx="1822" cy="219076"/>
+              </a:xfrm>
+              <a:prstGeom prst="line">
+                <a:avLst/>
+              </a:prstGeom>
+              <a:noFill/>
+              <a:ln w="19050">
+                <a:solidFill>
+                  <a:srgbClr val="002060"/>
+                </a:solidFill>
+              </a:ln>
+            </p:spPr>
+            <p:style>
+              <a:lnRef idx="2">
+                <a:schemeClr val="accent1">
+                  <a:shade val="15000"/>
+                </a:schemeClr>
+              </a:lnRef>
+              <a:fillRef idx="1">
+                <a:schemeClr val="accent1"/>
+              </a:fillRef>
+              <a:effectRef idx="0">
+                <a:schemeClr val="accent1"/>
+              </a:effectRef>
+              <a:fontRef idx="minor">
+                <a:schemeClr val="lt1"/>
+              </a:fontRef>
+            </p:style>
+          </p:cxnSp>
+        </p:grpSp>
+        <p:sp>
+          <p:nvSpPr>
+            <p:cNvPr id="37" name="Arc 36">
+              <a:extLst>
+                <a:ext uri="{FF2B5EF4-FFF2-40B4-BE49-F238E27FC236}">
+                  <a16:creationId xmlns:a16="http://schemas.microsoft.com/office/drawing/2014/main" id="{963958DB-6972-A022-DDA5-C4EAADB2982A}"/>
+                </a:ext>
+              </a:extLst>
+            </p:cNvPr>
+            <p:cNvSpPr/>
+            <p:nvPr/>
+          </p:nvSpPr>
+          <p:spPr>
+            <a:xfrm>
+              <a:off x="5957357" y="2966755"/>
+              <a:ext cx="491070" cy="497100"/>
+            </a:xfrm>
+            <a:prstGeom prst="arc">
+              <a:avLst>
+                <a:gd name="adj1" fmla="val 6880296"/>
+                <a:gd name="adj2" fmla="val 3892021"/>
+              </a:avLst>
+            </a:prstGeom>
+            <a:noFill/>
+            <a:ln w="19050">
+              <a:solidFill>
+                <a:srgbClr val="002060"/>
+              </a:solidFill>
+            </a:ln>
+          </p:spPr>
+          <p:style>
+            <a:lnRef idx="2">
+              <a:schemeClr val="accent1">
+                <a:shade val="15000"/>
+              </a:schemeClr>
+            </a:lnRef>
+            <a:fillRef idx="1">
+              <a:schemeClr val="accent1"/>
+            </a:fillRef>
+            <a:effectRef idx="0">
+              <a:schemeClr val="accent1"/>
+            </a:effectRef>
+            <a:fontRef idx="minor">
+              <a:schemeClr val="lt1"/>
+            </a:fontRef>
+          </p:style>
+          <p:txBody>
+            <a:bodyPr rtlCol="0" anchor="ctr"/>
+            <a:lstStyle/>
+            <a:p>
+              <a:pPr algn="ctr"/>
+              <a:endParaRPr lang="fr-FR"/>
+            </a:p>
+          </p:txBody>
+        </p:sp>
+        <p:sp>
+          <p:nvSpPr>
+            <p:cNvPr id="38" name="Arc 37">
+              <a:extLst>
+                <a:ext uri="{FF2B5EF4-FFF2-40B4-BE49-F238E27FC236}">
+                  <a16:creationId xmlns:a16="http://schemas.microsoft.com/office/drawing/2014/main" id="{0792AE7C-B71D-03D1-3128-D8B58D8E87AC}"/>
+                </a:ext>
+              </a:extLst>
+            </p:cNvPr>
+            <p:cNvSpPr/>
+            <p:nvPr/>
+          </p:nvSpPr>
+          <p:spPr>
+            <a:xfrm flipV="1">
+              <a:off x="5955769" y="3934040"/>
+              <a:ext cx="491070" cy="497100"/>
+            </a:xfrm>
+            <a:prstGeom prst="arc">
+              <a:avLst>
+                <a:gd name="adj1" fmla="val 6880296"/>
+                <a:gd name="adj2" fmla="val 3892021"/>
+              </a:avLst>
+            </a:prstGeom>
+            <a:noFill/>
+            <a:ln w="19050">
+              <a:solidFill>
+                <a:srgbClr val="002060"/>
+              </a:solidFill>
+            </a:ln>
+          </p:spPr>
+          <p:style>
+            <a:lnRef idx="2">
+              <a:schemeClr val="accent1">
+                <a:shade val="15000"/>
+              </a:schemeClr>
+            </a:lnRef>
+            <a:fillRef idx="1">
+              <a:schemeClr val="accent1"/>
+            </a:fillRef>
+            <a:effectRef idx="0">
+              <a:schemeClr val="accent1"/>
+            </a:effectRef>
+            <a:fontRef idx="minor">
+              <a:schemeClr val="lt1"/>
+            </a:fontRef>
+          </p:style>
+          <p:txBody>
+            <a:bodyPr rtlCol="0" anchor="ctr"/>
+            <a:lstStyle/>
+            <a:p>
+              <a:pPr algn="ctr"/>
+              <a:endParaRPr lang="fr-FR"/>
+            </a:p>
+          </p:txBody>
+        </p:sp>
+      </p:grpSp>
+      <p:cxnSp>
+        <p:nvCxnSpPr>
+          <p:cNvPr id="44" name="Connecteur droit 43">
+            <a:extLst>
+              <a:ext uri="{FF2B5EF4-FFF2-40B4-BE49-F238E27FC236}">
+                <a16:creationId xmlns:a16="http://schemas.microsoft.com/office/drawing/2014/main" id="{CDDDDFB3-499F-76C9-2B04-3F244D015857}"/>
+              </a:ext>
+            </a:extLst>
+          </p:cNvPr>
+          <p:cNvCxnSpPr>
+            <a:cxnSpLocks/>
+          </p:cNvCxnSpPr>
+          <p:nvPr/>
+        </p:nvCxnSpPr>
+        <p:spPr>
+          <a:xfrm flipH="1">
+            <a:off x="1332759" y="3848462"/>
+            <a:ext cx="216432" cy="216432"/>
+          </a:xfrm>
+          <a:prstGeom prst="line">
+            <a:avLst/>
+          </a:prstGeom>
+          <a:noFill/>
+          <a:ln w="19050">
+            <a:solidFill>
+              <a:srgbClr val="002060"/>
+            </a:solidFill>
+          </a:ln>
+        </p:spPr>
+        <p:style>
+          <a:lnRef idx="2">
+            <a:schemeClr val="accent1">
+              <a:shade val="15000"/>
+            </a:schemeClr>
+          </a:lnRef>
+          <a:fillRef idx="1">
+            <a:schemeClr val="accent1"/>
+          </a:fillRef>
+          <a:effectRef idx="0">
+            <a:schemeClr val="accent1"/>
+          </a:effectRef>
+          <a:fontRef idx="minor">
+            <a:schemeClr val="lt1"/>
+          </a:fontRef>
+        </p:style>
+      </p:cxnSp>
+      <p:cxnSp>
+        <p:nvCxnSpPr>
+          <p:cNvPr id="47" name="Connecteur droit 46">
+            <a:extLst>
+              <a:ext uri="{FF2B5EF4-FFF2-40B4-BE49-F238E27FC236}">
+                <a16:creationId xmlns:a16="http://schemas.microsoft.com/office/drawing/2014/main" id="{15864A84-534C-2FB4-F4EE-25F6756B0CF5}"/>
+              </a:ext>
+            </a:extLst>
+          </p:cNvPr>
+          <p:cNvCxnSpPr>
+            <a:cxnSpLocks/>
+          </p:cNvCxnSpPr>
+          <p:nvPr/>
+        </p:nvCxnSpPr>
+        <p:spPr>
+          <a:xfrm flipH="1">
+            <a:off x="1332759" y="3324304"/>
+            <a:ext cx="216432" cy="216432"/>
+          </a:xfrm>
+          <a:prstGeom prst="line">
+            <a:avLst/>
+          </a:prstGeom>
+          <a:noFill/>
+          <a:ln w="19050">
+            <a:solidFill>
+              <a:srgbClr val="002060"/>
+            </a:solidFill>
+          </a:ln>
+        </p:spPr>
+        <p:style>
+          <a:lnRef idx="2">
+            <a:schemeClr val="accent1">
+              <a:shade val="15000"/>
+            </a:schemeClr>
+          </a:lnRef>
+          <a:fillRef idx="1">
+            <a:schemeClr val="accent1"/>
+          </a:fillRef>
+          <a:effectRef idx="0">
+            <a:schemeClr val="accent1"/>
+          </a:effectRef>
+          <a:fontRef idx="minor">
+            <a:schemeClr val="lt1"/>
+          </a:fontRef>
+        </p:style>
+      </p:cxnSp>
+      <p:sp>
+        <p:nvSpPr>
+          <p:cNvPr id="49" name="Arc 48">
+            <a:extLst>
+              <a:ext uri="{FF2B5EF4-FFF2-40B4-BE49-F238E27FC236}">
+                <a16:creationId xmlns:a16="http://schemas.microsoft.com/office/drawing/2014/main" id="{6B8C451F-6446-D4AD-0BDE-2F7FA4109723}"/>
+              </a:ext>
+            </a:extLst>
+          </p:cNvPr>
+          <p:cNvSpPr/>
+          <p:nvPr/>
+        </p:nvSpPr>
+        <p:spPr>
+          <a:xfrm>
+            <a:off x="1413001" y="2854759"/>
+            <a:ext cx="491070" cy="497100"/>
+          </a:xfrm>
+          <a:prstGeom prst="arc">
+            <a:avLst>
+              <a:gd name="adj1" fmla="val 6880296"/>
+              <a:gd name="adj2" fmla="val 11288858"/>
+            </a:avLst>
+          </a:prstGeom>
+          <a:noFill/>
+          <a:ln w="19050">
+            <a:solidFill>
+              <a:srgbClr val="002060"/>
+            </a:solidFill>
+          </a:ln>
+        </p:spPr>
+        <p:style>
+          <a:lnRef idx="2">
+            <a:schemeClr val="accent1">
+              <a:shade val="15000"/>
+            </a:schemeClr>
+          </a:lnRef>
+          <a:fillRef idx="1">
+            <a:schemeClr val="accent1"/>
+          </a:fillRef>
+          <a:effectRef idx="0">
+            <a:schemeClr val="accent1"/>
+          </a:effectRef>
+          <a:fontRef idx="minor">
+            <a:schemeClr val="lt1"/>
+          </a:fontRef>
+        </p:style>
+        <p:txBody>
+          <a:bodyPr rtlCol="0" anchor="ctr"/>
+          <a:lstStyle/>
+          <a:p>
+            <a:pPr algn="ctr"/>
+            <a:endParaRPr lang="fr-FR"/>
+          </a:p>
+        </p:txBody>
+      </p:sp>
+      <p:cxnSp>
+        <p:nvCxnSpPr>
+          <p:cNvPr id="52" name="Connecteur droit avec flèche 51">
+            <a:extLst>
+              <a:ext uri="{FF2B5EF4-FFF2-40B4-BE49-F238E27FC236}">
+                <a16:creationId xmlns:a16="http://schemas.microsoft.com/office/drawing/2014/main" id="{6DB4809D-8DDA-D1DB-8689-C21B4A718BCA}"/>
+              </a:ext>
+            </a:extLst>
+          </p:cNvPr>
+          <p:cNvCxnSpPr>
+            <a:cxnSpLocks/>
+          </p:cNvCxnSpPr>
+          <p:nvPr/>
+        </p:nvCxnSpPr>
+        <p:spPr>
+          <a:xfrm>
+            <a:off x="4639734" y="2854759"/>
+            <a:ext cx="1012987" cy="0"/>
+          </a:xfrm>
+          <a:prstGeom prst="straightConnector1">
+            <a:avLst/>
+          </a:prstGeom>
+          <a:ln w="28575">
+            <a:solidFill>
+              <a:srgbClr val="C00000"/>
+            </a:solidFill>
+            <a:headEnd type="none"/>
+            <a:tailEnd type="stealth" w="med" len="lg"/>
+          </a:ln>
+        </p:spPr>
+        <p:style>
+          <a:lnRef idx="1">
+            <a:schemeClr val="accent1"/>
+          </a:lnRef>
+          <a:fillRef idx="0">
+            <a:schemeClr val="accent1"/>
+          </a:fillRef>
+          <a:effectRef idx="0">
+            <a:schemeClr val="accent1"/>
+          </a:effectRef>
+          <a:fontRef idx="minor">
+            <a:schemeClr val="tx1"/>
+          </a:fontRef>
+        </p:style>
+      </p:cxnSp>
+      <p:grpSp>
+        <p:nvGrpSpPr>
+          <p:cNvPr id="53" name="Groupe 52">
+            <a:extLst>
+              <a:ext uri="{FF2B5EF4-FFF2-40B4-BE49-F238E27FC236}">
+                <a16:creationId xmlns:a16="http://schemas.microsoft.com/office/drawing/2014/main" id="{47F6219A-77CC-3D57-5643-90DBAB625BE7}"/>
+              </a:ext>
+            </a:extLst>
+          </p:cNvPr>
+          <p:cNvGrpSpPr/>
+          <p:nvPr/>
+        </p:nvGrpSpPr>
+        <p:grpSpPr>
+          <a:xfrm>
+            <a:off x="3748191" y="4282787"/>
+            <a:ext cx="180000" cy="762532"/>
+            <a:chOff x="776931" y="3968201"/>
+            <a:chExt cx="180000" cy="762532"/>
+          </a:xfrm>
+        </p:grpSpPr>
+        <p:cxnSp>
+          <p:nvCxnSpPr>
+            <p:cNvPr id="54" name="Connecteur droit 53">
+              <a:extLst>
+                <a:ext uri="{FF2B5EF4-FFF2-40B4-BE49-F238E27FC236}">
+                  <a16:creationId xmlns:a16="http://schemas.microsoft.com/office/drawing/2014/main" id="{8D6B2B28-6F81-3C8E-6F96-10E42846F445}"/>
+                </a:ext>
+              </a:extLst>
+            </p:cNvPr>
+            <p:cNvCxnSpPr>
+              <a:cxnSpLocks/>
+            </p:cNvCxnSpPr>
+            <p:nvPr/>
+          </p:nvCxnSpPr>
+          <p:spPr>
+            <a:xfrm flipH="1">
+              <a:off x="776931" y="4550733"/>
+              <a:ext cx="180000" cy="180000"/>
+            </a:xfrm>
+            <a:prstGeom prst="line">
+              <a:avLst/>
+            </a:prstGeom>
+            <a:noFill/>
+            <a:ln w="19050">
+              <a:solidFill>
+                <a:srgbClr val="002060"/>
+              </a:solidFill>
+            </a:ln>
+          </p:spPr>
+          <p:style>
+            <a:lnRef idx="2">
+              <a:schemeClr val="accent1">
+                <a:shade val="15000"/>
+              </a:schemeClr>
+            </a:lnRef>
+            <a:fillRef idx="1">
+              <a:schemeClr val="accent1"/>
+            </a:fillRef>
+            <a:effectRef idx="0">
+              <a:schemeClr val="accent1"/>
+            </a:effectRef>
+            <a:fontRef idx="minor">
+              <a:schemeClr val="lt1"/>
+            </a:fontRef>
+          </p:style>
+        </p:cxnSp>
+        <p:cxnSp>
+          <p:nvCxnSpPr>
+            <p:cNvPr id="55" name="Connecteur droit 54">
+              <a:extLst>
+                <a:ext uri="{FF2B5EF4-FFF2-40B4-BE49-F238E27FC236}">
+                  <a16:creationId xmlns:a16="http://schemas.microsoft.com/office/drawing/2014/main" id="{A5527BFB-861F-10FB-97EC-8A785AB93EA1}"/>
+                </a:ext>
+              </a:extLst>
+            </p:cNvPr>
+            <p:cNvCxnSpPr>
+              <a:cxnSpLocks/>
+            </p:cNvCxnSpPr>
+            <p:nvPr/>
+          </p:nvCxnSpPr>
+          <p:spPr>
+            <a:xfrm flipH="1">
+              <a:off x="776931" y="4453646"/>
+              <a:ext cx="180000" cy="180000"/>
+            </a:xfrm>
+            <a:prstGeom prst="line">
+              <a:avLst/>
+            </a:prstGeom>
+            <a:noFill/>
+            <a:ln w="19050">
+              <a:solidFill>
+                <a:srgbClr val="002060"/>
+              </a:solidFill>
+            </a:ln>
+          </p:spPr>
+          <p:style>
+            <a:lnRef idx="2">
+              <a:schemeClr val="accent1">
+                <a:shade val="15000"/>
+              </a:schemeClr>
+            </a:lnRef>
+            <a:fillRef idx="1">
+              <a:schemeClr val="accent1"/>
+            </a:fillRef>
+            <a:effectRef idx="0">
+              <a:schemeClr val="accent1"/>
+            </a:effectRef>
+            <a:fontRef idx="minor">
+              <a:schemeClr val="lt1"/>
+            </a:fontRef>
+          </p:style>
+        </p:cxnSp>
+        <p:cxnSp>
+          <p:nvCxnSpPr>
+            <p:cNvPr id="56" name="Connecteur droit 55">
+              <a:extLst>
+                <a:ext uri="{FF2B5EF4-FFF2-40B4-BE49-F238E27FC236}">
+                  <a16:creationId xmlns:a16="http://schemas.microsoft.com/office/drawing/2014/main" id="{99CC17EB-EC3A-F6D7-4D6C-51169BA4691D}"/>
+                </a:ext>
+              </a:extLst>
+            </p:cNvPr>
+            <p:cNvCxnSpPr>
+              <a:cxnSpLocks/>
+            </p:cNvCxnSpPr>
+            <p:nvPr/>
+          </p:nvCxnSpPr>
+          <p:spPr>
+            <a:xfrm flipH="1">
+              <a:off x="776931" y="4356557"/>
+              <a:ext cx="180000" cy="180000"/>
+            </a:xfrm>
+            <a:prstGeom prst="line">
+              <a:avLst/>
+            </a:prstGeom>
+            <a:noFill/>
+            <a:ln w="19050">
+              <a:solidFill>
+                <a:srgbClr val="002060"/>
+              </a:solidFill>
+            </a:ln>
+          </p:spPr>
+          <p:style>
+            <a:lnRef idx="2">
+              <a:schemeClr val="accent1">
+                <a:shade val="15000"/>
+              </a:schemeClr>
+            </a:lnRef>
+            <a:fillRef idx="1">
+              <a:schemeClr val="accent1"/>
+            </a:fillRef>
+            <a:effectRef idx="0">
+              <a:schemeClr val="accent1"/>
+            </a:effectRef>
+            <a:fontRef idx="minor">
+              <a:schemeClr val="lt1"/>
+            </a:fontRef>
+          </p:style>
+        </p:cxnSp>
+        <p:cxnSp>
+          <p:nvCxnSpPr>
+            <p:cNvPr id="57" name="Connecteur droit 56">
+              <a:extLst>
+                <a:ext uri="{FF2B5EF4-FFF2-40B4-BE49-F238E27FC236}">
+                  <a16:creationId xmlns:a16="http://schemas.microsoft.com/office/drawing/2014/main" id="{33675BBE-C940-0FD1-741B-8CA3E73B9802}"/>
+                </a:ext>
+              </a:extLst>
+            </p:cNvPr>
+            <p:cNvCxnSpPr>
+              <a:cxnSpLocks/>
+            </p:cNvCxnSpPr>
+            <p:nvPr/>
+          </p:nvCxnSpPr>
+          <p:spPr>
+            <a:xfrm flipH="1">
+              <a:off x="776931" y="4259468"/>
+              <a:ext cx="180000" cy="180000"/>
+            </a:xfrm>
+            <a:prstGeom prst="line">
+              <a:avLst/>
+            </a:prstGeom>
+            <a:noFill/>
+            <a:ln w="19050">
+              <a:solidFill>
+                <a:srgbClr val="002060"/>
+              </a:solidFill>
+            </a:ln>
+          </p:spPr>
+          <p:style>
+            <a:lnRef idx="2">
+              <a:schemeClr val="accent1">
+                <a:shade val="15000"/>
+              </a:schemeClr>
+            </a:lnRef>
+            <a:fillRef idx="1">
+              <a:schemeClr val="accent1"/>
+            </a:fillRef>
+            <a:effectRef idx="0">
+              <a:schemeClr val="accent1"/>
+            </a:effectRef>
+            <a:fontRef idx="minor">
+              <a:schemeClr val="lt1"/>
+            </a:fontRef>
+          </p:style>
+        </p:cxnSp>
+        <p:cxnSp>
+          <p:nvCxnSpPr>
+            <p:cNvPr id="58" name="Connecteur droit 57">
+              <a:extLst>
+                <a:ext uri="{FF2B5EF4-FFF2-40B4-BE49-F238E27FC236}">
+                  <a16:creationId xmlns:a16="http://schemas.microsoft.com/office/drawing/2014/main" id="{10E71DE4-B628-EC2A-B0E9-2B22821EB5D1}"/>
+                </a:ext>
+              </a:extLst>
+            </p:cNvPr>
+            <p:cNvCxnSpPr>
+              <a:cxnSpLocks/>
+            </p:cNvCxnSpPr>
+            <p:nvPr/>
+          </p:nvCxnSpPr>
+          <p:spPr>
+            <a:xfrm flipH="1">
+              <a:off x="776931" y="4162379"/>
+              <a:ext cx="180000" cy="180000"/>
+            </a:xfrm>
+            <a:prstGeom prst="line">
+              <a:avLst/>
+            </a:prstGeom>
+            <a:noFill/>
+            <a:ln w="19050">
+              <a:solidFill>
+                <a:srgbClr val="002060"/>
+              </a:solidFill>
+            </a:ln>
+          </p:spPr>
+          <p:style>
+            <a:lnRef idx="2">
+              <a:schemeClr val="accent1">
+                <a:shade val="15000"/>
+              </a:schemeClr>
+            </a:lnRef>
+            <a:fillRef idx="1">
+              <a:schemeClr val="accent1"/>
+            </a:fillRef>
+            <a:effectRef idx="0">
+              <a:schemeClr val="accent1"/>
+            </a:effectRef>
+            <a:fontRef idx="minor">
+              <a:schemeClr val="lt1"/>
+            </a:fontRef>
+          </p:style>
+        </p:cxnSp>
+        <p:cxnSp>
+          <p:nvCxnSpPr>
+            <p:cNvPr id="59" name="Connecteur droit 58">
+              <a:extLst>
+                <a:ext uri="{FF2B5EF4-FFF2-40B4-BE49-F238E27FC236}">
+                  <a16:creationId xmlns:a16="http://schemas.microsoft.com/office/drawing/2014/main" id="{48FF30CD-8FE4-8828-0F14-77FF3FF06B5E}"/>
+                </a:ext>
+              </a:extLst>
+            </p:cNvPr>
+            <p:cNvCxnSpPr>
+              <a:cxnSpLocks/>
+            </p:cNvCxnSpPr>
+            <p:nvPr/>
+          </p:nvCxnSpPr>
+          <p:spPr>
+            <a:xfrm flipH="1">
+              <a:off x="776931" y="4065290"/>
+              <a:ext cx="180000" cy="180000"/>
+            </a:xfrm>
+            <a:prstGeom prst="line">
+              <a:avLst/>
+            </a:prstGeom>
+            <a:noFill/>
+            <a:ln w="19050">
+              <a:solidFill>
+                <a:srgbClr val="002060"/>
+              </a:solidFill>
+            </a:ln>
+          </p:spPr>
+          <p:style>
+            <a:lnRef idx="2">
+              <a:schemeClr val="accent1">
+                <a:shade val="15000"/>
+              </a:schemeClr>
+            </a:lnRef>
+            <a:fillRef idx="1">
+              <a:schemeClr val="accent1"/>
+            </a:fillRef>
+            <a:effectRef idx="0">
+              <a:schemeClr val="accent1"/>
+            </a:effectRef>
+            <a:fontRef idx="minor">
+              <a:schemeClr val="lt1"/>
+            </a:fontRef>
+          </p:style>
+        </p:cxnSp>
+        <p:cxnSp>
+          <p:nvCxnSpPr>
+            <p:cNvPr id="60" name="Connecteur droit 59">
+              <a:extLst>
+                <a:ext uri="{FF2B5EF4-FFF2-40B4-BE49-F238E27FC236}">
+                  <a16:creationId xmlns:a16="http://schemas.microsoft.com/office/drawing/2014/main" id="{1CB2340B-57F4-7EEB-C1A2-0BAE502421AE}"/>
+                </a:ext>
+              </a:extLst>
+            </p:cNvPr>
+            <p:cNvCxnSpPr>
+              <a:cxnSpLocks/>
+            </p:cNvCxnSpPr>
+            <p:nvPr/>
+          </p:nvCxnSpPr>
+          <p:spPr>
+            <a:xfrm flipH="1">
+              <a:off x="776931" y="3968201"/>
+              <a:ext cx="180000" cy="180000"/>
+            </a:xfrm>
+            <a:prstGeom prst="line">
+              <a:avLst/>
+            </a:prstGeom>
+            <a:noFill/>
+            <a:ln w="19050">
+              <a:solidFill>
+                <a:srgbClr val="002060"/>
+              </a:solidFill>
+            </a:ln>
+          </p:spPr>
+          <p:style>
+            <a:lnRef idx="2">
+              <a:schemeClr val="accent1">
+                <a:shade val="15000"/>
+              </a:schemeClr>
+            </a:lnRef>
+            <a:fillRef idx="1">
+              <a:schemeClr val="accent1"/>
+            </a:fillRef>
+            <a:effectRef idx="0">
+              <a:schemeClr val="accent1"/>
+            </a:effectRef>
+            <a:fontRef idx="minor">
+              <a:schemeClr val="lt1"/>
+            </a:fontRef>
+          </p:style>
+        </p:cxnSp>
+      </p:grpSp>
+      <p:cxnSp>
+        <p:nvCxnSpPr>
+          <p:cNvPr id="61" name="Connecteur droit 60">
+            <a:extLst>
+              <a:ext uri="{FF2B5EF4-FFF2-40B4-BE49-F238E27FC236}">
+                <a16:creationId xmlns:a16="http://schemas.microsoft.com/office/drawing/2014/main" id="{D1F20B85-7953-2F5C-A750-DF3DA4E1FF5C}"/>
+              </a:ext>
+            </a:extLst>
+          </p:cNvPr>
+          <p:cNvCxnSpPr>
+            <a:cxnSpLocks/>
+          </p:cNvCxnSpPr>
+          <p:nvPr/>
+        </p:nvCxnSpPr>
+        <p:spPr>
+          <a:xfrm>
+            <a:off x="7525982" y="2717800"/>
+            <a:ext cx="719442" cy="0"/>
+          </a:xfrm>
+          <a:prstGeom prst="line">
+            <a:avLst/>
+          </a:prstGeom>
+          <a:noFill/>
+          <a:ln w="19050">
+            <a:solidFill>
+              <a:srgbClr val="002060"/>
+            </a:solidFill>
+          </a:ln>
+        </p:spPr>
+        <p:style>
+          <a:lnRef idx="2">
+            <a:schemeClr val="accent1">
+              <a:shade val="15000"/>
+            </a:schemeClr>
+          </a:lnRef>
+          <a:fillRef idx="1">
+            <a:schemeClr val="accent1"/>
+          </a:fillRef>
+          <a:effectRef idx="0">
+            <a:schemeClr val="accent1"/>
+          </a:effectRef>
+          <a:fontRef idx="minor">
+            <a:schemeClr val="lt1"/>
+          </a:fontRef>
+        </p:style>
+      </p:cxnSp>
+      <p:cxnSp>
+        <p:nvCxnSpPr>
+          <p:cNvPr id="63" name="Connecteur droit 62">
+            <a:extLst>
+              <a:ext uri="{FF2B5EF4-FFF2-40B4-BE49-F238E27FC236}">
+                <a16:creationId xmlns:a16="http://schemas.microsoft.com/office/drawing/2014/main" id="{A10FDCCE-1CFE-8A65-05CD-431F2E1DF528}"/>
+              </a:ext>
+            </a:extLst>
+          </p:cNvPr>
+          <p:cNvCxnSpPr>
+            <a:cxnSpLocks/>
+          </p:cNvCxnSpPr>
+          <p:nvPr/>
+        </p:nvCxnSpPr>
+        <p:spPr>
+          <a:xfrm>
+            <a:off x="6816116" y="4866057"/>
+            <a:ext cx="719442" cy="0"/>
+          </a:xfrm>
+          <a:prstGeom prst="line">
+            <a:avLst/>
+          </a:prstGeom>
+          <a:noFill/>
+          <a:ln w="19050">
+            <a:solidFill>
+              <a:srgbClr val="002060"/>
+            </a:solidFill>
+          </a:ln>
+        </p:spPr>
+        <p:style>
+          <a:lnRef idx="2">
+            <a:schemeClr val="accent1">
+              <a:shade val="15000"/>
+            </a:schemeClr>
+          </a:lnRef>
+          <a:fillRef idx="1">
+            <a:schemeClr val="accent1"/>
+          </a:fillRef>
+          <a:effectRef idx="0">
+            <a:schemeClr val="accent1"/>
+          </a:effectRef>
+          <a:fontRef idx="minor">
+            <a:schemeClr val="lt1"/>
+          </a:fontRef>
+        </p:style>
+      </p:cxnSp>
+      <p:cxnSp>
+        <p:nvCxnSpPr>
+          <p:cNvPr id="64" name="Connecteur droit 63">
+            <a:extLst>
+              <a:ext uri="{FF2B5EF4-FFF2-40B4-BE49-F238E27FC236}">
+                <a16:creationId xmlns:a16="http://schemas.microsoft.com/office/drawing/2014/main" id="{B3987CE1-AB11-342C-0037-86C0A53FA3D9}"/>
+              </a:ext>
+            </a:extLst>
+          </p:cNvPr>
+          <p:cNvCxnSpPr>
+            <a:cxnSpLocks/>
+          </p:cNvCxnSpPr>
+          <p:nvPr/>
+        </p:nvCxnSpPr>
+        <p:spPr>
+          <a:xfrm>
+            <a:off x="6096674" y="7014314"/>
+            <a:ext cx="719442" cy="0"/>
+          </a:xfrm>
+          <a:prstGeom prst="line">
+            <a:avLst/>
+          </a:prstGeom>
+          <a:noFill/>
+          <a:ln w="19050">
+            <a:solidFill>
+              <a:srgbClr val="002060"/>
+            </a:solidFill>
+          </a:ln>
+        </p:spPr>
+        <p:style>
+          <a:lnRef idx="2">
+            <a:schemeClr val="accent1">
+              <a:shade val="15000"/>
+            </a:schemeClr>
+          </a:lnRef>
+          <a:fillRef idx="1">
+            <a:schemeClr val="accent1"/>
+          </a:fillRef>
+          <a:effectRef idx="0">
+            <a:schemeClr val="accent1"/>
+          </a:effectRef>
+          <a:fontRef idx="minor">
+            <a:schemeClr val="lt1"/>
+          </a:fontRef>
+        </p:style>
+      </p:cxnSp>
+      <p:cxnSp>
+        <p:nvCxnSpPr>
+          <p:cNvPr id="65" name="Connecteur droit 64">
+            <a:extLst>
+              <a:ext uri="{FF2B5EF4-FFF2-40B4-BE49-F238E27FC236}">
+                <a16:creationId xmlns:a16="http://schemas.microsoft.com/office/drawing/2014/main" id="{0CA75721-C7BF-AB74-0725-C5257C16B205}"/>
+              </a:ext>
+            </a:extLst>
+          </p:cNvPr>
+          <p:cNvCxnSpPr>
+            <a:cxnSpLocks/>
+          </p:cNvCxnSpPr>
+          <p:nvPr/>
+        </p:nvCxnSpPr>
+        <p:spPr>
+          <a:xfrm flipV="1">
+            <a:off x="6824973" y="2983793"/>
+            <a:ext cx="609521" cy="1875915"/>
+          </a:xfrm>
+          <a:prstGeom prst="line">
+            <a:avLst/>
+          </a:prstGeom>
+          <a:noFill/>
+          <a:ln w="19050">
+            <a:solidFill>
+              <a:srgbClr val="002060"/>
+            </a:solidFill>
+          </a:ln>
+        </p:spPr>
+        <p:style>
+          <a:lnRef idx="2">
+            <a:schemeClr val="accent1">
+              <a:shade val="15000"/>
+            </a:schemeClr>
+          </a:lnRef>
+          <a:fillRef idx="1">
+            <a:schemeClr val="accent1"/>
+          </a:fillRef>
+          <a:effectRef idx="0">
+            <a:schemeClr val="accent1"/>
+          </a:effectRef>
+          <a:fontRef idx="minor">
+            <a:schemeClr val="lt1"/>
+          </a:fontRef>
+        </p:style>
+      </p:cxnSp>
+      <p:cxnSp>
+        <p:nvCxnSpPr>
+          <p:cNvPr id="68" name="Connecteur droit 67">
+            <a:extLst>
+              <a:ext uri="{FF2B5EF4-FFF2-40B4-BE49-F238E27FC236}">
+                <a16:creationId xmlns:a16="http://schemas.microsoft.com/office/drawing/2014/main" id="{FFFC71CA-9D7D-A657-4038-EE874BE1E88B}"/>
+              </a:ext>
+            </a:extLst>
+          </p:cNvPr>
+          <p:cNvCxnSpPr>
+            <a:cxnSpLocks/>
+          </p:cNvCxnSpPr>
+          <p:nvPr/>
+        </p:nvCxnSpPr>
+        <p:spPr>
+          <a:xfrm flipV="1">
+            <a:off x="7535558" y="2993134"/>
+            <a:ext cx="609521" cy="1875915"/>
+          </a:xfrm>
+          <a:prstGeom prst="line">
+            <a:avLst/>
+          </a:prstGeom>
+          <a:noFill/>
+          <a:ln w="19050">
+            <a:solidFill>
+              <a:srgbClr val="002060"/>
+            </a:solidFill>
+          </a:ln>
+        </p:spPr>
+        <p:style>
+          <a:lnRef idx="2">
+            <a:schemeClr val="accent1">
+              <a:shade val="15000"/>
+            </a:schemeClr>
+          </a:lnRef>
+          <a:fillRef idx="1">
+            <a:schemeClr val="accent1"/>
+          </a:fillRef>
+          <a:effectRef idx="0">
+            <a:schemeClr val="accent1"/>
+          </a:effectRef>
+          <a:fontRef idx="minor">
+            <a:schemeClr val="lt1"/>
+          </a:fontRef>
+        </p:style>
+      </p:cxnSp>
+      <p:grpSp>
+        <p:nvGrpSpPr>
+          <p:cNvPr id="69" name="Groupe 68">
+            <a:extLst>
+              <a:ext uri="{FF2B5EF4-FFF2-40B4-BE49-F238E27FC236}">
+                <a16:creationId xmlns:a16="http://schemas.microsoft.com/office/drawing/2014/main" id="{C577B8C4-1206-9B5F-0DD4-44ABD4271AA4}"/>
+              </a:ext>
+            </a:extLst>
+          </p:cNvPr>
+          <p:cNvGrpSpPr/>
+          <p:nvPr/>
+        </p:nvGrpSpPr>
+        <p:grpSpPr>
+          <a:xfrm rot="900000">
+            <a:off x="6713464" y="4266873"/>
+            <a:ext cx="180000" cy="762532"/>
+            <a:chOff x="776931" y="3968201"/>
+            <a:chExt cx="180000" cy="762532"/>
+          </a:xfrm>
+        </p:grpSpPr>
+        <p:cxnSp>
+          <p:nvCxnSpPr>
+            <p:cNvPr id="70" name="Connecteur droit 69">
+              <a:extLst>
+                <a:ext uri="{FF2B5EF4-FFF2-40B4-BE49-F238E27FC236}">
+                  <a16:creationId xmlns:a16="http://schemas.microsoft.com/office/drawing/2014/main" id="{0794FF35-C158-3C20-B3D6-271CCD5F590E}"/>
+                </a:ext>
+              </a:extLst>
+            </p:cNvPr>
+            <p:cNvCxnSpPr>
+              <a:cxnSpLocks/>
+            </p:cNvCxnSpPr>
+            <p:nvPr/>
+          </p:nvCxnSpPr>
+          <p:spPr>
+            <a:xfrm flipH="1">
+              <a:off x="776931" y="4550733"/>
+              <a:ext cx="180000" cy="180000"/>
+            </a:xfrm>
+            <a:prstGeom prst="line">
+              <a:avLst/>
+            </a:prstGeom>
+            <a:noFill/>
+            <a:ln w="19050">
+              <a:solidFill>
+                <a:srgbClr val="002060"/>
+              </a:solidFill>
+            </a:ln>
+          </p:spPr>
+          <p:style>
+            <a:lnRef idx="2">
+              <a:schemeClr val="accent1">
+                <a:shade val="15000"/>
+              </a:schemeClr>
+            </a:lnRef>
+            <a:fillRef idx="1">
+              <a:schemeClr val="accent1"/>
+            </a:fillRef>
+            <a:effectRef idx="0">
+              <a:schemeClr val="accent1"/>
+            </a:effectRef>
+            <a:fontRef idx="minor">
+              <a:schemeClr val="lt1"/>
+            </a:fontRef>
+          </p:style>
+        </p:cxnSp>
+        <p:cxnSp>
+          <p:nvCxnSpPr>
+            <p:cNvPr id="71" name="Connecteur droit 70">
+              <a:extLst>
+                <a:ext uri="{FF2B5EF4-FFF2-40B4-BE49-F238E27FC236}">
+                  <a16:creationId xmlns:a16="http://schemas.microsoft.com/office/drawing/2014/main" id="{E6ABD81F-564F-F44D-1CC4-2D61618B1FD3}"/>
+                </a:ext>
+              </a:extLst>
+            </p:cNvPr>
+            <p:cNvCxnSpPr>
+              <a:cxnSpLocks/>
+            </p:cNvCxnSpPr>
+            <p:nvPr/>
+          </p:nvCxnSpPr>
+          <p:spPr>
+            <a:xfrm flipH="1">
+              <a:off x="776931" y="4453646"/>
+              <a:ext cx="180000" cy="180000"/>
+            </a:xfrm>
+            <a:prstGeom prst="line">
+              <a:avLst/>
+            </a:prstGeom>
+            <a:noFill/>
+            <a:ln w="19050">
+              <a:solidFill>
+                <a:srgbClr val="002060"/>
+              </a:solidFill>
+            </a:ln>
+          </p:spPr>
+          <p:style>
+            <a:lnRef idx="2">
+              <a:schemeClr val="accent1">
+                <a:shade val="15000"/>
+              </a:schemeClr>
+            </a:lnRef>
+            <a:fillRef idx="1">
+              <a:schemeClr val="accent1"/>
+            </a:fillRef>
+            <a:effectRef idx="0">
+              <a:schemeClr val="accent1"/>
+            </a:effectRef>
+            <a:fontRef idx="minor">
+              <a:schemeClr val="lt1"/>
+            </a:fontRef>
+          </p:style>
+        </p:cxnSp>
+        <p:cxnSp>
+          <p:nvCxnSpPr>
+            <p:cNvPr id="72" name="Connecteur droit 71">
+              <a:extLst>
+                <a:ext uri="{FF2B5EF4-FFF2-40B4-BE49-F238E27FC236}">
+                  <a16:creationId xmlns:a16="http://schemas.microsoft.com/office/drawing/2014/main" id="{4EA1DA6D-26D9-6280-3C2E-CDEC251639E7}"/>
+                </a:ext>
+              </a:extLst>
+            </p:cNvPr>
+            <p:cNvCxnSpPr>
+              <a:cxnSpLocks/>
+            </p:cNvCxnSpPr>
+            <p:nvPr/>
+          </p:nvCxnSpPr>
+          <p:spPr>
+            <a:xfrm flipH="1">
+              <a:off x="776931" y="4356557"/>
+              <a:ext cx="180000" cy="180000"/>
+            </a:xfrm>
+            <a:prstGeom prst="line">
+              <a:avLst/>
+            </a:prstGeom>
+            <a:noFill/>
+            <a:ln w="19050">
+              <a:solidFill>
+                <a:srgbClr val="002060"/>
+              </a:solidFill>
+            </a:ln>
+          </p:spPr>
+          <p:style>
+            <a:lnRef idx="2">
+              <a:schemeClr val="accent1">
+                <a:shade val="15000"/>
+              </a:schemeClr>
+            </a:lnRef>
+            <a:fillRef idx="1">
+              <a:schemeClr val="accent1"/>
+            </a:fillRef>
+            <a:effectRef idx="0">
+              <a:schemeClr val="accent1"/>
+            </a:effectRef>
+            <a:fontRef idx="minor">
+              <a:schemeClr val="lt1"/>
+            </a:fontRef>
+          </p:style>
+        </p:cxnSp>
+        <p:cxnSp>
+          <p:nvCxnSpPr>
+            <p:cNvPr id="73" name="Connecteur droit 72">
+              <a:extLst>
+                <a:ext uri="{FF2B5EF4-FFF2-40B4-BE49-F238E27FC236}">
+                  <a16:creationId xmlns:a16="http://schemas.microsoft.com/office/drawing/2014/main" id="{849B52F4-6D13-D33E-79F6-95781BEBC328}"/>
+                </a:ext>
+              </a:extLst>
+            </p:cNvPr>
+            <p:cNvCxnSpPr>
+              <a:cxnSpLocks/>
+            </p:cNvCxnSpPr>
+            <p:nvPr/>
+          </p:nvCxnSpPr>
+          <p:spPr>
+            <a:xfrm flipH="1">
+              <a:off x="776931" y="4259468"/>
+              <a:ext cx="180000" cy="180000"/>
+            </a:xfrm>
+            <a:prstGeom prst="line">
+              <a:avLst/>
+            </a:prstGeom>
+            <a:noFill/>
+            <a:ln w="19050">
+              <a:solidFill>
+                <a:srgbClr val="002060"/>
+              </a:solidFill>
+            </a:ln>
+          </p:spPr>
+          <p:style>
+            <a:lnRef idx="2">
+              <a:schemeClr val="accent1">
+                <a:shade val="15000"/>
+              </a:schemeClr>
+            </a:lnRef>
+            <a:fillRef idx="1">
+              <a:schemeClr val="accent1"/>
+            </a:fillRef>
+            <a:effectRef idx="0">
+              <a:schemeClr val="accent1"/>
+            </a:effectRef>
+            <a:fontRef idx="minor">
+              <a:schemeClr val="lt1"/>
+            </a:fontRef>
+          </p:style>
+        </p:cxnSp>
+        <p:cxnSp>
+          <p:nvCxnSpPr>
+            <p:cNvPr id="74" name="Connecteur droit 73">
+              <a:extLst>
+                <a:ext uri="{FF2B5EF4-FFF2-40B4-BE49-F238E27FC236}">
+                  <a16:creationId xmlns:a16="http://schemas.microsoft.com/office/drawing/2014/main" id="{4ED89097-F302-5202-6BA9-952CEB8F5142}"/>
+                </a:ext>
+              </a:extLst>
+            </p:cNvPr>
+            <p:cNvCxnSpPr>
+              <a:cxnSpLocks/>
+            </p:cNvCxnSpPr>
+            <p:nvPr/>
+          </p:nvCxnSpPr>
+          <p:spPr>
+            <a:xfrm flipH="1">
+              <a:off x="776931" y="4162379"/>
+              <a:ext cx="180000" cy="180000"/>
+            </a:xfrm>
+            <a:prstGeom prst="line">
+              <a:avLst/>
+            </a:prstGeom>
+            <a:noFill/>
+            <a:ln w="19050">
+              <a:solidFill>
+                <a:srgbClr val="002060"/>
+              </a:solidFill>
+            </a:ln>
+          </p:spPr>
+          <p:style>
+            <a:lnRef idx="2">
+              <a:schemeClr val="accent1">
+                <a:shade val="15000"/>
+              </a:schemeClr>
+            </a:lnRef>
+            <a:fillRef idx="1">
+              <a:schemeClr val="accent1"/>
+            </a:fillRef>
+            <a:effectRef idx="0">
+              <a:schemeClr val="accent1"/>
+            </a:effectRef>
+            <a:fontRef idx="minor">
+              <a:schemeClr val="lt1"/>
+            </a:fontRef>
+          </p:style>
+        </p:cxnSp>
+        <p:cxnSp>
+          <p:nvCxnSpPr>
+            <p:cNvPr id="75" name="Connecteur droit 74">
+              <a:extLst>
+                <a:ext uri="{FF2B5EF4-FFF2-40B4-BE49-F238E27FC236}">
+                  <a16:creationId xmlns:a16="http://schemas.microsoft.com/office/drawing/2014/main" id="{22F7D07F-ADA9-3D61-0E08-609FD245C9EA}"/>
+                </a:ext>
+              </a:extLst>
+            </p:cNvPr>
+            <p:cNvCxnSpPr>
+              <a:cxnSpLocks/>
+            </p:cNvCxnSpPr>
+            <p:nvPr/>
+          </p:nvCxnSpPr>
+          <p:spPr>
+            <a:xfrm flipH="1">
+              <a:off x="776931" y="4065290"/>
+              <a:ext cx="180000" cy="180000"/>
+            </a:xfrm>
+            <a:prstGeom prst="line">
+              <a:avLst/>
+            </a:prstGeom>
+            <a:noFill/>
+            <a:ln w="19050">
+              <a:solidFill>
+                <a:srgbClr val="002060"/>
+              </a:solidFill>
+            </a:ln>
+          </p:spPr>
+          <p:style>
+            <a:lnRef idx="2">
+              <a:schemeClr val="accent1">
+                <a:shade val="15000"/>
+              </a:schemeClr>
+            </a:lnRef>
+            <a:fillRef idx="1">
+              <a:schemeClr val="accent1"/>
+            </a:fillRef>
+            <a:effectRef idx="0">
+              <a:schemeClr val="accent1"/>
+            </a:effectRef>
+            <a:fontRef idx="minor">
+              <a:schemeClr val="lt1"/>
+            </a:fontRef>
+          </p:style>
+        </p:cxnSp>
+        <p:cxnSp>
+          <p:nvCxnSpPr>
+            <p:cNvPr id="76" name="Connecteur droit 75">
+              <a:extLst>
+                <a:ext uri="{FF2B5EF4-FFF2-40B4-BE49-F238E27FC236}">
+                  <a16:creationId xmlns:a16="http://schemas.microsoft.com/office/drawing/2014/main" id="{B149D4A8-12F3-7250-700D-A085DFDD8943}"/>
+                </a:ext>
+              </a:extLst>
+            </p:cNvPr>
+            <p:cNvCxnSpPr>
+              <a:cxnSpLocks/>
+            </p:cNvCxnSpPr>
+            <p:nvPr/>
+          </p:nvCxnSpPr>
+          <p:spPr>
+            <a:xfrm flipH="1">
+              <a:off x="776931" y="3968201"/>
+              <a:ext cx="180000" cy="180000"/>
+            </a:xfrm>
+            <a:prstGeom prst="line">
+              <a:avLst/>
+            </a:prstGeom>
+            <a:noFill/>
+            <a:ln w="19050">
+              <a:solidFill>
+                <a:srgbClr val="002060"/>
+              </a:solidFill>
+            </a:ln>
+          </p:spPr>
+          <p:style>
+            <a:lnRef idx="2">
+              <a:schemeClr val="accent1">
+                <a:shade val="15000"/>
+              </a:schemeClr>
+            </a:lnRef>
+            <a:fillRef idx="1">
+              <a:schemeClr val="accent1"/>
+            </a:fillRef>
+            <a:effectRef idx="0">
+              <a:schemeClr val="accent1"/>
+            </a:effectRef>
+            <a:fontRef idx="minor">
+              <a:schemeClr val="lt1"/>
+            </a:fontRef>
+          </p:style>
+        </p:cxnSp>
+      </p:grpSp>
+      <p:cxnSp>
+        <p:nvCxnSpPr>
+          <p:cNvPr id="77" name="Connecteur droit 76">
+            <a:extLst>
+              <a:ext uri="{FF2B5EF4-FFF2-40B4-BE49-F238E27FC236}">
+                <a16:creationId xmlns:a16="http://schemas.microsoft.com/office/drawing/2014/main" id="{486DAFCD-F4D9-F94B-B133-3BD734D8A047}"/>
+              </a:ext>
+            </a:extLst>
+          </p:cNvPr>
+          <p:cNvCxnSpPr>
+            <a:cxnSpLocks/>
+          </p:cNvCxnSpPr>
+          <p:nvPr/>
+        </p:nvCxnSpPr>
+        <p:spPr>
+          <a:xfrm flipV="1">
+            <a:off x="7428808" y="2705224"/>
+            <a:ext cx="97174" cy="299069"/>
+          </a:xfrm>
+          <a:prstGeom prst="line">
+            <a:avLst/>
+          </a:prstGeom>
+          <a:noFill/>
+          <a:ln w="19050">
+            <a:solidFill>
+              <a:srgbClr val="C00000"/>
+            </a:solidFill>
+          </a:ln>
+        </p:spPr>
+        <p:style>
+          <a:lnRef idx="2">
+            <a:schemeClr val="accent1">
+              <a:shade val="15000"/>
+            </a:schemeClr>
+          </a:lnRef>
+          <a:fillRef idx="1">
+            <a:schemeClr val="accent1"/>
+          </a:fillRef>
+          <a:effectRef idx="0">
+            <a:schemeClr val="accent1"/>
+          </a:effectRef>
+          <a:fontRef idx="minor">
+            <a:schemeClr val="lt1"/>
+          </a:fontRef>
+        </p:style>
+      </p:cxnSp>
+      <p:cxnSp>
+        <p:nvCxnSpPr>
+          <p:cNvPr id="80" name="Connecteur droit 79">
+            <a:extLst>
+              <a:ext uri="{FF2B5EF4-FFF2-40B4-BE49-F238E27FC236}">
+                <a16:creationId xmlns:a16="http://schemas.microsoft.com/office/drawing/2014/main" id="{8BAC96FC-BC7B-D458-6100-4635E371890E}"/>
+              </a:ext>
+            </a:extLst>
+          </p:cNvPr>
+          <p:cNvCxnSpPr>
+            <a:cxnSpLocks/>
+          </p:cNvCxnSpPr>
+          <p:nvPr/>
+        </p:nvCxnSpPr>
+        <p:spPr>
+          <a:xfrm flipV="1">
+            <a:off x="8138285" y="2715683"/>
+            <a:ext cx="97174" cy="299069"/>
+          </a:xfrm>
+          <a:prstGeom prst="line">
+            <a:avLst/>
+          </a:prstGeom>
+          <a:noFill/>
+          <a:ln w="19050">
+            <a:solidFill>
+              <a:srgbClr val="C00000"/>
+            </a:solidFill>
+          </a:ln>
+        </p:spPr>
+        <p:style>
+          <a:lnRef idx="2">
+            <a:schemeClr val="accent1">
+              <a:shade val="15000"/>
+            </a:schemeClr>
+          </a:lnRef>
+          <a:fillRef idx="1">
+            <a:schemeClr val="accent1"/>
+          </a:fillRef>
+          <a:effectRef idx="0">
+            <a:schemeClr val="accent1"/>
+          </a:effectRef>
+          <a:fontRef idx="minor">
+            <a:schemeClr val="lt1"/>
+          </a:fontRef>
+        </p:style>
+      </p:cxnSp>
+      <p:cxnSp>
+        <p:nvCxnSpPr>
+          <p:cNvPr id="83" name="Connecteur droit 82">
+            <a:extLst>
+              <a:ext uri="{FF2B5EF4-FFF2-40B4-BE49-F238E27FC236}">
+                <a16:creationId xmlns:a16="http://schemas.microsoft.com/office/drawing/2014/main" id="{6A595E61-0B4B-7487-33B8-46501C774AE9}"/>
+              </a:ext>
+            </a:extLst>
+          </p:cNvPr>
+          <p:cNvCxnSpPr>
+            <a:cxnSpLocks/>
+          </p:cNvCxnSpPr>
+          <p:nvPr/>
+        </p:nvCxnSpPr>
+        <p:spPr>
+          <a:xfrm flipV="1">
+            <a:off x="6424787" y="3018720"/>
+            <a:ext cx="609521" cy="1875915"/>
+          </a:xfrm>
+          <a:prstGeom prst="line">
+            <a:avLst/>
+          </a:prstGeom>
+          <a:solidFill>
+            <a:schemeClr val="accent5">
+              <a:lumMod val="20000"/>
+              <a:lumOff val="80000"/>
+            </a:schemeClr>
+          </a:solidFill>
+          <a:ln w="19050">
+            <a:solidFill>
+              <a:srgbClr val="002060"/>
+            </a:solidFill>
+            <a:headEnd type="stealth" w="med" len="lg"/>
+            <a:tailEnd type="stealth" w="med" len="lg"/>
+          </a:ln>
+        </p:spPr>
+        <p:style>
+          <a:lnRef idx="2">
+            <a:schemeClr val="accent1">
+              <a:shade val="15000"/>
+            </a:schemeClr>
+          </a:lnRef>
+          <a:fillRef idx="1">
+            <a:schemeClr val="accent1"/>
+          </a:fillRef>
+          <a:effectRef idx="0">
+            <a:schemeClr val="accent1"/>
+          </a:effectRef>
+          <a:fontRef idx="minor">
+            <a:schemeClr val="lt1"/>
+          </a:fontRef>
+        </p:style>
+      </p:cxnSp>
+      <p:cxnSp>
+        <p:nvCxnSpPr>
+          <p:cNvPr id="84" name="Connecteur droit 83">
+            <a:extLst>
+              <a:ext uri="{FF2B5EF4-FFF2-40B4-BE49-F238E27FC236}">
+                <a16:creationId xmlns:a16="http://schemas.microsoft.com/office/drawing/2014/main" id="{85125CF5-84D7-1279-D72E-00A166D552BE}"/>
+              </a:ext>
+            </a:extLst>
+          </p:cNvPr>
+          <p:cNvCxnSpPr>
+            <a:cxnSpLocks/>
+          </p:cNvCxnSpPr>
+          <p:nvPr/>
+        </p:nvCxnSpPr>
+        <p:spPr>
+          <a:xfrm flipV="1">
+            <a:off x="7017751" y="2705224"/>
+            <a:ext cx="116954" cy="359946"/>
+          </a:xfrm>
+          <a:prstGeom prst="line">
+            <a:avLst/>
+          </a:prstGeom>
+          <a:solidFill>
+            <a:schemeClr val="accent5">
+              <a:lumMod val="20000"/>
+              <a:lumOff val="80000"/>
+            </a:schemeClr>
+          </a:solidFill>
+          <a:ln w="19050">
+            <a:solidFill>
+              <a:srgbClr val="C00000"/>
+            </a:solidFill>
+            <a:headEnd type="stealth" w="med" len="lg"/>
+            <a:tailEnd type="stealth" w="med" len="lg"/>
+          </a:ln>
+        </p:spPr>
+        <p:style>
+          <a:lnRef idx="2">
+            <a:schemeClr val="accent1">
+              <a:shade val="15000"/>
+            </a:schemeClr>
+          </a:lnRef>
+          <a:fillRef idx="1">
+            <a:schemeClr val="accent1"/>
+          </a:fillRef>
+          <a:effectRef idx="0">
+            <a:schemeClr val="accent1"/>
+          </a:effectRef>
+          <a:fontRef idx="minor">
+            <a:schemeClr val="lt1"/>
+          </a:fontRef>
+        </p:style>
+      </p:cxnSp>
+      <p:sp>
+        <p:nvSpPr>
+          <p:cNvPr id="88" name="ZoneTexte 87">
+            <a:extLst>
+              <a:ext uri="{FF2B5EF4-FFF2-40B4-BE49-F238E27FC236}">
+                <a16:creationId xmlns:a16="http://schemas.microsoft.com/office/drawing/2014/main" id="{D0FE0BDC-8F1A-38D9-592E-C18691414D12}"/>
+              </a:ext>
+            </a:extLst>
+          </p:cNvPr>
+          <p:cNvSpPr txBox="1"/>
+          <p:nvPr/>
+        </p:nvSpPr>
+        <p:spPr>
+          <a:xfrm>
+            <a:off x="6198289" y="2784090"/>
+            <a:ext cx="853182" cy="246221"/>
+          </a:xfrm>
+          <a:prstGeom prst="rect">
+            <a:avLst/>
+          </a:prstGeom>
+          <a:noFill/>
+        </p:spPr>
+        <p:txBody>
+          <a:bodyPr wrap="square" rtlCol="0">
+            <a:spAutoFit/>
+          </a:bodyPr>
+          <a:lstStyle/>
+          <a:p>
+            <a:pPr algn="ctr"/>
+            <a:r>
+              <a:rPr lang="fr-FR" sz="1000" dirty="0"/>
+              <a:t>Allongement</a:t>
+            </a:r>
+          </a:p>
+        </p:txBody>
+      </p:sp>
+      <p:cxnSp>
+        <p:nvCxnSpPr>
+          <p:cNvPr id="89" name="Connecteur droit avec flèche 88">
+            <a:extLst>
+              <a:ext uri="{FF2B5EF4-FFF2-40B4-BE49-F238E27FC236}">
+                <a16:creationId xmlns:a16="http://schemas.microsoft.com/office/drawing/2014/main" id="{91336225-453E-EE02-B2F5-BF1A2E2D6840}"/>
+              </a:ext>
+            </a:extLst>
+          </p:cNvPr>
+          <p:cNvCxnSpPr>
+            <a:cxnSpLocks/>
+          </p:cNvCxnSpPr>
+          <p:nvPr/>
+        </p:nvCxnSpPr>
+        <p:spPr>
+          <a:xfrm>
+            <a:off x="8186872" y="2870023"/>
+            <a:ext cx="1012987" cy="0"/>
+          </a:xfrm>
+          <a:prstGeom prst="straightConnector1">
+            <a:avLst/>
+          </a:prstGeom>
+          <a:ln w="28575">
+            <a:solidFill>
+              <a:srgbClr val="C00000"/>
+            </a:solidFill>
+            <a:headEnd type="none"/>
+            <a:tailEnd type="stealth" w="med" len="lg"/>
+          </a:ln>
+        </p:spPr>
+        <p:style>
+          <a:lnRef idx="1">
+            <a:schemeClr val="accent1"/>
+          </a:lnRef>
+          <a:fillRef idx="0">
+            <a:schemeClr val="accent1"/>
+          </a:fillRef>
+          <a:effectRef idx="0">
+            <a:schemeClr val="accent1"/>
+          </a:effectRef>
+          <a:fontRef idx="minor">
+            <a:schemeClr val="tx1"/>
+          </a:fontRef>
+        </p:style>
+      </p:cxnSp>
+      <p:sp>
+        <p:nvSpPr>
+          <p:cNvPr id="90" name="ZoneTexte 89">
+            <a:extLst>
+              <a:ext uri="{FF2B5EF4-FFF2-40B4-BE49-F238E27FC236}">
+                <a16:creationId xmlns:a16="http://schemas.microsoft.com/office/drawing/2014/main" id="{48BACE4A-2690-6489-DFF7-C87529873E27}"/>
+              </a:ext>
+            </a:extLst>
+          </p:cNvPr>
+          <p:cNvSpPr txBox="1"/>
+          <p:nvPr/>
+        </p:nvSpPr>
+        <p:spPr>
+          <a:xfrm>
+            <a:off x="5789797" y="3822156"/>
+            <a:ext cx="853182" cy="400110"/>
+          </a:xfrm>
+          <a:prstGeom prst="rect">
+            <a:avLst/>
+          </a:prstGeom>
+          <a:noFill/>
+        </p:spPr>
+        <p:txBody>
+          <a:bodyPr wrap="square" rtlCol="0">
+            <a:spAutoFit/>
+          </a:bodyPr>
+          <a:lstStyle/>
+          <a:p>
+            <a:pPr algn="ctr"/>
+            <a:r>
+              <a:rPr lang="fr-FR" sz="1000" dirty="0"/>
+              <a:t>Longueur initiale</a:t>
+            </a:r>
+          </a:p>
+        </p:txBody>
+      </p:sp>
+      <p:grpSp>
+        <p:nvGrpSpPr>
+          <p:cNvPr id="91" name="Groupe 90">
+            <a:extLst>
+              <a:ext uri="{FF2B5EF4-FFF2-40B4-BE49-F238E27FC236}">
+                <a16:creationId xmlns:a16="http://schemas.microsoft.com/office/drawing/2014/main" id="{53121E33-119D-A275-6251-6B8396B8964B}"/>
+              </a:ext>
+            </a:extLst>
+          </p:cNvPr>
+          <p:cNvGrpSpPr/>
+          <p:nvPr/>
+        </p:nvGrpSpPr>
+        <p:grpSpPr>
+          <a:xfrm rot="1094879">
+            <a:off x="7316717" y="3028465"/>
+            <a:ext cx="492658" cy="1464385"/>
+            <a:chOff x="5955769" y="2966755"/>
+            <a:chExt cx="492658" cy="1464385"/>
+          </a:xfrm>
+        </p:grpSpPr>
+        <p:grpSp>
+          <p:nvGrpSpPr>
+            <p:cNvPr id="92" name="Groupe 91">
+              <a:extLst>
+                <a:ext uri="{FF2B5EF4-FFF2-40B4-BE49-F238E27FC236}">
+                  <a16:creationId xmlns:a16="http://schemas.microsoft.com/office/drawing/2014/main" id="{2248EB07-BCD5-B7C6-0454-B993CF9CC629}"/>
+                </a:ext>
+              </a:extLst>
+            </p:cNvPr>
+            <p:cNvGrpSpPr/>
+            <p:nvPr/>
+          </p:nvGrpSpPr>
+          <p:grpSpPr>
+            <a:xfrm>
+              <a:off x="6096000" y="3429000"/>
+              <a:ext cx="213784" cy="540000"/>
+              <a:chOff x="6096000" y="3429000"/>
+              <a:chExt cx="213784" cy="540000"/>
+            </a:xfrm>
+          </p:grpSpPr>
+          <p:cxnSp>
+            <p:nvCxnSpPr>
+              <p:cNvPr id="95" name="Connecteur droit 94">
+                <a:extLst>
+                  <a:ext uri="{FF2B5EF4-FFF2-40B4-BE49-F238E27FC236}">
+                    <a16:creationId xmlns:a16="http://schemas.microsoft.com/office/drawing/2014/main" id="{9E222C90-433A-6C6A-6D44-BF6F9DB1DB2F}"/>
+                  </a:ext>
+                </a:extLst>
+              </p:cNvPr>
+              <p:cNvCxnSpPr/>
+              <p:nvPr/>
+            </p:nvCxnSpPr>
+            <p:spPr>
+              <a:xfrm>
+                <a:off x="6096000" y="3429000"/>
+                <a:ext cx="0" cy="540000"/>
+              </a:xfrm>
+              <a:prstGeom prst="line">
+                <a:avLst/>
+              </a:prstGeom>
+              <a:noFill/>
+              <a:ln w="19050">
+                <a:solidFill>
+                  <a:srgbClr val="002060"/>
+                </a:solidFill>
+              </a:ln>
+            </p:spPr>
+            <p:style>
+              <a:lnRef idx="2">
+                <a:schemeClr val="accent1">
+                  <a:shade val="15000"/>
+                </a:schemeClr>
+              </a:lnRef>
+              <a:fillRef idx="1">
+                <a:schemeClr val="accent1"/>
+              </a:fillRef>
+              <a:effectRef idx="0">
+                <a:schemeClr val="accent1"/>
+              </a:effectRef>
+              <a:fontRef idx="minor">
+                <a:schemeClr val="lt1"/>
+              </a:fontRef>
+            </p:style>
+          </p:cxnSp>
+          <p:cxnSp>
+            <p:nvCxnSpPr>
+              <p:cNvPr id="96" name="Connecteur droit 95">
+                <a:extLst>
+                  <a:ext uri="{FF2B5EF4-FFF2-40B4-BE49-F238E27FC236}">
+                    <a16:creationId xmlns:a16="http://schemas.microsoft.com/office/drawing/2014/main" id="{14C7DA81-EDC6-8C66-24B8-87C389E5FB18}"/>
+                  </a:ext>
+                </a:extLst>
+              </p:cNvPr>
+              <p:cNvCxnSpPr/>
+              <p:nvPr/>
+            </p:nvCxnSpPr>
+            <p:spPr>
+              <a:xfrm>
+                <a:off x="6309784" y="3429000"/>
+                <a:ext cx="0" cy="540000"/>
+              </a:xfrm>
+              <a:prstGeom prst="line">
+                <a:avLst/>
+              </a:prstGeom>
+              <a:noFill/>
+              <a:ln w="19050">
+                <a:solidFill>
+                  <a:srgbClr val="002060"/>
+                </a:solidFill>
+              </a:ln>
+            </p:spPr>
+            <p:style>
+              <a:lnRef idx="2">
+                <a:schemeClr val="accent1">
+                  <a:shade val="15000"/>
+                </a:schemeClr>
+              </a:lnRef>
+              <a:fillRef idx="1">
+                <a:schemeClr val="accent1"/>
+              </a:fillRef>
+              <a:effectRef idx="0">
+                <a:schemeClr val="accent1"/>
+              </a:effectRef>
+              <a:fontRef idx="minor">
+                <a:schemeClr val="lt1"/>
+              </a:fontRef>
+            </p:style>
+          </p:cxnSp>
+        </p:grpSp>
+        <p:sp>
+          <p:nvSpPr>
+            <p:cNvPr id="93" name="Arc 92">
+              <a:extLst>
+                <a:ext uri="{FF2B5EF4-FFF2-40B4-BE49-F238E27FC236}">
+                  <a16:creationId xmlns:a16="http://schemas.microsoft.com/office/drawing/2014/main" id="{29B9EE5B-1A8F-46A6-AA2C-A7F6FB9B1099}"/>
+                </a:ext>
+              </a:extLst>
+            </p:cNvPr>
+            <p:cNvSpPr/>
+            <p:nvPr/>
+          </p:nvSpPr>
+          <p:spPr>
+            <a:xfrm>
+              <a:off x="5957357" y="2966755"/>
+              <a:ext cx="491070" cy="497100"/>
+            </a:xfrm>
+            <a:prstGeom prst="arc">
+              <a:avLst>
+                <a:gd name="adj1" fmla="val 6880296"/>
+                <a:gd name="adj2" fmla="val 3892021"/>
+              </a:avLst>
+            </a:prstGeom>
+            <a:noFill/>
+            <a:ln w="19050">
+              <a:solidFill>
+                <a:srgbClr val="002060"/>
+              </a:solidFill>
+            </a:ln>
+          </p:spPr>
+          <p:style>
+            <a:lnRef idx="2">
+              <a:schemeClr val="accent1">
+                <a:shade val="15000"/>
+              </a:schemeClr>
+            </a:lnRef>
+            <a:fillRef idx="1">
+              <a:schemeClr val="accent1"/>
+            </a:fillRef>
+            <a:effectRef idx="0">
+              <a:schemeClr val="accent1"/>
+            </a:effectRef>
+            <a:fontRef idx="minor">
+              <a:schemeClr val="lt1"/>
+            </a:fontRef>
+          </p:style>
+          <p:txBody>
+            <a:bodyPr rtlCol="0" anchor="ctr"/>
+            <a:lstStyle/>
+            <a:p>
+              <a:pPr algn="ctr"/>
+              <a:endParaRPr lang="fr-FR"/>
+            </a:p>
+          </p:txBody>
+        </p:sp>
+        <p:sp>
+          <p:nvSpPr>
+            <p:cNvPr id="94" name="Arc 93">
+              <a:extLst>
+                <a:ext uri="{FF2B5EF4-FFF2-40B4-BE49-F238E27FC236}">
+                  <a16:creationId xmlns:a16="http://schemas.microsoft.com/office/drawing/2014/main" id="{1F95974B-8995-9D89-B9C9-2534041CF825}"/>
+                </a:ext>
+              </a:extLst>
+            </p:cNvPr>
+            <p:cNvSpPr/>
+            <p:nvPr/>
+          </p:nvSpPr>
+          <p:spPr>
+            <a:xfrm flipV="1">
+              <a:off x="5955769" y="3934040"/>
+              <a:ext cx="491070" cy="497100"/>
+            </a:xfrm>
+            <a:prstGeom prst="arc">
+              <a:avLst>
+                <a:gd name="adj1" fmla="val 6880296"/>
+                <a:gd name="adj2" fmla="val 3892021"/>
+              </a:avLst>
+            </a:prstGeom>
+            <a:noFill/>
+            <a:ln w="19050">
+              <a:solidFill>
+                <a:srgbClr val="002060"/>
+              </a:solidFill>
+            </a:ln>
+          </p:spPr>
+          <p:style>
+            <a:lnRef idx="2">
+              <a:schemeClr val="accent1">
+                <a:shade val="15000"/>
+              </a:schemeClr>
+            </a:lnRef>
+            <a:fillRef idx="1">
+              <a:schemeClr val="accent1"/>
+            </a:fillRef>
+            <a:effectRef idx="0">
+              <a:schemeClr val="accent1"/>
+            </a:effectRef>
+            <a:fontRef idx="minor">
+              <a:schemeClr val="lt1"/>
+            </a:fontRef>
+          </p:style>
+          <p:txBody>
+            <a:bodyPr rtlCol="0" anchor="ctr"/>
+            <a:lstStyle/>
+            <a:p>
+              <a:pPr algn="ctr"/>
+              <a:endParaRPr lang="fr-FR"/>
+            </a:p>
+          </p:txBody>
+        </p:sp>
+      </p:grpSp>
+      <p:sp>
+        <p:nvSpPr>
+          <p:cNvPr id="98" name="Rectangle 97">
+            <a:extLst>
+              <a:ext uri="{FF2B5EF4-FFF2-40B4-BE49-F238E27FC236}">
+                <a16:creationId xmlns:a16="http://schemas.microsoft.com/office/drawing/2014/main" id="{AF1F3923-FCDA-CFE0-0147-A0D74903C2FE}"/>
+              </a:ext>
+            </a:extLst>
+          </p:cNvPr>
+          <p:cNvSpPr/>
+          <p:nvPr/>
+        </p:nvSpPr>
+        <p:spPr>
+          <a:xfrm>
+            <a:off x="9690100" y="2717800"/>
+            <a:ext cx="701756" cy="2163125"/>
+          </a:xfrm>
+          <a:prstGeom prst="rect">
+            <a:avLst/>
+          </a:prstGeom>
+          <a:noFill/>
+          <a:ln w="19050">
+            <a:solidFill>
+              <a:srgbClr val="002060"/>
+            </a:solidFill>
+          </a:ln>
+        </p:spPr>
+        <p:style>
+          <a:lnRef idx="2">
+            <a:schemeClr val="accent1">
+              <a:shade val="15000"/>
+            </a:schemeClr>
+          </a:lnRef>
+          <a:fillRef idx="1">
+            <a:schemeClr val="accent1"/>
+          </a:fillRef>
+          <a:effectRef idx="0">
+            <a:schemeClr val="accent1"/>
+          </a:effectRef>
+          <a:fontRef idx="minor">
+            <a:schemeClr val="lt1"/>
+          </a:fontRef>
+        </p:style>
+        <p:txBody>
+          <a:bodyPr rtlCol="0" anchor="ctr"/>
+          <a:lstStyle/>
+          <a:p>
+            <a:pPr algn="ctr"/>
+            <a:endParaRPr lang="fr-FR" dirty="0"/>
+          </a:p>
+        </p:txBody>
+      </p:sp>
+      <p:sp>
+        <p:nvSpPr>
+          <p:cNvPr id="99" name="Rectangle 98">
+            <a:extLst>
+              <a:ext uri="{FF2B5EF4-FFF2-40B4-BE49-F238E27FC236}">
+                <a16:creationId xmlns:a16="http://schemas.microsoft.com/office/drawing/2014/main" id="{82F1B032-B159-2A8B-9E64-39C252428B1E}"/>
+              </a:ext>
+            </a:extLst>
+          </p:cNvPr>
+          <p:cNvSpPr/>
+          <p:nvPr/>
+        </p:nvSpPr>
+        <p:spPr>
+          <a:xfrm>
+            <a:off x="11134776" y="2296636"/>
+            <a:ext cx="701756" cy="2598000"/>
+          </a:xfrm>
+          <a:prstGeom prst="rect">
+            <a:avLst/>
+          </a:prstGeom>
+          <a:noFill/>
+          <a:ln w="19050">
+            <a:solidFill>
+              <a:srgbClr val="002060"/>
+            </a:solidFill>
+          </a:ln>
+        </p:spPr>
+        <p:style>
+          <a:lnRef idx="2">
+            <a:schemeClr val="accent1">
+              <a:shade val="15000"/>
+            </a:schemeClr>
+          </a:lnRef>
+          <a:fillRef idx="1">
+            <a:schemeClr val="accent1"/>
+          </a:fillRef>
+          <a:effectRef idx="0">
+            <a:schemeClr val="accent1"/>
+          </a:effectRef>
+          <a:fontRef idx="minor">
+            <a:schemeClr val="lt1"/>
+          </a:fontRef>
+        </p:style>
+        <p:txBody>
+          <a:bodyPr rtlCol="0" anchor="ctr"/>
+          <a:lstStyle/>
+          <a:p>
+            <a:pPr algn="ctr"/>
+            <a:endParaRPr lang="fr-FR" dirty="0"/>
+          </a:p>
+        </p:txBody>
+      </p:sp>
+      <p:cxnSp>
+        <p:nvCxnSpPr>
+          <p:cNvPr id="100" name="Connecteur droit 99">
+            <a:extLst>
+              <a:ext uri="{FF2B5EF4-FFF2-40B4-BE49-F238E27FC236}">
+                <a16:creationId xmlns:a16="http://schemas.microsoft.com/office/drawing/2014/main" id="{9E25AEEB-6186-D9C4-7028-23B548FF108E}"/>
+              </a:ext>
+            </a:extLst>
+          </p:cNvPr>
+          <p:cNvCxnSpPr>
+            <a:cxnSpLocks/>
+          </p:cNvCxnSpPr>
+          <p:nvPr/>
+        </p:nvCxnSpPr>
+        <p:spPr>
+          <a:xfrm flipV="1">
+            <a:off x="11134776" y="2296636"/>
+            <a:ext cx="0" cy="280953"/>
+          </a:xfrm>
+          <a:prstGeom prst="line">
+            <a:avLst/>
+          </a:prstGeom>
+          <a:noFill/>
+          <a:ln w="19050">
+            <a:solidFill>
+              <a:srgbClr val="C00000"/>
+            </a:solidFill>
+          </a:ln>
+        </p:spPr>
+        <p:style>
+          <a:lnRef idx="2">
+            <a:schemeClr val="accent1">
+              <a:shade val="15000"/>
+            </a:schemeClr>
+          </a:lnRef>
+          <a:fillRef idx="1">
+            <a:schemeClr val="accent1"/>
+          </a:fillRef>
+          <a:effectRef idx="0">
+            <a:schemeClr val="accent1"/>
+          </a:effectRef>
+          <a:fontRef idx="minor">
+            <a:schemeClr val="lt1"/>
+          </a:fontRef>
+        </p:style>
+      </p:cxnSp>
+      <p:cxnSp>
+        <p:nvCxnSpPr>
+          <p:cNvPr id="102" name="Connecteur droit 101">
+            <a:extLst>
+              <a:ext uri="{FF2B5EF4-FFF2-40B4-BE49-F238E27FC236}">
+                <a16:creationId xmlns:a16="http://schemas.microsoft.com/office/drawing/2014/main" id="{022E8CA8-85BF-C794-E232-4F85B185FFC2}"/>
+              </a:ext>
+            </a:extLst>
+          </p:cNvPr>
+          <p:cNvCxnSpPr>
+            <a:cxnSpLocks/>
+          </p:cNvCxnSpPr>
+          <p:nvPr/>
+        </p:nvCxnSpPr>
+        <p:spPr>
+          <a:xfrm flipV="1">
+            <a:off x="11836532" y="2303320"/>
+            <a:ext cx="0" cy="280953"/>
+          </a:xfrm>
+          <a:prstGeom prst="line">
+            <a:avLst/>
+          </a:prstGeom>
+          <a:noFill/>
+          <a:ln w="19050">
+            <a:solidFill>
+              <a:srgbClr val="C00000"/>
+            </a:solidFill>
+          </a:ln>
+        </p:spPr>
+        <p:style>
+          <a:lnRef idx="2">
+            <a:schemeClr val="accent1">
+              <a:shade val="15000"/>
+            </a:schemeClr>
+          </a:lnRef>
+          <a:fillRef idx="1">
+            <a:schemeClr val="accent1"/>
+          </a:fillRef>
+          <a:effectRef idx="0">
+            <a:schemeClr val="accent1"/>
+          </a:effectRef>
+          <a:fontRef idx="minor">
+            <a:schemeClr val="lt1"/>
+          </a:fontRef>
+        </p:style>
+      </p:cxnSp>
+      <p:grpSp>
+        <p:nvGrpSpPr>
+          <p:cNvPr id="125" name="Groupe 124">
+            <a:extLst>
+              <a:ext uri="{FF2B5EF4-FFF2-40B4-BE49-F238E27FC236}">
+                <a16:creationId xmlns:a16="http://schemas.microsoft.com/office/drawing/2014/main" id="{183DE6C0-EE88-C45D-B297-C01C6A77D089}"/>
+              </a:ext>
+            </a:extLst>
+          </p:cNvPr>
+          <p:cNvGrpSpPr/>
+          <p:nvPr/>
+        </p:nvGrpSpPr>
+        <p:grpSpPr>
+          <a:xfrm>
+            <a:off x="9788337" y="3390984"/>
+            <a:ext cx="500067" cy="983280"/>
+            <a:chOff x="9832786" y="3390984"/>
+            <a:chExt cx="500067" cy="983280"/>
+          </a:xfrm>
+        </p:grpSpPr>
+        <p:grpSp>
+          <p:nvGrpSpPr>
+            <p:cNvPr id="109" name="Groupe 108">
+              <a:extLst>
+                <a:ext uri="{FF2B5EF4-FFF2-40B4-BE49-F238E27FC236}">
+                  <a16:creationId xmlns:a16="http://schemas.microsoft.com/office/drawing/2014/main" id="{E9908667-8F7D-9689-2234-2424C346A658}"/>
+                </a:ext>
+              </a:extLst>
+            </p:cNvPr>
+            <p:cNvGrpSpPr/>
+            <p:nvPr/>
+          </p:nvGrpSpPr>
+          <p:grpSpPr>
+            <a:xfrm>
+              <a:off x="9832786" y="3399063"/>
+              <a:ext cx="143999" cy="951287"/>
+              <a:chOff x="9832786" y="3399063"/>
+              <a:chExt cx="143999" cy="951287"/>
+            </a:xfrm>
+          </p:grpSpPr>
+          <p:cxnSp>
+            <p:nvCxnSpPr>
+              <p:cNvPr id="103" name="Connecteur droit 102">
+                <a:extLst>
+                  <a:ext uri="{FF2B5EF4-FFF2-40B4-BE49-F238E27FC236}">
+                    <a16:creationId xmlns:a16="http://schemas.microsoft.com/office/drawing/2014/main" id="{32A9D0FD-79B3-AD24-1F79-A36EEB0DBF47}"/>
+                  </a:ext>
+                </a:extLst>
+              </p:cNvPr>
+              <p:cNvCxnSpPr>
+                <a:cxnSpLocks/>
+              </p:cNvCxnSpPr>
+              <p:nvPr/>
+            </p:nvCxnSpPr>
+            <p:spPr>
+              <a:xfrm flipV="1">
+                <a:off x="9832787" y="3429000"/>
+                <a:ext cx="0" cy="921350"/>
+              </a:xfrm>
+              <a:prstGeom prst="line">
+                <a:avLst/>
+              </a:prstGeom>
+              <a:noFill/>
+              <a:ln w="19050">
+                <a:solidFill>
+                  <a:srgbClr val="002060"/>
+                </a:solidFill>
+              </a:ln>
+            </p:spPr>
+            <p:style>
+              <a:lnRef idx="2">
+                <a:schemeClr val="accent1">
+                  <a:shade val="15000"/>
+                </a:schemeClr>
+              </a:lnRef>
+              <a:fillRef idx="1">
+                <a:schemeClr val="accent1"/>
+              </a:fillRef>
+              <a:effectRef idx="0">
+                <a:schemeClr val="accent1"/>
+              </a:effectRef>
+              <a:fontRef idx="minor">
+                <a:schemeClr val="lt1"/>
+              </a:fontRef>
+            </p:style>
+          </p:cxnSp>
+          <p:cxnSp>
+            <p:nvCxnSpPr>
+              <p:cNvPr id="106" name="Connecteur droit 105">
+                <a:extLst>
+                  <a:ext uri="{FF2B5EF4-FFF2-40B4-BE49-F238E27FC236}">
+                    <a16:creationId xmlns:a16="http://schemas.microsoft.com/office/drawing/2014/main" id="{C78898AC-180A-F2B4-7BC9-041447410A29}"/>
+                  </a:ext>
+                </a:extLst>
+              </p:cNvPr>
+              <p:cNvCxnSpPr>
+                <a:cxnSpLocks/>
+              </p:cNvCxnSpPr>
+              <p:nvPr/>
+            </p:nvCxnSpPr>
+            <p:spPr>
+              <a:xfrm flipV="1">
+                <a:off x="9904786" y="3429000"/>
+                <a:ext cx="0" cy="720000"/>
+              </a:xfrm>
+              <a:prstGeom prst="line">
+                <a:avLst/>
+              </a:prstGeom>
+              <a:noFill/>
+              <a:ln w="19050">
+                <a:solidFill>
+                  <a:srgbClr val="002060"/>
+                </a:solidFill>
+              </a:ln>
+            </p:spPr>
+            <p:style>
+              <a:lnRef idx="2">
+                <a:schemeClr val="accent1">
+                  <a:shade val="15000"/>
+                </a:schemeClr>
+              </a:lnRef>
+              <a:fillRef idx="1">
+                <a:schemeClr val="accent1"/>
+              </a:fillRef>
+              <a:effectRef idx="0">
+                <a:schemeClr val="accent1"/>
+              </a:effectRef>
+              <a:fontRef idx="minor">
+                <a:schemeClr val="lt1"/>
+              </a:fontRef>
+            </p:style>
+          </p:cxnSp>
+          <p:sp>
+            <p:nvSpPr>
+              <p:cNvPr id="107" name="Arc 106">
+                <a:extLst>
+                  <a:ext uri="{FF2B5EF4-FFF2-40B4-BE49-F238E27FC236}">
+                    <a16:creationId xmlns:a16="http://schemas.microsoft.com/office/drawing/2014/main" id="{80189AC9-37E8-239F-4241-2B70FF88B6BB}"/>
+                  </a:ext>
+                </a:extLst>
+              </p:cNvPr>
+              <p:cNvSpPr/>
+              <p:nvPr/>
+            </p:nvSpPr>
+            <p:spPr>
+              <a:xfrm>
+                <a:off x="9832786" y="3399063"/>
+                <a:ext cx="72000" cy="72000"/>
+              </a:xfrm>
+              <a:prstGeom prst="arc">
+                <a:avLst>
+                  <a:gd name="adj1" fmla="val 10395250"/>
+                  <a:gd name="adj2" fmla="val 0"/>
+                </a:avLst>
+              </a:prstGeom>
+              <a:noFill/>
+              <a:ln w="19050">
+                <a:solidFill>
+                  <a:srgbClr val="002060"/>
+                </a:solidFill>
+              </a:ln>
+            </p:spPr>
+            <p:style>
+              <a:lnRef idx="2">
+                <a:schemeClr val="accent1">
+                  <a:shade val="15000"/>
+                </a:schemeClr>
+              </a:lnRef>
+              <a:fillRef idx="1">
+                <a:schemeClr val="accent1"/>
+              </a:fillRef>
+              <a:effectRef idx="0">
+                <a:schemeClr val="accent1"/>
+              </a:effectRef>
+              <a:fontRef idx="minor">
+                <a:schemeClr val="lt1"/>
+              </a:fontRef>
+            </p:style>
+            <p:txBody>
+              <a:bodyPr rtlCol="0" anchor="ctr"/>
+              <a:lstStyle/>
+              <a:p>
+                <a:pPr algn="ctr"/>
+                <a:endParaRPr lang="fr-FR"/>
+              </a:p>
+            </p:txBody>
+          </p:sp>
+          <p:sp>
+            <p:nvSpPr>
+              <p:cNvPr id="108" name="Arc 107">
+                <a:extLst>
+                  <a:ext uri="{FF2B5EF4-FFF2-40B4-BE49-F238E27FC236}">
+                    <a16:creationId xmlns:a16="http://schemas.microsoft.com/office/drawing/2014/main" id="{21461EB5-DB15-5BC1-40FF-2864C33C2B2A}"/>
+                  </a:ext>
+                </a:extLst>
+              </p:cNvPr>
+              <p:cNvSpPr/>
+              <p:nvPr/>
+            </p:nvSpPr>
+            <p:spPr>
+              <a:xfrm flipV="1">
+                <a:off x="9904785" y="4106937"/>
+                <a:ext cx="72000" cy="72000"/>
+              </a:xfrm>
+              <a:prstGeom prst="arc">
+                <a:avLst>
+                  <a:gd name="adj1" fmla="val 10395250"/>
+                  <a:gd name="adj2" fmla="val 460582"/>
+                </a:avLst>
+              </a:prstGeom>
+              <a:noFill/>
+              <a:ln w="19050">
+                <a:solidFill>
+                  <a:srgbClr val="002060"/>
+                </a:solidFill>
+              </a:ln>
+            </p:spPr>
+            <p:style>
+              <a:lnRef idx="2">
+                <a:schemeClr val="accent1">
+                  <a:shade val="15000"/>
+                </a:schemeClr>
+              </a:lnRef>
+              <a:fillRef idx="1">
+                <a:schemeClr val="accent1"/>
+              </a:fillRef>
+              <a:effectRef idx="0">
+                <a:schemeClr val="accent1"/>
+              </a:effectRef>
+              <a:fontRef idx="minor">
+                <a:schemeClr val="lt1"/>
+              </a:fontRef>
+            </p:style>
+            <p:txBody>
+              <a:bodyPr rtlCol="0" anchor="ctr"/>
+              <a:lstStyle/>
+              <a:p>
+                <a:pPr algn="ctr"/>
+                <a:endParaRPr lang="fr-FR"/>
+              </a:p>
+            </p:txBody>
+          </p:sp>
+        </p:grpSp>
+        <p:grpSp>
+          <p:nvGrpSpPr>
+            <p:cNvPr id="110" name="Groupe 109">
+              <a:extLst>
+                <a:ext uri="{FF2B5EF4-FFF2-40B4-BE49-F238E27FC236}">
+                  <a16:creationId xmlns:a16="http://schemas.microsoft.com/office/drawing/2014/main" id="{4F20C047-35C8-B334-8247-017F4B472BA7}"/>
+                </a:ext>
+              </a:extLst>
+            </p:cNvPr>
+            <p:cNvGrpSpPr/>
+            <p:nvPr/>
+          </p:nvGrpSpPr>
+          <p:grpSpPr>
+            <a:xfrm>
+              <a:off x="9975475" y="3396370"/>
+              <a:ext cx="143999" cy="779874"/>
+              <a:chOff x="9832786" y="3399063"/>
+              <a:chExt cx="143999" cy="779874"/>
+            </a:xfrm>
+          </p:grpSpPr>
+          <p:cxnSp>
+            <p:nvCxnSpPr>
+              <p:cNvPr id="111" name="Connecteur droit 110">
+                <a:extLst>
+                  <a:ext uri="{FF2B5EF4-FFF2-40B4-BE49-F238E27FC236}">
+                    <a16:creationId xmlns:a16="http://schemas.microsoft.com/office/drawing/2014/main" id="{D962238D-2650-3F53-5E89-82ABC8D5ED55}"/>
+                  </a:ext>
+                </a:extLst>
+              </p:cNvPr>
+              <p:cNvCxnSpPr>
+                <a:cxnSpLocks/>
+              </p:cNvCxnSpPr>
+              <p:nvPr/>
+            </p:nvCxnSpPr>
+            <p:spPr>
+              <a:xfrm flipV="1">
+                <a:off x="9832787" y="3429000"/>
+                <a:ext cx="0" cy="720000"/>
+              </a:xfrm>
+              <a:prstGeom prst="line">
+                <a:avLst/>
+              </a:prstGeom>
+              <a:noFill/>
+              <a:ln w="19050">
+                <a:solidFill>
+                  <a:srgbClr val="002060"/>
+                </a:solidFill>
+              </a:ln>
+            </p:spPr>
+            <p:style>
+              <a:lnRef idx="2">
+                <a:schemeClr val="accent1">
+                  <a:shade val="15000"/>
+                </a:schemeClr>
+              </a:lnRef>
+              <a:fillRef idx="1">
+                <a:schemeClr val="accent1"/>
+              </a:fillRef>
+              <a:effectRef idx="0">
+                <a:schemeClr val="accent1"/>
+              </a:effectRef>
+              <a:fontRef idx="minor">
+                <a:schemeClr val="lt1"/>
+              </a:fontRef>
+            </p:style>
+          </p:cxnSp>
+          <p:cxnSp>
+            <p:nvCxnSpPr>
+              <p:cNvPr id="112" name="Connecteur droit 111">
+                <a:extLst>
+                  <a:ext uri="{FF2B5EF4-FFF2-40B4-BE49-F238E27FC236}">
+                    <a16:creationId xmlns:a16="http://schemas.microsoft.com/office/drawing/2014/main" id="{5983D545-E7E1-7D22-F7B5-4D3F4EB23581}"/>
+                  </a:ext>
+                </a:extLst>
+              </p:cNvPr>
+              <p:cNvCxnSpPr>
+                <a:cxnSpLocks/>
+              </p:cNvCxnSpPr>
+              <p:nvPr/>
+            </p:nvCxnSpPr>
+            <p:spPr>
+              <a:xfrm flipV="1">
+                <a:off x="9904786" y="3429000"/>
+                <a:ext cx="0" cy="720000"/>
+              </a:xfrm>
+              <a:prstGeom prst="line">
+                <a:avLst/>
+              </a:prstGeom>
+              <a:noFill/>
+              <a:ln w="19050">
+                <a:solidFill>
+                  <a:srgbClr val="002060"/>
+                </a:solidFill>
+              </a:ln>
+            </p:spPr>
+            <p:style>
+              <a:lnRef idx="2">
+                <a:schemeClr val="accent1">
+                  <a:shade val="15000"/>
+                </a:schemeClr>
+              </a:lnRef>
+              <a:fillRef idx="1">
+                <a:schemeClr val="accent1"/>
+              </a:fillRef>
+              <a:effectRef idx="0">
+                <a:schemeClr val="accent1"/>
+              </a:effectRef>
+              <a:fontRef idx="minor">
+                <a:schemeClr val="lt1"/>
+              </a:fontRef>
+            </p:style>
+          </p:cxnSp>
+          <p:sp>
+            <p:nvSpPr>
+              <p:cNvPr id="113" name="Arc 112">
+                <a:extLst>
+                  <a:ext uri="{FF2B5EF4-FFF2-40B4-BE49-F238E27FC236}">
+                    <a16:creationId xmlns:a16="http://schemas.microsoft.com/office/drawing/2014/main" id="{1E495067-D397-79C6-7A4C-CBC65861D132}"/>
+                  </a:ext>
+                </a:extLst>
+              </p:cNvPr>
+              <p:cNvSpPr/>
+              <p:nvPr/>
+            </p:nvSpPr>
+            <p:spPr>
+              <a:xfrm>
+                <a:off x="9832786" y="3399063"/>
+                <a:ext cx="72000" cy="72000"/>
+              </a:xfrm>
+              <a:prstGeom prst="arc">
+                <a:avLst>
+                  <a:gd name="adj1" fmla="val 10395250"/>
+                  <a:gd name="adj2" fmla="val 0"/>
+                </a:avLst>
+              </a:prstGeom>
+              <a:noFill/>
+              <a:ln w="19050">
+                <a:solidFill>
+                  <a:srgbClr val="002060"/>
+                </a:solidFill>
+              </a:ln>
+            </p:spPr>
+            <p:style>
+              <a:lnRef idx="2">
+                <a:schemeClr val="accent1">
+                  <a:shade val="15000"/>
+                </a:schemeClr>
+              </a:lnRef>
+              <a:fillRef idx="1">
+                <a:schemeClr val="accent1"/>
+              </a:fillRef>
+              <a:effectRef idx="0">
+                <a:schemeClr val="accent1"/>
+              </a:effectRef>
+              <a:fontRef idx="minor">
+                <a:schemeClr val="lt1"/>
+              </a:fontRef>
+            </p:style>
+            <p:txBody>
+              <a:bodyPr rtlCol="0" anchor="ctr"/>
+              <a:lstStyle/>
+              <a:p>
+                <a:pPr algn="ctr"/>
+                <a:endParaRPr lang="fr-FR"/>
+              </a:p>
+            </p:txBody>
+          </p:sp>
+          <p:sp>
+            <p:nvSpPr>
+              <p:cNvPr id="114" name="Arc 113">
+                <a:extLst>
+                  <a:ext uri="{FF2B5EF4-FFF2-40B4-BE49-F238E27FC236}">
+                    <a16:creationId xmlns:a16="http://schemas.microsoft.com/office/drawing/2014/main" id="{63EED357-AE38-F6B4-1660-E1C69D862589}"/>
+                  </a:ext>
+                </a:extLst>
+              </p:cNvPr>
+              <p:cNvSpPr/>
+              <p:nvPr/>
+            </p:nvSpPr>
+            <p:spPr>
+              <a:xfrm flipV="1">
+                <a:off x="9904785" y="4106937"/>
+                <a:ext cx="72000" cy="72000"/>
+              </a:xfrm>
+              <a:prstGeom prst="arc">
+                <a:avLst>
+                  <a:gd name="adj1" fmla="val 10395250"/>
+                  <a:gd name="adj2" fmla="val 460582"/>
+                </a:avLst>
+              </a:prstGeom>
+              <a:noFill/>
+              <a:ln w="19050">
+                <a:solidFill>
+                  <a:srgbClr val="002060"/>
+                </a:solidFill>
+              </a:ln>
+            </p:spPr>
+            <p:style>
+              <a:lnRef idx="2">
+                <a:schemeClr val="accent1">
+                  <a:shade val="15000"/>
+                </a:schemeClr>
+              </a:lnRef>
+              <a:fillRef idx="1">
+                <a:schemeClr val="accent1"/>
+              </a:fillRef>
+              <a:effectRef idx="0">
+                <a:schemeClr val="accent1"/>
+              </a:effectRef>
+              <a:fontRef idx="minor">
+                <a:schemeClr val="lt1"/>
+              </a:fontRef>
+            </p:style>
+            <p:txBody>
+              <a:bodyPr rtlCol="0" anchor="ctr"/>
+              <a:lstStyle/>
+              <a:p>
+                <a:pPr algn="ctr"/>
+                <a:endParaRPr lang="fr-FR"/>
+              </a:p>
+            </p:txBody>
+          </p:sp>
+        </p:grpSp>
+        <p:grpSp>
+          <p:nvGrpSpPr>
+            <p:cNvPr id="115" name="Groupe 114">
+              <a:extLst>
+                <a:ext uri="{FF2B5EF4-FFF2-40B4-BE49-F238E27FC236}">
+                  <a16:creationId xmlns:a16="http://schemas.microsoft.com/office/drawing/2014/main" id="{140192CD-09AA-A879-58CB-DF43E24753CA}"/>
+                </a:ext>
+              </a:extLst>
+            </p:cNvPr>
+            <p:cNvGrpSpPr/>
+            <p:nvPr/>
+          </p:nvGrpSpPr>
+          <p:grpSpPr>
+            <a:xfrm>
+              <a:off x="10118164" y="3393677"/>
+              <a:ext cx="143999" cy="779874"/>
+              <a:chOff x="9832786" y="3399063"/>
+              <a:chExt cx="143999" cy="779874"/>
+            </a:xfrm>
+          </p:grpSpPr>
+          <p:cxnSp>
+            <p:nvCxnSpPr>
+              <p:cNvPr id="116" name="Connecteur droit 115">
+                <a:extLst>
+                  <a:ext uri="{FF2B5EF4-FFF2-40B4-BE49-F238E27FC236}">
+                    <a16:creationId xmlns:a16="http://schemas.microsoft.com/office/drawing/2014/main" id="{599AF6D4-458B-94B1-B6BC-7342452EA97B}"/>
+                  </a:ext>
+                </a:extLst>
+              </p:cNvPr>
+              <p:cNvCxnSpPr>
+                <a:cxnSpLocks/>
+              </p:cNvCxnSpPr>
+              <p:nvPr/>
+            </p:nvCxnSpPr>
+            <p:spPr>
+              <a:xfrm flipV="1">
+                <a:off x="9832787" y="3429000"/>
+                <a:ext cx="0" cy="720000"/>
+              </a:xfrm>
+              <a:prstGeom prst="line">
+                <a:avLst/>
+              </a:prstGeom>
+              <a:noFill/>
+              <a:ln w="19050">
+                <a:solidFill>
+                  <a:srgbClr val="002060"/>
+                </a:solidFill>
+              </a:ln>
+            </p:spPr>
+            <p:style>
+              <a:lnRef idx="2">
+                <a:schemeClr val="accent1">
+                  <a:shade val="15000"/>
+                </a:schemeClr>
+              </a:lnRef>
+              <a:fillRef idx="1">
+                <a:schemeClr val="accent1"/>
+              </a:fillRef>
+              <a:effectRef idx="0">
+                <a:schemeClr val="accent1"/>
+              </a:effectRef>
+              <a:fontRef idx="minor">
+                <a:schemeClr val="lt1"/>
+              </a:fontRef>
+            </p:style>
+          </p:cxnSp>
+          <p:cxnSp>
+            <p:nvCxnSpPr>
+              <p:cNvPr id="117" name="Connecteur droit 116">
+                <a:extLst>
+                  <a:ext uri="{FF2B5EF4-FFF2-40B4-BE49-F238E27FC236}">
+                    <a16:creationId xmlns:a16="http://schemas.microsoft.com/office/drawing/2014/main" id="{697F83B1-625B-33ED-1DD3-EB83F45FBF2F}"/>
+                  </a:ext>
+                </a:extLst>
+              </p:cNvPr>
+              <p:cNvCxnSpPr>
+                <a:cxnSpLocks/>
+              </p:cNvCxnSpPr>
+              <p:nvPr/>
+            </p:nvCxnSpPr>
+            <p:spPr>
+              <a:xfrm flipV="1">
+                <a:off x="9904786" y="3429000"/>
+                <a:ext cx="0" cy="720000"/>
+              </a:xfrm>
+              <a:prstGeom prst="line">
+                <a:avLst/>
+              </a:prstGeom>
+              <a:noFill/>
+              <a:ln w="19050">
+                <a:solidFill>
+                  <a:srgbClr val="002060"/>
+                </a:solidFill>
+              </a:ln>
+            </p:spPr>
+            <p:style>
+              <a:lnRef idx="2">
+                <a:schemeClr val="accent1">
+                  <a:shade val="15000"/>
+                </a:schemeClr>
+              </a:lnRef>
+              <a:fillRef idx="1">
+                <a:schemeClr val="accent1"/>
+              </a:fillRef>
+              <a:effectRef idx="0">
+                <a:schemeClr val="accent1"/>
+              </a:effectRef>
+              <a:fontRef idx="minor">
+                <a:schemeClr val="lt1"/>
+              </a:fontRef>
+            </p:style>
+          </p:cxnSp>
+          <p:sp>
+            <p:nvSpPr>
+              <p:cNvPr id="118" name="Arc 117">
+                <a:extLst>
+                  <a:ext uri="{FF2B5EF4-FFF2-40B4-BE49-F238E27FC236}">
+                    <a16:creationId xmlns:a16="http://schemas.microsoft.com/office/drawing/2014/main" id="{D36280FD-D12E-F08D-CB73-2F1CFCDC8CAC}"/>
+                  </a:ext>
+                </a:extLst>
+              </p:cNvPr>
+              <p:cNvSpPr/>
+              <p:nvPr/>
+            </p:nvSpPr>
+            <p:spPr>
+              <a:xfrm>
+                <a:off x="9832786" y="3399063"/>
+                <a:ext cx="72000" cy="72000"/>
+              </a:xfrm>
+              <a:prstGeom prst="arc">
+                <a:avLst>
+                  <a:gd name="adj1" fmla="val 10395250"/>
+                  <a:gd name="adj2" fmla="val 0"/>
+                </a:avLst>
+              </a:prstGeom>
+              <a:noFill/>
+              <a:ln w="19050">
+                <a:solidFill>
+                  <a:srgbClr val="002060"/>
+                </a:solidFill>
+              </a:ln>
+            </p:spPr>
+            <p:style>
+              <a:lnRef idx="2">
+                <a:schemeClr val="accent1">
+                  <a:shade val="15000"/>
+                </a:schemeClr>
+              </a:lnRef>
+              <a:fillRef idx="1">
+                <a:schemeClr val="accent1"/>
+              </a:fillRef>
+              <a:effectRef idx="0">
+                <a:schemeClr val="accent1"/>
+              </a:effectRef>
+              <a:fontRef idx="minor">
+                <a:schemeClr val="lt1"/>
+              </a:fontRef>
+            </p:style>
+            <p:txBody>
+              <a:bodyPr rtlCol="0" anchor="ctr"/>
+              <a:lstStyle/>
+              <a:p>
+                <a:pPr algn="ctr"/>
+                <a:endParaRPr lang="fr-FR"/>
+              </a:p>
+            </p:txBody>
+          </p:sp>
+          <p:sp>
+            <p:nvSpPr>
+              <p:cNvPr id="119" name="Arc 118">
+                <a:extLst>
+                  <a:ext uri="{FF2B5EF4-FFF2-40B4-BE49-F238E27FC236}">
+                    <a16:creationId xmlns:a16="http://schemas.microsoft.com/office/drawing/2014/main" id="{61761E00-EA7B-E856-693B-560FA5F106DA}"/>
+                  </a:ext>
+                </a:extLst>
+              </p:cNvPr>
+              <p:cNvSpPr/>
+              <p:nvPr/>
+            </p:nvSpPr>
+            <p:spPr>
+              <a:xfrm flipV="1">
+                <a:off x="9904785" y="4106937"/>
+                <a:ext cx="72000" cy="72000"/>
+              </a:xfrm>
+              <a:prstGeom prst="arc">
+                <a:avLst>
+                  <a:gd name="adj1" fmla="val 10395250"/>
+                  <a:gd name="adj2" fmla="val 460582"/>
+                </a:avLst>
+              </a:prstGeom>
+              <a:noFill/>
+              <a:ln w="19050">
+                <a:solidFill>
+                  <a:srgbClr val="002060"/>
+                </a:solidFill>
+              </a:ln>
+            </p:spPr>
+            <p:style>
+              <a:lnRef idx="2">
+                <a:schemeClr val="accent1">
+                  <a:shade val="15000"/>
+                </a:schemeClr>
+              </a:lnRef>
+              <a:fillRef idx="1">
+                <a:schemeClr val="accent1"/>
+              </a:fillRef>
+              <a:effectRef idx="0">
+                <a:schemeClr val="accent1"/>
+              </a:effectRef>
+              <a:fontRef idx="minor">
+                <a:schemeClr val="lt1"/>
+              </a:fontRef>
+            </p:style>
+            <p:txBody>
+              <a:bodyPr rtlCol="0" anchor="ctr"/>
+              <a:lstStyle/>
+              <a:p>
+                <a:pPr algn="ctr"/>
+                <a:endParaRPr lang="fr-FR"/>
+              </a:p>
+            </p:txBody>
+          </p:sp>
+        </p:grpSp>
+        <p:grpSp>
+          <p:nvGrpSpPr>
+            <p:cNvPr id="120" name="Groupe 119">
+              <a:extLst>
+                <a:ext uri="{FF2B5EF4-FFF2-40B4-BE49-F238E27FC236}">
+                  <a16:creationId xmlns:a16="http://schemas.microsoft.com/office/drawing/2014/main" id="{ADAA1FAB-A0FD-A871-FFD3-F462F72D404B}"/>
+                </a:ext>
+              </a:extLst>
+            </p:cNvPr>
+            <p:cNvGrpSpPr/>
+            <p:nvPr/>
+          </p:nvGrpSpPr>
+          <p:grpSpPr>
+            <a:xfrm>
+              <a:off x="10260853" y="3390984"/>
+              <a:ext cx="72000" cy="983280"/>
+              <a:chOff x="9832786" y="3399063"/>
+              <a:chExt cx="72000" cy="983280"/>
+            </a:xfrm>
+          </p:grpSpPr>
+          <p:cxnSp>
+            <p:nvCxnSpPr>
+              <p:cNvPr id="121" name="Connecteur droit 120">
+                <a:extLst>
+                  <a:ext uri="{FF2B5EF4-FFF2-40B4-BE49-F238E27FC236}">
+                    <a16:creationId xmlns:a16="http://schemas.microsoft.com/office/drawing/2014/main" id="{ABAB85E5-392C-6CC5-B0FD-E34D2CF55AF3}"/>
+                  </a:ext>
+                </a:extLst>
+              </p:cNvPr>
+              <p:cNvCxnSpPr>
+                <a:cxnSpLocks/>
+              </p:cNvCxnSpPr>
+              <p:nvPr/>
+            </p:nvCxnSpPr>
+            <p:spPr>
+              <a:xfrm flipV="1">
+                <a:off x="9832787" y="3429000"/>
+                <a:ext cx="0" cy="720000"/>
+              </a:xfrm>
+              <a:prstGeom prst="line">
+                <a:avLst/>
+              </a:prstGeom>
+              <a:noFill/>
+              <a:ln w="19050">
+                <a:solidFill>
+                  <a:srgbClr val="002060"/>
+                </a:solidFill>
+              </a:ln>
+            </p:spPr>
+            <p:style>
+              <a:lnRef idx="2">
+                <a:schemeClr val="accent1">
+                  <a:shade val="15000"/>
+                </a:schemeClr>
+              </a:lnRef>
+              <a:fillRef idx="1">
+                <a:schemeClr val="accent1"/>
+              </a:fillRef>
+              <a:effectRef idx="0">
+                <a:schemeClr val="accent1"/>
+              </a:effectRef>
+              <a:fontRef idx="minor">
+                <a:schemeClr val="lt1"/>
+              </a:fontRef>
+            </p:style>
+          </p:cxnSp>
+          <p:cxnSp>
+            <p:nvCxnSpPr>
+              <p:cNvPr id="122" name="Connecteur droit 121">
+                <a:extLst>
+                  <a:ext uri="{FF2B5EF4-FFF2-40B4-BE49-F238E27FC236}">
+                    <a16:creationId xmlns:a16="http://schemas.microsoft.com/office/drawing/2014/main" id="{0D4C81E1-AC83-6C89-9443-0F797F9B5D56}"/>
+                  </a:ext>
+                </a:extLst>
+              </p:cNvPr>
+              <p:cNvCxnSpPr>
+                <a:cxnSpLocks/>
+              </p:cNvCxnSpPr>
+              <p:nvPr/>
+            </p:nvCxnSpPr>
+            <p:spPr>
+              <a:xfrm flipV="1">
+                <a:off x="9904786" y="3429000"/>
+                <a:ext cx="0" cy="953343"/>
+              </a:xfrm>
+              <a:prstGeom prst="line">
+                <a:avLst/>
+              </a:prstGeom>
+              <a:noFill/>
+              <a:ln w="19050">
+                <a:solidFill>
+                  <a:srgbClr val="002060"/>
+                </a:solidFill>
+              </a:ln>
+            </p:spPr>
+            <p:style>
+              <a:lnRef idx="2">
+                <a:schemeClr val="accent1">
+                  <a:shade val="15000"/>
+                </a:schemeClr>
+              </a:lnRef>
+              <a:fillRef idx="1">
+                <a:schemeClr val="accent1"/>
+              </a:fillRef>
+              <a:effectRef idx="0">
+                <a:schemeClr val="accent1"/>
+              </a:effectRef>
+              <a:fontRef idx="minor">
+                <a:schemeClr val="lt1"/>
+              </a:fontRef>
+            </p:style>
+          </p:cxnSp>
+          <p:sp>
+            <p:nvSpPr>
+              <p:cNvPr id="123" name="Arc 122">
+                <a:extLst>
+                  <a:ext uri="{FF2B5EF4-FFF2-40B4-BE49-F238E27FC236}">
+                    <a16:creationId xmlns:a16="http://schemas.microsoft.com/office/drawing/2014/main" id="{8E9EC7E1-E08A-4215-08B4-16720A002B34}"/>
+                  </a:ext>
+                </a:extLst>
+              </p:cNvPr>
+              <p:cNvSpPr/>
+              <p:nvPr/>
+            </p:nvSpPr>
+            <p:spPr>
+              <a:xfrm>
+                <a:off x="9832786" y="3399063"/>
+                <a:ext cx="72000" cy="72000"/>
+              </a:xfrm>
+              <a:prstGeom prst="arc">
+                <a:avLst>
+                  <a:gd name="adj1" fmla="val 10395250"/>
+                  <a:gd name="adj2" fmla="val 0"/>
+                </a:avLst>
+              </a:prstGeom>
+              <a:noFill/>
+              <a:ln w="19050">
+                <a:solidFill>
+                  <a:srgbClr val="002060"/>
+                </a:solidFill>
+              </a:ln>
+            </p:spPr>
+            <p:style>
+              <a:lnRef idx="2">
+                <a:schemeClr val="accent1">
+                  <a:shade val="15000"/>
+                </a:schemeClr>
+              </a:lnRef>
+              <a:fillRef idx="1">
+                <a:schemeClr val="accent1"/>
+              </a:fillRef>
+              <a:effectRef idx="0">
+                <a:schemeClr val="accent1"/>
+              </a:effectRef>
+              <a:fontRef idx="minor">
+                <a:schemeClr val="lt1"/>
+              </a:fontRef>
+            </p:style>
+            <p:txBody>
+              <a:bodyPr rtlCol="0" anchor="ctr"/>
+              <a:lstStyle/>
+              <a:p>
+                <a:pPr algn="ctr"/>
+                <a:endParaRPr lang="fr-FR"/>
+              </a:p>
+            </p:txBody>
+          </p:sp>
+        </p:grpSp>
+      </p:grpSp>
+      <p:grpSp>
+        <p:nvGrpSpPr>
+          <p:cNvPr id="128" name="Groupe 127">
+            <a:extLst>
+              <a:ext uri="{FF2B5EF4-FFF2-40B4-BE49-F238E27FC236}">
+                <a16:creationId xmlns:a16="http://schemas.microsoft.com/office/drawing/2014/main" id="{F087D647-612D-C774-4641-5BB54DFDAA8A}"/>
+              </a:ext>
+            </a:extLst>
+          </p:cNvPr>
+          <p:cNvGrpSpPr/>
+          <p:nvPr/>
+        </p:nvGrpSpPr>
+        <p:grpSpPr>
+          <a:xfrm>
+            <a:off x="11229962" y="2983793"/>
+            <a:ext cx="500067" cy="1389308"/>
+            <a:chOff x="9832786" y="3390984"/>
+            <a:chExt cx="500067" cy="983280"/>
+          </a:xfrm>
+        </p:grpSpPr>
+        <p:grpSp>
+          <p:nvGrpSpPr>
+            <p:cNvPr id="129" name="Groupe 128">
+              <a:extLst>
+                <a:ext uri="{FF2B5EF4-FFF2-40B4-BE49-F238E27FC236}">
+                  <a16:creationId xmlns:a16="http://schemas.microsoft.com/office/drawing/2014/main" id="{48EE7EC7-39CC-6F9B-47AA-EA04B87A731D}"/>
+                </a:ext>
+              </a:extLst>
+            </p:cNvPr>
+            <p:cNvGrpSpPr/>
+            <p:nvPr/>
+          </p:nvGrpSpPr>
+          <p:grpSpPr>
+            <a:xfrm>
+              <a:off x="9832786" y="3399063"/>
+              <a:ext cx="143999" cy="951287"/>
+              <a:chOff x="9832786" y="3399063"/>
+              <a:chExt cx="143999" cy="951287"/>
+            </a:xfrm>
+          </p:grpSpPr>
+          <p:cxnSp>
+            <p:nvCxnSpPr>
+              <p:cNvPr id="144" name="Connecteur droit 143">
+                <a:extLst>
+                  <a:ext uri="{FF2B5EF4-FFF2-40B4-BE49-F238E27FC236}">
+                    <a16:creationId xmlns:a16="http://schemas.microsoft.com/office/drawing/2014/main" id="{4C3F122A-E8A5-A012-CDF8-A8562B17A6A4}"/>
+                  </a:ext>
+                </a:extLst>
+              </p:cNvPr>
+              <p:cNvCxnSpPr>
+                <a:cxnSpLocks/>
+              </p:cNvCxnSpPr>
+              <p:nvPr/>
+            </p:nvCxnSpPr>
+            <p:spPr>
+              <a:xfrm flipV="1">
+                <a:off x="9832787" y="3429000"/>
+                <a:ext cx="0" cy="921350"/>
+              </a:xfrm>
+              <a:prstGeom prst="line">
+                <a:avLst/>
+              </a:prstGeom>
+              <a:noFill/>
+              <a:ln w="19050">
+                <a:solidFill>
+                  <a:srgbClr val="002060"/>
+                </a:solidFill>
+              </a:ln>
+            </p:spPr>
+            <p:style>
+              <a:lnRef idx="2">
+                <a:schemeClr val="accent1">
+                  <a:shade val="15000"/>
+                </a:schemeClr>
+              </a:lnRef>
+              <a:fillRef idx="1">
+                <a:schemeClr val="accent1"/>
+              </a:fillRef>
+              <a:effectRef idx="0">
+                <a:schemeClr val="accent1"/>
+              </a:effectRef>
+              <a:fontRef idx="minor">
+                <a:schemeClr val="lt1"/>
+              </a:fontRef>
+            </p:style>
+          </p:cxnSp>
+          <p:cxnSp>
+            <p:nvCxnSpPr>
+              <p:cNvPr id="145" name="Connecteur droit 144">
+                <a:extLst>
+                  <a:ext uri="{FF2B5EF4-FFF2-40B4-BE49-F238E27FC236}">
+                    <a16:creationId xmlns:a16="http://schemas.microsoft.com/office/drawing/2014/main" id="{2B5496B7-A008-3D74-F41E-D7D787CF286E}"/>
+                  </a:ext>
+                </a:extLst>
+              </p:cNvPr>
+              <p:cNvCxnSpPr>
+                <a:cxnSpLocks/>
+              </p:cNvCxnSpPr>
+              <p:nvPr/>
+            </p:nvCxnSpPr>
+            <p:spPr>
+              <a:xfrm flipV="1">
+                <a:off x="9904786" y="3429000"/>
+                <a:ext cx="0" cy="720000"/>
+              </a:xfrm>
+              <a:prstGeom prst="line">
+                <a:avLst/>
+              </a:prstGeom>
+              <a:noFill/>
+              <a:ln w="19050">
+                <a:solidFill>
+                  <a:srgbClr val="002060"/>
+                </a:solidFill>
+              </a:ln>
+            </p:spPr>
+            <p:style>
+              <a:lnRef idx="2">
+                <a:schemeClr val="accent1">
+                  <a:shade val="15000"/>
+                </a:schemeClr>
+              </a:lnRef>
+              <a:fillRef idx="1">
+                <a:schemeClr val="accent1"/>
+              </a:fillRef>
+              <a:effectRef idx="0">
+                <a:schemeClr val="accent1"/>
+              </a:effectRef>
+              <a:fontRef idx="minor">
+                <a:schemeClr val="lt1"/>
+              </a:fontRef>
+            </p:style>
+          </p:cxnSp>
+          <p:sp>
+            <p:nvSpPr>
+              <p:cNvPr id="146" name="Arc 145">
+                <a:extLst>
+                  <a:ext uri="{FF2B5EF4-FFF2-40B4-BE49-F238E27FC236}">
+                    <a16:creationId xmlns:a16="http://schemas.microsoft.com/office/drawing/2014/main" id="{79114D03-99D4-0750-D92C-57FA7CA37589}"/>
+                  </a:ext>
+                </a:extLst>
+              </p:cNvPr>
+              <p:cNvSpPr/>
+              <p:nvPr/>
+            </p:nvSpPr>
+            <p:spPr>
+              <a:xfrm>
+                <a:off x="9832786" y="3399063"/>
+                <a:ext cx="72000" cy="72000"/>
+              </a:xfrm>
+              <a:prstGeom prst="arc">
+                <a:avLst>
+                  <a:gd name="adj1" fmla="val 10395250"/>
+                  <a:gd name="adj2" fmla="val 0"/>
+                </a:avLst>
+              </a:prstGeom>
+              <a:noFill/>
+              <a:ln w="19050">
+                <a:solidFill>
+                  <a:srgbClr val="002060"/>
+                </a:solidFill>
+              </a:ln>
+            </p:spPr>
+            <p:style>
+              <a:lnRef idx="2">
+                <a:schemeClr val="accent1">
+                  <a:shade val="15000"/>
+                </a:schemeClr>
+              </a:lnRef>
+              <a:fillRef idx="1">
+                <a:schemeClr val="accent1"/>
+              </a:fillRef>
+              <a:effectRef idx="0">
+                <a:schemeClr val="accent1"/>
+              </a:effectRef>
+              <a:fontRef idx="minor">
+                <a:schemeClr val="lt1"/>
+              </a:fontRef>
+            </p:style>
+            <p:txBody>
+              <a:bodyPr rtlCol="0" anchor="ctr"/>
+              <a:lstStyle/>
+              <a:p>
+                <a:pPr algn="ctr"/>
+                <a:endParaRPr lang="fr-FR"/>
+              </a:p>
+            </p:txBody>
+          </p:sp>
+          <p:sp>
+            <p:nvSpPr>
+              <p:cNvPr id="147" name="Arc 146">
+                <a:extLst>
+                  <a:ext uri="{FF2B5EF4-FFF2-40B4-BE49-F238E27FC236}">
+                    <a16:creationId xmlns:a16="http://schemas.microsoft.com/office/drawing/2014/main" id="{82F2ECD4-982A-E17A-39A5-68616579C144}"/>
+                  </a:ext>
+                </a:extLst>
+              </p:cNvPr>
+              <p:cNvSpPr/>
+              <p:nvPr/>
+            </p:nvSpPr>
+            <p:spPr>
+              <a:xfrm flipV="1">
+                <a:off x="9904785" y="4106937"/>
+                <a:ext cx="72000" cy="72000"/>
+              </a:xfrm>
+              <a:prstGeom prst="arc">
+                <a:avLst>
+                  <a:gd name="adj1" fmla="val 10395250"/>
+                  <a:gd name="adj2" fmla="val 460582"/>
+                </a:avLst>
+              </a:prstGeom>
+              <a:noFill/>
+              <a:ln w="19050">
+                <a:solidFill>
+                  <a:srgbClr val="002060"/>
+                </a:solidFill>
+              </a:ln>
+            </p:spPr>
+            <p:style>
+              <a:lnRef idx="2">
+                <a:schemeClr val="accent1">
+                  <a:shade val="15000"/>
+                </a:schemeClr>
+              </a:lnRef>
+              <a:fillRef idx="1">
+                <a:schemeClr val="accent1"/>
+              </a:fillRef>
+              <a:effectRef idx="0">
+                <a:schemeClr val="accent1"/>
+              </a:effectRef>
+              <a:fontRef idx="minor">
+                <a:schemeClr val="lt1"/>
+              </a:fontRef>
+            </p:style>
+            <p:txBody>
+              <a:bodyPr rtlCol="0" anchor="ctr"/>
+              <a:lstStyle/>
+              <a:p>
+                <a:pPr algn="ctr"/>
+                <a:endParaRPr lang="fr-FR"/>
+              </a:p>
+            </p:txBody>
+          </p:sp>
+        </p:grpSp>
+        <p:grpSp>
+          <p:nvGrpSpPr>
+            <p:cNvPr id="130" name="Groupe 129">
+              <a:extLst>
+                <a:ext uri="{FF2B5EF4-FFF2-40B4-BE49-F238E27FC236}">
+                  <a16:creationId xmlns:a16="http://schemas.microsoft.com/office/drawing/2014/main" id="{DB64B502-26A3-16D0-1E30-FAE16B4FF0E2}"/>
+                </a:ext>
+              </a:extLst>
+            </p:cNvPr>
+            <p:cNvGrpSpPr/>
+            <p:nvPr/>
+          </p:nvGrpSpPr>
+          <p:grpSpPr>
+            <a:xfrm>
+              <a:off x="9975475" y="3396370"/>
+              <a:ext cx="143999" cy="779874"/>
+              <a:chOff x="9832786" y="3399063"/>
+              <a:chExt cx="143999" cy="779874"/>
+            </a:xfrm>
+          </p:grpSpPr>
+          <p:cxnSp>
+            <p:nvCxnSpPr>
+              <p:cNvPr id="140" name="Connecteur droit 139">
+                <a:extLst>
+                  <a:ext uri="{FF2B5EF4-FFF2-40B4-BE49-F238E27FC236}">
+                    <a16:creationId xmlns:a16="http://schemas.microsoft.com/office/drawing/2014/main" id="{84D6427E-C596-9973-95D6-25C4DC90B5C9}"/>
+                  </a:ext>
+                </a:extLst>
+              </p:cNvPr>
+              <p:cNvCxnSpPr>
+                <a:cxnSpLocks/>
+              </p:cNvCxnSpPr>
+              <p:nvPr/>
+            </p:nvCxnSpPr>
+            <p:spPr>
+              <a:xfrm flipV="1">
+                <a:off x="9832787" y="3429000"/>
+                <a:ext cx="0" cy="720000"/>
+              </a:xfrm>
+              <a:prstGeom prst="line">
+                <a:avLst/>
+              </a:prstGeom>
+              <a:noFill/>
+              <a:ln w="19050">
+                <a:solidFill>
+                  <a:srgbClr val="002060"/>
+                </a:solidFill>
+              </a:ln>
+            </p:spPr>
+            <p:style>
+              <a:lnRef idx="2">
+                <a:schemeClr val="accent1">
+                  <a:shade val="15000"/>
+                </a:schemeClr>
+              </a:lnRef>
+              <a:fillRef idx="1">
+                <a:schemeClr val="accent1"/>
+              </a:fillRef>
+              <a:effectRef idx="0">
+                <a:schemeClr val="accent1"/>
+              </a:effectRef>
+              <a:fontRef idx="minor">
+                <a:schemeClr val="lt1"/>
+              </a:fontRef>
+            </p:style>
+          </p:cxnSp>
+          <p:cxnSp>
+            <p:nvCxnSpPr>
+              <p:cNvPr id="141" name="Connecteur droit 140">
+                <a:extLst>
+                  <a:ext uri="{FF2B5EF4-FFF2-40B4-BE49-F238E27FC236}">
+                    <a16:creationId xmlns:a16="http://schemas.microsoft.com/office/drawing/2014/main" id="{900E8191-3A62-D689-2E28-F77BC5FA05DD}"/>
+                  </a:ext>
+                </a:extLst>
+              </p:cNvPr>
+              <p:cNvCxnSpPr>
+                <a:cxnSpLocks/>
+              </p:cNvCxnSpPr>
+              <p:nvPr/>
+            </p:nvCxnSpPr>
+            <p:spPr>
+              <a:xfrm flipV="1">
+                <a:off x="9904786" y="3429000"/>
+                <a:ext cx="0" cy="720000"/>
+              </a:xfrm>
+              <a:prstGeom prst="line">
+                <a:avLst/>
+              </a:prstGeom>
+              <a:noFill/>
+              <a:ln w="19050">
+                <a:solidFill>
+                  <a:srgbClr val="002060"/>
+                </a:solidFill>
+              </a:ln>
+            </p:spPr>
+            <p:style>
+              <a:lnRef idx="2">
+                <a:schemeClr val="accent1">
+                  <a:shade val="15000"/>
+                </a:schemeClr>
+              </a:lnRef>
+              <a:fillRef idx="1">
+                <a:schemeClr val="accent1"/>
+              </a:fillRef>
+              <a:effectRef idx="0">
+                <a:schemeClr val="accent1"/>
+              </a:effectRef>
+              <a:fontRef idx="minor">
+                <a:schemeClr val="lt1"/>
+              </a:fontRef>
+            </p:style>
+          </p:cxnSp>
+          <p:sp>
+            <p:nvSpPr>
+              <p:cNvPr id="142" name="Arc 141">
+                <a:extLst>
+                  <a:ext uri="{FF2B5EF4-FFF2-40B4-BE49-F238E27FC236}">
+                    <a16:creationId xmlns:a16="http://schemas.microsoft.com/office/drawing/2014/main" id="{A79E73F3-2A87-E10C-E3B9-D23AC123FBE7}"/>
+                  </a:ext>
+                </a:extLst>
+              </p:cNvPr>
+              <p:cNvSpPr/>
+              <p:nvPr/>
+            </p:nvSpPr>
+            <p:spPr>
+              <a:xfrm>
+                <a:off x="9832786" y="3399063"/>
+                <a:ext cx="72000" cy="72000"/>
+              </a:xfrm>
+              <a:prstGeom prst="arc">
+                <a:avLst>
+                  <a:gd name="adj1" fmla="val 10395250"/>
+                  <a:gd name="adj2" fmla="val 0"/>
+                </a:avLst>
+              </a:prstGeom>
+              <a:noFill/>
+              <a:ln w="19050">
+                <a:solidFill>
+                  <a:srgbClr val="002060"/>
+                </a:solidFill>
+              </a:ln>
+            </p:spPr>
+            <p:style>
+              <a:lnRef idx="2">
+                <a:schemeClr val="accent1">
+                  <a:shade val="15000"/>
+                </a:schemeClr>
+              </a:lnRef>
+              <a:fillRef idx="1">
+                <a:schemeClr val="accent1"/>
+              </a:fillRef>
+              <a:effectRef idx="0">
+                <a:schemeClr val="accent1"/>
+              </a:effectRef>
+              <a:fontRef idx="minor">
+                <a:schemeClr val="lt1"/>
+              </a:fontRef>
+            </p:style>
+            <p:txBody>
+              <a:bodyPr rtlCol="0" anchor="ctr"/>
+              <a:lstStyle/>
+              <a:p>
+                <a:pPr algn="ctr"/>
+                <a:endParaRPr lang="fr-FR"/>
+              </a:p>
+            </p:txBody>
+          </p:sp>
+          <p:sp>
+            <p:nvSpPr>
+              <p:cNvPr id="143" name="Arc 142">
+                <a:extLst>
+                  <a:ext uri="{FF2B5EF4-FFF2-40B4-BE49-F238E27FC236}">
+                    <a16:creationId xmlns:a16="http://schemas.microsoft.com/office/drawing/2014/main" id="{E69A18C2-33D2-BF01-24C8-7222B9EF0FCE}"/>
+                  </a:ext>
+                </a:extLst>
+              </p:cNvPr>
+              <p:cNvSpPr/>
+              <p:nvPr/>
+            </p:nvSpPr>
+            <p:spPr>
+              <a:xfrm flipV="1">
+                <a:off x="9904785" y="4106937"/>
+                <a:ext cx="72000" cy="72000"/>
+              </a:xfrm>
+              <a:prstGeom prst="arc">
+                <a:avLst>
+                  <a:gd name="adj1" fmla="val 10395250"/>
+                  <a:gd name="adj2" fmla="val 460582"/>
+                </a:avLst>
+              </a:prstGeom>
+              <a:noFill/>
+              <a:ln w="19050">
+                <a:solidFill>
+                  <a:srgbClr val="002060"/>
+                </a:solidFill>
+              </a:ln>
+            </p:spPr>
+            <p:style>
+              <a:lnRef idx="2">
+                <a:schemeClr val="accent1">
+                  <a:shade val="15000"/>
+                </a:schemeClr>
+              </a:lnRef>
+              <a:fillRef idx="1">
+                <a:schemeClr val="accent1"/>
+              </a:fillRef>
+              <a:effectRef idx="0">
+                <a:schemeClr val="accent1"/>
+              </a:effectRef>
+              <a:fontRef idx="minor">
+                <a:schemeClr val="lt1"/>
+              </a:fontRef>
+            </p:style>
+            <p:txBody>
+              <a:bodyPr rtlCol="0" anchor="ctr"/>
+              <a:lstStyle/>
+              <a:p>
+                <a:pPr algn="ctr"/>
+                <a:endParaRPr lang="fr-FR"/>
+              </a:p>
+            </p:txBody>
+          </p:sp>
+        </p:grpSp>
+        <p:grpSp>
+          <p:nvGrpSpPr>
+            <p:cNvPr id="131" name="Groupe 130">
+              <a:extLst>
+                <a:ext uri="{FF2B5EF4-FFF2-40B4-BE49-F238E27FC236}">
+                  <a16:creationId xmlns:a16="http://schemas.microsoft.com/office/drawing/2014/main" id="{FF7CF0AE-6AB3-DA5E-9ED9-649195C756A2}"/>
+                </a:ext>
+              </a:extLst>
+            </p:cNvPr>
+            <p:cNvGrpSpPr/>
+            <p:nvPr/>
+          </p:nvGrpSpPr>
+          <p:grpSpPr>
+            <a:xfrm>
+              <a:off x="10118164" y="3393677"/>
+              <a:ext cx="143999" cy="779874"/>
+              <a:chOff x="9832786" y="3399063"/>
+              <a:chExt cx="143999" cy="779874"/>
+            </a:xfrm>
+          </p:grpSpPr>
+          <p:cxnSp>
+            <p:nvCxnSpPr>
+              <p:cNvPr id="136" name="Connecteur droit 135">
+                <a:extLst>
+                  <a:ext uri="{FF2B5EF4-FFF2-40B4-BE49-F238E27FC236}">
+                    <a16:creationId xmlns:a16="http://schemas.microsoft.com/office/drawing/2014/main" id="{14176D3B-0C25-A2C5-A243-7A6D1770449C}"/>
+                  </a:ext>
+                </a:extLst>
+              </p:cNvPr>
+              <p:cNvCxnSpPr>
+                <a:cxnSpLocks/>
+              </p:cNvCxnSpPr>
+              <p:nvPr/>
+            </p:nvCxnSpPr>
+            <p:spPr>
+              <a:xfrm flipV="1">
+                <a:off x="9832787" y="3429000"/>
+                <a:ext cx="0" cy="720000"/>
+              </a:xfrm>
+              <a:prstGeom prst="line">
+                <a:avLst/>
+              </a:prstGeom>
+              <a:noFill/>
+              <a:ln w="19050">
+                <a:solidFill>
+                  <a:srgbClr val="002060"/>
+                </a:solidFill>
+              </a:ln>
+            </p:spPr>
+            <p:style>
+              <a:lnRef idx="2">
+                <a:schemeClr val="accent1">
+                  <a:shade val="15000"/>
+                </a:schemeClr>
+              </a:lnRef>
+              <a:fillRef idx="1">
+                <a:schemeClr val="accent1"/>
+              </a:fillRef>
+              <a:effectRef idx="0">
+                <a:schemeClr val="accent1"/>
+              </a:effectRef>
+              <a:fontRef idx="minor">
+                <a:schemeClr val="lt1"/>
+              </a:fontRef>
+            </p:style>
+          </p:cxnSp>
+          <p:cxnSp>
+            <p:nvCxnSpPr>
+              <p:cNvPr id="137" name="Connecteur droit 136">
+                <a:extLst>
+                  <a:ext uri="{FF2B5EF4-FFF2-40B4-BE49-F238E27FC236}">
+                    <a16:creationId xmlns:a16="http://schemas.microsoft.com/office/drawing/2014/main" id="{D284ED47-BBDC-DA98-094D-AA2DFE7458EF}"/>
+                  </a:ext>
+                </a:extLst>
+              </p:cNvPr>
+              <p:cNvCxnSpPr>
+                <a:cxnSpLocks/>
+              </p:cNvCxnSpPr>
+              <p:nvPr/>
+            </p:nvCxnSpPr>
+            <p:spPr>
+              <a:xfrm flipV="1">
+                <a:off x="9904786" y="3429000"/>
+                <a:ext cx="0" cy="720000"/>
+              </a:xfrm>
+              <a:prstGeom prst="line">
+                <a:avLst/>
+              </a:prstGeom>
+              <a:noFill/>
+              <a:ln w="19050">
+                <a:solidFill>
+                  <a:srgbClr val="002060"/>
+                </a:solidFill>
+              </a:ln>
+            </p:spPr>
+            <p:style>
+              <a:lnRef idx="2">
+                <a:schemeClr val="accent1">
+                  <a:shade val="15000"/>
+                </a:schemeClr>
+              </a:lnRef>
+              <a:fillRef idx="1">
+                <a:schemeClr val="accent1"/>
+              </a:fillRef>
+              <a:effectRef idx="0">
+                <a:schemeClr val="accent1"/>
+              </a:effectRef>
+              <a:fontRef idx="minor">
+                <a:schemeClr val="lt1"/>
+              </a:fontRef>
+            </p:style>
+          </p:cxnSp>
+          <p:sp>
+            <p:nvSpPr>
+              <p:cNvPr id="138" name="Arc 137">
+                <a:extLst>
+                  <a:ext uri="{FF2B5EF4-FFF2-40B4-BE49-F238E27FC236}">
+                    <a16:creationId xmlns:a16="http://schemas.microsoft.com/office/drawing/2014/main" id="{A9B3FA2B-726E-5701-3815-5DAE3B201208}"/>
+                  </a:ext>
+                </a:extLst>
+              </p:cNvPr>
+              <p:cNvSpPr/>
+              <p:nvPr/>
+            </p:nvSpPr>
+            <p:spPr>
+              <a:xfrm>
+                <a:off x="9832786" y="3399063"/>
+                <a:ext cx="72000" cy="72000"/>
+              </a:xfrm>
+              <a:prstGeom prst="arc">
+                <a:avLst>
+                  <a:gd name="adj1" fmla="val 10395250"/>
+                  <a:gd name="adj2" fmla="val 0"/>
+                </a:avLst>
+              </a:prstGeom>
+              <a:noFill/>
+              <a:ln w="19050">
+                <a:solidFill>
+                  <a:srgbClr val="002060"/>
+                </a:solidFill>
+              </a:ln>
+            </p:spPr>
+            <p:style>
+              <a:lnRef idx="2">
+                <a:schemeClr val="accent1">
+                  <a:shade val="15000"/>
+                </a:schemeClr>
+              </a:lnRef>
+              <a:fillRef idx="1">
+                <a:schemeClr val="accent1"/>
+              </a:fillRef>
+              <a:effectRef idx="0">
+                <a:schemeClr val="accent1"/>
+              </a:effectRef>
+              <a:fontRef idx="minor">
+                <a:schemeClr val="lt1"/>
+              </a:fontRef>
+            </p:style>
+            <p:txBody>
+              <a:bodyPr rtlCol="0" anchor="ctr"/>
+              <a:lstStyle/>
+              <a:p>
+                <a:pPr algn="ctr"/>
+                <a:endParaRPr lang="fr-FR"/>
+              </a:p>
+            </p:txBody>
+          </p:sp>
+          <p:sp>
+            <p:nvSpPr>
+              <p:cNvPr id="139" name="Arc 138">
+                <a:extLst>
+                  <a:ext uri="{FF2B5EF4-FFF2-40B4-BE49-F238E27FC236}">
+                    <a16:creationId xmlns:a16="http://schemas.microsoft.com/office/drawing/2014/main" id="{C32FDB46-B36E-8A4D-757E-F9EE9317C257}"/>
+                  </a:ext>
+                </a:extLst>
+              </p:cNvPr>
+              <p:cNvSpPr/>
+              <p:nvPr/>
+            </p:nvSpPr>
+            <p:spPr>
+              <a:xfrm flipV="1">
+                <a:off x="9904785" y="4106937"/>
+                <a:ext cx="72000" cy="72000"/>
+              </a:xfrm>
+              <a:prstGeom prst="arc">
+                <a:avLst>
+                  <a:gd name="adj1" fmla="val 10395250"/>
+                  <a:gd name="adj2" fmla="val 460582"/>
+                </a:avLst>
+              </a:prstGeom>
+              <a:noFill/>
+              <a:ln w="19050">
+                <a:solidFill>
+                  <a:srgbClr val="002060"/>
+                </a:solidFill>
+              </a:ln>
+            </p:spPr>
+            <p:style>
+              <a:lnRef idx="2">
+                <a:schemeClr val="accent1">
+                  <a:shade val="15000"/>
+                </a:schemeClr>
+              </a:lnRef>
+              <a:fillRef idx="1">
+                <a:schemeClr val="accent1"/>
+              </a:fillRef>
+              <a:effectRef idx="0">
+                <a:schemeClr val="accent1"/>
+              </a:effectRef>
+              <a:fontRef idx="minor">
+                <a:schemeClr val="lt1"/>
+              </a:fontRef>
+            </p:style>
+            <p:txBody>
+              <a:bodyPr rtlCol="0" anchor="ctr"/>
+              <a:lstStyle/>
+              <a:p>
+                <a:pPr algn="ctr"/>
+                <a:endParaRPr lang="fr-FR"/>
+              </a:p>
+            </p:txBody>
+          </p:sp>
+        </p:grpSp>
+        <p:grpSp>
+          <p:nvGrpSpPr>
+            <p:cNvPr id="132" name="Groupe 131">
+              <a:extLst>
+                <a:ext uri="{FF2B5EF4-FFF2-40B4-BE49-F238E27FC236}">
+                  <a16:creationId xmlns:a16="http://schemas.microsoft.com/office/drawing/2014/main" id="{AAE2EF17-D823-9E3F-492D-D09F94ADF4C5}"/>
+                </a:ext>
+              </a:extLst>
+            </p:cNvPr>
+            <p:cNvGrpSpPr/>
+            <p:nvPr/>
+          </p:nvGrpSpPr>
+          <p:grpSpPr>
+            <a:xfrm>
+              <a:off x="10260853" y="3390984"/>
+              <a:ext cx="72000" cy="983280"/>
+              <a:chOff x="9832786" y="3399063"/>
+              <a:chExt cx="72000" cy="983280"/>
+            </a:xfrm>
+          </p:grpSpPr>
+          <p:cxnSp>
+            <p:nvCxnSpPr>
+              <p:cNvPr id="133" name="Connecteur droit 132">
+                <a:extLst>
+                  <a:ext uri="{FF2B5EF4-FFF2-40B4-BE49-F238E27FC236}">
+                    <a16:creationId xmlns:a16="http://schemas.microsoft.com/office/drawing/2014/main" id="{A3F3BC3C-E87B-7D9B-D981-949E67FA521E}"/>
+                  </a:ext>
+                </a:extLst>
+              </p:cNvPr>
+              <p:cNvCxnSpPr>
+                <a:cxnSpLocks/>
+              </p:cNvCxnSpPr>
+              <p:nvPr/>
+            </p:nvCxnSpPr>
+            <p:spPr>
+              <a:xfrm flipV="1">
+                <a:off x="9832787" y="3429000"/>
+                <a:ext cx="0" cy="720000"/>
+              </a:xfrm>
+              <a:prstGeom prst="line">
+                <a:avLst/>
+              </a:prstGeom>
+              <a:noFill/>
+              <a:ln w="19050">
+                <a:solidFill>
+                  <a:srgbClr val="002060"/>
+                </a:solidFill>
+              </a:ln>
+            </p:spPr>
+            <p:style>
+              <a:lnRef idx="2">
+                <a:schemeClr val="accent1">
+                  <a:shade val="15000"/>
+                </a:schemeClr>
+              </a:lnRef>
+              <a:fillRef idx="1">
+                <a:schemeClr val="accent1"/>
+              </a:fillRef>
+              <a:effectRef idx="0">
+                <a:schemeClr val="accent1"/>
+              </a:effectRef>
+              <a:fontRef idx="minor">
+                <a:schemeClr val="lt1"/>
+              </a:fontRef>
+            </p:style>
+          </p:cxnSp>
+          <p:cxnSp>
+            <p:nvCxnSpPr>
+              <p:cNvPr id="134" name="Connecteur droit 133">
+                <a:extLst>
+                  <a:ext uri="{FF2B5EF4-FFF2-40B4-BE49-F238E27FC236}">
+                    <a16:creationId xmlns:a16="http://schemas.microsoft.com/office/drawing/2014/main" id="{7218326A-8F03-78DB-E443-C944E88DA0BD}"/>
+                  </a:ext>
+                </a:extLst>
+              </p:cNvPr>
+              <p:cNvCxnSpPr>
+                <a:cxnSpLocks/>
+              </p:cNvCxnSpPr>
+              <p:nvPr/>
+            </p:nvCxnSpPr>
+            <p:spPr>
+              <a:xfrm flipV="1">
+                <a:off x="9904786" y="3429000"/>
+                <a:ext cx="0" cy="953343"/>
+              </a:xfrm>
+              <a:prstGeom prst="line">
+                <a:avLst/>
+              </a:prstGeom>
+              <a:noFill/>
+              <a:ln w="19050">
+                <a:solidFill>
+                  <a:srgbClr val="002060"/>
+                </a:solidFill>
+              </a:ln>
+            </p:spPr>
+            <p:style>
+              <a:lnRef idx="2">
+                <a:schemeClr val="accent1">
+                  <a:shade val="15000"/>
+                </a:schemeClr>
+              </a:lnRef>
+              <a:fillRef idx="1">
+                <a:schemeClr val="accent1"/>
+              </a:fillRef>
+              <a:effectRef idx="0">
+                <a:schemeClr val="accent1"/>
+              </a:effectRef>
+              <a:fontRef idx="minor">
+                <a:schemeClr val="lt1"/>
+              </a:fontRef>
+            </p:style>
+          </p:cxnSp>
+          <p:sp>
+            <p:nvSpPr>
+              <p:cNvPr id="135" name="Arc 134">
+                <a:extLst>
+                  <a:ext uri="{FF2B5EF4-FFF2-40B4-BE49-F238E27FC236}">
+                    <a16:creationId xmlns:a16="http://schemas.microsoft.com/office/drawing/2014/main" id="{59A4FE6B-923C-65E5-A4DD-97584E0D39FC}"/>
+                  </a:ext>
+                </a:extLst>
+              </p:cNvPr>
+              <p:cNvSpPr/>
+              <p:nvPr/>
+            </p:nvSpPr>
+            <p:spPr>
+              <a:xfrm>
+                <a:off x="9832786" y="3399063"/>
+                <a:ext cx="72000" cy="72000"/>
+              </a:xfrm>
+              <a:prstGeom prst="arc">
+                <a:avLst>
+                  <a:gd name="adj1" fmla="val 10395250"/>
+                  <a:gd name="adj2" fmla="val 0"/>
+                </a:avLst>
+              </a:prstGeom>
+              <a:noFill/>
+              <a:ln w="19050">
+                <a:solidFill>
+                  <a:srgbClr val="002060"/>
+                </a:solidFill>
+              </a:ln>
+            </p:spPr>
+            <p:style>
+              <a:lnRef idx="2">
+                <a:schemeClr val="accent1">
+                  <a:shade val="15000"/>
+                </a:schemeClr>
+              </a:lnRef>
+              <a:fillRef idx="1">
+                <a:schemeClr val="accent1"/>
+              </a:fillRef>
+              <a:effectRef idx="0">
+                <a:schemeClr val="accent1"/>
+              </a:effectRef>
+              <a:fontRef idx="minor">
+                <a:schemeClr val="lt1"/>
+              </a:fontRef>
+            </p:style>
+            <p:txBody>
+              <a:bodyPr rtlCol="0" anchor="ctr"/>
+              <a:lstStyle/>
+              <a:p>
+                <a:pPr algn="ctr"/>
+                <a:endParaRPr lang="fr-FR"/>
+              </a:p>
+            </p:txBody>
+          </p:sp>
+        </p:grpSp>
+      </p:grpSp>
+      <p:grpSp>
+        <p:nvGrpSpPr>
+          <p:cNvPr id="156" name="Groupe 155">
+            <a:extLst>
+              <a:ext uri="{FF2B5EF4-FFF2-40B4-BE49-F238E27FC236}">
+                <a16:creationId xmlns:a16="http://schemas.microsoft.com/office/drawing/2014/main" id="{BFBCCB1A-F2D1-B860-4FD1-115A9B45CB9A}"/>
+              </a:ext>
+            </a:extLst>
+          </p:cNvPr>
+          <p:cNvGrpSpPr/>
+          <p:nvPr/>
+        </p:nvGrpSpPr>
+        <p:grpSpPr>
+          <a:xfrm>
+            <a:off x="11231653" y="3455159"/>
+            <a:ext cx="499534" cy="280953"/>
+            <a:chOff x="11231296" y="3615729"/>
+            <a:chExt cx="499534" cy="280953"/>
+          </a:xfrm>
+        </p:grpSpPr>
+        <p:cxnSp>
+          <p:nvCxnSpPr>
+            <p:cNvPr id="148" name="Connecteur droit 147">
+              <a:extLst>
+                <a:ext uri="{FF2B5EF4-FFF2-40B4-BE49-F238E27FC236}">
+                  <a16:creationId xmlns:a16="http://schemas.microsoft.com/office/drawing/2014/main" id="{23E205C8-C346-F0BE-C093-0DA93D941793}"/>
+                </a:ext>
+              </a:extLst>
+            </p:cNvPr>
+            <p:cNvCxnSpPr>
+              <a:cxnSpLocks/>
+            </p:cNvCxnSpPr>
+            <p:nvPr/>
+          </p:nvCxnSpPr>
+          <p:spPr>
+            <a:xfrm flipV="1">
+              <a:off x="11231296" y="3615729"/>
+              <a:ext cx="0" cy="280953"/>
+            </a:xfrm>
+            <a:prstGeom prst="line">
+              <a:avLst/>
+            </a:prstGeom>
+            <a:noFill/>
+            <a:ln w="19050">
+              <a:solidFill>
+                <a:srgbClr val="C00000"/>
+              </a:solidFill>
+            </a:ln>
+          </p:spPr>
+          <p:style>
+            <a:lnRef idx="2">
+              <a:schemeClr val="accent1">
+                <a:shade val="15000"/>
+              </a:schemeClr>
+            </a:lnRef>
+            <a:fillRef idx="1">
+              <a:schemeClr val="accent1"/>
+            </a:fillRef>
+            <a:effectRef idx="0">
+              <a:schemeClr val="accent1"/>
+            </a:effectRef>
+            <a:fontRef idx="minor">
+              <a:schemeClr val="lt1"/>
+            </a:fontRef>
+          </p:style>
+        </p:cxnSp>
+        <p:cxnSp>
+          <p:nvCxnSpPr>
+            <p:cNvPr id="149" name="Connecteur droit 148">
+              <a:extLst>
+                <a:ext uri="{FF2B5EF4-FFF2-40B4-BE49-F238E27FC236}">
+                  <a16:creationId xmlns:a16="http://schemas.microsoft.com/office/drawing/2014/main" id="{FD7E3CA1-942C-4902-7171-93E03E1CDD1C}"/>
+                </a:ext>
+              </a:extLst>
+            </p:cNvPr>
+            <p:cNvCxnSpPr>
+              <a:cxnSpLocks/>
+            </p:cNvCxnSpPr>
+            <p:nvPr/>
+          </p:nvCxnSpPr>
+          <p:spPr>
+            <a:xfrm flipV="1">
+              <a:off x="11302658" y="3615729"/>
+              <a:ext cx="0" cy="280953"/>
+            </a:xfrm>
+            <a:prstGeom prst="line">
+              <a:avLst/>
+            </a:prstGeom>
+            <a:noFill/>
+            <a:ln w="19050">
+              <a:solidFill>
+                <a:srgbClr val="C00000"/>
+              </a:solidFill>
+            </a:ln>
+          </p:spPr>
+          <p:style>
+            <a:lnRef idx="2">
+              <a:schemeClr val="accent1">
+                <a:shade val="15000"/>
+              </a:schemeClr>
+            </a:lnRef>
+            <a:fillRef idx="1">
+              <a:schemeClr val="accent1"/>
+            </a:fillRef>
+            <a:effectRef idx="0">
+              <a:schemeClr val="accent1"/>
+            </a:effectRef>
+            <a:fontRef idx="minor">
+              <a:schemeClr val="lt1"/>
+            </a:fontRef>
+          </p:style>
+        </p:cxnSp>
+        <p:cxnSp>
+          <p:nvCxnSpPr>
+            <p:cNvPr id="150" name="Connecteur droit 149">
+              <a:extLst>
+                <a:ext uri="{FF2B5EF4-FFF2-40B4-BE49-F238E27FC236}">
+                  <a16:creationId xmlns:a16="http://schemas.microsoft.com/office/drawing/2014/main" id="{8DF637F5-A4E5-B5DD-E44C-37FA5A101652}"/>
+                </a:ext>
+              </a:extLst>
+            </p:cNvPr>
+            <p:cNvCxnSpPr>
+              <a:cxnSpLocks/>
+            </p:cNvCxnSpPr>
+            <p:nvPr/>
+          </p:nvCxnSpPr>
+          <p:spPr>
+            <a:xfrm flipV="1">
+              <a:off x="11374020" y="3615729"/>
+              <a:ext cx="0" cy="280953"/>
+            </a:xfrm>
+            <a:prstGeom prst="line">
+              <a:avLst/>
+            </a:prstGeom>
+            <a:noFill/>
+            <a:ln w="19050">
+              <a:solidFill>
+                <a:srgbClr val="C00000"/>
+              </a:solidFill>
+            </a:ln>
+          </p:spPr>
+          <p:style>
+            <a:lnRef idx="2">
+              <a:schemeClr val="accent1">
+                <a:shade val="15000"/>
+              </a:schemeClr>
+            </a:lnRef>
+            <a:fillRef idx="1">
+              <a:schemeClr val="accent1"/>
+            </a:fillRef>
+            <a:effectRef idx="0">
+              <a:schemeClr val="accent1"/>
+            </a:effectRef>
+            <a:fontRef idx="minor">
+              <a:schemeClr val="lt1"/>
+            </a:fontRef>
+          </p:style>
+        </p:cxnSp>
+        <p:cxnSp>
+          <p:nvCxnSpPr>
+            <p:cNvPr id="151" name="Connecteur droit 150">
+              <a:extLst>
+                <a:ext uri="{FF2B5EF4-FFF2-40B4-BE49-F238E27FC236}">
+                  <a16:creationId xmlns:a16="http://schemas.microsoft.com/office/drawing/2014/main" id="{A948BED3-09BB-C31F-34BA-EFC63947E1FC}"/>
+                </a:ext>
+              </a:extLst>
+            </p:cNvPr>
+            <p:cNvCxnSpPr>
+              <a:cxnSpLocks/>
+            </p:cNvCxnSpPr>
+            <p:nvPr/>
+          </p:nvCxnSpPr>
+          <p:spPr>
+            <a:xfrm flipV="1">
+              <a:off x="11445382" y="3615729"/>
+              <a:ext cx="0" cy="280953"/>
+            </a:xfrm>
+            <a:prstGeom prst="line">
+              <a:avLst/>
+            </a:prstGeom>
+            <a:noFill/>
+            <a:ln w="19050">
+              <a:solidFill>
+                <a:srgbClr val="C00000"/>
+              </a:solidFill>
+            </a:ln>
+          </p:spPr>
+          <p:style>
+            <a:lnRef idx="2">
+              <a:schemeClr val="accent1">
+                <a:shade val="15000"/>
+              </a:schemeClr>
+            </a:lnRef>
+            <a:fillRef idx="1">
+              <a:schemeClr val="accent1"/>
+            </a:fillRef>
+            <a:effectRef idx="0">
+              <a:schemeClr val="accent1"/>
+            </a:effectRef>
+            <a:fontRef idx="minor">
+              <a:schemeClr val="lt1"/>
+            </a:fontRef>
+          </p:style>
+        </p:cxnSp>
+        <p:cxnSp>
+          <p:nvCxnSpPr>
+            <p:cNvPr id="152" name="Connecteur droit 151">
+              <a:extLst>
+                <a:ext uri="{FF2B5EF4-FFF2-40B4-BE49-F238E27FC236}">
+                  <a16:creationId xmlns:a16="http://schemas.microsoft.com/office/drawing/2014/main" id="{2C399BCE-B2AC-0A5D-CDB0-B223B11E3233}"/>
+                </a:ext>
+              </a:extLst>
+            </p:cNvPr>
+            <p:cNvCxnSpPr>
+              <a:cxnSpLocks/>
+            </p:cNvCxnSpPr>
+            <p:nvPr/>
+          </p:nvCxnSpPr>
+          <p:spPr>
+            <a:xfrm flipV="1">
+              <a:off x="11516744" y="3615729"/>
+              <a:ext cx="0" cy="280953"/>
+            </a:xfrm>
+            <a:prstGeom prst="line">
+              <a:avLst/>
+            </a:prstGeom>
+            <a:noFill/>
+            <a:ln w="19050">
+              <a:solidFill>
+                <a:srgbClr val="C00000"/>
+              </a:solidFill>
+            </a:ln>
+          </p:spPr>
+          <p:style>
+            <a:lnRef idx="2">
+              <a:schemeClr val="accent1">
+                <a:shade val="15000"/>
+              </a:schemeClr>
+            </a:lnRef>
+            <a:fillRef idx="1">
+              <a:schemeClr val="accent1"/>
+            </a:fillRef>
+            <a:effectRef idx="0">
+              <a:schemeClr val="accent1"/>
+            </a:effectRef>
+            <a:fontRef idx="minor">
+              <a:schemeClr val="lt1"/>
+            </a:fontRef>
+          </p:style>
+        </p:cxnSp>
+        <p:cxnSp>
+          <p:nvCxnSpPr>
+            <p:cNvPr id="153" name="Connecteur droit 152">
+              <a:extLst>
+                <a:ext uri="{FF2B5EF4-FFF2-40B4-BE49-F238E27FC236}">
+                  <a16:creationId xmlns:a16="http://schemas.microsoft.com/office/drawing/2014/main" id="{FA77E675-7850-9872-93BF-EC5B96332817}"/>
+                </a:ext>
+              </a:extLst>
+            </p:cNvPr>
+            <p:cNvCxnSpPr>
+              <a:cxnSpLocks/>
+            </p:cNvCxnSpPr>
+            <p:nvPr/>
+          </p:nvCxnSpPr>
+          <p:spPr>
+            <a:xfrm flipV="1">
+              <a:off x="11588106" y="3615729"/>
+              <a:ext cx="0" cy="280953"/>
+            </a:xfrm>
+            <a:prstGeom prst="line">
+              <a:avLst/>
+            </a:prstGeom>
+            <a:noFill/>
+            <a:ln w="19050">
+              <a:solidFill>
+                <a:srgbClr val="C00000"/>
+              </a:solidFill>
+            </a:ln>
+          </p:spPr>
+          <p:style>
+            <a:lnRef idx="2">
+              <a:schemeClr val="accent1">
+                <a:shade val="15000"/>
+              </a:schemeClr>
+            </a:lnRef>
+            <a:fillRef idx="1">
+              <a:schemeClr val="accent1"/>
+            </a:fillRef>
+            <a:effectRef idx="0">
+              <a:schemeClr val="accent1"/>
+            </a:effectRef>
+            <a:fontRef idx="minor">
+              <a:schemeClr val="lt1"/>
+            </a:fontRef>
+          </p:style>
+        </p:cxnSp>
+        <p:cxnSp>
+          <p:nvCxnSpPr>
+            <p:cNvPr id="154" name="Connecteur droit 153">
+              <a:extLst>
+                <a:ext uri="{FF2B5EF4-FFF2-40B4-BE49-F238E27FC236}">
+                  <a16:creationId xmlns:a16="http://schemas.microsoft.com/office/drawing/2014/main" id="{B74D64A0-6A8A-1155-0760-6335E50CAFCA}"/>
+                </a:ext>
+              </a:extLst>
+            </p:cNvPr>
+            <p:cNvCxnSpPr>
+              <a:cxnSpLocks/>
+            </p:cNvCxnSpPr>
+            <p:nvPr/>
+          </p:nvCxnSpPr>
+          <p:spPr>
+            <a:xfrm flipV="1">
+              <a:off x="11659468" y="3615729"/>
+              <a:ext cx="0" cy="280953"/>
+            </a:xfrm>
+            <a:prstGeom prst="line">
+              <a:avLst/>
+            </a:prstGeom>
+            <a:noFill/>
+            <a:ln w="19050">
+              <a:solidFill>
+                <a:srgbClr val="C00000"/>
+              </a:solidFill>
+            </a:ln>
+          </p:spPr>
+          <p:style>
+            <a:lnRef idx="2">
+              <a:schemeClr val="accent1">
+                <a:shade val="15000"/>
+              </a:schemeClr>
+            </a:lnRef>
+            <a:fillRef idx="1">
+              <a:schemeClr val="accent1"/>
+            </a:fillRef>
+            <a:effectRef idx="0">
+              <a:schemeClr val="accent1"/>
+            </a:effectRef>
+            <a:fontRef idx="minor">
+              <a:schemeClr val="lt1"/>
+            </a:fontRef>
+          </p:style>
+        </p:cxnSp>
+        <p:cxnSp>
+          <p:nvCxnSpPr>
+            <p:cNvPr id="155" name="Connecteur droit 154">
+              <a:extLst>
+                <a:ext uri="{FF2B5EF4-FFF2-40B4-BE49-F238E27FC236}">
+                  <a16:creationId xmlns:a16="http://schemas.microsoft.com/office/drawing/2014/main" id="{3DE3E6CD-2D59-9017-03C0-080537361EDF}"/>
+                </a:ext>
+              </a:extLst>
+            </p:cNvPr>
+            <p:cNvCxnSpPr>
+              <a:cxnSpLocks/>
+            </p:cNvCxnSpPr>
+            <p:nvPr/>
+          </p:nvCxnSpPr>
+          <p:spPr>
+            <a:xfrm flipV="1">
+              <a:off x="11730830" y="3615729"/>
+              <a:ext cx="0" cy="280953"/>
+            </a:xfrm>
+            <a:prstGeom prst="line">
+              <a:avLst/>
+            </a:prstGeom>
+            <a:noFill/>
+            <a:ln w="19050">
+              <a:solidFill>
+                <a:srgbClr val="C00000"/>
+              </a:solidFill>
+            </a:ln>
+          </p:spPr>
+          <p:style>
+            <a:lnRef idx="2">
+              <a:schemeClr val="accent1">
+                <a:shade val="15000"/>
+              </a:schemeClr>
+            </a:lnRef>
+            <a:fillRef idx="1">
+              <a:schemeClr val="accent1"/>
+            </a:fillRef>
+            <a:effectRef idx="0">
+              <a:schemeClr val="accent1"/>
+            </a:effectRef>
+            <a:fontRef idx="minor">
+              <a:schemeClr val="lt1"/>
+            </a:fontRef>
+          </p:style>
+        </p:cxnSp>
+      </p:grpSp>
+      <p:cxnSp>
+        <p:nvCxnSpPr>
+          <p:cNvPr id="157" name="Connecteur droit 156">
+            <a:extLst>
+              <a:ext uri="{FF2B5EF4-FFF2-40B4-BE49-F238E27FC236}">
+                <a16:creationId xmlns:a16="http://schemas.microsoft.com/office/drawing/2014/main" id="{C5D3BE6D-4C11-18AA-20BE-201A111A2725}"/>
+              </a:ext>
+            </a:extLst>
+          </p:cNvPr>
+          <p:cNvCxnSpPr>
+            <a:cxnSpLocks/>
+          </p:cNvCxnSpPr>
+          <p:nvPr/>
+        </p:nvCxnSpPr>
+        <p:spPr>
+          <a:xfrm flipV="1">
+            <a:off x="9583909" y="3439871"/>
+            <a:ext cx="0" cy="764570"/>
+          </a:xfrm>
+          <a:prstGeom prst="line">
+            <a:avLst/>
+          </a:prstGeom>
+          <a:solidFill>
+            <a:schemeClr val="accent5">
+              <a:lumMod val="20000"/>
+              <a:lumOff val="80000"/>
+            </a:schemeClr>
+          </a:solidFill>
+          <a:ln w="19050">
+            <a:solidFill>
+              <a:srgbClr val="002060"/>
+            </a:solidFill>
+            <a:headEnd type="stealth" w="med" len="lg"/>
+            <a:tailEnd type="stealth" w="med" len="lg"/>
+          </a:ln>
+        </p:spPr>
+        <p:style>
+          <a:lnRef idx="2">
+            <a:schemeClr val="accent1">
+              <a:shade val="15000"/>
+            </a:schemeClr>
+          </a:lnRef>
+          <a:fillRef idx="1">
+            <a:schemeClr val="accent1"/>
+          </a:fillRef>
+          <a:effectRef idx="0">
+            <a:schemeClr val="accent1"/>
+          </a:effectRef>
+          <a:fontRef idx="minor">
+            <a:schemeClr val="lt1"/>
+          </a:fontRef>
+        </p:style>
+      </p:cxnSp>
+      <p:cxnSp>
+        <p:nvCxnSpPr>
+          <p:cNvPr id="159" name="Connecteur droit 158">
+            <a:extLst>
+              <a:ext uri="{FF2B5EF4-FFF2-40B4-BE49-F238E27FC236}">
+                <a16:creationId xmlns:a16="http://schemas.microsoft.com/office/drawing/2014/main" id="{0EC9FDBA-2690-BFA5-6E3C-20585648D76E}"/>
+              </a:ext>
+            </a:extLst>
+          </p:cNvPr>
+          <p:cNvCxnSpPr>
+            <a:cxnSpLocks/>
+          </p:cNvCxnSpPr>
+          <p:nvPr/>
+        </p:nvCxnSpPr>
+        <p:spPr>
+          <a:xfrm flipV="1">
+            <a:off x="11065432" y="3455159"/>
+            <a:ext cx="0" cy="344203"/>
+          </a:xfrm>
+          <a:prstGeom prst="line">
+            <a:avLst/>
+          </a:prstGeom>
+          <a:solidFill>
+            <a:schemeClr val="accent5">
+              <a:lumMod val="20000"/>
+              <a:lumOff val="80000"/>
+            </a:schemeClr>
+          </a:solidFill>
+          <a:ln w="19050">
+            <a:solidFill>
+              <a:srgbClr val="C00000"/>
+            </a:solidFill>
+            <a:headEnd type="stealth" w="med" len="lg"/>
+            <a:tailEnd type="stealth" w="med" len="lg"/>
+          </a:ln>
+        </p:spPr>
+        <p:style>
+          <a:lnRef idx="2">
+            <a:schemeClr val="accent1">
+              <a:shade val="15000"/>
+            </a:schemeClr>
+          </a:lnRef>
+          <a:fillRef idx="1">
+            <a:schemeClr val="accent1"/>
+          </a:fillRef>
+          <a:effectRef idx="0">
+            <a:schemeClr val="accent1"/>
+          </a:effectRef>
+          <a:fontRef idx="minor">
+            <a:schemeClr val="lt1"/>
+          </a:fontRef>
+        </p:style>
+      </p:cxnSp>
+      <p:sp>
+        <p:nvSpPr>
+          <p:cNvPr id="162" name="ZoneTexte 161">
+            <a:extLst>
+              <a:ext uri="{FF2B5EF4-FFF2-40B4-BE49-F238E27FC236}">
+                <a16:creationId xmlns:a16="http://schemas.microsoft.com/office/drawing/2014/main" id="{D0294AB2-4815-385B-2047-E7DECA61AE98}"/>
+              </a:ext>
+            </a:extLst>
+          </p:cNvPr>
+          <p:cNvSpPr txBox="1"/>
+          <p:nvPr/>
+        </p:nvSpPr>
+        <p:spPr>
+          <a:xfrm>
+            <a:off x="9614387" y="4948923"/>
+            <a:ext cx="853182" cy="400110"/>
+          </a:xfrm>
+          <a:prstGeom prst="rect">
+            <a:avLst/>
+          </a:prstGeom>
+          <a:noFill/>
+        </p:spPr>
+        <p:txBody>
+          <a:bodyPr wrap="square" rtlCol="0">
+            <a:spAutoFit/>
+          </a:bodyPr>
+          <a:lstStyle/>
+          <a:p>
+            <a:pPr algn="ctr"/>
+            <a:r>
+              <a:rPr lang="fr-FR" sz="1000" dirty="0"/>
+              <a:t>Jauge à l’état libre</a:t>
+            </a:r>
+          </a:p>
+        </p:txBody>
+      </p:sp>
+      <p:sp>
+        <p:nvSpPr>
+          <p:cNvPr id="163" name="ZoneTexte 162">
+            <a:extLst>
+              <a:ext uri="{FF2B5EF4-FFF2-40B4-BE49-F238E27FC236}">
+                <a16:creationId xmlns:a16="http://schemas.microsoft.com/office/drawing/2014/main" id="{6B1C4D16-558B-4C64-AE9A-2A17F0E90121}"/>
+              </a:ext>
+            </a:extLst>
+          </p:cNvPr>
+          <p:cNvSpPr txBox="1"/>
+          <p:nvPr/>
+        </p:nvSpPr>
+        <p:spPr>
+          <a:xfrm>
+            <a:off x="11019147" y="4964740"/>
+            <a:ext cx="918851" cy="707886"/>
+          </a:xfrm>
+          <a:prstGeom prst="rect">
+            <a:avLst/>
+          </a:prstGeom>
+          <a:noFill/>
+        </p:spPr>
+        <p:txBody>
+          <a:bodyPr wrap="square" rtlCol="0">
+            <a:spAutoFit/>
+          </a:bodyPr>
+          <a:lstStyle/>
+          <a:p>
+            <a:pPr algn="ctr"/>
+            <a:r>
+              <a:rPr lang="fr-FR" sz="1000" dirty="0"/>
+              <a:t>Jauge allongée sous l’effet de la déformation</a:t>
+            </a:r>
+          </a:p>
+        </p:txBody>
+      </p:sp>
+      <p:cxnSp>
+        <p:nvCxnSpPr>
+          <p:cNvPr id="164" name="Connecteur droit 163">
+            <a:extLst>
+              <a:ext uri="{FF2B5EF4-FFF2-40B4-BE49-F238E27FC236}">
+                <a16:creationId xmlns:a16="http://schemas.microsoft.com/office/drawing/2014/main" id="{33125C5D-E795-FC06-96CC-2CE4281B3C77}"/>
+              </a:ext>
+            </a:extLst>
+          </p:cNvPr>
+          <p:cNvCxnSpPr>
+            <a:cxnSpLocks/>
+          </p:cNvCxnSpPr>
+          <p:nvPr/>
+        </p:nvCxnSpPr>
+        <p:spPr>
+          <a:xfrm flipV="1">
+            <a:off x="11024025" y="2311635"/>
+            <a:ext cx="0" cy="344203"/>
+          </a:xfrm>
+          <a:prstGeom prst="line">
+            <a:avLst/>
+          </a:prstGeom>
+          <a:solidFill>
+            <a:schemeClr val="accent5">
+              <a:lumMod val="20000"/>
+              <a:lumOff val="80000"/>
+            </a:schemeClr>
+          </a:solidFill>
+          <a:ln w="19050">
+            <a:solidFill>
+              <a:srgbClr val="C00000"/>
+            </a:solidFill>
+            <a:headEnd type="stealth" w="med" len="lg"/>
+            <a:tailEnd type="stealth" w="med" len="lg"/>
+          </a:ln>
+        </p:spPr>
+        <p:style>
+          <a:lnRef idx="2">
+            <a:schemeClr val="accent1">
+              <a:shade val="15000"/>
+            </a:schemeClr>
+          </a:lnRef>
+          <a:fillRef idx="1">
+            <a:schemeClr val="accent1"/>
+          </a:fillRef>
+          <a:effectRef idx="0">
+            <a:schemeClr val="accent1"/>
+          </a:effectRef>
+          <a:fontRef idx="minor">
+            <a:schemeClr val="lt1"/>
+          </a:fontRef>
+        </p:style>
+      </p:cxnSp>
+      <p:sp>
+        <p:nvSpPr>
+          <p:cNvPr id="165" name="ZoneTexte 164">
+            <a:extLst>
+              <a:ext uri="{FF2B5EF4-FFF2-40B4-BE49-F238E27FC236}">
+                <a16:creationId xmlns:a16="http://schemas.microsoft.com/office/drawing/2014/main" id="{6AEB33DB-B2A6-0DCC-4C17-7E56E2CA54E1}"/>
+              </a:ext>
+            </a:extLst>
+          </p:cNvPr>
+          <p:cNvSpPr txBox="1"/>
+          <p:nvPr/>
+        </p:nvSpPr>
+        <p:spPr>
+          <a:xfrm>
+            <a:off x="135188" y="2311635"/>
+            <a:ext cx="951862" cy="461665"/>
+          </a:xfrm>
+          <a:prstGeom prst="rect">
+            <a:avLst/>
+          </a:prstGeom>
+          <a:noFill/>
+        </p:spPr>
+        <p:txBody>
+          <a:bodyPr wrap="square" rtlCol="0">
+            <a:spAutoFit/>
+          </a:bodyPr>
+          <a:lstStyle/>
+          <a:p>
+            <a:pPr algn="ctr"/>
+            <a:r>
+              <a:rPr lang="fr-FR" sz="1200" dirty="0"/>
+              <a:t>Corps d’épreuve</a:t>
+            </a:r>
+          </a:p>
+        </p:txBody>
+      </p:sp>
+      <p:cxnSp>
+        <p:nvCxnSpPr>
+          <p:cNvPr id="166" name="Connecteur droit avec flèche 165">
+            <a:extLst>
+              <a:ext uri="{FF2B5EF4-FFF2-40B4-BE49-F238E27FC236}">
+                <a16:creationId xmlns:a16="http://schemas.microsoft.com/office/drawing/2014/main" id="{F980DF44-6885-4B3C-A130-9F8D03B86814}"/>
+              </a:ext>
+            </a:extLst>
+          </p:cNvPr>
+          <p:cNvCxnSpPr>
+            <a:cxnSpLocks/>
+          </p:cNvCxnSpPr>
+          <p:nvPr/>
+        </p:nvCxnSpPr>
+        <p:spPr>
+          <a:xfrm flipV="1">
+            <a:off x="10006160" y="2197100"/>
+            <a:ext cx="0" cy="518583"/>
+          </a:xfrm>
+          <a:prstGeom prst="straightConnector1">
+            <a:avLst/>
+          </a:prstGeom>
+          <a:ln w="28575">
+            <a:solidFill>
+              <a:srgbClr val="C00000"/>
+            </a:solidFill>
+            <a:headEnd type="none"/>
+            <a:tailEnd type="stealth" w="med" len="lg"/>
+          </a:ln>
+        </p:spPr>
+        <p:style>
+          <a:lnRef idx="1">
+            <a:schemeClr val="accent1"/>
+          </a:lnRef>
+          <a:fillRef idx="0">
+            <a:schemeClr val="accent1"/>
+          </a:fillRef>
+          <a:effectRef idx="0">
+            <a:schemeClr val="accent1"/>
+          </a:effectRef>
+          <a:fontRef idx="minor">
+            <a:schemeClr val="tx1"/>
+          </a:fontRef>
+        </p:style>
+      </p:cxnSp>
+      <mc:AlternateContent xmlns:mc="http://schemas.openxmlformats.org/markup-compatibility/2006">
+        <mc:Choice xmlns:a14="http://schemas.microsoft.com/office/drawing/2010/main" Requires="a14">
+          <p:sp>
+            <p:nvSpPr>
+              <p:cNvPr id="169" name="ZoneTexte 168">
+                <a:extLst>
+                  <a:ext uri="{FF2B5EF4-FFF2-40B4-BE49-F238E27FC236}">
+                    <a16:creationId xmlns:a16="http://schemas.microsoft.com/office/drawing/2014/main" id="{CAE434DA-089E-3D44-33C5-61FDA086C9D9}"/>
+                  </a:ext>
+                </a:extLst>
+              </p:cNvPr>
+              <p:cNvSpPr txBox="1"/>
+              <p:nvPr/>
+            </p:nvSpPr>
+            <p:spPr>
+              <a:xfrm>
+                <a:off x="9690100" y="2311635"/>
+                <a:ext cx="423140" cy="368499"/>
+              </a:xfrm>
+              <a:prstGeom prst="rect">
+                <a:avLst/>
+              </a:prstGeom>
+              <a:noFill/>
+            </p:spPr>
+            <p:txBody>
+              <a:bodyPr wrap="square" rtlCol="0">
+                <a:spAutoFit/>
+              </a:bodyPr>
+              <a:lstStyle/>
+              <a:p>
+                <a:pPr algn="ctr"/>
+                <a14:m>
+                  <m:oMathPara xmlns:m="http://schemas.openxmlformats.org/officeDocument/2006/math">
+                    <m:oMathParaPr>
+                      <m:jc m:val="centerGroup"/>
+                    </m:oMathParaPr>
+                    <m:oMath xmlns:m="http://schemas.openxmlformats.org/officeDocument/2006/math">
+                      <m:acc>
+                        <m:accPr>
+                          <m:chr m:val="⃗"/>
+                          <m:ctrlPr>
+                            <a:rPr lang="fr-FR" sz="1600" i="1" smtClean="0">
+                              <a:solidFill>
+                                <a:srgbClr val="C00000"/>
+                              </a:solidFill>
+                              <a:latin typeface="Cambria Math" panose="02040503050406030204" pitchFamily="18" charset="0"/>
+                            </a:rPr>
+                          </m:ctrlPr>
+                        </m:accPr>
+                        <m:e>
+                          <m:r>
+                            <a:rPr lang="fr-FR" sz="1600" b="0" i="1" smtClean="0">
+                              <a:solidFill>
+                                <a:srgbClr val="C00000"/>
+                              </a:solidFill>
+                              <a:latin typeface="Cambria Math" panose="02040503050406030204" pitchFamily="18" charset="0"/>
+                            </a:rPr>
+                            <m:t>𝐹</m:t>
+                          </m:r>
+                        </m:e>
+                      </m:acc>
+                    </m:oMath>
+                  </m:oMathPara>
+                </a14:m>
+                <a:endParaRPr lang="fr-FR" sz="1600" dirty="0">
+                  <a:solidFill>
+                    <a:srgbClr val="C00000"/>
+                  </a:solidFill>
+                </a:endParaRPr>
+              </a:p>
+            </p:txBody>
+          </p:sp>
+        </mc:Choice>
+        <mc:Fallback>
+          <p:sp>
+            <p:nvSpPr>
+              <p:cNvPr id="169" name="ZoneTexte 168">
+                <a:extLst>
+                  <a:ext uri="{FF2B5EF4-FFF2-40B4-BE49-F238E27FC236}">
+                    <a16:creationId xmlns:a16="http://schemas.microsoft.com/office/drawing/2014/main" id="{CAE434DA-089E-3D44-33C5-61FDA086C9D9}"/>
+                  </a:ext>
+                </a:extLst>
+              </p:cNvPr>
+              <p:cNvSpPr txBox="1">
+                <a:spLocks noRot="1" noChangeAspect="1" noMove="1" noResize="1" noEditPoints="1" noAdjustHandles="1" noChangeArrowheads="1" noChangeShapeType="1" noTextEdit="1"/>
+              </p:cNvSpPr>
+              <p:nvPr/>
+            </p:nvSpPr>
+            <p:spPr>
+              <a:xfrm>
+                <a:off x="9690100" y="2311635"/>
+                <a:ext cx="423140" cy="368499"/>
+              </a:xfrm>
+              <a:prstGeom prst="rect">
+                <a:avLst/>
+              </a:prstGeom>
+              <a:blipFill>
+                <a:blip r:embed="rId2"/>
+                <a:stretch>
+                  <a:fillRect t="-14754" r="-20290"/>
+                </a:stretch>
+              </a:blipFill>
+            </p:spPr>
+            <p:txBody>
+              <a:bodyPr/>
+              <a:lstStyle/>
+              <a:p>
+                <a:r>
+                  <a:rPr lang="fr-FR">
+                    <a:noFill/>
+                  </a:rPr>
+                  <a:t> </a:t>
+                </a:r>
+              </a:p>
+            </p:txBody>
+          </p:sp>
+        </mc:Fallback>
+      </mc:AlternateContent>
+      <mc:AlternateContent xmlns:mc="http://schemas.openxmlformats.org/markup-compatibility/2006">
+        <mc:Choice xmlns:a14="http://schemas.microsoft.com/office/drawing/2010/main" Requires="a14">
+          <p:sp>
+            <p:nvSpPr>
+              <p:cNvPr id="170" name="ZoneTexte 169">
+                <a:extLst>
+                  <a:ext uri="{FF2B5EF4-FFF2-40B4-BE49-F238E27FC236}">
+                    <a16:creationId xmlns:a16="http://schemas.microsoft.com/office/drawing/2014/main" id="{2432A433-B8EF-D0D1-37FB-B3FBF6B42B86}"/>
+                  </a:ext>
+                </a:extLst>
+              </p:cNvPr>
+              <p:cNvSpPr txBox="1"/>
+              <p:nvPr/>
+            </p:nvSpPr>
+            <p:spPr>
+              <a:xfrm>
+                <a:off x="9199370" y="3627260"/>
+                <a:ext cx="423140" cy="338554"/>
+              </a:xfrm>
+              <a:prstGeom prst="rect">
+                <a:avLst/>
+              </a:prstGeom>
+              <a:noFill/>
+            </p:spPr>
+            <p:txBody>
+              <a:bodyPr wrap="square" rtlCol="0">
+                <a:spAutoFit/>
+              </a:bodyPr>
+              <a:lstStyle/>
+              <a:p>
+                <a:pPr algn="ctr"/>
+                <a14:m>
+                  <m:oMathPara xmlns:m="http://schemas.openxmlformats.org/officeDocument/2006/math">
+                    <m:oMathParaPr>
+                      <m:jc m:val="centerGroup"/>
+                    </m:oMathParaPr>
+                    <m:oMath xmlns:m="http://schemas.openxmlformats.org/officeDocument/2006/math">
+                      <m:r>
+                        <a:rPr lang="fr-FR" sz="1600" i="1" smtClean="0">
+                          <a:solidFill>
+                            <a:srgbClr val="C00000"/>
+                          </a:solidFill>
+                          <a:latin typeface="Cambria Math" panose="02040503050406030204" pitchFamily="18" charset="0"/>
+                        </a:rPr>
+                        <m:t>𝐿</m:t>
+                      </m:r>
+                    </m:oMath>
+                  </m:oMathPara>
+                </a14:m>
+                <a:endParaRPr lang="fr-FR" sz="1600" dirty="0">
+                  <a:solidFill>
+                    <a:srgbClr val="C00000"/>
+                  </a:solidFill>
+                </a:endParaRPr>
+              </a:p>
+            </p:txBody>
+          </p:sp>
+        </mc:Choice>
+        <mc:Fallback>
+          <p:sp>
+            <p:nvSpPr>
+              <p:cNvPr id="170" name="ZoneTexte 169">
+                <a:extLst>
+                  <a:ext uri="{FF2B5EF4-FFF2-40B4-BE49-F238E27FC236}">
+                    <a16:creationId xmlns:a16="http://schemas.microsoft.com/office/drawing/2014/main" id="{2432A433-B8EF-D0D1-37FB-B3FBF6B42B86}"/>
+                  </a:ext>
+                </a:extLst>
+              </p:cNvPr>
+              <p:cNvSpPr txBox="1">
+                <a:spLocks noRot="1" noChangeAspect="1" noMove="1" noResize="1" noEditPoints="1" noAdjustHandles="1" noChangeArrowheads="1" noChangeShapeType="1" noTextEdit="1"/>
+              </p:cNvSpPr>
+              <p:nvPr/>
+            </p:nvSpPr>
+            <p:spPr>
+              <a:xfrm>
+                <a:off x="9199370" y="3627260"/>
+                <a:ext cx="423140" cy="338554"/>
+              </a:xfrm>
+              <a:prstGeom prst="rect">
+                <a:avLst/>
+              </a:prstGeom>
+              <a:blipFill>
+                <a:blip r:embed="rId3"/>
+                <a:stretch>
+                  <a:fillRect/>
+                </a:stretch>
+              </a:blipFill>
+            </p:spPr>
+            <p:txBody>
+              <a:bodyPr/>
+              <a:lstStyle/>
+              <a:p>
+                <a:r>
+                  <a:rPr lang="fr-FR">
+                    <a:noFill/>
+                  </a:rPr>
+                  <a:t> </a:t>
+                </a:r>
+              </a:p>
+            </p:txBody>
+          </p:sp>
+        </mc:Fallback>
+      </mc:AlternateContent>
+      <mc:AlternateContent xmlns:mc="http://schemas.openxmlformats.org/markup-compatibility/2006">
+        <mc:Choice xmlns:a14="http://schemas.microsoft.com/office/drawing/2010/main" Requires="a14">
+          <p:sp>
+            <p:nvSpPr>
+              <p:cNvPr id="171" name="ZoneTexte 170">
+                <a:extLst>
+                  <a:ext uri="{FF2B5EF4-FFF2-40B4-BE49-F238E27FC236}">
+                    <a16:creationId xmlns:a16="http://schemas.microsoft.com/office/drawing/2014/main" id="{FD490BA1-CDB3-C401-1695-6590E840F900}"/>
+                  </a:ext>
+                </a:extLst>
+              </p:cNvPr>
+              <p:cNvSpPr txBox="1"/>
+              <p:nvPr/>
+            </p:nvSpPr>
+            <p:spPr>
+              <a:xfrm>
+                <a:off x="10642292" y="2303320"/>
+                <a:ext cx="423140" cy="338554"/>
+              </a:xfrm>
+              <a:prstGeom prst="rect">
+                <a:avLst/>
+              </a:prstGeom>
+              <a:noFill/>
+            </p:spPr>
+            <p:txBody>
+              <a:bodyPr wrap="square" rtlCol="0">
+                <a:spAutoFit/>
+              </a:bodyPr>
+              <a:lstStyle/>
+              <a:p>
+                <a:pPr algn="ctr"/>
+                <a14:m>
+                  <m:oMathPara xmlns:m="http://schemas.openxmlformats.org/officeDocument/2006/math">
+                    <m:oMathParaPr>
+                      <m:jc m:val="centerGroup"/>
+                    </m:oMathParaPr>
+                    <m:oMath xmlns:m="http://schemas.openxmlformats.org/officeDocument/2006/math">
+                      <m:r>
+                        <m:rPr>
+                          <m:sty m:val="p"/>
+                        </m:rPr>
+                        <a:rPr lang="fr-FR" sz="1600" b="0" i="0" smtClean="0">
+                          <a:solidFill>
+                            <a:srgbClr val="C00000"/>
+                          </a:solidFill>
+                          <a:latin typeface="Cambria Math" panose="02040503050406030204" pitchFamily="18" charset="0"/>
+                        </a:rPr>
+                        <m:t>Δ</m:t>
+                      </m:r>
+                      <m:r>
+                        <a:rPr lang="fr-FR" sz="1600" i="1" smtClean="0">
+                          <a:solidFill>
+                            <a:srgbClr val="C00000"/>
+                          </a:solidFill>
+                          <a:latin typeface="Cambria Math" panose="02040503050406030204" pitchFamily="18" charset="0"/>
+                        </a:rPr>
+                        <m:t>𝐿</m:t>
+                      </m:r>
+                    </m:oMath>
+                  </m:oMathPara>
+                </a14:m>
+                <a:endParaRPr lang="fr-FR" sz="1600" dirty="0">
+                  <a:solidFill>
+                    <a:srgbClr val="C00000"/>
+                  </a:solidFill>
+                </a:endParaRPr>
+              </a:p>
+            </p:txBody>
+          </p:sp>
+        </mc:Choice>
+        <mc:Fallback>
+          <p:sp>
+            <p:nvSpPr>
+              <p:cNvPr id="171" name="ZoneTexte 170">
+                <a:extLst>
+                  <a:ext uri="{FF2B5EF4-FFF2-40B4-BE49-F238E27FC236}">
+                    <a16:creationId xmlns:a16="http://schemas.microsoft.com/office/drawing/2014/main" id="{FD490BA1-CDB3-C401-1695-6590E840F900}"/>
+                  </a:ext>
+                </a:extLst>
+              </p:cNvPr>
+              <p:cNvSpPr txBox="1">
+                <a:spLocks noRot="1" noChangeAspect="1" noMove="1" noResize="1" noEditPoints="1" noAdjustHandles="1" noChangeArrowheads="1" noChangeShapeType="1" noTextEdit="1"/>
+              </p:cNvSpPr>
+              <p:nvPr/>
+            </p:nvSpPr>
+            <p:spPr>
+              <a:xfrm>
+                <a:off x="10642292" y="2303320"/>
+                <a:ext cx="423140" cy="338554"/>
+              </a:xfrm>
+              <a:prstGeom prst="rect">
+                <a:avLst/>
+              </a:prstGeom>
+              <a:blipFill>
+                <a:blip r:embed="rId4"/>
+                <a:stretch>
+                  <a:fillRect/>
+                </a:stretch>
+              </a:blipFill>
+            </p:spPr>
+            <p:txBody>
+              <a:bodyPr/>
+              <a:lstStyle/>
+              <a:p>
+                <a:r>
+                  <a:rPr lang="fr-FR">
+                    <a:noFill/>
+                  </a:rPr>
+                  <a:t> </a:t>
+                </a:r>
+              </a:p>
+            </p:txBody>
+          </p:sp>
+        </mc:Fallback>
+      </mc:AlternateContent>
+      <mc:AlternateContent xmlns:mc="http://schemas.openxmlformats.org/markup-compatibility/2006">
+        <mc:Choice xmlns:a14="http://schemas.microsoft.com/office/drawing/2010/main" Requires="a14">
+          <p:sp>
+            <p:nvSpPr>
+              <p:cNvPr id="172" name="ZoneTexte 171">
+                <a:extLst>
+                  <a:ext uri="{FF2B5EF4-FFF2-40B4-BE49-F238E27FC236}">
+                    <a16:creationId xmlns:a16="http://schemas.microsoft.com/office/drawing/2014/main" id="{DED02477-4B19-D3A2-9E9C-82927281F67B}"/>
+                  </a:ext>
+                </a:extLst>
+              </p:cNvPr>
+              <p:cNvSpPr txBox="1"/>
+              <p:nvPr/>
+            </p:nvSpPr>
+            <p:spPr>
+              <a:xfrm>
+                <a:off x="10676964" y="3417702"/>
+                <a:ext cx="423140" cy="338554"/>
+              </a:xfrm>
+              <a:prstGeom prst="rect">
+                <a:avLst/>
+              </a:prstGeom>
+              <a:noFill/>
+            </p:spPr>
+            <p:txBody>
+              <a:bodyPr wrap="square" rtlCol="0">
+                <a:spAutoFit/>
+              </a:bodyPr>
+              <a:lstStyle/>
+              <a:p>
+                <a:pPr algn="ctr"/>
+                <a14:m>
+                  <m:oMathPara xmlns:m="http://schemas.openxmlformats.org/officeDocument/2006/math">
+                    <m:oMathParaPr>
+                      <m:jc m:val="centerGroup"/>
+                    </m:oMathParaPr>
+                    <m:oMath xmlns:m="http://schemas.openxmlformats.org/officeDocument/2006/math">
+                      <m:r>
+                        <m:rPr>
+                          <m:sty m:val="p"/>
+                        </m:rPr>
+                        <a:rPr lang="fr-FR" sz="1600" b="0" i="0" smtClean="0">
+                          <a:solidFill>
+                            <a:srgbClr val="C00000"/>
+                          </a:solidFill>
+                          <a:latin typeface="Cambria Math" panose="02040503050406030204" pitchFamily="18" charset="0"/>
+                        </a:rPr>
+                        <m:t>Δ</m:t>
+                      </m:r>
+                      <m:r>
+                        <a:rPr lang="fr-FR" sz="1600" i="1" smtClean="0">
+                          <a:solidFill>
+                            <a:srgbClr val="C00000"/>
+                          </a:solidFill>
+                          <a:latin typeface="Cambria Math" panose="02040503050406030204" pitchFamily="18" charset="0"/>
+                        </a:rPr>
+                        <m:t>𝐿</m:t>
+                      </m:r>
+                    </m:oMath>
+                  </m:oMathPara>
+                </a14:m>
+                <a:endParaRPr lang="fr-FR" sz="1600" dirty="0">
+                  <a:solidFill>
+                    <a:srgbClr val="C00000"/>
+                  </a:solidFill>
+                </a:endParaRPr>
+              </a:p>
+            </p:txBody>
+          </p:sp>
+        </mc:Choice>
+        <mc:Fallback>
+          <p:sp>
+            <p:nvSpPr>
+              <p:cNvPr id="172" name="ZoneTexte 171">
+                <a:extLst>
+                  <a:ext uri="{FF2B5EF4-FFF2-40B4-BE49-F238E27FC236}">
+                    <a16:creationId xmlns:a16="http://schemas.microsoft.com/office/drawing/2014/main" id="{DED02477-4B19-D3A2-9E9C-82927281F67B}"/>
+                  </a:ext>
+                </a:extLst>
+              </p:cNvPr>
+              <p:cNvSpPr txBox="1">
+                <a:spLocks noRot="1" noChangeAspect="1" noMove="1" noResize="1" noEditPoints="1" noAdjustHandles="1" noChangeArrowheads="1" noChangeShapeType="1" noTextEdit="1"/>
+              </p:cNvSpPr>
+              <p:nvPr/>
+            </p:nvSpPr>
+            <p:spPr>
+              <a:xfrm>
+                <a:off x="10676964" y="3417702"/>
+                <a:ext cx="423140" cy="338554"/>
+              </a:xfrm>
+              <a:prstGeom prst="rect">
+                <a:avLst/>
+              </a:prstGeom>
+              <a:blipFill>
+                <a:blip r:embed="rId5"/>
+                <a:stretch>
+                  <a:fillRect/>
+                </a:stretch>
+              </a:blipFill>
+            </p:spPr>
+            <p:txBody>
+              <a:bodyPr/>
+              <a:lstStyle/>
+              <a:p>
+                <a:r>
+                  <a:rPr lang="fr-FR">
+                    <a:noFill/>
+                  </a:rPr>
+                  <a:t> </a:t>
+                </a:r>
+              </a:p>
+            </p:txBody>
+          </p:sp>
+        </mc:Fallback>
+      </mc:AlternateContent>
+    </p:spTree>
+    <p:extLst>
+      <p:ext uri="{BB962C8B-B14F-4D97-AF65-F5344CB8AC3E}">
+        <p14:creationId xmlns:p14="http://schemas.microsoft.com/office/powerpoint/2010/main" val="2721058538"/>
+      </p:ext>
+    </p:extLst>
+  </p:cSld>
+  <p:clrMapOvr>
+    <a:masterClrMapping/>
+  </p:clrMapOvr>
+</p:sld>
+</file>
+
+<file path=ppt/slides/slide19.xml><?xml version="1.0" encoding="utf-8"?>
+<p:sld xmlns:a="http://schemas.openxmlformats.org/drawingml/2006/main" xmlns:r="http://schemas.openxmlformats.org/officeDocument/2006/relationships" xmlns:p="http://schemas.openxmlformats.org/presentationml/2006/main">
+  <p:cSld>
+    <p:spTree>
+      <p:nvGrpSpPr>
+        <p:cNvPr id="1" name=""/>
+        <p:cNvGrpSpPr/>
+        <p:nvPr/>
+      </p:nvGrpSpPr>
+      <p:grpSpPr>
+        <a:xfrm>
+          <a:off x="0" y="0"/>
+          <a:ext cx="0" cy="0"/>
+          <a:chOff x="0" y="0"/>
+          <a:chExt cx="0" cy="0"/>
+        </a:xfrm>
+      </p:grpSpPr>
+      <p:sp>
+        <p:nvSpPr>
+          <p:cNvPr id="2" name="Titre 1">
+            <a:extLst>
+              <a:ext uri="{FF2B5EF4-FFF2-40B4-BE49-F238E27FC236}">
+                <a16:creationId xmlns:a16="http://schemas.microsoft.com/office/drawing/2014/main" id="{FD6CA520-E8DF-97A8-BB7D-8CBA64565705}"/>
+              </a:ext>
+            </a:extLst>
+          </p:cNvPr>
+          <p:cNvSpPr>
+            <a:spLocks noGrp="1"/>
+          </p:cNvSpPr>
+          <p:nvPr>
+            <p:ph type="title"/>
+          </p:nvPr>
+        </p:nvSpPr>
+        <p:spPr/>
+        <p:txBody>
+          <a:bodyPr/>
+          <a:lstStyle/>
+          <a:p>
+            <a:endParaRPr lang="fr-FR"/>
+          </a:p>
+        </p:txBody>
+      </p:sp>
+      <p:pic>
+        <p:nvPicPr>
+          <p:cNvPr id="2050" name="Picture 2">
+            <a:extLst>
+              <a:ext uri="{FF2B5EF4-FFF2-40B4-BE49-F238E27FC236}">
+                <a16:creationId xmlns:a16="http://schemas.microsoft.com/office/drawing/2014/main" id="{B05E6309-7EA6-4A89-B488-AE1777AE4727}"/>
+              </a:ext>
+            </a:extLst>
+          </p:cNvPr>
+          <p:cNvPicPr>
+            <a:picLocks noChangeAspect="1" noChangeArrowheads="1"/>
+          </p:cNvPicPr>
+          <p:nvPr/>
+        </p:nvPicPr>
+        <p:blipFill rotWithShape="1">
+          <a:blip r:embed="rId2"/>
+          <a:srcRect l="21577" t="18859" b="25342"/>
+          <a:stretch>
+            <a:fillRect/>
+          </a:stretch>
+        </p:blipFill>
+        <p:spPr bwMode="auto">
+          <a:xfrm>
+            <a:off x="4979624" y="1696598"/>
+            <a:ext cx="3540680" cy="1110815"/>
+          </a:xfrm>
+          <a:prstGeom prst="rect">
+            <a:avLst/>
+          </a:prstGeom>
+          <a:noFill/>
+          <a:extLst>
+            <a:ext uri="{909E8E84-426E-40DD-AFC4-6F175D3DCCD1}">
+              <a14:hiddenFill xmlns:a14="http://schemas.microsoft.com/office/drawing/2010/main">
+                <a:solidFill>
+                  <a:srgbClr val="FFFFFF"/>
+                </a:solidFill>
+              </a14:hiddenFill>
+            </a:ext>
+          </a:extLst>
+        </p:spPr>
+      </p:pic>
+      <p:pic>
+        <p:nvPicPr>
+          <p:cNvPr id="2054" name="Picture 6">
+            <a:extLst>
+              <a:ext uri="{FF2B5EF4-FFF2-40B4-BE49-F238E27FC236}">
+                <a16:creationId xmlns:a16="http://schemas.microsoft.com/office/drawing/2014/main" id="{726FFF6E-E439-3A44-3A1D-728270697CC1}"/>
+              </a:ext>
+            </a:extLst>
+          </p:cNvPr>
+          <p:cNvPicPr>
+            <a:picLocks noChangeAspect="1" noChangeArrowheads="1"/>
+          </p:cNvPicPr>
+          <p:nvPr/>
+        </p:nvPicPr>
+        <p:blipFill rotWithShape="1">
+          <a:blip r:embed="rId3"/>
+          <a:srcRect l="21577" t="17328" b="16648"/>
+          <a:stretch>
+            <a:fillRect/>
+          </a:stretch>
+        </p:blipFill>
+        <p:spPr bwMode="auto">
+          <a:xfrm>
+            <a:off x="7217997" y="2555913"/>
+            <a:ext cx="3540681" cy="2980915"/>
+          </a:xfrm>
+          <a:prstGeom prst="rect">
+            <a:avLst/>
+          </a:prstGeom>
+          <a:noFill/>
+          <a:extLst>
+            <a:ext uri="{909E8E84-426E-40DD-AFC4-6F175D3DCCD1}">
+              <a14:hiddenFill xmlns:a14="http://schemas.microsoft.com/office/drawing/2010/main">
+                <a:solidFill>
+                  <a:srgbClr val="FFFFFF"/>
+                </a:solidFill>
+              </a14:hiddenFill>
+            </a:ext>
+          </a:extLst>
+        </p:spPr>
+      </p:pic>
+      <p:pic>
+        <p:nvPicPr>
+          <p:cNvPr id="2056" name="Picture 8">
+            <a:extLst>
+              <a:ext uri="{FF2B5EF4-FFF2-40B4-BE49-F238E27FC236}">
+                <a16:creationId xmlns:a16="http://schemas.microsoft.com/office/drawing/2014/main" id="{F9955154-168D-522D-A773-3155B265230F}"/>
+              </a:ext>
+            </a:extLst>
+          </p:cNvPr>
+          <p:cNvPicPr>
+            <a:picLocks noChangeAspect="1" noChangeArrowheads="1"/>
+          </p:cNvPicPr>
+          <p:nvPr/>
+        </p:nvPicPr>
+        <p:blipFill rotWithShape="1">
+          <a:blip r:embed="rId4"/>
+          <a:srcRect l="18323" t="25891" r="24888" b="22631"/>
+          <a:stretch>
+            <a:fillRect/>
+          </a:stretch>
+        </p:blipFill>
+        <p:spPr bwMode="auto">
+          <a:xfrm>
+            <a:off x="3157869" y="3232298"/>
+            <a:ext cx="2542301" cy="2304530"/>
+          </a:xfrm>
+          <a:prstGeom prst="rect">
+            <a:avLst/>
+          </a:prstGeom>
+          <a:noFill/>
+          <a:extLst>
+            <a:ext uri="{909E8E84-426E-40DD-AFC4-6F175D3DCCD1}">
+              <a14:hiddenFill xmlns:a14="http://schemas.microsoft.com/office/drawing/2010/main">
+                <a:solidFill>
+                  <a:srgbClr val="FFFFFF"/>
+                </a:solidFill>
+              </a14:hiddenFill>
+            </a:ext>
+          </a:extLst>
+        </p:spPr>
+      </p:pic>
+      <p:pic>
+        <p:nvPicPr>
+          <p:cNvPr id="2058" name="Picture 10">
+            <a:extLst>
+              <a:ext uri="{FF2B5EF4-FFF2-40B4-BE49-F238E27FC236}">
+                <a16:creationId xmlns:a16="http://schemas.microsoft.com/office/drawing/2014/main" id="{9F5FA0BE-8B9F-911D-F071-ACE267B2DCB8}"/>
+              </a:ext>
+            </a:extLst>
+          </p:cNvPr>
+          <p:cNvPicPr>
+            <a:picLocks noChangeAspect="1" noChangeArrowheads="1"/>
+          </p:cNvPicPr>
+          <p:nvPr/>
+        </p:nvPicPr>
+        <p:blipFill>
+          <a:blip r:embed="rId5"/>
+          <a:srcRect/>
+          <a:stretch/>
+        </p:blipFill>
+        <p:spPr bwMode="auto">
+          <a:xfrm>
+            <a:off x="1976979" y="1321172"/>
+            <a:ext cx="2028474" cy="3562090"/>
+          </a:xfrm>
+          <a:prstGeom prst="rect">
+            <a:avLst/>
+          </a:prstGeom>
+          <a:noFill/>
+          <a:extLst>
+            <a:ext uri="{909E8E84-426E-40DD-AFC4-6F175D3DCCD1}">
+              <a14:hiddenFill xmlns:a14="http://schemas.microsoft.com/office/drawing/2010/main">
+                <a:solidFill>
+                  <a:srgbClr val="FFFFFF"/>
+                </a:solidFill>
+              </a14:hiddenFill>
+            </a:ext>
+          </a:extLst>
+        </p:spPr>
+      </p:pic>
+      <p:pic>
+        <p:nvPicPr>
+          <p:cNvPr id="7" name="Picture 4">
+            <a:extLst>
+              <a:ext uri="{FF2B5EF4-FFF2-40B4-BE49-F238E27FC236}">
+                <a16:creationId xmlns:a16="http://schemas.microsoft.com/office/drawing/2014/main" id="{FFD771ED-4A1B-AE6E-4321-82D310581E92}"/>
+              </a:ext>
+            </a:extLst>
+          </p:cNvPr>
+          <p:cNvPicPr>
+            <a:picLocks noChangeAspect="1" noChangeArrowheads="1"/>
+          </p:cNvPicPr>
+          <p:nvPr/>
+        </p:nvPicPr>
+        <p:blipFill>
+          <a:blip r:embed="rId6">
+            <a:extLst>
+              <a:ext uri="{28A0092B-C50C-407E-A947-70E740481C1C}">
+                <a14:useLocalDpi xmlns:a14="http://schemas.microsoft.com/office/drawing/2010/main" val="0"/>
+              </a:ext>
+            </a:extLst>
+          </a:blip>
+          <a:srcRect/>
+          <a:stretch>
+            <a:fillRect/>
+          </a:stretch>
+        </p:blipFill>
+        <p:spPr bwMode="auto">
+          <a:xfrm>
+            <a:off x="5341941" y="-1445187"/>
+            <a:ext cx="2772276" cy="2041191"/>
+          </a:xfrm>
+          <a:prstGeom prst="rect">
+            <a:avLst/>
+          </a:prstGeom>
+          <a:noFill/>
+          <a:extLst>
+            <a:ext uri="{909E8E84-426E-40DD-AFC4-6F175D3DCCD1}">
+              <a14:hiddenFill xmlns:a14="http://schemas.microsoft.com/office/drawing/2010/main">
+                <a:solidFill>
+                  <a:srgbClr val="FFFFFF"/>
+                </a:solidFill>
+              </a14:hiddenFill>
+            </a:ext>
+          </a:extLst>
+        </p:spPr>
+      </p:pic>
+      <p:pic>
+        <p:nvPicPr>
+          <p:cNvPr id="9" name="Picture 2">
+            <a:extLst>
+              <a:ext uri="{FF2B5EF4-FFF2-40B4-BE49-F238E27FC236}">
+                <a16:creationId xmlns:a16="http://schemas.microsoft.com/office/drawing/2014/main" id="{339A554F-19AE-179F-15CD-085858F0A3F2}"/>
+              </a:ext>
+            </a:extLst>
+          </p:cNvPr>
+          <p:cNvPicPr>
+            <a:picLocks noChangeAspect="1" noChangeArrowheads="1"/>
+          </p:cNvPicPr>
+          <p:nvPr/>
+        </p:nvPicPr>
+        <p:blipFill>
+          <a:blip r:embed="rId7" cstate="print">
+            <a:extLst>
+              <a:ext uri="{28A0092B-C50C-407E-A947-70E740481C1C}">
+                <a14:useLocalDpi xmlns:a14="http://schemas.microsoft.com/office/drawing/2010/main" val="0"/>
+              </a:ext>
+            </a:extLst>
+          </a:blip>
+          <a:srcRect/>
+          <a:stretch>
+            <a:fillRect/>
+          </a:stretch>
+        </p:blipFill>
+        <p:spPr bwMode="auto">
+          <a:xfrm>
+            <a:off x="9682473" y="1010869"/>
+            <a:ext cx="1763266" cy="1026712"/>
+          </a:xfrm>
+          <a:prstGeom prst="rect">
+            <a:avLst/>
+          </a:prstGeom>
+          <a:noFill/>
+          <a:extLst>
+            <a:ext uri="{909E8E84-426E-40DD-AFC4-6F175D3DCCD1}">
+              <a14:hiddenFill xmlns:a14="http://schemas.microsoft.com/office/drawing/2010/main">
+                <a:solidFill>
+                  <a:srgbClr val="FFFFFF"/>
+                </a:solidFill>
+              </a14:hiddenFill>
+            </a:ext>
+          </a:extLst>
+        </p:spPr>
+      </p:pic>
+    </p:spTree>
+    <p:extLst>
+      <p:ext uri="{BB962C8B-B14F-4D97-AF65-F5344CB8AC3E}">
+        <p14:creationId xmlns:p14="http://schemas.microsoft.com/office/powerpoint/2010/main" val="2968874741"/>
+      </p:ext>
+    </p:extLst>
+  </p:cSld>
+  <p:clrMapOvr>
+    <a:masterClrMapping/>
+  </p:clrMapOvr>
+</p:sld>
+</file>
+
 <file path=ppt/slides/slide2.xml><?xml version="1.0" encoding="utf-8"?>
 <p:sld xmlns:a="http://schemas.openxmlformats.org/drawingml/2006/main" xmlns:r="http://schemas.openxmlformats.org/officeDocument/2006/relationships" xmlns:p="http://schemas.openxmlformats.org/presentationml/2006/main">
   <p:cSld>
@@ -22216,6 +28377,461 @@
     <p:extLst>
       <p:ext uri="{BB962C8B-B14F-4D97-AF65-F5344CB8AC3E}">
         <p14:creationId xmlns:p14="http://schemas.microsoft.com/office/powerpoint/2010/main" val="805748378"/>
+      </p:ext>
+    </p:extLst>
+  </p:cSld>
+  <p:clrMapOvr>
+    <a:masterClrMapping/>
+  </p:clrMapOvr>
+</p:sld>
+</file>
+
+<file path=ppt/slides/slide20.xml><?xml version="1.0" encoding="utf-8"?>
+<p:sld xmlns:a="http://schemas.openxmlformats.org/drawingml/2006/main" xmlns:r="http://schemas.openxmlformats.org/officeDocument/2006/relationships" xmlns:p="http://schemas.openxmlformats.org/presentationml/2006/main">
+  <p:cSld>
+    <p:spTree>
+      <p:nvGrpSpPr>
+        <p:cNvPr id="1" name=""/>
+        <p:cNvGrpSpPr/>
+        <p:nvPr/>
+      </p:nvGrpSpPr>
+      <p:grpSpPr>
+        <a:xfrm>
+          <a:off x="0" y="0"/>
+          <a:ext cx="0" cy="0"/>
+          <a:chOff x="0" y="0"/>
+          <a:chExt cx="0" cy="0"/>
+        </a:xfrm>
+      </p:grpSpPr>
+      <p:sp>
+        <p:nvSpPr>
+          <p:cNvPr id="2" name="Titre 1">
+            <a:extLst>
+              <a:ext uri="{FF2B5EF4-FFF2-40B4-BE49-F238E27FC236}">
+                <a16:creationId xmlns:a16="http://schemas.microsoft.com/office/drawing/2014/main" id="{8463DC6D-3566-B73B-ACD9-4A91D2E7DCD2}"/>
+              </a:ext>
+            </a:extLst>
+          </p:cNvPr>
+          <p:cNvSpPr>
+            <a:spLocks noGrp="1"/>
+          </p:cNvSpPr>
+          <p:nvPr>
+            <p:ph type="title"/>
+          </p:nvPr>
+        </p:nvSpPr>
+        <p:spPr/>
+        <p:txBody>
+          <a:bodyPr/>
+          <a:lstStyle/>
+          <a:p>
+            <a:endParaRPr lang="fr-FR"/>
+          </a:p>
+        </p:txBody>
+      </p:sp>
+      <p:pic>
+        <p:nvPicPr>
+          <p:cNvPr id="5" name="Picture 4">
+            <a:extLst>
+              <a:ext uri="{FF2B5EF4-FFF2-40B4-BE49-F238E27FC236}">
+                <a16:creationId xmlns:a16="http://schemas.microsoft.com/office/drawing/2014/main" id="{115781AA-7900-0001-727F-1F70C953700D}"/>
+              </a:ext>
+            </a:extLst>
+          </p:cNvPr>
+          <p:cNvPicPr>
+            <a:picLocks noGrp="1" noChangeAspect="1" noChangeArrowheads="1"/>
+          </p:cNvPicPr>
+          <p:nvPr>
+            <p:ph idx="1"/>
+          </p:nvPr>
+        </p:nvPicPr>
+        <p:blipFill rotWithShape="1">
+          <a:blip r:embed="rId2"/>
+          <a:srcRect l="25050" t="38012" r="11705" b="38599"/>
+          <a:stretch>
+            <a:fillRect/>
+          </a:stretch>
+        </p:blipFill>
+        <p:spPr bwMode="auto">
+          <a:xfrm rot="17175072">
+            <a:off x="4199447" y="3182997"/>
+            <a:ext cx="2831716" cy="1047213"/>
+          </a:xfrm>
+          <a:prstGeom prst="rect">
+            <a:avLst/>
+          </a:prstGeom>
+          <a:noFill/>
+          <a:extLst>
+            <a:ext uri="{909E8E84-426E-40DD-AFC4-6F175D3DCCD1}">
+              <a14:hiddenFill xmlns:a14="http://schemas.microsoft.com/office/drawing/2010/main">
+                <a:solidFill>
+                  <a:srgbClr val="FFFFFF"/>
+                </a:solidFill>
+              </a14:hiddenFill>
+            </a:ext>
+          </a:extLst>
+        </p:spPr>
+      </p:pic>
+      <p:pic>
+        <p:nvPicPr>
+          <p:cNvPr id="7" name="Picture 2">
+            <a:extLst>
+              <a:ext uri="{FF2B5EF4-FFF2-40B4-BE49-F238E27FC236}">
+                <a16:creationId xmlns:a16="http://schemas.microsoft.com/office/drawing/2014/main" id="{901594FF-805A-C445-32D1-B52AB8C287DD}"/>
+              </a:ext>
+            </a:extLst>
+          </p:cNvPr>
+          <p:cNvPicPr>
+            <a:picLocks noChangeAspect="1" noChangeArrowheads="1"/>
+          </p:cNvPicPr>
+          <p:nvPr/>
+        </p:nvPicPr>
+        <p:blipFill rotWithShape="1">
+          <a:blip r:embed="rId3"/>
+          <a:srcRect l="21577" t="18859" r="18099" b="25342"/>
+          <a:stretch>
+            <a:fillRect/>
+          </a:stretch>
+        </p:blipFill>
+        <p:spPr bwMode="auto">
+          <a:xfrm rot="5400000">
+            <a:off x="6581723" y="3761726"/>
+            <a:ext cx="2723548" cy="1110815"/>
+          </a:xfrm>
+          <a:prstGeom prst="rect">
+            <a:avLst/>
+          </a:prstGeom>
+          <a:noFill/>
+          <a:extLst>
+            <a:ext uri="{909E8E84-426E-40DD-AFC4-6F175D3DCCD1}">
+              <a14:hiddenFill xmlns:a14="http://schemas.microsoft.com/office/drawing/2010/main">
+                <a:solidFill>
+                  <a:srgbClr val="FFFFFF"/>
+                </a:solidFill>
+              </a14:hiddenFill>
+            </a:ext>
+          </a:extLst>
+        </p:spPr>
+      </p:pic>
+      <p:cxnSp>
+        <p:nvCxnSpPr>
+          <p:cNvPr id="9" name="Connecteur droit avec flèche 8">
+            <a:extLst>
+              <a:ext uri="{FF2B5EF4-FFF2-40B4-BE49-F238E27FC236}">
+                <a16:creationId xmlns:a16="http://schemas.microsoft.com/office/drawing/2014/main" id="{9F041FD0-C176-0CBF-23EB-67E616192232}"/>
+              </a:ext>
+            </a:extLst>
+          </p:cNvPr>
+          <p:cNvCxnSpPr>
+            <a:cxnSpLocks/>
+          </p:cNvCxnSpPr>
+          <p:nvPr/>
+        </p:nvCxnSpPr>
+        <p:spPr>
+          <a:xfrm flipH="1">
+            <a:off x="7863637" y="5017168"/>
+            <a:ext cx="770224" cy="0"/>
+          </a:xfrm>
+          <a:prstGeom prst="straightConnector1">
+            <a:avLst/>
+          </a:prstGeom>
+          <a:ln w="31750">
+            <a:solidFill>
+              <a:srgbClr val="002060"/>
+            </a:solidFill>
+            <a:tailEnd type="oval"/>
+          </a:ln>
+        </p:spPr>
+        <p:style>
+          <a:lnRef idx="1">
+            <a:schemeClr val="accent1"/>
+          </a:lnRef>
+          <a:fillRef idx="0">
+            <a:schemeClr val="accent1"/>
+          </a:fillRef>
+          <a:effectRef idx="0">
+            <a:schemeClr val="accent1"/>
+          </a:effectRef>
+          <a:fontRef idx="minor">
+            <a:schemeClr val="tx1"/>
+          </a:fontRef>
+        </p:style>
+      </p:cxnSp>
+      <p:sp>
+        <p:nvSpPr>
+          <p:cNvPr id="11" name="ZoneTexte 10">
+            <a:extLst>
+              <a:ext uri="{FF2B5EF4-FFF2-40B4-BE49-F238E27FC236}">
+                <a16:creationId xmlns:a16="http://schemas.microsoft.com/office/drawing/2014/main" id="{AE54002E-45E6-D64F-9435-D8E66F9FA34F}"/>
+              </a:ext>
+            </a:extLst>
+          </p:cNvPr>
+          <p:cNvSpPr txBox="1"/>
+          <p:nvPr/>
+        </p:nvSpPr>
+        <p:spPr>
+          <a:xfrm>
+            <a:off x="8633861" y="4863279"/>
+            <a:ext cx="1772784" cy="307777"/>
+          </a:xfrm>
+          <a:prstGeom prst="rect">
+            <a:avLst/>
+          </a:prstGeom>
+          <a:noFill/>
+        </p:spPr>
+        <p:txBody>
+          <a:bodyPr wrap="square" rtlCol="0">
+            <a:spAutoFit/>
+          </a:bodyPr>
+          <a:lstStyle/>
+          <a:p>
+            <a:r>
+              <a:rPr lang="fr-FR" sz="1400" dirty="0"/>
+              <a:t>Corps d’épreuve</a:t>
+            </a:r>
+          </a:p>
+        </p:txBody>
+      </p:sp>
+      <p:cxnSp>
+        <p:nvCxnSpPr>
+          <p:cNvPr id="12" name="Connecteur droit avec flèche 11">
+            <a:extLst>
+              <a:ext uri="{FF2B5EF4-FFF2-40B4-BE49-F238E27FC236}">
+                <a16:creationId xmlns:a16="http://schemas.microsoft.com/office/drawing/2014/main" id="{905E5B69-642E-3136-0157-505F02DED924}"/>
+              </a:ext>
+            </a:extLst>
+          </p:cNvPr>
+          <p:cNvCxnSpPr>
+            <a:cxnSpLocks/>
+          </p:cNvCxnSpPr>
+          <p:nvPr/>
+        </p:nvCxnSpPr>
+        <p:spPr>
+          <a:xfrm flipH="1">
+            <a:off x="7853605" y="3706604"/>
+            <a:ext cx="780256" cy="0"/>
+          </a:xfrm>
+          <a:prstGeom prst="straightConnector1">
+            <a:avLst/>
+          </a:prstGeom>
+          <a:ln w="31750">
+            <a:solidFill>
+              <a:srgbClr val="002060"/>
+            </a:solidFill>
+            <a:tailEnd type="oval"/>
+          </a:ln>
+        </p:spPr>
+        <p:style>
+          <a:lnRef idx="1">
+            <a:schemeClr val="accent1"/>
+          </a:lnRef>
+          <a:fillRef idx="0">
+            <a:schemeClr val="accent1"/>
+          </a:fillRef>
+          <a:effectRef idx="0">
+            <a:schemeClr val="accent1"/>
+          </a:effectRef>
+          <a:fontRef idx="minor">
+            <a:schemeClr val="tx1"/>
+          </a:fontRef>
+        </p:style>
+      </p:cxnSp>
+      <p:sp>
+        <p:nvSpPr>
+          <p:cNvPr id="13" name="ZoneTexte 12">
+            <a:extLst>
+              <a:ext uri="{FF2B5EF4-FFF2-40B4-BE49-F238E27FC236}">
+                <a16:creationId xmlns:a16="http://schemas.microsoft.com/office/drawing/2014/main" id="{7CA1A67B-19B1-B09A-DA46-B65EED0B2678}"/>
+              </a:ext>
+            </a:extLst>
+          </p:cNvPr>
+          <p:cNvSpPr txBox="1"/>
+          <p:nvPr/>
+        </p:nvSpPr>
+        <p:spPr>
+          <a:xfrm>
+            <a:off x="8652141" y="3463210"/>
+            <a:ext cx="1983415" cy="523220"/>
+          </a:xfrm>
+          <a:prstGeom prst="rect">
+            <a:avLst/>
+          </a:prstGeom>
+          <a:noFill/>
+        </p:spPr>
+        <p:txBody>
+          <a:bodyPr wrap="square" rtlCol="0">
+            <a:spAutoFit/>
+          </a:bodyPr>
+          <a:lstStyle/>
+          <a:p>
+            <a:r>
+              <a:rPr lang="fr-FR" sz="1400" dirty="0"/>
+              <a:t>Evidement pour favoriser la déformation</a:t>
+            </a:r>
+          </a:p>
+        </p:txBody>
+      </p:sp>
+      <p:cxnSp>
+        <p:nvCxnSpPr>
+          <p:cNvPr id="15" name="Connecteur droit avec flèche 14">
+            <a:extLst>
+              <a:ext uri="{FF2B5EF4-FFF2-40B4-BE49-F238E27FC236}">
+                <a16:creationId xmlns:a16="http://schemas.microsoft.com/office/drawing/2014/main" id="{2DD82EFC-EFB0-41A1-5FA6-1BAAE2636250}"/>
+              </a:ext>
+            </a:extLst>
+          </p:cNvPr>
+          <p:cNvCxnSpPr>
+            <a:cxnSpLocks/>
+          </p:cNvCxnSpPr>
+          <p:nvPr/>
+        </p:nvCxnSpPr>
+        <p:spPr>
+          <a:xfrm flipH="1">
+            <a:off x="8036615" y="4187204"/>
+            <a:ext cx="597246" cy="0"/>
+          </a:xfrm>
+          <a:prstGeom prst="straightConnector1">
+            <a:avLst/>
+          </a:prstGeom>
+          <a:ln w="31750">
+            <a:solidFill>
+              <a:srgbClr val="002060"/>
+            </a:solidFill>
+            <a:tailEnd type="oval"/>
+          </a:ln>
+        </p:spPr>
+        <p:style>
+          <a:lnRef idx="1">
+            <a:schemeClr val="accent1"/>
+          </a:lnRef>
+          <a:fillRef idx="0">
+            <a:schemeClr val="accent1"/>
+          </a:fillRef>
+          <a:effectRef idx="0">
+            <a:schemeClr val="accent1"/>
+          </a:effectRef>
+          <a:fontRef idx="minor">
+            <a:schemeClr val="tx1"/>
+          </a:fontRef>
+        </p:style>
+      </p:cxnSp>
+      <p:sp>
+        <p:nvSpPr>
+          <p:cNvPr id="16" name="ZoneTexte 15">
+            <a:extLst>
+              <a:ext uri="{FF2B5EF4-FFF2-40B4-BE49-F238E27FC236}">
+                <a16:creationId xmlns:a16="http://schemas.microsoft.com/office/drawing/2014/main" id="{C662FF9D-3437-17BF-32C2-F18D43B67C64}"/>
+              </a:ext>
+            </a:extLst>
+          </p:cNvPr>
+          <p:cNvSpPr txBox="1"/>
+          <p:nvPr/>
+        </p:nvSpPr>
+        <p:spPr>
+          <a:xfrm>
+            <a:off x="8652141" y="4009356"/>
+            <a:ext cx="2196499" cy="307777"/>
+          </a:xfrm>
+          <a:prstGeom prst="rect">
+            <a:avLst/>
+          </a:prstGeom>
+          <a:noFill/>
+        </p:spPr>
+        <p:txBody>
+          <a:bodyPr wrap="square" rtlCol="0">
+            <a:spAutoFit/>
+          </a:bodyPr>
+          <a:lstStyle/>
+          <a:p>
+            <a:r>
+              <a:rPr lang="fr-FR" sz="1400" dirty="0"/>
+              <a:t>Zone de collage de la jauge</a:t>
+            </a:r>
+          </a:p>
+        </p:txBody>
+      </p:sp>
+      <p:cxnSp>
+        <p:nvCxnSpPr>
+          <p:cNvPr id="27" name="Connecteur droit avec flèche 26">
+            <a:extLst>
+              <a:ext uri="{FF2B5EF4-FFF2-40B4-BE49-F238E27FC236}">
+                <a16:creationId xmlns:a16="http://schemas.microsoft.com/office/drawing/2014/main" id="{E21EEC84-80AA-4830-DDAC-4B4CE2CE9350}"/>
+              </a:ext>
+            </a:extLst>
+          </p:cNvPr>
+          <p:cNvCxnSpPr>
+            <a:cxnSpLocks/>
+          </p:cNvCxnSpPr>
+          <p:nvPr/>
+        </p:nvCxnSpPr>
+        <p:spPr>
+          <a:xfrm flipH="1">
+            <a:off x="8258476" y="5473807"/>
+            <a:ext cx="393665" cy="0"/>
+          </a:xfrm>
+          <a:prstGeom prst="straightConnector1">
+            <a:avLst/>
+          </a:prstGeom>
+          <a:ln w="31750">
+            <a:solidFill>
+              <a:srgbClr val="002060"/>
+            </a:solidFill>
+            <a:tailEnd type="oval"/>
+          </a:ln>
+        </p:spPr>
+        <p:style>
+          <a:lnRef idx="1">
+            <a:schemeClr val="accent1"/>
+          </a:lnRef>
+          <a:fillRef idx="0">
+            <a:schemeClr val="accent1"/>
+          </a:fillRef>
+          <a:effectRef idx="0">
+            <a:schemeClr val="accent1"/>
+          </a:effectRef>
+          <a:fontRef idx="minor">
+            <a:schemeClr val="tx1"/>
+          </a:fontRef>
+        </p:style>
+      </p:cxnSp>
+      <p:sp>
+        <p:nvSpPr>
+          <p:cNvPr id="28" name="ZoneTexte 27">
+            <a:extLst>
+              <a:ext uri="{FF2B5EF4-FFF2-40B4-BE49-F238E27FC236}">
+                <a16:creationId xmlns:a16="http://schemas.microsoft.com/office/drawing/2014/main" id="{A1AEBC18-4AAC-1D2F-9481-C0E0653AD541}"/>
+              </a:ext>
+            </a:extLst>
+          </p:cNvPr>
+          <p:cNvSpPr txBox="1"/>
+          <p:nvPr/>
+        </p:nvSpPr>
+        <p:spPr>
+          <a:xfrm>
+            <a:off x="8633861" y="5240315"/>
+            <a:ext cx="1772784" cy="523220"/>
+          </a:xfrm>
+          <a:prstGeom prst="rect">
+            <a:avLst/>
+          </a:prstGeom>
+          <a:noFill/>
+        </p:spPr>
+        <p:txBody>
+          <a:bodyPr wrap="square" rtlCol="0">
+            <a:spAutoFit/>
+          </a:bodyPr>
+          <a:lstStyle/>
+          <a:p>
+            <a:r>
+              <a:rPr lang="fr-FR" sz="1400" dirty="0"/>
+              <a:t>Fil de liaison à l’amplificateur</a:t>
+            </a:r>
+          </a:p>
+        </p:txBody>
+      </p:sp>
+    </p:spTree>
+    <p:extLst>
+      <p:ext uri="{BB962C8B-B14F-4D97-AF65-F5344CB8AC3E}">
+        <p14:creationId xmlns:p14="http://schemas.microsoft.com/office/powerpoint/2010/main" val="226768148"/>
       </p:ext>
     </p:extLst>
   </p:cSld>

--- a/Fiches_Protocoles_Techno/Fiches_Technologie.pptx
+++ b/Fiches_Protocoles_Techno/Fiches_Technologie.pptx
@@ -263,7 +263,7 @@
           <a:p>
             <a:fld id="{1A3D9B3B-1EC8-4BC4-B783-7630517B3190}" type="datetimeFigureOut">
               <a:rPr lang="fr-FR" smtClean="0"/>
-              <a:t>12/06/2026</a:t>
+              <a:t>22/06/2026</a:t>
             </a:fld>
             <a:endParaRPr lang="fr-FR"/>
           </a:p>
@@ -672,7 +672,7 @@
           <a:p>
             <a:fld id="{1A3D9B3B-1EC8-4BC4-B783-7630517B3190}" type="datetimeFigureOut">
               <a:rPr lang="fr-FR" smtClean="0"/>
-              <a:t>12/06/2026</a:t>
+              <a:t>22/06/2026</a:t>
             </a:fld>
             <a:endParaRPr lang="fr-FR"/>
           </a:p>
@@ -858,7 +858,7 @@
           <a:p>
             <a:fld id="{1A3D9B3B-1EC8-4BC4-B783-7630517B3190}" type="datetimeFigureOut">
               <a:rPr lang="fr-FR" smtClean="0"/>
-              <a:t>12/06/2026</a:t>
+              <a:t>22/06/2026</a:t>
             </a:fld>
             <a:endParaRPr lang="fr-FR"/>
           </a:p>
@@ -1034,7 +1034,7 @@
           <a:p>
             <a:fld id="{1A3D9B3B-1EC8-4BC4-B783-7630517B3190}" type="datetimeFigureOut">
               <a:rPr lang="fr-FR" smtClean="0"/>
-              <a:t>12/06/2026</a:t>
+              <a:t>22/06/2026</a:t>
             </a:fld>
             <a:endParaRPr lang="fr-FR"/>
           </a:p>
@@ -1333,7 +1333,7 @@
           <a:p>
             <a:fld id="{1A3D9B3B-1EC8-4BC4-B783-7630517B3190}" type="datetimeFigureOut">
               <a:rPr lang="fr-FR" smtClean="0"/>
-              <a:t>12/06/2026</a:t>
+              <a:t>22/06/2026</a:t>
             </a:fld>
             <a:endParaRPr lang="fr-FR"/>
           </a:p>
@@ -1570,7 +1570,7 @@
           <a:p>
             <a:fld id="{1A3D9B3B-1EC8-4BC4-B783-7630517B3190}" type="datetimeFigureOut">
               <a:rPr lang="fr-FR" smtClean="0"/>
-              <a:t>12/06/2026</a:t>
+              <a:t>22/06/2026</a:t>
             </a:fld>
             <a:endParaRPr lang="fr-FR"/>
           </a:p>
@@ -1988,7 +1988,7 @@
           <a:p>
             <a:fld id="{1A3D9B3B-1EC8-4BC4-B783-7630517B3190}" type="datetimeFigureOut">
               <a:rPr lang="fr-FR" smtClean="0"/>
-              <a:t>12/06/2026</a:t>
+              <a:t>22/06/2026</a:t>
             </a:fld>
             <a:endParaRPr lang="fr-FR"/>
           </a:p>
@@ -2113,7 +2113,7 @@
           <a:p>
             <a:fld id="{1A3D9B3B-1EC8-4BC4-B783-7630517B3190}" type="datetimeFigureOut">
               <a:rPr lang="fr-FR" smtClean="0"/>
-              <a:t>12/06/2026</a:t>
+              <a:t>22/06/2026</a:t>
             </a:fld>
             <a:endParaRPr lang="fr-FR"/>
           </a:p>
@@ -2262,7 +2262,7 @@
           <a:p>
             <a:fld id="{1A3D9B3B-1EC8-4BC4-B783-7630517B3190}" type="datetimeFigureOut">
               <a:rPr lang="fr-FR" smtClean="0"/>
-              <a:t>12/06/2026</a:t>
+              <a:t>22/06/2026</a:t>
             </a:fld>
             <a:endParaRPr lang="fr-FR"/>
           </a:p>
@@ -2545,7 +2545,7 @@
           <a:p>
             <a:fld id="{1A3D9B3B-1EC8-4BC4-B783-7630517B3190}" type="datetimeFigureOut">
               <a:rPr lang="fr-FR" smtClean="0"/>
-              <a:t>12/06/2026</a:t>
+              <a:t>22/06/2026</a:t>
             </a:fld>
             <a:endParaRPr lang="fr-FR"/>
           </a:p>
@@ -2805,7 +2805,7 @@
           <a:p>
             <a:fld id="{1A3D9B3B-1EC8-4BC4-B783-7630517B3190}" type="datetimeFigureOut">
               <a:rPr lang="fr-FR" smtClean="0"/>
-              <a:t>12/06/2026</a:t>
+              <a:t>22/06/2026</a:t>
             </a:fld>
             <a:endParaRPr lang="fr-FR"/>
           </a:p>
@@ -3025,7 +3025,7 @@
             <a:fld id="{1A3D9B3B-1EC8-4BC4-B783-7630517B3190}" type="datetimeFigureOut">
               <a:rPr lang="fr-FR" smtClean="0"/>
               <a:pPr/>
-              <a:t>12/06/2026</a:t>
+              <a:t>22/06/2026</a:t>
             </a:fld>
             <a:endParaRPr lang="fr-FR"/>
           </a:p>
@@ -27425,8 +27425,8 @@
           </a:fontRef>
         </p:style>
       </p:cxnSp>
-      <mc:AlternateContent xmlns:mc="http://schemas.openxmlformats.org/markup-compatibility/2006">
-        <mc:Choice xmlns:a14="http://schemas.microsoft.com/office/drawing/2010/main" Requires="a14">
+      <mc:AlternateContent xmlns:mc="http://schemas.openxmlformats.org/markup-compatibility/2006" xmlns:a14="http://schemas.microsoft.com/office/drawing/2010/main">
+        <mc:Choice Requires="a14">
           <p:sp>
             <p:nvSpPr>
               <p:cNvPr id="169" name="ZoneTexte 168">
@@ -27498,7 +27498,7 @@
             </p:txBody>
           </p:sp>
         </mc:Choice>
-        <mc:Fallback>
+        <mc:Fallback xmlns="">
           <p:sp>
             <p:nvSpPr>
               <p:cNvPr id="169" name="ZoneTexte 168">
@@ -27543,8 +27543,8 @@
           </p:sp>
         </mc:Fallback>
       </mc:AlternateContent>
-      <mc:AlternateContent xmlns:mc="http://schemas.openxmlformats.org/markup-compatibility/2006">
-        <mc:Choice xmlns:a14="http://schemas.microsoft.com/office/drawing/2010/main" Requires="a14">
+      <mc:AlternateContent xmlns:mc="http://schemas.openxmlformats.org/markup-compatibility/2006" xmlns:a14="http://schemas.microsoft.com/office/drawing/2010/main">
+        <mc:Choice Requires="a14">
           <p:sp>
             <p:nvSpPr>
               <p:cNvPr id="170" name="ZoneTexte 169">
@@ -27601,7 +27601,7 @@
             </p:txBody>
           </p:sp>
         </mc:Choice>
-        <mc:Fallback>
+        <mc:Fallback xmlns="">
           <p:sp>
             <p:nvSpPr>
               <p:cNvPr id="170" name="ZoneTexte 169">
@@ -27646,8 +27646,8 @@
           </p:sp>
         </mc:Fallback>
       </mc:AlternateContent>
-      <mc:AlternateContent xmlns:mc="http://schemas.openxmlformats.org/markup-compatibility/2006">
-        <mc:Choice xmlns:a14="http://schemas.microsoft.com/office/drawing/2010/main" Requires="a14">
+      <mc:AlternateContent xmlns:mc="http://schemas.openxmlformats.org/markup-compatibility/2006" xmlns:a14="http://schemas.microsoft.com/office/drawing/2010/main">
+        <mc:Choice Requires="a14">
           <p:sp>
             <p:nvSpPr>
               <p:cNvPr id="171" name="ZoneTexte 170">
@@ -27716,7 +27716,7 @@
             </p:txBody>
           </p:sp>
         </mc:Choice>
-        <mc:Fallback>
+        <mc:Fallback xmlns="">
           <p:sp>
             <p:nvSpPr>
               <p:cNvPr id="171" name="ZoneTexte 170">
@@ -27761,8 +27761,8 @@
           </p:sp>
         </mc:Fallback>
       </mc:AlternateContent>
-      <mc:AlternateContent xmlns:mc="http://schemas.openxmlformats.org/markup-compatibility/2006">
-        <mc:Choice xmlns:a14="http://schemas.microsoft.com/office/drawing/2010/main" Requires="a14">
+      <mc:AlternateContent xmlns:mc="http://schemas.openxmlformats.org/markup-compatibility/2006" xmlns:a14="http://schemas.microsoft.com/office/drawing/2010/main">
+        <mc:Choice Requires="a14">
           <p:sp>
             <p:nvSpPr>
               <p:cNvPr id="172" name="ZoneTexte 171">
@@ -27831,7 +27831,7 @@
             </p:txBody>
           </p:sp>
         </mc:Choice>
-        <mc:Fallback>
+        <mc:Fallback xmlns="">
           <p:sp>
             <p:nvSpPr>
               <p:cNvPr id="172" name="ZoneTexte 171">
@@ -32759,8 +32759,8 @@
             <a:solidFill>
               <a:srgbClr val="002060"/>
             </a:solidFill>
-            <a:headEnd type="none" w="lg" len="lg"/>
-            <a:tailEnd type="stealth" w="lg" len="lg"/>
+            <a:headEnd type="stealth" w="med" len="lg"/>
+            <a:tailEnd type="none" w="med" len="lg"/>
           </a:ln>
         </p:spPr>
         <p:style>
@@ -35819,8 +35819,8 @@
             <a:solidFill>
               <a:srgbClr val="002060"/>
             </a:solidFill>
-            <a:headEnd type="stealth" w="lg" len="lg"/>
-            <a:tailEnd type="none" w="lg" len="lg"/>
+            <a:headEnd type="none" w="lg" len="lg"/>
+            <a:tailEnd type="stealth" w="lg" len="lg"/>
           </a:ln>
         </p:spPr>
         <p:style>
